--- a/Slide/Configuratore di prodotto per le vendite.pptx
+++ b/Slide/Configuratore di prodotto per le vendite.pptx
@@ -4,9 +4,22 @@
   <p:sldMasterIdLst>
     <p:sldMasterId id="2147483648" r:id="rId1"/>
   </p:sldMasterIdLst>
+  <p:notesMasterIdLst>
+    <p:notesMasterId r:id="rId14"/>
+  </p:notesMasterIdLst>
   <p:sldIdLst>
     <p:sldId id="256" r:id="rId2"/>
-    <p:sldId id="257" r:id="rId3"/>
+    <p:sldId id="269" r:id="rId3"/>
+    <p:sldId id="259" r:id="rId4"/>
+    <p:sldId id="260" r:id="rId5"/>
+    <p:sldId id="261" r:id="rId6"/>
+    <p:sldId id="262" r:id="rId7"/>
+    <p:sldId id="263" r:id="rId8"/>
+    <p:sldId id="264" r:id="rId9"/>
+    <p:sldId id="265" r:id="rId10"/>
+    <p:sldId id="266" r:id="rId11"/>
+    <p:sldId id="267" r:id="rId12"/>
+    <p:sldId id="268" r:id="rId13"/>
   </p:sldIdLst>
   <p:sldSz cx="12192000" cy="6858000"/>
   <p:notesSz cx="6858000" cy="9144000"/>
@@ -105,7 +118,889 @@
       </a:defRPr>
     </a:lvl9pPr>
   </p:defaultTextStyle>
+  <p:extLst>
+    <p:ext uri="{EFAFB233-063F-42B5-8137-9DF3F51BA10A}">
+      <p15:sldGuideLst xmlns:p15="http://schemas.microsoft.com/office/powerpoint/2012/main"/>
+    </p:ext>
+  </p:extLst>
 </p:presentation>
+</file>
+
+<file path=ppt/notesMasters/notesMaster1.xml><?xml version="1.0" encoding="utf-8"?>
+<p:notesMaster xmlns:a="http://schemas.openxmlformats.org/drawingml/2006/main" xmlns:r="http://schemas.openxmlformats.org/officeDocument/2006/relationships" xmlns:p="http://schemas.openxmlformats.org/presentationml/2006/main">
+  <p:cSld>
+    <p:bg>
+      <p:bgRef idx="1001">
+        <a:schemeClr val="bg1"/>
+      </p:bgRef>
+    </p:bg>
+    <p:spTree>
+      <p:nvGrpSpPr>
+        <p:cNvPr id="1" name=""/>
+        <p:cNvGrpSpPr/>
+        <p:nvPr/>
+      </p:nvGrpSpPr>
+      <p:grpSpPr>
+        <a:xfrm>
+          <a:off x="0" y="0"/>
+          <a:ext cx="0" cy="0"/>
+          <a:chOff x="0" y="0"/>
+          <a:chExt cx="0" cy="0"/>
+        </a:xfrm>
+      </p:grpSpPr>
+      <p:sp>
+        <p:nvSpPr>
+          <p:cNvPr id="2" name="Segnaposto intestazione 1"/>
+          <p:cNvSpPr>
+            <a:spLocks noGrp="1"/>
+          </p:cNvSpPr>
+          <p:nvPr>
+            <p:ph type="hdr" sz="quarter"/>
+          </p:nvPr>
+        </p:nvSpPr>
+        <p:spPr>
+          <a:xfrm>
+            <a:off x="0" y="0"/>
+            <a:ext cx="2971800" cy="458788"/>
+          </a:xfrm>
+          <a:prstGeom prst="rect">
+            <a:avLst/>
+          </a:prstGeom>
+        </p:spPr>
+        <p:txBody>
+          <a:bodyPr vert="horz" lIns="91440" tIns="45720" rIns="91440" bIns="45720" rtlCol="0"/>
+          <a:lstStyle>
+            <a:lvl1pPr algn="l">
+              <a:defRPr sz="1200"/>
+            </a:lvl1pPr>
+          </a:lstStyle>
+          <a:p>
+            <a:endParaRPr lang="it-IT"/>
+          </a:p>
+        </p:txBody>
+      </p:sp>
+      <p:sp>
+        <p:nvSpPr>
+          <p:cNvPr id="3" name="Segnaposto data 2"/>
+          <p:cNvSpPr>
+            <a:spLocks noGrp="1"/>
+          </p:cNvSpPr>
+          <p:nvPr>
+            <p:ph type="dt" idx="1"/>
+          </p:nvPr>
+        </p:nvSpPr>
+        <p:spPr>
+          <a:xfrm>
+            <a:off x="3884613" y="0"/>
+            <a:ext cx="2971800" cy="458788"/>
+          </a:xfrm>
+          <a:prstGeom prst="rect">
+            <a:avLst/>
+          </a:prstGeom>
+        </p:spPr>
+        <p:txBody>
+          <a:bodyPr vert="horz" lIns="91440" tIns="45720" rIns="91440" bIns="45720" rtlCol="0"/>
+          <a:lstStyle>
+            <a:lvl1pPr algn="r">
+              <a:defRPr sz="1200"/>
+            </a:lvl1pPr>
+          </a:lstStyle>
+          <a:p>
+            <a:fld id="{2FC382D0-E5E5-42D8-AA41-3ABE763FF4D8}" type="datetimeFigureOut">
+              <a:rPr lang="it-IT" smtClean="0"/>
+              <a:t>26/10/2026</a:t>
+            </a:fld>
+            <a:endParaRPr lang="it-IT"/>
+          </a:p>
+        </p:txBody>
+      </p:sp>
+      <p:sp>
+        <p:nvSpPr>
+          <p:cNvPr id="4" name="Segnaposto immagine diapositiva 3"/>
+          <p:cNvSpPr>
+            <a:spLocks noGrp="1" noRot="1" noChangeAspect="1"/>
+          </p:cNvSpPr>
+          <p:nvPr>
+            <p:ph type="sldImg" idx="2"/>
+          </p:nvPr>
+        </p:nvSpPr>
+        <p:spPr>
+          <a:xfrm>
+            <a:off x="685800" y="1143000"/>
+            <a:ext cx="5486400" cy="3086100"/>
+          </a:xfrm>
+          <a:prstGeom prst="rect">
+            <a:avLst/>
+          </a:prstGeom>
+          <a:noFill/>
+          <a:ln w="12700">
+            <a:solidFill>
+              <a:prstClr val="black"/>
+            </a:solidFill>
+          </a:ln>
+        </p:spPr>
+        <p:txBody>
+          <a:bodyPr vert="horz" lIns="91440" tIns="45720" rIns="91440" bIns="45720" rtlCol="0" anchor="ctr"/>
+          <a:lstStyle/>
+          <a:p>
+            <a:endParaRPr lang="it-IT"/>
+          </a:p>
+        </p:txBody>
+      </p:sp>
+      <p:sp>
+        <p:nvSpPr>
+          <p:cNvPr id="5" name="Segnaposto note 4"/>
+          <p:cNvSpPr>
+            <a:spLocks noGrp="1"/>
+          </p:cNvSpPr>
+          <p:nvPr>
+            <p:ph type="body" sz="quarter" idx="3"/>
+          </p:nvPr>
+        </p:nvSpPr>
+        <p:spPr>
+          <a:xfrm>
+            <a:off x="685800" y="4400550"/>
+            <a:ext cx="5486400" cy="3600450"/>
+          </a:xfrm>
+          <a:prstGeom prst="rect">
+            <a:avLst/>
+          </a:prstGeom>
+        </p:spPr>
+        <p:txBody>
+          <a:bodyPr vert="horz" lIns="91440" tIns="45720" rIns="91440" bIns="45720" rtlCol="0"/>
+          <a:lstStyle/>
+          <a:p>
+            <a:pPr lvl="0"/>
+            <a:r>
+              <a:rPr lang="it-IT"/>
+              <a:t>Fare clic per modificare gli stili del testo dello schema</a:t>
+            </a:r>
+          </a:p>
+          <a:p>
+            <a:pPr lvl="1"/>
+            <a:r>
+              <a:rPr lang="it-IT"/>
+              <a:t>Secondo livello</a:t>
+            </a:r>
+          </a:p>
+          <a:p>
+            <a:pPr lvl="2"/>
+            <a:r>
+              <a:rPr lang="it-IT"/>
+              <a:t>Terzo livello</a:t>
+            </a:r>
+          </a:p>
+          <a:p>
+            <a:pPr lvl="3"/>
+            <a:r>
+              <a:rPr lang="it-IT"/>
+              <a:t>Quarto livello</a:t>
+            </a:r>
+          </a:p>
+          <a:p>
+            <a:pPr lvl="4"/>
+            <a:r>
+              <a:rPr lang="it-IT"/>
+              <a:t>Quinto livello</a:t>
+            </a:r>
+          </a:p>
+        </p:txBody>
+      </p:sp>
+      <p:sp>
+        <p:nvSpPr>
+          <p:cNvPr id="6" name="Segnaposto piè di pagina 5"/>
+          <p:cNvSpPr>
+            <a:spLocks noGrp="1"/>
+          </p:cNvSpPr>
+          <p:nvPr>
+            <p:ph type="ftr" sz="quarter" idx="4"/>
+          </p:nvPr>
+        </p:nvSpPr>
+        <p:spPr>
+          <a:xfrm>
+            <a:off x="0" y="8685213"/>
+            <a:ext cx="2971800" cy="458787"/>
+          </a:xfrm>
+          <a:prstGeom prst="rect">
+            <a:avLst/>
+          </a:prstGeom>
+        </p:spPr>
+        <p:txBody>
+          <a:bodyPr vert="horz" lIns="91440" tIns="45720" rIns="91440" bIns="45720" rtlCol="0" anchor="b"/>
+          <a:lstStyle>
+            <a:lvl1pPr algn="l">
+              <a:defRPr sz="1200"/>
+            </a:lvl1pPr>
+          </a:lstStyle>
+          <a:p>
+            <a:endParaRPr lang="it-IT"/>
+          </a:p>
+        </p:txBody>
+      </p:sp>
+      <p:sp>
+        <p:nvSpPr>
+          <p:cNvPr id="7" name="Segnaposto numero diapositiva 6"/>
+          <p:cNvSpPr>
+            <a:spLocks noGrp="1"/>
+          </p:cNvSpPr>
+          <p:nvPr>
+            <p:ph type="sldNum" sz="quarter" idx="5"/>
+          </p:nvPr>
+        </p:nvSpPr>
+        <p:spPr>
+          <a:xfrm>
+            <a:off x="3884613" y="8685213"/>
+            <a:ext cx="2971800" cy="458787"/>
+          </a:xfrm>
+          <a:prstGeom prst="rect">
+            <a:avLst/>
+          </a:prstGeom>
+        </p:spPr>
+        <p:txBody>
+          <a:bodyPr vert="horz" lIns="91440" tIns="45720" rIns="91440" bIns="45720" rtlCol="0" anchor="b"/>
+          <a:lstStyle>
+            <a:lvl1pPr algn="r">
+              <a:defRPr sz="1200"/>
+            </a:lvl1pPr>
+          </a:lstStyle>
+          <a:p>
+            <a:fld id="{ACA75DBD-5771-499A-B872-6B661169A41A}" type="slidenum">
+              <a:rPr lang="it-IT" smtClean="0"/>
+              <a:t>‹N›</a:t>
+            </a:fld>
+            <a:endParaRPr lang="it-IT"/>
+          </a:p>
+        </p:txBody>
+      </p:sp>
+    </p:spTree>
+    <p:extLst>
+      <p:ext uri="{BB962C8B-B14F-4D97-AF65-F5344CB8AC3E}">
+        <p14:creationId xmlns:p14="http://schemas.microsoft.com/office/powerpoint/2010/main" val="3705864382"/>
+      </p:ext>
+    </p:extLst>
+  </p:cSld>
+  <p:clrMap bg1="lt1" tx1="dk1" bg2="lt2" tx2="dk2" accent1="accent1" accent2="accent2" accent3="accent3" accent4="accent4" accent5="accent5" accent6="accent6" hlink="hlink" folHlink="folHlink"/>
+  <p:notesStyle>
+    <a:lvl1pPr marL="0" algn="l" defTabSz="914400" rtl="0" eaLnBrk="1" latinLnBrk="0" hangingPunct="1">
+      <a:defRPr sz="1200" kern="1200">
+        <a:solidFill>
+          <a:schemeClr val="tx1"/>
+        </a:solidFill>
+        <a:latin typeface="+mn-lt"/>
+        <a:ea typeface="+mn-ea"/>
+        <a:cs typeface="+mn-cs"/>
+      </a:defRPr>
+    </a:lvl1pPr>
+    <a:lvl2pPr marL="457200" algn="l" defTabSz="914400" rtl="0" eaLnBrk="1" latinLnBrk="0" hangingPunct="1">
+      <a:defRPr sz="1200" kern="1200">
+        <a:solidFill>
+          <a:schemeClr val="tx1"/>
+        </a:solidFill>
+        <a:latin typeface="+mn-lt"/>
+        <a:ea typeface="+mn-ea"/>
+        <a:cs typeface="+mn-cs"/>
+      </a:defRPr>
+    </a:lvl2pPr>
+    <a:lvl3pPr marL="914400" algn="l" defTabSz="914400" rtl="0" eaLnBrk="1" latinLnBrk="0" hangingPunct="1">
+      <a:defRPr sz="1200" kern="1200">
+        <a:solidFill>
+          <a:schemeClr val="tx1"/>
+        </a:solidFill>
+        <a:latin typeface="+mn-lt"/>
+        <a:ea typeface="+mn-ea"/>
+        <a:cs typeface="+mn-cs"/>
+      </a:defRPr>
+    </a:lvl3pPr>
+    <a:lvl4pPr marL="1371600" algn="l" defTabSz="914400" rtl="0" eaLnBrk="1" latinLnBrk="0" hangingPunct="1">
+      <a:defRPr sz="1200" kern="1200">
+        <a:solidFill>
+          <a:schemeClr val="tx1"/>
+        </a:solidFill>
+        <a:latin typeface="+mn-lt"/>
+        <a:ea typeface="+mn-ea"/>
+        <a:cs typeface="+mn-cs"/>
+      </a:defRPr>
+    </a:lvl4pPr>
+    <a:lvl5pPr marL="1828800" algn="l" defTabSz="914400" rtl="0" eaLnBrk="1" latinLnBrk="0" hangingPunct="1">
+      <a:defRPr sz="1200" kern="1200">
+        <a:solidFill>
+          <a:schemeClr val="tx1"/>
+        </a:solidFill>
+        <a:latin typeface="+mn-lt"/>
+        <a:ea typeface="+mn-ea"/>
+        <a:cs typeface="+mn-cs"/>
+      </a:defRPr>
+    </a:lvl5pPr>
+    <a:lvl6pPr marL="2286000" algn="l" defTabSz="914400" rtl="0" eaLnBrk="1" latinLnBrk="0" hangingPunct="1">
+      <a:defRPr sz="1200" kern="1200">
+        <a:solidFill>
+          <a:schemeClr val="tx1"/>
+        </a:solidFill>
+        <a:latin typeface="+mn-lt"/>
+        <a:ea typeface="+mn-ea"/>
+        <a:cs typeface="+mn-cs"/>
+      </a:defRPr>
+    </a:lvl6pPr>
+    <a:lvl7pPr marL="2743200" algn="l" defTabSz="914400" rtl="0" eaLnBrk="1" latinLnBrk="0" hangingPunct="1">
+      <a:defRPr sz="1200" kern="1200">
+        <a:solidFill>
+          <a:schemeClr val="tx1"/>
+        </a:solidFill>
+        <a:latin typeface="+mn-lt"/>
+        <a:ea typeface="+mn-ea"/>
+        <a:cs typeface="+mn-cs"/>
+      </a:defRPr>
+    </a:lvl7pPr>
+    <a:lvl8pPr marL="3200400" algn="l" defTabSz="914400" rtl="0" eaLnBrk="1" latinLnBrk="0" hangingPunct="1">
+      <a:defRPr sz="1200" kern="1200">
+        <a:solidFill>
+          <a:schemeClr val="tx1"/>
+        </a:solidFill>
+        <a:latin typeface="+mn-lt"/>
+        <a:ea typeface="+mn-ea"/>
+        <a:cs typeface="+mn-cs"/>
+      </a:defRPr>
+    </a:lvl8pPr>
+    <a:lvl9pPr marL="3657600" algn="l" defTabSz="914400" rtl="0" eaLnBrk="1" latinLnBrk="0" hangingPunct="1">
+      <a:defRPr sz="1200" kern="1200">
+        <a:solidFill>
+          <a:schemeClr val="tx1"/>
+        </a:solidFill>
+        <a:latin typeface="+mn-lt"/>
+        <a:ea typeface="+mn-ea"/>
+        <a:cs typeface="+mn-cs"/>
+      </a:defRPr>
+    </a:lvl9pPr>
+  </p:notesStyle>
+</p:notesMaster>
+</file>
+
+<file path=ppt/notesSlides/notesSlide1.xml><?xml version="1.0" encoding="utf-8"?>
+<p:notes xmlns:a="http://schemas.openxmlformats.org/drawingml/2006/main" xmlns:r="http://schemas.openxmlformats.org/officeDocument/2006/relationships" xmlns:p="http://schemas.openxmlformats.org/presentationml/2006/main">
+  <p:cSld>
+    <p:spTree>
+      <p:nvGrpSpPr>
+        <p:cNvPr id="1" name="">
+          <a:extLst>
+            <a:ext uri="{FF2B5EF4-FFF2-40B4-BE49-F238E27FC236}">
+              <a16:creationId xmlns:a16="http://schemas.microsoft.com/office/drawing/2014/main" id="{F300C0CF-A65C-3C8B-02FE-A549DA1EE7B1}"/>
+            </a:ext>
+          </a:extLst>
+        </p:cNvPr>
+        <p:cNvGrpSpPr/>
+        <p:nvPr/>
+      </p:nvGrpSpPr>
+      <p:grpSpPr>
+        <a:xfrm>
+          <a:off x="0" y="0"/>
+          <a:ext cx="0" cy="0"/>
+          <a:chOff x="0" y="0"/>
+          <a:chExt cx="0" cy="0"/>
+        </a:xfrm>
+      </p:grpSpPr>
+      <p:sp>
+        <p:nvSpPr>
+          <p:cNvPr id="2" name="Segnaposto immagine diapositiva 1">
+            <a:extLst>
+              <a:ext uri="{FF2B5EF4-FFF2-40B4-BE49-F238E27FC236}">
+                <a16:creationId xmlns:a16="http://schemas.microsoft.com/office/drawing/2014/main" id="{248058EC-60F2-374F-CC23-FBD5D6BED8B8}"/>
+              </a:ext>
+            </a:extLst>
+          </p:cNvPr>
+          <p:cNvSpPr>
+            <a:spLocks noGrp="1" noRot="1" noChangeAspect="1"/>
+          </p:cNvSpPr>
+          <p:nvPr>
+            <p:ph type="sldImg"/>
+          </p:nvPr>
+        </p:nvSpPr>
+        <p:spPr/>
+      </p:sp>
+      <p:sp>
+        <p:nvSpPr>
+          <p:cNvPr id="3" name="Segnaposto note 2">
+            <a:extLst>
+              <a:ext uri="{FF2B5EF4-FFF2-40B4-BE49-F238E27FC236}">
+                <a16:creationId xmlns:a16="http://schemas.microsoft.com/office/drawing/2014/main" id="{571BA53D-6BB7-CB1C-F435-11D15AE2EB79}"/>
+              </a:ext>
+            </a:extLst>
+          </p:cNvPr>
+          <p:cNvSpPr>
+            <a:spLocks noGrp="1"/>
+          </p:cNvSpPr>
+          <p:nvPr>
+            <p:ph type="body" idx="1"/>
+          </p:nvPr>
+        </p:nvSpPr>
+        <p:spPr/>
+        <p:txBody>
+          <a:bodyPr/>
+          <a:lstStyle/>
+          <a:p>
+            <a:endParaRPr lang="it-IT" dirty="0"/>
+          </a:p>
+        </p:txBody>
+      </p:sp>
+      <p:sp>
+        <p:nvSpPr>
+          <p:cNvPr id="4" name="Segnaposto numero diapositiva 3">
+            <a:extLst>
+              <a:ext uri="{FF2B5EF4-FFF2-40B4-BE49-F238E27FC236}">
+                <a16:creationId xmlns:a16="http://schemas.microsoft.com/office/drawing/2014/main" id="{359A4C1F-325B-2C7E-3FC5-E768E9058823}"/>
+              </a:ext>
+            </a:extLst>
+          </p:cNvPr>
+          <p:cNvSpPr>
+            <a:spLocks noGrp="1"/>
+          </p:cNvSpPr>
+          <p:nvPr>
+            <p:ph type="sldNum" sz="quarter" idx="5"/>
+          </p:nvPr>
+        </p:nvSpPr>
+        <p:spPr/>
+        <p:txBody>
+          <a:bodyPr/>
+          <a:lstStyle/>
+          <a:p>
+            <a:fld id="{ACA75DBD-5771-499A-B872-6B661169A41A}" type="slidenum">
+              <a:rPr lang="it-IT" smtClean="0"/>
+              <a:t>2</a:t>
+            </a:fld>
+            <a:endParaRPr lang="it-IT"/>
+          </a:p>
+        </p:txBody>
+      </p:sp>
+    </p:spTree>
+    <p:extLst>
+      <p:ext uri="{BB962C8B-B14F-4D97-AF65-F5344CB8AC3E}">
+        <p14:creationId xmlns:p14="http://schemas.microsoft.com/office/powerpoint/2010/main" val="2909752915"/>
+      </p:ext>
+    </p:extLst>
+  </p:cSld>
+  <p:clrMapOvr>
+    <a:masterClrMapping/>
+  </p:clrMapOvr>
+</p:notes>
+</file>
+
+<file path=ppt/notesSlides/notesSlide2.xml><?xml version="1.0" encoding="utf-8"?>
+<p:notes xmlns:a="http://schemas.openxmlformats.org/drawingml/2006/main" xmlns:r="http://schemas.openxmlformats.org/officeDocument/2006/relationships" xmlns:p="http://schemas.openxmlformats.org/presentationml/2006/main">
+  <p:cSld>
+    <p:spTree>
+      <p:nvGrpSpPr>
+        <p:cNvPr id="1" name=""/>
+        <p:cNvGrpSpPr/>
+        <p:nvPr/>
+      </p:nvGrpSpPr>
+      <p:grpSpPr>
+        <a:xfrm>
+          <a:off x="0" y="0"/>
+          <a:ext cx="0" cy="0"/>
+          <a:chOff x="0" y="0"/>
+          <a:chExt cx="0" cy="0"/>
+        </a:xfrm>
+      </p:grpSpPr>
+      <p:sp>
+        <p:nvSpPr>
+          <p:cNvPr id="2" name="Segnaposto immagine diapositiva 1"/>
+          <p:cNvSpPr>
+            <a:spLocks noGrp="1" noRot="1" noChangeAspect="1"/>
+          </p:cNvSpPr>
+          <p:nvPr>
+            <p:ph type="sldImg"/>
+          </p:nvPr>
+        </p:nvSpPr>
+        <p:spPr/>
+      </p:sp>
+      <p:sp>
+        <p:nvSpPr>
+          <p:cNvPr id="3" name="Segnaposto note 2"/>
+          <p:cNvSpPr>
+            <a:spLocks noGrp="1"/>
+          </p:cNvSpPr>
+          <p:nvPr>
+            <p:ph type="body" idx="1"/>
+          </p:nvPr>
+        </p:nvSpPr>
+        <p:spPr/>
+        <p:txBody>
+          <a:bodyPr/>
+          <a:lstStyle/>
+          <a:p>
+            <a:endParaRPr lang="it-IT" dirty="0"/>
+          </a:p>
+        </p:txBody>
+      </p:sp>
+      <p:sp>
+        <p:nvSpPr>
+          <p:cNvPr id="4" name="Segnaposto numero diapositiva 3"/>
+          <p:cNvSpPr>
+            <a:spLocks noGrp="1"/>
+          </p:cNvSpPr>
+          <p:nvPr>
+            <p:ph type="sldNum" sz="quarter" idx="5"/>
+          </p:nvPr>
+        </p:nvSpPr>
+        <p:spPr/>
+        <p:txBody>
+          <a:bodyPr/>
+          <a:lstStyle/>
+          <a:p>
+            <a:fld id="{ACA75DBD-5771-499A-B872-6B661169A41A}" type="slidenum">
+              <a:rPr lang="it-IT" smtClean="0"/>
+              <a:t>3</a:t>
+            </a:fld>
+            <a:endParaRPr lang="it-IT"/>
+          </a:p>
+        </p:txBody>
+      </p:sp>
+    </p:spTree>
+    <p:extLst>
+      <p:ext uri="{BB962C8B-B14F-4D97-AF65-F5344CB8AC3E}">
+        <p14:creationId xmlns:p14="http://schemas.microsoft.com/office/powerpoint/2010/main" val="322213774"/>
+      </p:ext>
+    </p:extLst>
+  </p:cSld>
+  <p:clrMapOvr>
+    <a:masterClrMapping/>
+  </p:clrMapOvr>
+</p:notes>
+</file>
+
+<file path=ppt/notesSlides/notesSlide3.xml><?xml version="1.0" encoding="utf-8"?>
+<p:notes xmlns:a="http://schemas.openxmlformats.org/drawingml/2006/main" xmlns:r="http://schemas.openxmlformats.org/officeDocument/2006/relationships" xmlns:p="http://schemas.openxmlformats.org/presentationml/2006/main">
+  <p:cSld>
+    <p:spTree>
+      <p:nvGrpSpPr>
+        <p:cNvPr id="1" name=""/>
+        <p:cNvGrpSpPr/>
+        <p:nvPr/>
+      </p:nvGrpSpPr>
+      <p:grpSpPr>
+        <a:xfrm>
+          <a:off x="0" y="0"/>
+          <a:ext cx="0" cy="0"/>
+          <a:chOff x="0" y="0"/>
+          <a:chExt cx="0" cy="0"/>
+        </a:xfrm>
+      </p:grpSpPr>
+      <p:sp>
+        <p:nvSpPr>
+          <p:cNvPr id="2" name="Segnaposto immagine diapositiva 1"/>
+          <p:cNvSpPr>
+            <a:spLocks noGrp="1" noRot="1" noChangeAspect="1"/>
+          </p:cNvSpPr>
+          <p:nvPr>
+            <p:ph type="sldImg"/>
+          </p:nvPr>
+        </p:nvSpPr>
+        <p:spPr/>
+      </p:sp>
+      <p:sp>
+        <p:nvSpPr>
+          <p:cNvPr id="3" name="Segnaposto note 2"/>
+          <p:cNvSpPr>
+            <a:spLocks noGrp="1"/>
+          </p:cNvSpPr>
+          <p:nvPr>
+            <p:ph type="body" idx="1"/>
+          </p:nvPr>
+        </p:nvSpPr>
+        <p:spPr/>
+        <p:txBody>
+          <a:bodyPr/>
+          <a:lstStyle/>
+          <a:p>
+            <a:endParaRPr lang="it-IT" dirty="0"/>
+          </a:p>
+        </p:txBody>
+      </p:sp>
+      <p:sp>
+        <p:nvSpPr>
+          <p:cNvPr id="4" name="Segnaposto numero diapositiva 3"/>
+          <p:cNvSpPr>
+            <a:spLocks noGrp="1"/>
+          </p:cNvSpPr>
+          <p:nvPr>
+            <p:ph type="sldNum" sz="quarter" idx="5"/>
+          </p:nvPr>
+        </p:nvSpPr>
+        <p:spPr/>
+        <p:txBody>
+          <a:bodyPr/>
+          <a:lstStyle/>
+          <a:p>
+            <a:fld id="{ACA75DBD-5771-499A-B872-6B661169A41A}" type="slidenum">
+              <a:rPr lang="it-IT" smtClean="0"/>
+              <a:t>5</a:t>
+            </a:fld>
+            <a:endParaRPr lang="it-IT"/>
+          </a:p>
+        </p:txBody>
+      </p:sp>
+    </p:spTree>
+    <p:extLst>
+      <p:ext uri="{BB962C8B-B14F-4D97-AF65-F5344CB8AC3E}">
+        <p14:creationId xmlns:p14="http://schemas.microsoft.com/office/powerpoint/2010/main" val="275755148"/>
+      </p:ext>
+    </p:extLst>
+  </p:cSld>
+  <p:clrMapOvr>
+    <a:masterClrMapping/>
+  </p:clrMapOvr>
+</p:notes>
+</file>
+
+<file path=ppt/notesSlides/notesSlide4.xml><?xml version="1.0" encoding="utf-8"?>
+<p:notes xmlns:a="http://schemas.openxmlformats.org/drawingml/2006/main" xmlns:r="http://schemas.openxmlformats.org/officeDocument/2006/relationships" xmlns:p="http://schemas.openxmlformats.org/presentationml/2006/main">
+  <p:cSld>
+    <p:spTree>
+      <p:nvGrpSpPr>
+        <p:cNvPr id="1" name=""/>
+        <p:cNvGrpSpPr/>
+        <p:nvPr/>
+      </p:nvGrpSpPr>
+      <p:grpSpPr>
+        <a:xfrm>
+          <a:off x="0" y="0"/>
+          <a:ext cx="0" cy="0"/>
+          <a:chOff x="0" y="0"/>
+          <a:chExt cx="0" cy="0"/>
+        </a:xfrm>
+      </p:grpSpPr>
+      <p:sp>
+        <p:nvSpPr>
+          <p:cNvPr id="2" name="Segnaposto immagine diapositiva 1"/>
+          <p:cNvSpPr>
+            <a:spLocks noGrp="1" noRot="1" noChangeAspect="1"/>
+          </p:cNvSpPr>
+          <p:nvPr>
+            <p:ph type="sldImg"/>
+          </p:nvPr>
+        </p:nvSpPr>
+        <p:spPr/>
+      </p:sp>
+      <p:sp>
+        <p:nvSpPr>
+          <p:cNvPr id="3" name="Segnaposto note 2"/>
+          <p:cNvSpPr>
+            <a:spLocks noGrp="1"/>
+          </p:cNvSpPr>
+          <p:nvPr>
+            <p:ph type="body" idx="1"/>
+          </p:nvPr>
+        </p:nvSpPr>
+        <p:spPr/>
+        <p:txBody>
+          <a:bodyPr/>
+          <a:lstStyle/>
+          <a:p>
+            <a:endParaRPr lang="it-IT" dirty="0"/>
+          </a:p>
+        </p:txBody>
+      </p:sp>
+      <p:sp>
+        <p:nvSpPr>
+          <p:cNvPr id="4" name="Segnaposto numero diapositiva 3"/>
+          <p:cNvSpPr>
+            <a:spLocks noGrp="1"/>
+          </p:cNvSpPr>
+          <p:nvPr>
+            <p:ph type="sldNum" sz="quarter" idx="5"/>
+          </p:nvPr>
+        </p:nvSpPr>
+        <p:spPr/>
+        <p:txBody>
+          <a:bodyPr/>
+          <a:lstStyle/>
+          <a:p>
+            <a:fld id="{ACA75DBD-5771-499A-B872-6B661169A41A}" type="slidenum">
+              <a:rPr lang="it-IT" smtClean="0"/>
+              <a:t>6</a:t>
+            </a:fld>
+            <a:endParaRPr lang="it-IT"/>
+          </a:p>
+        </p:txBody>
+      </p:sp>
+    </p:spTree>
+    <p:extLst>
+      <p:ext uri="{BB962C8B-B14F-4D97-AF65-F5344CB8AC3E}">
+        <p14:creationId xmlns:p14="http://schemas.microsoft.com/office/powerpoint/2010/main" val="2077174872"/>
+      </p:ext>
+    </p:extLst>
+  </p:cSld>
+  <p:clrMapOvr>
+    <a:masterClrMapping/>
+  </p:clrMapOvr>
+</p:notes>
+</file>
+
+<file path=ppt/notesSlides/notesSlide5.xml><?xml version="1.0" encoding="utf-8"?>
+<p:notes xmlns:a="http://schemas.openxmlformats.org/drawingml/2006/main" xmlns:r="http://schemas.openxmlformats.org/officeDocument/2006/relationships" xmlns:p="http://schemas.openxmlformats.org/presentationml/2006/main">
+  <p:cSld>
+    <p:spTree>
+      <p:nvGrpSpPr>
+        <p:cNvPr id="1" name=""/>
+        <p:cNvGrpSpPr/>
+        <p:nvPr/>
+      </p:nvGrpSpPr>
+      <p:grpSpPr>
+        <a:xfrm>
+          <a:off x="0" y="0"/>
+          <a:ext cx="0" cy="0"/>
+          <a:chOff x="0" y="0"/>
+          <a:chExt cx="0" cy="0"/>
+        </a:xfrm>
+      </p:grpSpPr>
+      <p:sp>
+        <p:nvSpPr>
+          <p:cNvPr id="2" name="Segnaposto immagine diapositiva 1"/>
+          <p:cNvSpPr>
+            <a:spLocks noGrp="1" noRot="1" noChangeAspect="1"/>
+          </p:cNvSpPr>
+          <p:nvPr>
+            <p:ph type="sldImg"/>
+          </p:nvPr>
+        </p:nvSpPr>
+        <p:spPr/>
+      </p:sp>
+      <p:sp>
+        <p:nvSpPr>
+          <p:cNvPr id="3" name="Segnaposto note 2"/>
+          <p:cNvSpPr>
+            <a:spLocks noGrp="1"/>
+          </p:cNvSpPr>
+          <p:nvPr>
+            <p:ph type="body" idx="1"/>
+          </p:nvPr>
+        </p:nvSpPr>
+        <p:spPr/>
+        <p:txBody>
+          <a:bodyPr/>
+          <a:lstStyle/>
+          <a:p>
+            <a:endParaRPr lang="it-IT" dirty="0"/>
+          </a:p>
+        </p:txBody>
+      </p:sp>
+      <p:sp>
+        <p:nvSpPr>
+          <p:cNvPr id="4" name="Segnaposto numero diapositiva 3"/>
+          <p:cNvSpPr>
+            <a:spLocks noGrp="1"/>
+          </p:cNvSpPr>
+          <p:nvPr>
+            <p:ph type="sldNum" sz="quarter" idx="5"/>
+          </p:nvPr>
+        </p:nvSpPr>
+        <p:spPr/>
+        <p:txBody>
+          <a:bodyPr/>
+          <a:lstStyle/>
+          <a:p>
+            <a:fld id="{ACA75DBD-5771-499A-B872-6B661169A41A}" type="slidenum">
+              <a:rPr lang="it-IT" smtClean="0"/>
+              <a:t>9</a:t>
+            </a:fld>
+            <a:endParaRPr lang="it-IT"/>
+          </a:p>
+        </p:txBody>
+      </p:sp>
+    </p:spTree>
+    <p:extLst>
+      <p:ext uri="{BB962C8B-B14F-4D97-AF65-F5344CB8AC3E}">
+        <p14:creationId xmlns:p14="http://schemas.microsoft.com/office/powerpoint/2010/main" val="2925337426"/>
+      </p:ext>
+    </p:extLst>
+  </p:cSld>
+  <p:clrMapOvr>
+    <a:masterClrMapping/>
+  </p:clrMapOvr>
+</p:notes>
+</file>
+
+<file path=ppt/notesSlides/notesSlide6.xml><?xml version="1.0" encoding="utf-8"?>
+<p:notes xmlns:a="http://schemas.openxmlformats.org/drawingml/2006/main" xmlns:r="http://schemas.openxmlformats.org/officeDocument/2006/relationships" xmlns:p="http://schemas.openxmlformats.org/presentationml/2006/main">
+  <p:cSld>
+    <p:spTree>
+      <p:nvGrpSpPr>
+        <p:cNvPr id="1" name=""/>
+        <p:cNvGrpSpPr/>
+        <p:nvPr/>
+      </p:nvGrpSpPr>
+      <p:grpSpPr>
+        <a:xfrm>
+          <a:off x="0" y="0"/>
+          <a:ext cx="0" cy="0"/>
+          <a:chOff x="0" y="0"/>
+          <a:chExt cx="0" cy="0"/>
+        </a:xfrm>
+      </p:grpSpPr>
+      <p:sp>
+        <p:nvSpPr>
+          <p:cNvPr id="2" name="Segnaposto immagine diapositiva 1"/>
+          <p:cNvSpPr>
+            <a:spLocks noGrp="1" noRot="1" noChangeAspect="1"/>
+          </p:cNvSpPr>
+          <p:nvPr>
+            <p:ph type="sldImg"/>
+          </p:nvPr>
+        </p:nvSpPr>
+        <p:spPr/>
+      </p:sp>
+      <p:sp>
+        <p:nvSpPr>
+          <p:cNvPr id="3" name="Segnaposto note 2"/>
+          <p:cNvSpPr>
+            <a:spLocks noGrp="1"/>
+          </p:cNvSpPr>
+          <p:nvPr>
+            <p:ph type="body" idx="1"/>
+          </p:nvPr>
+        </p:nvSpPr>
+        <p:spPr/>
+        <p:txBody>
+          <a:bodyPr/>
+          <a:lstStyle/>
+          <a:p>
+            <a:endParaRPr lang="it-IT" dirty="0"/>
+          </a:p>
+        </p:txBody>
+      </p:sp>
+      <p:sp>
+        <p:nvSpPr>
+          <p:cNvPr id="4" name="Segnaposto numero diapositiva 3"/>
+          <p:cNvSpPr>
+            <a:spLocks noGrp="1"/>
+          </p:cNvSpPr>
+          <p:nvPr>
+            <p:ph type="sldNum" sz="quarter" idx="5"/>
+          </p:nvPr>
+        </p:nvSpPr>
+        <p:spPr/>
+        <p:txBody>
+          <a:bodyPr/>
+          <a:lstStyle/>
+          <a:p>
+            <a:fld id="{ACA75DBD-5771-499A-B872-6B661169A41A}" type="slidenum">
+              <a:rPr lang="it-IT" smtClean="0"/>
+              <a:t>10</a:t>
+            </a:fld>
+            <a:endParaRPr lang="it-IT"/>
+          </a:p>
+        </p:txBody>
+      </p:sp>
+    </p:spTree>
+    <p:extLst>
+      <p:ext uri="{BB962C8B-B14F-4D97-AF65-F5344CB8AC3E}">
+        <p14:creationId xmlns:p14="http://schemas.microsoft.com/office/powerpoint/2010/main" val="3975928253"/>
+      </p:ext>
+    </p:extLst>
+  </p:cSld>
+  <p:clrMapOvr>
+    <a:masterClrMapping/>
+  </p:clrMapOvr>
+</p:notes>
 </file>
 
 <file path=ppt/slideLayouts/slideLayout1.xml><?xml version="1.0" encoding="utf-8"?>
@@ -3599,15 +4494,23 @@
 </p:sld>
 </file>
 
-<file path=ppt/slides/slide2.xml><?xml version="1.0" encoding="utf-8"?>
+<file path=ppt/slides/slide10.xml><?xml version="1.0" encoding="utf-8"?>
 <p:sld xmlns:a="http://schemas.openxmlformats.org/drawingml/2006/main" xmlns:r="http://schemas.openxmlformats.org/officeDocument/2006/relationships" xmlns:p="http://schemas.openxmlformats.org/presentationml/2006/main">
   <p:cSld>
+    <p:bg>
+      <p:bgPr>
+        <a:solidFill>
+          <a:schemeClr val="bg1"/>
+        </a:solidFill>
+        <a:effectLst/>
+      </p:bgPr>
+    </p:bg>
     <p:spTree>
       <p:nvGrpSpPr>
         <p:cNvPr id="1" name="">
           <a:extLst>
             <a:ext uri="{FF2B5EF4-FFF2-40B4-BE49-F238E27FC236}">
-              <a16:creationId xmlns:a16="http://schemas.microsoft.com/office/drawing/2014/main" id="{BB6CC30E-4A9D-E78B-247C-CA2CDE868F0E}"/>
+              <a16:creationId xmlns:a16="http://schemas.microsoft.com/office/drawing/2014/main" id="{890865A1-DA0E-1220-9619-58139CB600D3}"/>
             </a:ext>
           </a:extLst>
         </p:cNvPr>
@@ -3622,104 +4525,6628 @@
           <a:chExt cx="0" cy="0"/>
         </a:xfrm>
       </p:grpSpPr>
-      <p:sp>
-        <p:nvSpPr>
-          <p:cNvPr id="8" name="Sottotitolo 7">
-            <a:extLst>
-              <a:ext uri="{FF2B5EF4-FFF2-40B4-BE49-F238E27FC236}">
-                <a16:creationId xmlns:a16="http://schemas.microsoft.com/office/drawing/2014/main" id="{2701B09E-E5EB-20BC-72AC-CBA05474548F}"/>
-              </a:ext>
-            </a:extLst>
-          </p:cNvPr>
-          <p:cNvSpPr>
-            <a:spLocks noGrp="1"/>
-          </p:cNvSpPr>
-          <p:nvPr>
-            <p:ph type="subTitle" idx="1"/>
+      <p:sp useBgFill="1">
+        <p:nvSpPr>
+          <p:cNvPr id="17" name="Rectangle 16">
+            <a:extLst>
+              <a:ext uri="{FF2B5EF4-FFF2-40B4-BE49-F238E27FC236}">
+                <a16:creationId xmlns:a16="http://schemas.microsoft.com/office/drawing/2014/main" id="{352BEC0E-22F8-46D0-9632-375DB541B06C}"/>
+              </a:ext>
+              <a:ext uri="{C183D7F6-B498-43B3-948B-1728B52AA6E4}">
+                <adec:decorative xmlns:adec="http://schemas.microsoft.com/office/drawing/2017/decorative" val="1"/>
+              </a:ext>
+            </a:extLst>
+          </p:cNvPr>
+          <p:cNvSpPr>
+            <a:spLocks noGrp="1" noRot="1" noChangeAspect="1" noMove="1" noResize="1" noEditPoints="1" noAdjustHandles="1" noChangeArrowheads="1" noChangeShapeType="1" noTextEdit="1"/>
+          </p:cNvSpPr>
+          <p:nvPr>
+            <p:extLst>
+              <p:ext uri="{386F3935-93C4-4BCD-93E2-E3B085C9AB24}">
+                <p16:designElem xmlns:p16="http://schemas.microsoft.com/office/powerpoint/2015/main" val="1"/>
+              </p:ext>
+            </p:extLst>
           </p:nvPr>
         </p:nvSpPr>
         <p:spPr>
           <a:xfrm>
-            <a:off x="304800" y="706438"/>
-            <a:ext cx="9842500" cy="2417762"/>
+            <a:off x="0" y="0"/>
+            <a:ext cx="12188952" cy="6858000"/>
+          </a:xfrm>
+          <a:prstGeom prst="rect">
+            <a:avLst/>
+          </a:prstGeom>
+          <a:ln>
+            <a:noFill/>
+          </a:ln>
+        </p:spPr>
+        <p:style>
+          <a:lnRef idx="2">
+            <a:schemeClr val="accent1">
+              <a:shade val="50000"/>
+            </a:schemeClr>
+          </a:lnRef>
+          <a:fillRef idx="1">
+            <a:schemeClr val="accent1"/>
+          </a:fillRef>
+          <a:effectRef idx="0">
+            <a:schemeClr val="accent1"/>
+          </a:effectRef>
+          <a:fontRef idx="minor">
+            <a:schemeClr val="lt1"/>
+          </a:fontRef>
+        </p:style>
+        <p:txBody>
+          <a:bodyPr rtlCol="0" anchor="ctr"/>
+          <a:lstStyle/>
+          <a:p>
+            <a:pPr algn="ctr"/>
+            <a:endParaRPr lang="en-US"/>
+          </a:p>
+        </p:txBody>
+      </p:sp>
+      <p:sp>
+        <p:nvSpPr>
+          <p:cNvPr id="7" name="Titolo 6">
+            <a:extLst>
+              <a:ext uri="{FF2B5EF4-FFF2-40B4-BE49-F238E27FC236}">
+                <a16:creationId xmlns:a16="http://schemas.microsoft.com/office/drawing/2014/main" id="{F0BAEF04-0170-ED0A-F4C0-10025E48109E}"/>
+              </a:ext>
+            </a:extLst>
+          </p:cNvPr>
+          <p:cNvSpPr>
+            <a:spLocks noGrp="1"/>
+          </p:cNvSpPr>
+          <p:nvPr>
+            <p:ph type="title"/>
+          </p:nvPr>
+        </p:nvSpPr>
+        <p:spPr>
+          <a:xfrm>
+            <a:off x="640080" y="329184"/>
+            <a:ext cx="6894576" cy="1783080"/>
           </a:xfrm>
         </p:spPr>
         <p:txBody>
-          <a:bodyPr>
-            <a:normAutofit fontScale="85000" lnSpcReduction="20000"/>
+          <a:bodyPr anchor="b">
+            <a:normAutofit/>
           </a:bodyPr>
           <a:lstStyle/>
           <a:p>
-            <a:pPr algn="l"/>
-            <a:r>
-              <a:rPr lang="it-IT" sz="3000" dirty="0"/>
-              <a:t>Contesto del lavoro:</a:t>
-            </a:r>
-          </a:p>
-          <a:p>
-            <a:pPr marL="342900" indent="-342900" algn="l">
-              <a:buFont typeface="Arial" panose="020B0604020202020204" pitchFamily="34" charset="0"/>
-              <a:buChar char="•"/>
-            </a:pPr>
-            <a:r>
-              <a:rPr lang="it-IT" dirty="0"/>
-              <a:t>Richiedente: azienda </a:t>
-            </a:r>
-            <a:r>
-              <a:rPr lang="it-IT" dirty="0" err="1"/>
-              <a:t>Cepi.s.p.a</a:t>
-            </a:r>
-            <a:r>
-              <a:rPr lang="it-IT" dirty="0"/>
-              <a:t>.</a:t>
-            </a:r>
-          </a:p>
-          <a:p>
-            <a:pPr marL="342900" indent="-342900" algn="l">
-              <a:buFont typeface="Arial" panose="020B0604020202020204" pitchFamily="34" charset="0"/>
-              <a:buChar char="•"/>
-            </a:pPr>
-            <a:r>
-              <a:rPr lang="it-IT" dirty="0"/>
-              <a:t>Situazione: azienda in espansione con un fatturato in crescita</a:t>
-            </a:r>
-          </a:p>
-          <a:p>
-            <a:pPr marL="342900" indent="-342900" algn="l">
-              <a:buFont typeface="Arial" panose="020B0604020202020204" pitchFamily="34" charset="0"/>
-              <a:buChar char="•"/>
-            </a:pPr>
-            <a:r>
-              <a:rPr lang="it-IT" dirty="0"/>
-              <a:t>Reparto interessato al progetto: Reparto vendite</a:t>
-            </a:r>
-          </a:p>
-          <a:p>
-            <a:pPr marL="342900" indent="-342900" algn="l">
-              <a:buFont typeface="Arial" panose="020B0604020202020204" pitchFamily="34" charset="0"/>
-              <a:buChar char="•"/>
-            </a:pPr>
-            <a:r>
-              <a:rPr lang="it-IT" dirty="0"/>
-              <a:t>Attuale tecnologia utilizzata: Database Access implementato ~30 anni fa.</a:t>
-            </a:r>
-          </a:p>
-          <a:p>
-            <a:pPr marL="342900" indent="-342900" algn="l">
-              <a:buFont typeface="Arial" panose="020B0604020202020204" pitchFamily="34" charset="0"/>
-              <a:buChar char="•"/>
-            </a:pPr>
-            <a:r>
-              <a:rPr lang="it-IT" dirty="0"/>
-              <a:t>Attuale fase aziendale: l’azienda è in un momento di riorganizzazione dei flussi e programmi infamativi,</a:t>
-            </a:r>
-          </a:p>
-        </p:txBody>
-      </p:sp>
+            <a:r>
+              <a:rPr lang="it-IT" sz="5400" dirty="0"/>
+              <a:t>Progettazione View	</a:t>
+            </a:r>
+            <a:br>
+              <a:rPr lang="it-IT" sz="5400" dirty="0"/>
+            </a:br>
+            <a:endParaRPr lang="it-IT" sz="5400" dirty="0"/>
+          </a:p>
+        </p:txBody>
+      </p:sp>
+      <p:sp>
+        <p:nvSpPr>
+          <p:cNvPr id="19" name="sketch line">
+            <a:extLst>
+              <a:ext uri="{FF2B5EF4-FFF2-40B4-BE49-F238E27FC236}">
+                <a16:creationId xmlns:a16="http://schemas.microsoft.com/office/drawing/2014/main" id="{3FCFB1DE-0B7E-48CC-BA90-B2AB0889F9D6}"/>
+              </a:ext>
+              <a:ext uri="{C183D7F6-B498-43B3-948B-1728B52AA6E4}">
+                <adec:decorative xmlns:adec="http://schemas.microsoft.com/office/drawing/2017/decorative" val="1"/>
+              </a:ext>
+            </a:extLst>
+          </p:cNvPr>
+          <p:cNvSpPr>
+            <a:spLocks noGrp="1" noRot="1" noChangeAspect="1" noMove="1" noResize="1" noEditPoints="1" noAdjustHandles="1" noChangeArrowheads="1" noChangeShapeType="1" noTextEdit="1"/>
+          </p:cNvSpPr>
+          <p:nvPr>
+            <p:extLst>
+              <p:ext uri="{386F3935-93C4-4BCD-93E2-E3B085C9AB24}">
+                <p16:designElem xmlns:p16="http://schemas.microsoft.com/office/powerpoint/2015/main" val="1"/>
+              </p:ext>
+            </p:extLst>
+          </p:nvPr>
+        </p:nvSpPr>
+        <p:spPr>
+          <a:xfrm>
+            <a:off x="758952" y="2395728"/>
+            <a:ext cx="4243589" cy="18288"/>
+          </a:xfrm>
+          <a:custGeom>
+            <a:avLst/>
+            <a:gdLst>
+              <a:gd name="csX0" fmla="*/ 0 w 4243589"/>
+              <a:gd name="csY0" fmla="*/ 0 h 18288"/>
+              <a:gd name="csX1" fmla="*/ 478919 w 4243589"/>
+              <a:gd name="csY1" fmla="*/ 0 h 18288"/>
+              <a:gd name="csX2" fmla="*/ 957839 w 4243589"/>
+              <a:gd name="csY2" fmla="*/ 0 h 18288"/>
+              <a:gd name="csX3" fmla="*/ 1521630 w 4243589"/>
+              <a:gd name="csY3" fmla="*/ 0 h 18288"/>
+              <a:gd name="csX4" fmla="*/ 2212729 w 4243589"/>
+              <a:gd name="csY4" fmla="*/ 0 h 18288"/>
+              <a:gd name="csX5" fmla="*/ 2734084 w 4243589"/>
+              <a:gd name="csY5" fmla="*/ 0 h 18288"/>
+              <a:gd name="csX6" fmla="*/ 3255439 w 4243589"/>
+              <a:gd name="csY6" fmla="*/ 0 h 18288"/>
+              <a:gd name="csX7" fmla="*/ 4243589 w 4243589"/>
+              <a:gd name="csY7" fmla="*/ 0 h 18288"/>
+              <a:gd name="csX8" fmla="*/ 4243589 w 4243589"/>
+              <a:gd name="csY8" fmla="*/ 18288 h 18288"/>
+              <a:gd name="csX9" fmla="*/ 3594926 w 4243589"/>
+              <a:gd name="csY9" fmla="*/ 18288 h 18288"/>
+              <a:gd name="csX10" fmla="*/ 3073571 w 4243589"/>
+              <a:gd name="csY10" fmla="*/ 18288 h 18288"/>
+              <a:gd name="csX11" fmla="*/ 2552216 w 4243589"/>
+              <a:gd name="csY11" fmla="*/ 18288 h 18288"/>
+              <a:gd name="csX12" fmla="*/ 1903553 w 4243589"/>
+              <a:gd name="csY12" fmla="*/ 18288 h 18288"/>
+              <a:gd name="csX13" fmla="*/ 1212454 w 4243589"/>
+              <a:gd name="csY13" fmla="*/ 18288 h 18288"/>
+              <a:gd name="csX14" fmla="*/ 733535 w 4243589"/>
+              <a:gd name="csY14" fmla="*/ 18288 h 18288"/>
+              <a:gd name="csX15" fmla="*/ 0 w 4243589"/>
+              <a:gd name="csY15" fmla="*/ 18288 h 18288"/>
+              <a:gd name="csX16" fmla="*/ 0 w 4243589"/>
+              <a:gd name="csY16" fmla="*/ 0 h 18288"/>
+            </a:gdLst>
+            <a:ahLst/>
+            <a:cxnLst>
+              <a:cxn ang="0">
+                <a:pos x="csX0" y="csY0"/>
+              </a:cxn>
+              <a:cxn ang="0">
+                <a:pos x="csX1" y="csY1"/>
+              </a:cxn>
+              <a:cxn ang="0">
+                <a:pos x="csX2" y="csY2"/>
+              </a:cxn>
+              <a:cxn ang="0">
+                <a:pos x="csX3" y="csY3"/>
+              </a:cxn>
+              <a:cxn ang="0">
+                <a:pos x="csX4" y="csY4"/>
+              </a:cxn>
+              <a:cxn ang="0">
+                <a:pos x="csX5" y="csY5"/>
+              </a:cxn>
+              <a:cxn ang="0">
+                <a:pos x="csX6" y="csY6"/>
+              </a:cxn>
+              <a:cxn ang="0">
+                <a:pos x="csX7" y="csY7"/>
+              </a:cxn>
+              <a:cxn ang="0">
+                <a:pos x="csX8" y="csY8"/>
+              </a:cxn>
+              <a:cxn ang="0">
+                <a:pos x="csX9" y="csY9"/>
+              </a:cxn>
+              <a:cxn ang="0">
+                <a:pos x="csX10" y="csY10"/>
+              </a:cxn>
+              <a:cxn ang="0">
+                <a:pos x="csX11" y="csY11"/>
+              </a:cxn>
+              <a:cxn ang="0">
+                <a:pos x="csX12" y="csY12"/>
+              </a:cxn>
+              <a:cxn ang="0">
+                <a:pos x="csX13" y="csY13"/>
+              </a:cxn>
+              <a:cxn ang="0">
+                <a:pos x="csX14" y="csY14"/>
+              </a:cxn>
+              <a:cxn ang="0">
+                <a:pos x="csX15" y="csY15"/>
+              </a:cxn>
+              <a:cxn ang="0">
+                <a:pos x="csX16" y="csY16"/>
+              </a:cxn>
+            </a:cxnLst>
+            <a:rect l="l" t="t" r="r" b="b"/>
+            <a:pathLst>
+              <a:path w="4243589" h="18288" fill="none" extrusionOk="0">
+                <a:moveTo>
+                  <a:pt x="0" y="0"/>
+                </a:moveTo>
+                <a:cubicBezTo>
+                  <a:pt x="213395" y="-21006"/>
+                  <a:pt x="307421" y="-18116"/>
+                  <a:pt x="478919" y="0"/>
+                </a:cubicBezTo>
+                <a:cubicBezTo>
+                  <a:pt x="650417" y="18116"/>
+                  <a:pt x="831092" y="-21237"/>
+                  <a:pt x="957839" y="0"/>
+                </a:cubicBezTo>
+                <a:cubicBezTo>
+                  <a:pt x="1084586" y="21237"/>
+                  <a:pt x="1301682" y="25124"/>
+                  <a:pt x="1521630" y="0"/>
+                </a:cubicBezTo>
+                <a:cubicBezTo>
+                  <a:pt x="1741578" y="-25124"/>
+                  <a:pt x="1970269" y="-29139"/>
+                  <a:pt x="2212729" y="0"/>
+                </a:cubicBezTo>
+                <a:cubicBezTo>
+                  <a:pt x="2455189" y="29139"/>
+                  <a:pt x="2558847" y="-4796"/>
+                  <a:pt x="2734084" y="0"/>
+                </a:cubicBezTo>
+                <a:cubicBezTo>
+                  <a:pt x="2909321" y="4796"/>
+                  <a:pt x="3097217" y="-13409"/>
+                  <a:pt x="3255439" y="0"/>
+                </a:cubicBezTo>
+                <a:cubicBezTo>
+                  <a:pt x="3413662" y="13409"/>
+                  <a:pt x="3979999" y="-10121"/>
+                  <a:pt x="4243589" y="0"/>
+                </a:cubicBezTo>
+                <a:cubicBezTo>
+                  <a:pt x="4244484" y="8974"/>
+                  <a:pt x="4243043" y="9359"/>
+                  <a:pt x="4243589" y="18288"/>
+                </a:cubicBezTo>
+                <a:cubicBezTo>
+                  <a:pt x="4058777" y="31246"/>
+                  <a:pt x="3910348" y="3158"/>
+                  <a:pt x="3594926" y="18288"/>
+                </a:cubicBezTo>
+                <a:cubicBezTo>
+                  <a:pt x="3279504" y="33418"/>
+                  <a:pt x="3319955" y="-3977"/>
+                  <a:pt x="3073571" y="18288"/>
+                </a:cubicBezTo>
+                <a:cubicBezTo>
+                  <a:pt x="2827187" y="40553"/>
+                  <a:pt x="2767387" y="1863"/>
+                  <a:pt x="2552216" y="18288"/>
+                </a:cubicBezTo>
+                <a:cubicBezTo>
+                  <a:pt x="2337046" y="34713"/>
+                  <a:pt x="2181871" y="19527"/>
+                  <a:pt x="1903553" y="18288"/>
+                </a:cubicBezTo>
+                <a:cubicBezTo>
+                  <a:pt x="1625235" y="17049"/>
+                  <a:pt x="1557672" y="24174"/>
+                  <a:pt x="1212454" y="18288"/>
+                </a:cubicBezTo>
+                <a:cubicBezTo>
+                  <a:pt x="867236" y="12402"/>
+                  <a:pt x="874382" y="15627"/>
+                  <a:pt x="733535" y="18288"/>
+                </a:cubicBezTo>
+                <a:cubicBezTo>
+                  <a:pt x="592688" y="20949"/>
+                  <a:pt x="183477" y="14753"/>
+                  <a:pt x="0" y="18288"/>
+                </a:cubicBezTo>
+                <a:cubicBezTo>
+                  <a:pt x="-229" y="14222"/>
+                  <a:pt x="509" y="5816"/>
+                  <a:pt x="0" y="0"/>
+                </a:cubicBezTo>
+                <a:close/>
+              </a:path>
+              <a:path w="4243589" h="18288" stroke="0" extrusionOk="0">
+                <a:moveTo>
+                  <a:pt x="0" y="0"/>
+                </a:moveTo>
+                <a:cubicBezTo>
+                  <a:pt x="143690" y="16630"/>
+                  <a:pt x="266667" y="14847"/>
+                  <a:pt x="521355" y="0"/>
+                </a:cubicBezTo>
+                <a:cubicBezTo>
+                  <a:pt x="776043" y="-14847"/>
+                  <a:pt x="814491" y="-17363"/>
+                  <a:pt x="1000275" y="0"/>
+                </a:cubicBezTo>
+                <a:cubicBezTo>
+                  <a:pt x="1186059" y="17363"/>
+                  <a:pt x="1352504" y="-23507"/>
+                  <a:pt x="1521630" y="0"/>
+                </a:cubicBezTo>
+                <a:cubicBezTo>
+                  <a:pt x="1690756" y="23507"/>
+                  <a:pt x="1889525" y="5871"/>
+                  <a:pt x="2127857" y="0"/>
+                </a:cubicBezTo>
+                <a:cubicBezTo>
+                  <a:pt x="2366189" y="-5871"/>
+                  <a:pt x="2620628" y="-27997"/>
+                  <a:pt x="2776520" y="0"/>
+                </a:cubicBezTo>
+                <a:cubicBezTo>
+                  <a:pt x="2932412" y="27997"/>
+                  <a:pt x="3131683" y="-25073"/>
+                  <a:pt x="3467618" y="0"/>
+                </a:cubicBezTo>
+                <a:cubicBezTo>
+                  <a:pt x="3803553" y="25073"/>
+                  <a:pt x="4017371" y="3071"/>
+                  <a:pt x="4243589" y="0"/>
+                </a:cubicBezTo>
+                <a:cubicBezTo>
+                  <a:pt x="4243134" y="6162"/>
+                  <a:pt x="4243492" y="11775"/>
+                  <a:pt x="4243589" y="18288"/>
+                </a:cubicBezTo>
+                <a:cubicBezTo>
+                  <a:pt x="4017834" y="-5779"/>
+                  <a:pt x="3834586" y="13376"/>
+                  <a:pt x="3594926" y="18288"/>
+                </a:cubicBezTo>
+                <a:cubicBezTo>
+                  <a:pt x="3355266" y="23200"/>
+                  <a:pt x="3204179" y="2869"/>
+                  <a:pt x="2903827" y="18288"/>
+                </a:cubicBezTo>
+                <a:cubicBezTo>
+                  <a:pt x="2603475" y="33707"/>
+                  <a:pt x="2526187" y="46187"/>
+                  <a:pt x="2212729" y="18288"/>
+                </a:cubicBezTo>
+                <a:cubicBezTo>
+                  <a:pt x="1899271" y="-9611"/>
+                  <a:pt x="1966289" y="29692"/>
+                  <a:pt x="1733809" y="18288"/>
+                </a:cubicBezTo>
+                <a:cubicBezTo>
+                  <a:pt x="1501329" y="6884"/>
+                  <a:pt x="1343612" y="12492"/>
+                  <a:pt x="1085146" y="18288"/>
+                </a:cubicBezTo>
+                <a:cubicBezTo>
+                  <a:pt x="826680" y="24084"/>
+                  <a:pt x="778184" y="35607"/>
+                  <a:pt x="521355" y="18288"/>
+                </a:cubicBezTo>
+                <a:cubicBezTo>
+                  <a:pt x="264526" y="969"/>
+                  <a:pt x="120277" y="4268"/>
+                  <a:pt x="0" y="18288"/>
+                </a:cubicBezTo>
+                <a:cubicBezTo>
+                  <a:pt x="766" y="10800"/>
+                  <a:pt x="-457" y="8180"/>
+                  <a:pt x="0" y="0"/>
+                </a:cubicBezTo>
+                <a:close/>
+              </a:path>
+            </a:pathLst>
+          </a:custGeom>
+          <a:solidFill>
+            <a:schemeClr val="accent2"/>
+          </a:solidFill>
+          <a:ln w="41275" cap="rnd">
+            <a:solidFill>
+              <a:schemeClr val="accent2"/>
+            </a:solidFill>
+            <a:round/>
+            <a:extLst>
+              <a:ext uri="{C807C97D-BFC1-408E-A445-0C87EB9F89A2}">
+                <ask:lineSketchStyleProps xmlns:ask="http://schemas.microsoft.com/office/drawing/2018/sketchyshapes" sd="2727557108">
+                  <a:prstGeom prst="rect">
+                    <a:avLst/>
+                  </a:prstGeom>
+                  <ask:type>
+                    <ask:lineSketchFreehand/>
+                  </ask:type>
+                </ask:lineSketchStyleProps>
+              </a:ext>
+            </a:extLst>
+          </a:ln>
+        </p:spPr>
+        <p:style>
+          <a:lnRef idx="2">
+            <a:schemeClr val="accent1">
+              <a:shade val="50000"/>
+            </a:schemeClr>
+          </a:lnRef>
+          <a:fillRef idx="1">
+            <a:schemeClr val="accent1"/>
+          </a:fillRef>
+          <a:effectRef idx="0">
+            <a:schemeClr val="accent1"/>
+          </a:effectRef>
+          <a:fontRef idx="minor">
+            <a:schemeClr val="lt1"/>
+          </a:fontRef>
+        </p:style>
+        <p:txBody>
+          <a:bodyPr rtlCol="0" anchor="ctr"/>
+          <a:lstStyle/>
+          <a:p>
+            <a:pPr algn="ctr"/>
+            <a:endParaRPr lang="en-US"/>
+          </a:p>
+        </p:txBody>
+      </p:sp>
+      <p:sp>
+        <p:nvSpPr>
+          <p:cNvPr id="3" name="Segnaposto contenuto 2">
+            <a:extLst>
+              <a:ext uri="{FF2B5EF4-FFF2-40B4-BE49-F238E27FC236}">
+                <a16:creationId xmlns:a16="http://schemas.microsoft.com/office/drawing/2014/main" id="{028A465B-70BA-60C7-1157-EA7D9D0834AD}"/>
+              </a:ext>
+            </a:extLst>
+          </p:cNvPr>
+          <p:cNvSpPr>
+            <a:spLocks noGrp="1"/>
+          </p:cNvSpPr>
+          <p:nvPr>
+            <p:ph idx="1"/>
+          </p:nvPr>
+        </p:nvSpPr>
+        <p:spPr>
+          <a:xfrm>
+            <a:off x="640080" y="2706624"/>
+            <a:ext cx="6894576" cy="3483864"/>
+          </a:xfrm>
+        </p:spPr>
+        <p:txBody>
+          <a:bodyPr>
+            <a:normAutofit/>
+          </a:bodyPr>
+          <a:lstStyle/>
+          <a:p>
+            <a:r>
+              <a:rPr lang="it-IT" sz="2200" dirty="0"/>
+              <a:t>Prototipazione mediante </a:t>
+            </a:r>
+            <a:r>
+              <a:rPr lang="it-IT" sz="2200" dirty="0" err="1"/>
+              <a:t>Figma</a:t>
+            </a:r>
+            <a:endParaRPr lang="it-IT" sz="2200" dirty="0"/>
+          </a:p>
+          <a:p>
+            <a:r>
+              <a:rPr lang="it-IT" sz="2200" dirty="0"/>
+              <a:t>Conversione in codice e creazione </a:t>
+            </a:r>
+            <a:r>
+              <a:rPr lang="it-IT" sz="2200" dirty="0" err="1"/>
+              <a:t>factory</a:t>
+            </a:r>
+            <a:br>
+              <a:rPr lang="it-IT" sz="2200" dirty="0"/>
+            </a:br>
+            <a:r>
+              <a:rPr lang="it-IT" sz="2200" dirty="0"/>
+              <a:t> per gli elementi</a:t>
+            </a:r>
+          </a:p>
+          <a:p>
+            <a:r>
+              <a:rPr lang="it-IT" sz="2200" dirty="0"/>
+              <a:t>Validate interfacce tramite focus group</a:t>
+            </a:r>
+          </a:p>
+          <a:p>
+            <a:r>
+              <a:rPr lang="it-IT" sz="2200" dirty="0"/>
+              <a:t>Interfaccia col database mediante </a:t>
+            </a:r>
+            <a:r>
+              <a:rPr lang="it-IT" sz="2200" dirty="0" err="1"/>
+              <a:t>ViewModel</a:t>
+            </a:r>
+            <a:r>
+              <a:rPr lang="it-IT" sz="2200" dirty="0"/>
+              <a:t> secondo il modello MVVM.</a:t>
+            </a:r>
+          </a:p>
+          <a:p>
+            <a:r>
+              <a:rPr lang="it-IT" sz="2200" dirty="0"/>
+              <a:t>Uso della </a:t>
+            </a:r>
+            <a:r>
+              <a:rPr lang="it-IT" sz="2200" dirty="0" err="1"/>
+              <a:t>Dependency</a:t>
+            </a:r>
+            <a:r>
+              <a:rPr lang="it-IT" sz="2200" dirty="0"/>
+              <a:t> Injection</a:t>
+            </a:r>
+          </a:p>
+        </p:txBody>
+      </p:sp>
+      <p:pic>
+        <p:nvPicPr>
+          <p:cNvPr id="10" name="Immagine 9">
+            <a:extLst>
+              <a:ext uri="{FF2B5EF4-FFF2-40B4-BE49-F238E27FC236}">
+                <a16:creationId xmlns:a16="http://schemas.microsoft.com/office/drawing/2014/main" id="{03E69A40-38B8-2E30-04F8-D1260EBD9923}"/>
+              </a:ext>
+            </a:extLst>
+          </p:cNvPr>
+          <p:cNvPicPr>
+            <a:picLocks noChangeAspect="1"/>
+          </p:cNvPicPr>
+          <p:nvPr/>
+        </p:nvPicPr>
+        <p:blipFill>
+          <a:blip r:embed="rId3">
+            <a:extLst>
+              <a:ext uri="{28A0092B-C50C-407E-A947-70E740481C1C}">
+                <a14:useLocalDpi xmlns:a14="http://schemas.microsoft.com/office/drawing/2010/main" val="0"/>
+              </a:ext>
+            </a:extLst>
+          </a:blip>
+          <a:stretch>
+            <a:fillRect/>
+          </a:stretch>
+        </p:blipFill>
+        <p:spPr>
+          <a:xfrm>
+            <a:off x="7863840" y="669299"/>
+            <a:ext cx="4014216" cy="2749737"/>
+          </a:xfrm>
+          <a:prstGeom prst="rect">
+            <a:avLst/>
+          </a:prstGeom>
+          <a:solidFill>
+            <a:srgbClr val="FFFFFF">
+              <a:shade val="85000"/>
+            </a:srgbClr>
+          </a:solidFill>
+          <a:scene3d>
+            <a:camera prst="orthographicFront"/>
+            <a:lightRig rig="twoPt" dir="t">
+              <a:rot lat="0" lon="0" rev="7800000"/>
+            </a:lightRig>
+          </a:scene3d>
+          <a:sp3d contourW="6350">
+            <a:bevelT w="50800" h="16510"/>
+            <a:contourClr>
+              <a:srgbClr val="C0C0C0"/>
+            </a:contourClr>
+          </a:sp3d>
+        </p:spPr>
+      </p:pic>
+      <p:pic>
+        <p:nvPicPr>
+          <p:cNvPr id="12" name="Immagine 11">
+            <a:extLst>
+              <a:ext uri="{FF2B5EF4-FFF2-40B4-BE49-F238E27FC236}">
+                <a16:creationId xmlns:a16="http://schemas.microsoft.com/office/drawing/2014/main" id="{C688FDB2-C48E-E346-3250-D6C52F26668E}"/>
+              </a:ext>
+            </a:extLst>
+          </p:cNvPr>
+          <p:cNvPicPr>
+            <a:picLocks noChangeAspect="1"/>
+          </p:cNvPicPr>
+          <p:nvPr/>
+        </p:nvPicPr>
+        <p:blipFill>
+          <a:blip r:embed="rId4">
+            <a:extLst>
+              <a:ext uri="{28A0092B-C50C-407E-A947-70E740481C1C}">
+                <a14:useLocalDpi xmlns:a14="http://schemas.microsoft.com/office/drawing/2010/main" val="0"/>
+              </a:ext>
+            </a:extLst>
+          </a:blip>
+          <a:stretch>
+            <a:fillRect/>
+          </a:stretch>
+        </p:blipFill>
+        <p:spPr>
+          <a:xfrm>
+            <a:off x="7863840" y="4358154"/>
+            <a:ext cx="3995928" cy="1618350"/>
+          </a:xfrm>
+          <a:prstGeom prst="rect">
+            <a:avLst/>
+          </a:prstGeom>
+          <a:solidFill>
+            <a:srgbClr val="FFFFFF">
+              <a:shade val="85000"/>
+            </a:srgbClr>
+          </a:solidFill>
+          <a:scene3d>
+            <a:camera prst="orthographicFront"/>
+            <a:lightRig rig="twoPt" dir="t">
+              <a:rot lat="0" lon="0" rev="7800000"/>
+            </a:lightRig>
+          </a:scene3d>
+          <a:sp3d contourW="6350">
+            <a:bevelT w="50800" h="16510"/>
+            <a:contourClr>
+              <a:srgbClr val="C0C0C0"/>
+            </a:contourClr>
+          </a:sp3d>
+        </p:spPr>
+      </p:pic>
     </p:spTree>
     <p:extLst>
       <p:ext uri="{BB962C8B-B14F-4D97-AF65-F5344CB8AC3E}">
-        <p14:creationId xmlns:p14="http://schemas.microsoft.com/office/powerpoint/2010/main" val="447819401"/>
+        <p14:creationId xmlns:p14="http://schemas.microsoft.com/office/powerpoint/2010/main" val="2317739954"/>
+      </p:ext>
+    </p:extLst>
+  </p:cSld>
+  <p:clrMapOvr>
+    <a:masterClrMapping/>
+  </p:clrMapOvr>
+</p:sld>
+</file>
+
+<file path=ppt/slides/slide11.xml><?xml version="1.0" encoding="utf-8"?>
+<p:sld xmlns:a="http://schemas.openxmlformats.org/drawingml/2006/main" xmlns:r="http://schemas.openxmlformats.org/officeDocument/2006/relationships" xmlns:p="http://schemas.openxmlformats.org/presentationml/2006/main">
+  <p:cSld>
+    <p:spTree>
+      <p:nvGrpSpPr>
+        <p:cNvPr id="1" name=""/>
+        <p:cNvGrpSpPr/>
+        <p:nvPr/>
+      </p:nvGrpSpPr>
+      <p:grpSpPr>
+        <a:xfrm>
+          <a:off x="0" y="0"/>
+          <a:ext cx="0" cy="0"/>
+          <a:chOff x="0" y="0"/>
+          <a:chExt cx="0" cy="0"/>
+        </a:xfrm>
+      </p:grpSpPr>
+      <p:sp>
+        <p:nvSpPr>
+          <p:cNvPr id="2" name="Titolo 1">
+            <a:extLst>
+              <a:ext uri="{FF2B5EF4-FFF2-40B4-BE49-F238E27FC236}">
+                <a16:creationId xmlns:a16="http://schemas.microsoft.com/office/drawing/2014/main" id="{AB262E07-1CD0-76F0-8D16-141342DF7749}"/>
+              </a:ext>
+            </a:extLst>
+          </p:cNvPr>
+          <p:cNvSpPr>
+            <a:spLocks noGrp="1"/>
+          </p:cNvSpPr>
+          <p:nvPr>
+            <p:ph type="title"/>
+          </p:nvPr>
+        </p:nvSpPr>
+        <p:spPr/>
+        <p:txBody>
+          <a:bodyPr/>
+          <a:lstStyle/>
+          <a:p>
+            <a:r>
+              <a:rPr lang="it-IT"/>
+              <a:t>Configuratore di prodotto</a:t>
+            </a:r>
+            <a:endParaRPr lang="it-IT" dirty="0"/>
+          </a:p>
+        </p:txBody>
+      </p:sp>
+      <p:pic>
+        <p:nvPicPr>
+          <p:cNvPr id="5" name="Segnaposto contenuto 4">
+            <a:extLst>
+              <a:ext uri="{FF2B5EF4-FFF2-40B4-BE49-F238E27FC236}">
+                <a16:creationId xmlns:a16="http://schemas.microsoft.com/office/drawing/2014/main" id="{94CEF3E8-5B8C-7B7C-0062-7F1F15EDFEEA}"/>
+              </a:ext>
+            </a:extLst>
+          </p:cNvPr>
+          <p:cNvPicPr>
+            <a:picLocks noGrp="1" noChangeAspect="1"/>
+          </p:cNvPicPr>
+          <p:nvPr>
+            <p:ph idx="1"/>
+          </p:nvPr>
+        </p:nvPicPr>
+        <p:blipFill>
+          <a:blip r:embed="rId2">
+            <a:extLst>
+              <a:ext uri="{28A0092B-C50C-407E-A947-70E740481C1C}">
+                <a14:useLocalDpi xmlns:a14="http://schemas.microsoft.com/office/drawing/2010/main" val="0"/>
+              </a:ext>
+            </a:extLst>
+          </a:blip>
+          <a:stretch>
+            <a:fillRect/>
+          </a:stretch>
+        </p:blipFill>
+        <p:spPr>
+          <a:xfrm>
+            <a:off x="978012" y="1825625"/>
+            <a:ext cx="10235976" cy="4351338"/>
+          </a:xfrm>
+          <a:prstGeom prst="rect">
+            <a:avLst/>
+          </a:prstGeom>
+        </p:spPr>
+      </p:pic>
+    </p:spTree>
+    <p:extLst>
+      <p:ext uri="{BB962C8B-B14F-4D97-AF65-F5344CB8AC3E}">
+        <p14:creationId xmlns:p14="http://schemas.microsoft.com/office/powerpoint/2010/main" val="147102395"/>
+      </p:ext>
+    </p:extLst>
+  </p:cSld>
+  <p:clrMapOvr>
+    <a:masterClrMapping/>
+  </p:clrMapOvr>
+</p:sld>
+</file>
+
+<file path=ppt/slides/slide12.xml><?xml version="1.0" encoding="utf-8"?>
+<p:sld xmlns:a="http://schemas.openxmlformats.org/drawingml/2006/main" xmlns:r="http://schemas.openxmlformats.org/officeDocument/2006/relationships" xmlns:p="http://schemas.openxmlformats.org/presentationml/2006/main">
+  <p:cSld>
+    <p:spTree>
+      <p:nvGrpSpPr>
+        <p:cNvPr id="1" name=""/>
+        <p:cNvGrpSpPr/>
+        <p:nvPr/>
+      </p:nvGrpSpPr>
+      <p:grpSpPr>
+        <a:xfrm>
+          <a:off x="0" y="0"/>
+          <a:ext cx="0" cy="0"/>
+          <a:chOff x="0" y="0"/>
+          <a:chExt cx="0" cy="0"/>
+        </a:xfrm>
+      </p:grpSpPr>
+      <p:sp>
+        <p:nvSpPr>
+          <p:cNvPr id="2" name="Titolo 1">
+            <a:extLst>
+              <a:ext uri="{FF2B5EF4-FFF2-40B4-BE49-F238E27FC236}">
+                <a16:creationId xmlns:a16="http://schemas.microsoft.com/office/drawing/2014/main" id="{AC63E6F6-3E3E-E03F-50E5-B6E0843A35C8}"/>
+              </a:ext>
+            </a:extLst>
+          </p:cNvPr>
+          <p:cNvSpPr>
+            <a:spLocks noGrp="1"/>
+          </p:cNvSpPr>
+          <p:nvPr>
+            <p:ph type="title"/>
+          </p:nvPr>
+        </p:nvSpPr>
+        <p:spPr/>
+        <p:txBody>
+          <a:bodyPr/>
+          <a:lstStyle/>
+          <a:p>
+            <a:pPr algn="ctr"/>
+            <a:r>
+              <a:rPr lang="it-IT" dirty="0"/>
+              <a:t>Conclusione</a:t>
+            </a:r>
+          </a:p>
+        </p:txBody>
+      </p:sp>
+      <p:sp>
+        <p:nvSpPr>
+          <p:cNvPr id="3" name="Segnaposto contenuto 2">
+            <a:extLst>
+              <a:ext uri="{FF2B5EF4-FFF2-40B4-BE49-F238E27FC236}">
+                <a16:creationId xmlns:a16="http://schemas.microsoft.com/office/drawing/2014/main" id="{5BEAC260-308F-28C3-73FE-00DA911FFA9A}"/>
+              </a:ext>
+            </a:extLst>
+          </p:cNvPr>
+          <p:cNvSpPr>
+            <a:spLocks noGrp="1"/>
+          </p:cNvSpPr>
+          <p:nvPr>
+            <p:ph idx="1"/>
+          </p:nvPr>
+        </p:nvSpPr>
+        <p:spPr/>
+        <p:txBody>
+          <a:bodyPr/>
+          <a:lstStyle/>
+          <a:p>
+            <a:endParaRPr lang="it-IT" dirty="0"/>
+          </a:p>
+        </p:txBody>
+      </p:sp>
+    </p:spTree>
+    <p:extLst>
+      <p:ext uri="{BB962C8B-B14F-4D97-AF65-F5344CB8AC3E}">
+        <p14:creationId xmlns:p14="http://schemas.microsoft.com/office/powerpoint/2010/main" val="3010895147"/>
+      </p:ext>
+    </p:extLst>
+  </p:cSld>
+  <p:clrMapOvr>
+    <a:masterClrMapping/>
+  </p:clrMapOvr>
+</p:sld>
+</file>
+
+<file path=ppt/slides/slide2.xml><?xml version="1.0" encoding="utf-8"?>
+<p:sld xmlns:a="http://schemas.openxmlformats.org/drawingml/2006/main" xmlns:r="http://schemas.openxmlformats.org/officeDocument/2006/relationships" xmlns:p="http://schemas.openxmlformats.org/presentationml/2006/main">
+  <p:cSld>
+    <p:bg>
+      <p:bgPr>
+        <a:solidFill>
+          <a:schemeClr val="bg1"/>
+        </a:solidFill>
+        <a:effectLst/>
+      </p:bgPr>
+    </p:bg>
+    <p:spTree>
+      <p:nvGrpSpPr>
+        <p:cNvPr id="1" name="">
+          <a:extLst>
+            <a:ext uri="{FF2B5EF4-FFF2-40B4-BE49-F238E27FC236}">
+              <a16:creationId xmlns:a16="http://schemas.microsoft.com/office/drawing/2014/main" id="{B46E4288-F842-4AE0-A807-7E16E30F8738}"/>
+            </a:ext>
+          </a:extLst>
+        </p:cNvPr>
+        <p:cNvGrpSpPr/>
+        <p:nvPr/>
+      </p:nvGrpSpPr>
+      <p:grpSpPr>
+        <a:xfrm>
+          <a:off x="0" y="0"/>
+          <a:ext cx="0" cy="0"/>
+          <a:chOff x="0" y="0"/>
+          <a:chExt cx="0" cy="0"/>
+        </a:xfrm>
+      </p:grpSpPr>
+      <p:sp useBgFill="1">
+        <p:nvSpPr>
+          <p:cNvPr id="12" name="Rectangle 11">
+            <a:extLst>
+              <a:ext uri="{FF2B5EF4-FFF2-40B4-BE49-F238E27FC236}">
+                <a16:creationId xmlns:a16="http://schemas.microsoft.com/office/drawing/2014/main" id="{2C61293E-6EBE-43EF-A52C-9BEBFD7679D4}"/>
+              </a:ext>
+              <a:ext uri="{C183D7F6-B498-43B3-948B-1728B52AA6E4}">
+                <adec:decorative xmlns:adec="http://schemas.microsoft.com/office/drawing/2017/decorative" val="1"/>
+              </a:ext>
+            </a:extLst>
+          </p:cNvPr>
+          <p:cNvSpPr>
+            <a:spLocks noGrp="1" noRot="1" noChangeAspect="1" noMove="1" noResize="1" noEditPoints="1" noAdjustHandles="1" noChangeArrowheads="1" noChangeShapeType="1" noTextEdit="1"/>
+          </p:cNvSpPr>
+          <p:nvPr>
+            <p:extLst>
+              <p:ext uri="{386F3935-93C4-4BCD-93E2-E3B085C9AB24}">
+                <p16:designElem xmlns:p16="http://schemas.microsoft.com/office/powerpoint/2015/main" val="1"/>
+              </p:ext>
+            </p:extLst>
+          </p:nvPr>
+        </p:nvSpPr>
+        <p:spPr>
+          <a:xfrm>
+            <a:off x="0" y="0"/>
+            <a:ext cx="12188952" cy="6858000"/>
+          </a:xfrm>
+          <a:prstGeom prst="rect">
+            <a:avLst/>
+          </a:prstGeom>
+          <a:ln>
+            <a:noFill/>
+          </a:ln>
+        </p:spPr>
+        <p:style>
+          <a:lnRef idx="2">
+            <a:schemeClr val="accent1">
+              <a:shade val="50000"/>
+            </a:schemeClr>
+          </a:lnRef>
+          <a:fillRef idx="1">
+            <a:schemeClr val="accent1"/>
+          </a:fillRef>
+          <a:effectRef idx="0">
+            <a:schemeClr val="accent1"/>
+          </a:effectRef>
+          <a:fontRef idx="minor">
+            <a:schemeClr val="lt1"/>
+          </a:fontRef>
+        </p:style>
+        <p:txBody>
+          <a:bodyPr rtlCol="0" anchor="ctr"/>
+          <a:lstStyle/>
+          <a:p>
+            <a:pPr algn="ctr"/>
+            <a:endParaRPr lang="en-US"/>
+          </a:p>
+        </p:txBody>
+      </p:sp>
+      <p:sp>
+        <p:nvSpPr>
+          <p:cNvPr id="7" name="Titolo 6">
+            <a:extLst>
+              <a:ext uri="{FF2B5EF4-FFF2-40B4-BE49-F238E27FC236}">
+                <a16:creationId xmlns:a16="http://schemas.microsoft.com/office/drawing/2014/main" id="{666B2835-0269-32DC-36EF-334E57A0A7F8}"/>
+              </a:ext>
+            </a:extLst>
+          </p:cNvPr>
+          <p:cNvSpPr>
+            <a:spLocks noGrp="1"/>
+          </p:cNvSpPr>
+          <p:nvPr>
+            <p:ph type="title"/>
+          </p:nvPr>
+        </p:nvSpPr>
+        <p:spPr>
+          <a:xfrm>
+            <a:off x="5297762" y="329184"/>
+            <a:ext cx="6251110" cy="1783080"/>
+          </a:xfrm>
+        </p:spPr>
+        <p:txBody>
+          <a:bodyPr anchor="b">
+            <a:normAutofit/>
+          </a:bodyPr>
+          <a:lstStyle/>
+          <a:p>
+            <a:r>
+              <a:rPr lang="it-IT" sz="5400" dirty="0"/>
+              <a:t>Contesto di lavoro</a:t>
+            </a:r>
+          </a:p>
+        </p:txBody>
+      </p:sp>
+      <p:pic>
+        <p:nvPicPr>
+          <p:cNvPr id="2" name="Immagine 1">
+            <a:extLst>
+              <a:ext uri="{FF2B5EF4-FFF2-40B4-BE49-F238E27FC236}">
+                <a16:creationId xmlns:a16="http://schemas.microsoft.com/office/drawing/2014/main" id="{463E716C-0283-EE04-3345-11BB1F568BF5}"/>
+              </a:ext>
+            </a:extLst>
+          </p:cNvPr>
+          <p:cNvPicPr>
+            <a:picLocks noChangeAspect="1"/>
+          </p:cNvPicPr>
+          <p:nvPr/>
+        </p:nvPicPr>
+        <p:blipFill>
+          <a:blip r:embed="rId3"/>
+          <a:srcRect r="-1" b="3550"/>
+          <a:stretch>
+            <a:fillRect/>
+          </a:stretch>
+        </p:blipFill>
+        <p:spPr>
+          <a:xfrm>
+            <a:off x="1" y="10"/>
+            <a:ext cx="4657344" cy="6857990"/>
+          </a:xfrm>
+          <a:custGeom>
+            <a:avLst/>
+            <a:gdLst/>
+            <a:ahLst/>
+            <a:cxnLst/>
+            <a:rect l="l" t="t" r="r" b="b"/>
+            <a:pathLst>
+              <a:path w="4657344" h="6858000">
+                <a:moveTo>
+                  <a:pt x="0" y="0"/>
+                </a:moveTo>
+                <a:lnTo>
+                  <a:pt x="3429755" y="0"/>
+                </a:lnTo>
+                <a:lnTo>
+                  <a:pt x="3526016" y="148742"/>
+                </a:lnTo>
+                <a:cubicBezTo>
+                  <a:pt x="3657740" y="365513"/>
+                  <a:pt x="3777402" y="589569"/>
+                  <a:pt x="3886489" y="819975"/>
+                </a:cubicBezTo>
+                <a:cubicBezTo>
+                  <a:pt x="3891856" y="833492"/>
+                  <a:pt x="3900663" y="845393"/>
+                  <a:pt x="3912049" y="854514"/>
+                </a:cubicBezTo>
+                <a:cubicBezTo>
+                  <a:pt x="3897352" y="819849"/>
+                  <a:pt x="3883037" y="784928"/>
+                  <a:pt x="3868083" y="750263"/>
+                </a:cubicBezTo>
+                <a:cubicBezTo>
+                  <a:pt x="3806989" y="608712"/>
+                  <a:pt x="3742478" y="469145"/>
+                  <a:pt x="3674155" y="331786"/>
+                </a:cubicBezTo>
+                <a:lnTo>
+                  <a:pt x="3496656" y="0"/>
+                </a:lnTo>
+                <a:lnTo>
+                  <a:pt x="3554371" y="0"/>
+                </a:lnTo>
+                <a:lnTo>
+                  <a:pt x="3661621" y="196614"/>
+                </a:lnTo>
+                <a:cubicBezTo>
+                  <a:pt x="3856899" y="573253"/>
+                  <a:pt x="4021071" y="966066"/>
+                  <a:pt x="4161279" y="1371196"/>
+                </a:cubicBezTo>
+                <a:cubicBezTo>
+                  <a:pt x="4379525" y="2007265"/>
+                  <a:pt x="4530141" y="2664286"/>
+                  <a:pt x="4610660" y="3331516"/>
+                </a:cubicBezTo>
+                <a:cubicBezTo>
+                  <a:pt x="4652837" y="3672965"/>
+                  <a:pt x="4671625" y="4013908"/>
+                  <a:pt x="4645040" y="4357388"/>
+                </a:cubicBezTo>
+                <a:cubicBezTo>
+                  <a:pt x="4613599" y="4758899"/>
+                  <a:pt x="4566181" y="5157998"/>
+                  <a:pt x="4485789" y="5552906"/>
+                </a:cubicBezTo>
+                <a:cubicBezTo>
+                  <a:pt x="4397121" y="5988893"/>
+                  <a:pt x="4276748" y="6414594"/>
+                  <a:pt x="4117769" y="6828295"/>
+                </a:cubicBezTo>
+                <a:lnTo>
+                  <a:pt x="4105288" y="6858000"/>
+                </a:lnTo>
+                <a:lnTo>
+                  <a:pt x="4052520" y="6858000"/>
+                </a:lnTo>
+                <a:lnTo>
+                  <a:pt x="4059369" y="6841549"/>
+                </a:lnTo>
+                <a:cubicBezTo>
+                  <a:pt x="4147276" y="6614016"/>
+                  <a:pt x="4224193" y="6380817"/>
+                  <a:pt x="4291518" y="6142729"/>
+                </a:cubicBezTo>
+                <a:cubicBezTo>
+                  <a:pt x="4350055" y="5935370"/>
+                  <a:pt x="4393256" y="5723695"/>
+                  <a:pt x="4443357" y="5513923"/>
+                </a:cubicBezTo>
+                <a:cubicBezTo>
+                  <a:pt x="4444541" y="5502788"/>
+                  <a:pt x="4445137" y="5491601"/>
+                  <a:pt x="4445146" y="5480401"/>
+                </a:cubicBezTo>
+                <a:cubicBezTo>
+                  <a:pt x="4408465" y="5607635"/>
+                  <a:pt x="4379196" y="5719759"/>
+                  <a:pt x="4344559" y="5830359"/>
+                </a:cubicBezTo>
+                <a:cubicBezTo>
+                  <a:pt x="4254261" y="6118381"/>
+                  <a:pt x="4150112" y="6398531"/>
+                  <a:pt x="4031702" y="6670527"/>
+                </a:cubicBezTo>
+                <a:lnTo>
+                  <a:pt x="3943824" y="6858000"/>
+                </a:lnTo>
+                <a:lnTo>
+                  <a:pt x="0" y="6858000"/>
+                </a:lnTo>
+                <a:close/>
+              </a:path>
+            </a:pathLst>
+          </a:custGeom>
+        </p:spPr>
+      </p:pic>
+      <p:sp>
+        <p:nvSpPr>
+          <p:cNvPr id="14" name="sketchy line">
+            <a:extLst>
+              <a:ext uri="{FF2B5EF4-FFF2-40B4-BE49-F238E27FC236}">
+                <a16:creationId xmlns:a16="http://schemas.microsoft.com/office/drawing/2014/main" id="{21540236-BFD5-4A9D-8840-4703E7F76825}"/>
+              </a:ext>
+              <a:ext uri="{C183D7F6-B498-43B3-948B-1728B52AA6E4}">
+                <adec:decorative xmlns:adec="http://schemas.microsoft.com/office/drawing/2017/decorative" val="1"/>
+              </a:ext>
+            </a:extLst>
+          </p:cNvPr>
+          <p:cNvSpPr>
+            <a:spLocks noGrp="1" noRot="1" noChangeAspect="1" noMove="1" noResize="1" noEditPoints="1" noAdjustHandles="1" noChangeArrowheads="1" noChangeShapeType="1" noTextEdit="1"/>
+          </p:cNvSpPr>
+          <p:nvPr>
+            <p:extLst>
+              <p:ext uri="{386F3935-93C4-4BCD-93E2-E3B085C9AB24}">
+                <p16:designElem xmlns:p16="http://schemas.microsoft.com/office/powerpoint/2015/main" val="1"/>
+              </p:ext>
+            </p:extLst>
+          </p:nvPr>
+        </p:nvSpPr>
+        <p:spPr>
+          <a:xfrm>
+            <a:off x="5297762" y="2374947"/>
+            <a:ext cx="4243589" cy="18288"/>
+          </a:xfrm>
+          <a:custGeom>
+            <a:avLst/>
+            <a:gdLst>
+              <a:gd name="csX0" fmla="*/ 0 w 4243589"/>
+              <a:gd name="csY0" fmla="*/ 0 h 18288"/>
+              <a:gd name="csX1" fmla="*/ 478919 w 4243589"/>
+              <a:gd name="csY1" fmla="*/ 0 h 18288"/>
+              <a:gd name="csX2" fmla="*/ 957839 w 4243589"/>
+              <a:gd name="csY2" fmla="*/ 0 h 18288"/>
+              <a:gd name="csX3" fmla="*/ 1521630 w 4243589"/>
+              <a:gd name="csY3" fmla="*/ 0 h 18288"/>
+              <a:gd name="csX4" fmla="*/ 2212729 w 4243589"/>
+              <a:gd name="csY4" fmla="*/ 0 h 18288"/>
+              <a:gd name="csX5" fmla="*/ 2734084 w 4243589"/>
+              <a:gd name="csY5" fmla="*/ 0 h 18288"/>
+              <a:gd name="csX6" fmla="*/ 3255439 w 4243589"/>
+              <a:gd name="csY6" fmla="*/ 0 h 18288"/>
+              <a:gd name="csX7" fmla="*/ 4243589 w 4243589"/>
+              <a:gd name="csY7" fmla="*/ 0 h 18288"/>
+              <a:gd name="csX8" fmla="*/ 4243589 w 4243589"/>
+              <a:gd name="csY8" fmla="*/ 18288 h 18288"/>
+              <a:gd name="csX9" fmla="*/ 3594926 w 4243589"/>
+              <a:gd name="csY9" fmla="*/ 18288 h 18288"/>
+              <a:gd name="csX10" fmla="*/ 3073571 w 4243589"/>
+              <a:gd name="csY10" fmla="*/ 18288 h 18288"/>
+              <a:gd name="csX11" fmla="*/ 2552216 w 4243589"/>
+              <a:gd name="csY11" fmla="*/ 18288 h 18288"/>
+              <a:gd name="csX12" fmla="*/ 1903553 w 4243589"/>
+              <a:gd name="csY12" fmla="*/ 18288 h 18288"/>
+              <a:gd name="csX13" fmla="*/ 1212454 w 4243589"/>
+              <a:gd name="csY13" fmla="*/ 18288 h 18288"/>
+              <a:gd name="csX14" fmla="*/ 733535 w 4243589"/>
+              <a:gd name="csY14" fmla="*/ 18288 h 18288"/>
+              <a:gd name="csX15" fmla="*/ 0 w 4243589"/>
+              <a:gd name="csY15" fmla="*/ 18288 h 18288"/>
+              <a:gd name="csX16" fmla="*/ 0 w 4243589"/>
+              <a:gd name="csY16" fmla="*/ 0 h 18288"/>
+            </a:gdLst>
+            <a:ahLst/>
+            <a:cxnLst>
+              <a:cxn ang="0">
+                <a:pos x="csX0" y="csY0"/>
+              </a:cxn>
+              <a:cxn ang="0">
+                <a:pos x="csX1" y="csY1"/>
+              </a:cxn>
+              <a:cxn ang="0">
+                <a:pos x="csX2" y="csY2"/>
+              </a:cxn>
+              <a:cxn ang="0">
+                <a:pos x="csX3" y="csY3"/>
+              </a:cxn>
+              <a:cxn ang="0">
+                <a:pos x="csX4" y="csY4"/>
+              </a:cxn>
+              <a:cxn ang="0">
+                <a:pos x="csX5" y="csY5"/>
+              </a:cxn>
+              <a:cxn ang="0">
+                <a:pos x="csX6" y="csY6"/>
+              </a:cxn>
+              <a:cxn ang="0">
+                <a:pos x="csX7" y="csY7"/>
+              </a:cxn>
+              <a:cxn ang="0">
+                <a:pos x="csX8" y="csY8"/>
+              </a:cxn>
+              <a:cxn ang="0">
+                <a:pos x="csX9" y="csY9"/>
+              </a:cxn>
+              <a:cxn ang="0">
+                <a:pos x="csX10" y="csY10"/>
+              </a:cxn>
+              <a:cxn ang="0">
+                <a:pos x="csX11" y="csY11"/>
+              </a:cxn>
+              <a:cxn ang="0">
+                <a:pos x="csX12" y="csY12"/>
+              </a:cxn>
+              <a:cxn ang="0">
+                <a:pos x="csX13" y="csY13"/>
+              </a:cxn>
+              <a:cxn ang="0">
+                <a:pos x="csX14" y="csY14"/>
+              </a:cxn>
+              <a:cxn ang="0">
+                <a:pos x="csX15" y="csY15"/>
+              </a:cxn>
+              <a:cxn ang="0">
+                <a:pos x="csX16" y="csY16"/>
+              </a:cxn>
+            </a:cxnLst>
+            <a:rect l="l" t="t" r="r" b="b"/>
+            <a:pathLst>
+              <a:path w="4243589" h="18288" fill="none" extrusionOk="0">
+                <a:moveTo>
+                  <a:pt x="0" y="0"/>
+                </a:moveTo>
+                <a:cubicBezTo>
+                  <a:pt x="213395" y="-21006"/>
+                  <a:pt x="307421" y="-18116"/>
+                  <a:pt x="478919" y="0"/>
+                </a:cubicBezTo>
+                <a:cubicBezTo>
+                  <a:pt x="650417" y="18116"/>
+                  <a:pt x="831092" y="-21237"/>
+                  <a:pt x="957839" y="0"/>
+                </a:cubicBezTo>
+                <a:cubicBezTo>
+                  <a:pt x="1084586" y="21237"/>
+                  <a:pt x="1301682" y="25124"/>
+                  <a:pt x="1521630" y="0"/>
+                </a:cubicBezTo>
+                <a:cubicBezTo>
+                  <a:pt x="1741578" y="-25124"/>
+                  <a:pt x="1970269" y="-29139"/>
+                  <a:pt x="2212729" y="0"/>
+                </a:cubicBezTo>
+                <a:cubicBezTo>
+                  <a:pt x="2455189" y="29139"/>
+                  <a:pt x="2558847" y="-4796"/>
+                  <a:pt x="2734084" y="0"/>
+                </a:cubicBezTo>
+                <a:cubicBezTo>
+                  <a:pt x="2909321" y="4796"/>
+                  <a:pt x="3097217" y="-13409"/>
+                  <a:pt x="3255439" y="0"/>
+                </a:cubicBezTo>
+                <a:cubicBezTo>
+                  <a:pt x="3413662" y="13409"/>
+                  <a:pt x="3979999" y="-10121"/>
+                  <a:pt x="4243589" y="0"/>
+                </a:cubicBezTo>
+                <a:cubicBezTo>
+                  <a:pt x="4244484" y="8974"/>
+                  <a:pt x="4243043" y="9359"/>
+                  <a:pt x="4243589" y="18288"/>
+                </a:cubicBezTo>
+                <a:cubicBezTo>
+                  <a:pt x="4058777" y="31246"/>
+                  <a:pt x="3910348" y="3158"/>
+                  <a:pt x="3594926" y="18288"/>
+                </a:cubicBezTo>
+                <a:cubicBezTo>
+                  <a:pt x="3279504" y="33418"/>
+                  <a:pt x="3319955" y="-3977"/>
+                  <a:pt x="3073571" y="18288"/>
+                </a:cubicBezTo>
+                <a:cubicBezTo>
+                  <a:pt x="2827187" y="40553"/>
+                  <a:pt x="2767387" y="1863"/>
+                  <a:pt x="2552216" y="18288"/>
+                </a:cubicBezTo>
+                <a:cubicBezTo>
+                  <a:pt x="2337046" y="34713"/>
+                  <a:pt x="2181871" y="19527"/>
+                  <a:pt x="1903553" y="18288"/>
+                </a:cubicBezTo>
+                <a:cubicBezTo>
+                  <a:pt x="1625235" y="17049"/>
+                  <a:pt x="1557672" y="24174"/>
+                  <a:pt x="1212454" y="18288"/>
+                </a:cubicBezTo>
+                <a:cubicBezTo>
+                  <a:pt x="867236" y="12402"/>
+                  <a:pt x="874382" y="15627"/>
+                  <a:pt x="733535" y="18288"/>
+                </a:cubicBezTo>
+                <a:cubicBezTo>
+                  <a:pt x="592688" y="20949"/>
+                  <a:pt x="183477" y="14753"/>
+                  <a:pt x="0" y="18288"/>
+                </a:cubicBezTo>
+                <a:cubicBezTo>
+                  <a:pt x="-229" y="14222"/>
+                  <a:pt x="509" y="5816"/>
+                  <a:pt x="0" y="0"/>
+                </a:cubicBezTo>
+                <a:close/>
+              </a:path>
+              <a:path w="4243589" h="18288" stroke="0" extrusionOk="0">
+                <a:moveTo>
+                  <a:pt x="0" y="0"/>
+                </a:moveTo>
+                <a:cubicBezTo>
+                  <a:pt x="143690" y="16630"/>
+                  <a:pt x="266667" y="14847"/>
+                  <a:pt x="521355" y="0"/>
+                </a:cubicBezTo>
+                <a:cubicBezTo>
+                  <a:pt x="776043" y="-14847"/>
+                  <a:pt x="814491" y="-17363"/>
+                  <a:pt x="1000275" y="0"/>
+                </a:cubicBezTo>
+                <a:cubicBezTo>
+                  <a:pt x="1186059" y="17363"/>
+                  <a:pt x="1352504" y="-23507"/>
+                  <a:pt x="1521630" y="0"/>
+                </a:cubicBezTo>
+                <a:cubicBezTo>
+                  <a:pt x="1690756" y="23507"/>
+                  <a:pt x="1889525" y="5871"/>
+                  <a:pt x="2127857" y="0"/>
+                </a:cubicBezTo>
+                <a:cubicBezTo>
+                  <a:pt x="2366189" y="-5871"/>
+                  <a:pt x="2620628" y="-27997"/>
+                  <a:pt x="2776520" y="0"/>
+                </a:cubicBezTo>
+                <a:cubicBezTo>
+                  <a:pt x="2932412" y="27997"/>
+                  <a:pt x="3131683" y="-25073"/>
+                  <a:pt x="3467618" y="0"/>
+                </a:cubicBezTo>
+                <a:cubicBezTo>
+                  <a:pt x="3803553" y="25073"/>
+                  <a:pt x="4017371" y="3071"/>
+                  <a:pt x="4243589" y="0"/>
+                </a:cubicBezTo>
+                <a:cubicBezTo>
+                  <a:pt x="4243134" y="6162"/>
+                  <a:pt x="4243492" y="11775"/>
+                  <a:pt x="4243589" y="18288"/>
+                </a:cubicBezTo>
+                <a:cubicBezTo>
+                  <a:pt x="4017834" y="-5779"/>
+                  <a:pt x="3834586" y="13376"/>
+                  <a:pt x="3594926" y="18288"/>
+                </a:cubicBezTo>
+                <a:cubicBezTo>
+                  <a:pt x="3355266" y="23200"/>
+                  <a:pt x="3204179" y="2869"/>
+                  <a:pt x="2903827" y="18288"/>
+                </a:cubicBezTo>
+                <a:cubicBezTo>
+                  <a:pt x="2603475" y="33707"/>
+                  <a:pt x="2526187" y="46187"/>
+                  <a:pt x="2212729" y="18288"/>
+                </a:cubicBezTo>
+                <a:cubicBezTo>
+                  <a:pt x="1899271" y="-9611"/>
+                  <a:pt x="1966289" y="29692"/>
+                  <a:pt x="1733809" y="18288"/>
+                </a:cubicBezTo>
+                <a:cubicBezTo>
+                  <a:pt x="1501329" y="6884"/>
+                  <a:pt x="1343612" y="12492"/>
+                  <a:pt x="1085146" y="18288"/>
+                </a:cubicBezTo>
+                <a:cubicBezTo>
+                  <a:pt x="826680" y="24084"/>
+                  <a:pt x="778184" y="35607"/>
+                  <a:pt x="521355" y="18288"/>
+                </a:cubicBezTo>
+                <a:cubicBezTo>
+                  <a:pt x="264526" y="969"/>
+                  <a:pt x="120277" y="4268"/>
+                  <a:pt x="0" y="18288"/>
+                </a:cubicBezTo>
+                <a:cubicBezTo>
+                  <a:pt x="766" y="10800"/>
+                  <a:pt x="-457" y="8180"/>
+                  <a:pt x="0" y="0"/>
+                </a:cubicBezTo>
+                <a:close/>
+              </a:path>
+            </a:pathLst>
+          </a:custGeom>
+          <a:solidFill>
+            <a:schemeClr val="accent2"/>
+          </a:solidFill>
+          <a:ln w="44450" cap="rnd">
+            <a:solidFill>
+              <a:schemeClr val="accent2"/>
+            </a:solidFill>
+            <a:round/>
+            <a:extLst>
+              <a:ext uri="{C807C97D-BFC1-408E-A445-0C87EB9F89A2}">
+                <ask:lineSketchStyleProps xmlns:ask="http://schemas.microsoft.com/office/drawing/2018/sketchyshapes" sd="2727557108">
+                  <a:prstGeom prst="rect">
+                    <a:avLst/>
+                  </a:prstGeom>
+                  <ask:type>
+                    <ask:lineSketchFreehand/>
+                  </ask:type>
+                </ask:lineSketchStyleProps>
+              </a:ext>
+            </a:extLst>
+          </a:ln>
+        </p:spPr>
+        <p:style>
+          <a:lnRef idx="2">
+            <a:schemeClr val="accent1">
+              <a:shade val="50000"/>
+            </a:schemeClr>
+          </a:lnRef>
+          <a:fillRef idx="1">
+            <a:schemeClr val="accent1"/>
+          </a:fillRef>
+          <a:effectRef idx="0">
+            <a:schemeClr val="accent1"/>
+          </a:effectRef>
+          <a:fontRef idx="minor">
+            <a:schemeClr val="lt1"/>
+          </a:fontRef>
+        </p:style>
+        <p:txBody>
+          <a:bodyPr rtlCol="0" anchor="ctr"/>
+          <a:lstStyle/>
+          <a:p>
+            <a:pPr algn="ctr"/>
+            <a:endParaRPr lang="en-US"/>
+          </a:p>
+        </p:txBody>
+      </p:sp>
+      <p:sp>
+        <p:nvSpPr>
+          <p:cNvPr id="3" name="Segnaposto contenuto 2">
+            <a:extLst>
+              <a:ext uri="{FF2B5EF4-FFF2-40B4-BE49-F238E27FC236}">
+                <a16:creationId xmlns:a16="http://schemas.microsoft.com/office/drawing/2014/main" id="{808940F7-3D25-439E-2C90-3B565EC232FE}"/>
+              </a:ext>
+            </a:extLst>
+          </p:cNvPr>
+          <p:cNvSpPr>
+            <a:spLocks noGrp="1"/>
+          </p:cNvSpPr>
+          <p:nvPr>
+            <p:ph idx="1"/>
+          </p:nvPr>
+        </p:nvSpPr>
+        <p:spPr>
+          <a:xfrm>
+            <a:off x="5297762" y="2706624"/>
+            <a:ext cx="6251110" cy="3483864"/>
+          </a:xfrm>
+        </p:spPr>
+        <p:txBody>
+          <a:bodyPr>
+            <a:normAutofit/>
+          </a:bodyPr>
+          <a:lstStyle/>
+          <a:p>
+            <a:r>
+              <a:rPr lang="it-IT" sz="2200" dirty="0"/>
+              <a:t>Richiedente: azienda </a:t>
+            </a:r>
+            <a:r>
+              <a:rPr lang="it-IT" sz="2200"/>
+              <a:t>Cepi.s.p.a</a:t>
+            </a:r>
+            <a:r>
+              <a:rPr lang="it-IT" sz="2200" dirty="0"/>
+              <a:t>.</a:t>
+            </a:r>
+          </a:p>
+          <a:p>
+            <a:r>
+              <a:rPr lang="it-IT" sz="2200" dirty="0"/>
+              <a:t>Situazione: azienda in espansione con un fatturato in crescita</a:t>
+            </a:r>
+          </a:p>
+          <a:p>
+            <a:r>
+              <a:rPr lang="it-IT" sz="2200" dirty="0"/>
+              <a:t>Reparto interessato al progetto: Reparto vendite</a:t>
+            </a:r>
+          </a:p>
+          <a:p>
+            <a:r>
+              <a:rPr lang="it-IT" sz="2200" dirty="0"/>
+              <a:t>Attuale tecnologia utilizzata: Database Access implementato ~30 anni fa.</a:t>
+            </a:r>
+          </a:p>
+          <a:p>
+            <a:r>
+              <a:rPr lang="it-IT" sz="2200" dirty="0"/>
+              <a:t>Attuale fase aziendale: l’azienda è in un momento di riorganizzazione dei flussi e programmi informativi</a:t>
+            </a:r>
+          </a:p>
+        </p:txBody>
+      </p:sp>
+    </p:spTree>
+    <p:extLst>
+      <p:ext uri="{BB962C8B-B14F-4D97-AF65-F5344CB8AC3E}">
+        <p14:creationId xmlns:p14="http://schemas.microsoft.com/office/powerpoint/2010/main" val="466100760"/>
+      </p:ext>
+    </p:extLst>
+  </p:cSld>
+  <p:clrMapOvr>
+    <a:masterClrMapping/>
+  </p:clrMapOvr>
+</p:sld>
+</file>
+
+<file path=ppt/slides/slide3.xml><?xml version="1.0" encoding="utf-8"?>
+<p:sld xmlns:a="http://schemas.openxmlformats.org/drawingml/2006/main" xmlns:r="http://schemas.openxmlformats.org/officeDocument/2006/relationships" xmlns:p="http://schemas.openxmlformats.org/presentationml/2006/main">
+  <p:cSld>
+    <p:bg>
+      <p:bgPr>
+        <a:solidFill>
+          <a:schemeClr val="bg1"/>
+        </a:solidFill>
+        <a:effectLst/>
+      </p:bgPr>
+    </p:bg>
+    <p:spTree>
+      <p:nvGrpSpPr>
+        <p:cNvPr id="1" name=""/>
+        <p:cNvGrpSpPr/>
+        <p:nvPr/>
+      </p:nvGrpSpPr>
+      <p:grpSpPr>
+        <a:xfrm>
+          <a:off x="0" y="0"/>
+          <a:ext cx="0" cy="0"/>
+          <a:chOff x="0" y="0"/>
+          <a:chExt cx="0" cy="0"/>
+        </a:xfrm>
+      </p:grpSpPr>
+      <p:sp useBgFill="1">
+        <p:nvSpPr>
+          <p:cNvPr id="10" name="Rectangle 9">
+            <a:extLst>
+              <a:ext uri="{FF2B5EF4-FFF2-40B4-BE49-F238E27FC236}">
+                <a16:creationId xmlns:a16="http://schemas.microsoft.com/office/drawing/2014/main" id="{45D37F4E-DDB4-456B-97E0-9937730A039F}"/>
+              </a:ext>
+              <a:ext uri="{C183D7F6-B498-43B3-948B-1728B52AA6E4}">
+                <adec:decorative xmlns:adec="http://schemas.microsoft.com/office/drawing/2017/decorative" val="1"/>
+              </a:ext>
+            </a:extLst>
+          </p:cNvPr>
+          <p:cNvSpPr>
+            <a:spLocks noGrp="1" noRot="1" noChangeAspect="1" noMove="1" noResize="1" noEditPoints="1" noAdjustHandles="1" noChangeArrowheads="1" noChangeShapeType="1" noTextEdit="1"/>
+          </p:cNvSpPr>
+          <p:nvPr>
+            <p:extLst>
+              <p:ext uri="{386F3935-93C4-4BCD-93E2-E3B085C9AB24}">
+                <p16:designElem xmlns:p16="http://schemas.microsoft.com/office/powerpoint/2015/main" val="1"/>
+              </p:ext>
+            </p:extLst>
+          </p:nvPr>
+        </p:nvSpPr>
+        <p:spPr>
+          <a:xfrm>
+            <a:off x="0" y="0"/>
+            <a:ext cx="12188952" cy="6858000"/>
+          </a:xfrm>
+          <a:prstGeom prst="rect">
+            <a:avLst/>
+          </a:prstGeom>
+          <a:ln>
+            <a:noFill/>
+          </a:ln>
+        </p:spPr>
+        <p:style>
+          <a:lnRef idx="2">
+            <a:schemeClr val="accent1">
+              <a:shade val="50000"/>
+            </a:schemeClr>
+          </a:lnRef>
+          <a:fillRef idx="1">
+            <a:schemeClr val="accent1"/>
+          </a:fillRef>
+          <a:effectRef idx="0">
+            <a:schemeClr val="accent1"/>
+          </a:effectRef>
+          <a:fontRef idx="minor">
+            <a:schemeClr val="lt1"/>
+          </a:fontRef>
+        </p:style>
+        <p:txBody>
+          <a:bodyPr rtlCol="0" anchor="ctr"/>
+          <a:lstStyle/>
+          <a:p>
+            <a:pPr algn="ctr"/>
+            <a:endParaRPr lang="en-US"/>
+          </a:p>
+        </p:txBody>
+      </p:sp>
+      <p:sp>
+        <p:nvSpPr>
+          <p:cNvPr id="2" name="Titolo 1">
+            <a:extLst>
+              <a:ext uri="{FF2B5EF4-FFF2-40B4-BE49-F238E27FC236}">
+                <a16:creationId xmlns:a16="http://schemas.microsoft.com/office/drawing/2014/main" id="{3C515082-5FF7-C561-38E3-04FC5D6A3023}"/>
+              </a:ext>
+            </a:extLst>
+          </p:cNvPr>
+          <p:cNvSpPr>
+            <a:spLocks noGrp="1"/>
+          </p:cNvSpPr>
+          <p:nvPr>
+            <p:ph type="title"/>
+          </p:nvPr>
+        </p:nvSpPr>
+        <p:spPr>
+          <a:xfrm>
+            <a:off x="572493" y="238539"/>
+            <a:ext cx="11018520" cy="1434415"/>
+          </a:xfrm>
+        </p:spPr>
+        <p:txBody>
+          <a:bodyPr vert="horz" lIns="91440" tIns="45720" rIns="91440" bIns="45720" rtlCol="0" anchor="b">
+            <a:normAutofit/>
+          </a:bodyPr>
+          <a:lstStyle/>
+          <a:p>
+            <a:r>
+              <a:rPr lang="it-IT" sz="5400" dirty="0"/>
+              <a:t>Motivazioni e risultati attesi</a:t>
+            </a:r>
+          </a:p>
+        </p:txBody>
+      </p:sp>
+      <p:sp>
+        <p:nvSpPr>
+          <p:cNvPr id="12" name="sketchy line">
+            <a:extLst>
+              <a:ext uri="{FF2B5EF4-FFF2-40B4-BE49-F238E27FC236}">
+                <a16:creationId xmlns:a16="http://schemas.microsoft.com/office/drawing/2014/main" id="{B2DD41CD-8F47-4F56-AD12-4E2FF7696987}"/>
+              </a:ext>
+              <a:ext uri="{C183D7F6-B498-43B3-948B-1728B52AA6E4}">
+                <adec:decorative xmlns:adec="http://schemas.microsoft.com/office/drawing/2017/decorative" val="1"/>
+              </a:ext>
+            </a:extLst>
+          </p:cNvPr>
+          <p:cNvSpPr>
+            <a:spLocks noGrp="1" noRot="1" noChangeAspect="1" noMove="1" noResize="1" noEditPoints="1" noAdjustHandles="1" noChangeArrowheads="1" noChangeShapeType="1" noTextEdit="1"/>
+          </p:cNvSpPr>
+          <p:nvPr>
+            <p:extLst>
+              <p:ext uri="{386F3935-93C4-4BCD-93E2-E3B085C9AB24}">
+                <p16:designElem xmlns:p16="http://schemas.microsoft.com/office/powerpoint/2015/main" val="1"/>
+              </p:ext>
+            </p:extLst>
+          </p:nvPr>
+        </p:nvSpPr>
+        <p:spPr>
+          <a:xfrm>
+            <a:off x="572493" y="1681544"/>
+            <a:ext cx="10972800" cy="18288"/>
+          </a:xfrm>
+          <a:custGeom>
+            <a:avLst/>
+            <a:gdLst>
+              <a:gd name="csX0" fmla="*/ 0 w 10972800"/>
+              <a:gd name="csY0" fmla="*/ 0 h 18288"/>
+              <a:gd name="csX1" fmla="*/ 356616 w 10972800"/>
+              <a:gd name="csY1" fmla="*/ 0 h 18288"/>
+              <a:gd name="csX2" fmla="*/ 1042416 w 10972800"/>
+              <a:gd name="csY2" fmla="*/ 0 h 18288"/>
+              <a:gd name="csX3" fmla="*/ 1947672 w 10972800"/>
+              <a:gd name="csY3" fmla="*/ 0 h 18288"/>
+              <a:gd name="csX4" fmla="*/ 2633472 w 10972800"/>
+              <a:gd name="csY4" fmla="*/ 0 h 18288"/>
+              <a:gd name="csX5" fmla="*/ 2990088 w 10972800"/>
+              <a:gd name="csY5" fmla="*/ 0 h 18288"/>
+              <a:gd name="csX6" fmla="*/ 3456432 w 10972800"/>
+              <a:gd name="csY6" fmla="*/ 0 h 18288"/>
+              <a:gd name="csX7" fmla="*/ 4361688 w 10972800"/>
+              <a:gd name="csY7" fmla="*/ 0 h 18288"/>
+              <a:gd name="csX8" fmla="*/ 5266944 w 10972800"/>
+              <a:gd name="csY8" fmla="*/ 0 h 18288"/>
+              <a:gd name="csX9" fmla="*/ 6172200 w 10972800"/>
+              <a:gd name="csY9" fmla="*/ 0 h 18288"/>
+              <a:gd name="csX10" fmla="*/ 6528816 w 10972800"/>
+              <a:gd name="csY10" fmla="*/ 0 h 18288"/>
+              <a:gd name="csX11" fmla="*/ 7214616 w 10972800"/>
+              <a:gd name="csY11" fmla="*/ 0 h 18288"/>
+              <a:gd name="csX12" fmla="*/ 7790688 w 10972800"/>
+              <a:gd name="csY12" fmla="*/ 0 h 18288"/>
+              <a:gd name="csX13" fmla="*/ 8147304 w 10972800"/>
+              <a:gd name="csY13" fmla="*/ 0 h 18288"/>
+              <a:gd name="csX14" fmla="*/ 9052560 w 10972800"/>
+              <a:gd name="csY14" fmla="*/ 0 h 18288"/>
+              <a:gd name="csX15" fmla="*/ 9409176 w 10972800"/>
+              <a:gd name="csY15" fmla="*/ 0 h 18288"/>
+              <a:gd name="csX16" fmla="*/ 9765792 w 10972800"/>
+              <a:gd name="csY16" fmla="*/ 0 h 18288"/>
+              <a:gd name="csX17" fmla="*/ 10341864 w 10972800"/>
+              <a:gd name="csY17" fmla="*/ 0 h 18288"/>
+              <a:gd name="csX18" fmla="*/ 10972800 w 10972800"/>
+              <a:gd name="csY18" fmla="*/ 0 h 18288"/>
+              <a:gd name="csX19" fmla="*/ 10972800 w 10972800"/>
+              <a:gd name="csY19" fmla="*/ 18288 h 18288"/>
+              <a:gd name="csX20" fmla="*/ 10177272 w 10972800"/>
+              <a:gd name="csY20" fmla="*/ 18288 h 18288"/>
+              <a:gd name="csX21" fmla="*/ 9820656 w 10972800"/>
+              <a:gd name="csY21" fmla="*/ 18288 h 18288"/>
+              <a:gd name="csX22" fmla="*/ 9464040 w 10972800"/>
+              <a:gd name="csY22" fmla="*/ 18288 h 18288"/>
+              <a:gd name="csX23" fmla="*/ 8778240 w 10972800"/>
+              <a:gd name="csY23" fmla="*/ 18288 h 18288"/>
+              <a:gd name="csX24" fmla="*/ 8421624 w 10972800"/>
+              <a:gd name="csY24" fmla="*/ 18288 h 18288"/>
+              <a:gd name="csX25" fmla="*/ 7735824 w 10972800"/>
+              <a:gd name="csY25" fmla="*/ 18288 h 18288"/>
+              <a:gd name="csX26" fmla="*/ 6940296 w 10972800"/>
+              <a:gd name="csY26" fmla="*/ 18288 h 18288"/>
+              <a:gd name="csX27" fmla="*/ 6254496 w 10972800"/>
+              <a:gd name="csY27" fmla="*/ 18288 h 18288"/>
+              <a:gd name="csX28" fmla="*/ 5458968 w 10972800"/>
+              <a:gd name="csY28" fmla="*/ 18288 h 18288"/>
+              <a:gd name="csX29" fmla="*/ 4663440 w 10972800"/>
+              <a:gd name="csY29" fmla="*/ 18288 h 18288"/>
+              <a:gd name="csX30" fmla="*/ 4306824 w 10972800"/>
+              <a:gd name="csY30" fmla="*/ 18288 h 18288"/>
+              <a:gd name="csX31" fmla="*/ 3840480 w 10972800"/>
+              <a:gd name="csY31" fmla="*/ 18288 h 18288"/>
+              <a:gd name="csX32" fmla="*/ 3264408 w 10972800"/>
+              <a:gd name="csY32" fmla="*/ 18288 h 18288"/>
+              <a:gd name="csX33" fmla="*/ 2578608 w 10972800"/>
+              <a:gd name="csY33" fmla="*/ 18288 h 18288"/>
+              <a:gd name="csX34" fmla="*/ 1673352 w 10972800"/>
+              <a:gd name="csY34" fmla="*/ 18288 h 18288"/>
+              <a:gd name="csX35" fmla="*/ 877824 w 10972800"/>
+              <a:gd name="csY35" fmla="*/ 18288 h 18288"/>
+              <a:gd name="csX36" fmla="*/ 0 w 10972800"/>
+              <a:gd name="csY36" fmla="*/ 18288 h 18288"/>
+              <a:gd name="csX37" fmla="*/ 0 w 10972800"/>
+              <a:gd name="csY37" fmla="*/ 0 h 18288"/>
+            </a:gdLst>
+            <a:ahLst/>
+            <a:cxnLst>
+              <a:cxn ang="0">
+                <a:pos x="csX0" y="csY0"/>
+              </a:cxn>
+              <a:cxn ang="0">
+                <a:pos x="csX1" y="csY1"/>
+              </a:cxn>
+              <a:cxn ang="0">
+                <a:pos x="csX2" y="csY2"/>
+              </a:cxn>
+              <a:cxn ang="0">
+                <a:pos x="csX3" y="csY3"/>
+              </a:cxn>
+              <a:cxn ang="0">
+                <a:pos x="csX4" y="csY4"/>
+              </a:cxn>
+              <a:cxn ang="0">
+                <a:pos x="csX5" y="csY5"/>
+              </a:cxn>
+              <a:cxn ang="0">
+                <a:pos x="csX6" y="csY6"/>
+              </a:cxn>
+              <a:cxn ang="0">
+                <a:pos x="csX7" y="csY7"/>
+              </a:cxn>
+              <a:cxn ang="0">
+                <a:pos x="csX8" y="csY8"/>
+              </a:cxn>
+              <a:cxn ang="0">
+                <a:pos x="csX9" y="csY9"/>
+              </a:cxn>
+              <a:cxn ang="0">
+                <a:pos x="csX10" y="csY10"/>
+              </a:cxn>
+              <a:cxn ang="0">
+                <a:pos x="csX11" y="csY11"/>
+              </a:cxn>
+              <a:cxn ang="0">
+                <a:pos x="csX12" y="csY12"/>
+              </a:cxn>
+              <a:cxn ang="0">
+                <a:pos x="csX13" y="csY13"/>
+              </a:cxn>
+              <a:cxn ang="0">
+                <a:pos x="csX14" y="csY14"/>
+              </a:cxn>
+              <a:cxn ang="0">
+                <a:pos x="csX15" y="csY15"/>
+              </a:cxn>
+              <a:cxn ang="0">
+                <a:pos x="csX16" y="csY16"/>
+              </a:cxn>
+              <a:cxn ang="0">
+                <a:pos x="csX17" y="csY17"/>
+              </a:cxn>
+              <a:cxn ang="0">
+                <a:pos x="csX18" y="csY18"/>
+              </a:cxn>
+              <a:cxn ang="0">
+                <a:pos x="csX19" y="csY19"/>
+              </a:cxn>
+              <a:cxn ang="0">
+                <a:pos x="csX20" y="csY20"/>
+              </a:cxn>
+              <a:cxn ang="0">
+                <a:pos x="csX21" y="csY21"/>
+              </a:cxn>
+              <a:cxn ang="0">
+                <a:pos x="csX22" y="csY22"/>
+              </a:cxn>
+              <a:cxn ang="0">
+                <a:pos x="csX23" y="csY23"/>
+              </a:cxn>
+              <a:cxn ang="0">
+                <a:pos x="csX24" y="csY24"/>
+              </a:cxn>
+              <a:cxn ang="0">
+                <a:pos x="csX25" y="csY25"/>
+              </a:cxn>
+              <a:cxn ang="0">
+                <a:pos x="csX26" y="csY26"/>
+              </a:cxn>
+              <a:cxn ang="0">
+                <a:pos x="csX27" y="csY27"/>
+              </a:cxn>
+              <a:cxn ang="0">
+                <a:pos x="csX28" y="csY28"/>
+              </a:cxn>
+              <a:cxn ang="0">
+                <a:pos x="csX29" y="csY29"/>
+              </a:cxn>
+              <a:cxn ang="0">
+                <a:pos x="csX30" y="csY30"/>
+              </a:cxn>
+              <a:cxn ang="0">
+                <a:pos x="csX31" y="csY31"/>
+              </a:cxn>
+              <a:cxn ang="0">
+                <a:pos x="csX32" y="csY32"/>
+              </a:cxn>
+              <a:cxn ang="0">
+                <a:pos x="csX33" y="csY33"/>
+              </a:cxn>
+              <a:cxn ang="0">
+                <a:pos x="csX34" y="csY34"/>
+              </a:cxn>
+              <a:cxn ang="0">
+                <a:pos x="csX35" y="csY35"/>
+              </a:cxn>
+              <a:cxn ang="0">
+                <a:pos x="csX36" y="csY36"/>
+              </a:cxn>
+              <a:cxn ang="0">
+                <a:pos x="csX37" y="csY37"/>
+              </a:cxn>
+            </a:cxnLst>
+            <a:rect l="l" t="t" r="r" b="b"/>
+            <a:pathLst>
+              <a:path w="10972800" h="18288" fill="none" extrusionOk="0">
+                <a:moveTo>
+                  <a:pt x="0" y="0"/>
+                </a:moveTo>
+                <a:cubicBezTo>
+                  <a:pt x="165916" y="-1866"/>
+                  <a:pt x="188720" y="13756"/>
+                  <a:pt x="356616" y="0"/>
+                </a:cubicBezTo>
+                <a:cubicBezTo>
+                  <a:pt x="524512" y="-13756"/>
+                  <a:pt x="734781" y="8922"/>
+                  <a:pt x="1042416" y="0"/>
+                </a:cubicBezTo>
+                <a:cubicBezTo>
+                  <a:pt x="1350051" y="-8922"/>
+                  <a:pt x="1595982" y="-26315"/>
+                  <a:pt x="1947672" y="0"/>
+                </a:cubicBezTo>
+                <a:cubicBezTo>
+                  <a:pt x="2299362" y="26315"/>
+                  <a:pt x="2292691" y="-19526"/>
+                  <a:pt x="2633472" y="0"/>
+                </a:cubicBezTo>
+                <a:cubicBezTo>
+                  <a:pt x="2974253" y="19526"/>
+                  <a:pt x="2857309" y="10773"/>
+                  <a:pt x="2990088" y="0"/>
+                </a:cubicBezTo>
+                <a:cubicBezTo>
+                  <a:pt x="3122867" y="-10773"/>
+                  <a:pt x="3359343" y="7194"/>
+                  <a:pt x="3456432" y="0"/>
+                </a:cubicBezTo>
+                <a:cubicBezTo>
+                  <a:pt x="3553521" y="-7194"/>
+                  <a:pt x="4136258" y="5108"/>
+                  <a:pt x="4361688" y="0"/>
+                </a:cubicBezTo>
+                <a:cubicBezTo>
+                  <a:pt x="4587118" y="-5108"/>
+                  <a:pt x="4992424" y="-42958"/>
+                  <a:pt x="5266944" y="0"/>
+                </a:cubicBezTo>
+                <a:cubicBezTo>
+                  <a:pt x="5541464" y="42958"/>
+                  <a:pt x="5882966" y="-3430"/>
+                  <a:pt x="6172200" y="0"/>
+                </a:cubicBezTo>
+                <a:cubicBezTo>
+                  <a:pt x="6461434" y="3430"/>
+                  <a:pt x="6432127" y="6688"/>
+                  <a:pt x="6528816" y="0"/>
+                </a:cubicBezTo>
+                <a:cubicBezTo>
+                  <a:pt x="6625505" y="-6688"/>
+                  <a:pt x="6916805" y="-436"/>
+                  <a:pt x="7214616" y="0"/>
+                </a:cubicBezTo>
+                <a:cubicBezTo>
+                  <a:pt x="7512427" y="436"/>
+                  <a:pt x="7626159" y="-6909"/>
+                  <a:pt x="7790688" y="0"/>
+                </a:cubicBezTo>
+                <a:cubicBezTo>
+                  <a:pt x="7955217" y="6909"/>
+                  <a:pt x="8048891" y="15307"/>
+                  <a:pt x="8147304" y="0"/>
+                </a:cubicBezTo>
+                <a:cubicBezTo>
+                  <a:pt x="8245717" y="-15307"/>
+                  <a:pt x="8645618" y="-11734"/>
+                  <a:pt x="9052560" y="0"/>
+                </a:cubicBezTo>
+                <a:cubicBezTo>
+                  <a:pt x="9459502" y="11734"/>
+                  <a:pt x="9320584" y="8388"/>
+                  <a:pt x="9409176" y="0"/>
+                </a:cubicBezTo>
+                <a:cubicBezTo>
+                  <a:pt x="9497768" y="-8388"/>
+                  <a:pt x="9644192" y="8379"/>
+                  <a:pt x="9765792" y="0"/>
+                </a:cubicBezTo>
+                <a:cubicBezTo>
+                  <a:pt x="9887392" y="-8379"/>
+                  <a:pt x="10105220" y="-12663"/>
+                  <a:pt x="10341864" y="0"/>
+                </a:cubicBezTo>
+                <a:cubicBezTo>
+                  <a:pt x="10578508" y="12663"/>
+                  <a:pt x="10773103" y="-5786"/>
+                  <a:pt x="10972800" y="0"/>
+                </a:cubicBezTo>
+                <a:cubicBezTo>
+                  <a:pt x="10972146" y="8818"/>
+                  <a:pt x="10972240" y="13823"/>
+                  <a:pt x="10972800" y="18288"/>
+                </a:cubicBezTo>
+                <a:cubicBezTo>
+                  <a:pt x="10588778" y="31598"/>
+                  <a:pt x="10543381" y="-12698"/>
+                  <a:pt x="10177272" y="18288"/>
+                </a:cubicBezTo>
+                <a:cubicBezTo>
+                  <a:pt x="9811163" y="49274"/>
+                  <a:pt x="9996817" y="25662"/>
+                  <a:pt x="9820656" y="18288"/>
+                </a:cubicBezTo>
+                <a:cubicBezTo>
+                  <a:pt x="9644495" y="10914"/>
+                  <a:pt x="9607007" y="31631"/>
+                  <a:pt x="9464040" y="18288"/>
+                </a:cubicBezTo>
+                <a:cubicBezTo>
+                  <a:pt x="9321073" y="4945"/>
+                  <a:pt x="9114189" y="28940"/>
+                  <a:pt x="8778240" y="18288"/>
+                </a:cubicBezTo>
+                <a:cubicBezTo>
+                  <a:pt x="8442291" y="7636"/>
+                  <a:pt x="8594763" y="987"/>
+                  <a:pt x="8421624" y="18288"/>
+                </a:cubicBezTo>
+                <a:cubicBezTo>
+                  <a:pt x="8248485" y="35589"/>
+                  <a:pt x="7929515" y="37573"/>
+                  <a:pt x="7735824" y="18288"/>
+                </a:cubicBezTo>
+                <a:cubicBezTo>
+                  <a:pt x="7542133" y="-997"/>
+                  <a:pt x="7252504" y="33858"/>
+                  <a:pt x="6940296" y="18288"/>
+                </a:cubicBezTo>
+                <a:cubicBezTo>
+                  <a:pt x="6628088" y="2718"/>
+                  <a:pt x="6528503" y="48389"/>
+                  <a:pt x="6254496" y="18288"/>
+                </a:cubicBezTo>
+                <a:cubicBezTo>
+                  <a:pt x="5980489" y="-11813"/>
+                  <a:pt x="5695784" y="-3740"/>
+                  <a:pt x="5458968" y="18288"/>
+                </a:cubicBezTo>
+                <a:cubicBezTo>
+                  <a:pt x="5222152" y="40316"/>
+                  <a:pt x="5010751" y="19095"/>
+                  <a:pt x="4663440" y="18288"/>
+                </a:cubicBezTo>
+                <a:cubicBezTo>
+                  <a:pt x="4316129" y="17481"/>
+                  <a:pt x="4425552" y="1606"/>
+                  <a:pt x="4306824" y="18288"/>
+                </a:cubicBezTo>
+                <a:cubicBezTo>
+                  <a:pt x="4188096" y="34970"/>
+                  <a:pt x="3941535" y="7481"/>
+                  <a:pt x="3840480" y="18288"/>
+                </a:cubicBezTo>
+                <a:cubicBezTo>
+                  <a:pt x="3739425" y="29095"/>
+                  <a:pt x="3402388" y="17641"/>
+                  <a:pt x="3264408" y="18288"/>
+                </a:cubicBezTo>
+                <a:cubicBezTo>
+                  <a:pt x="3126428" y="18935"/>
+                  <a:pt x="2776779" y="9983"/>
+                  <a:pt x="2578608" y="18288"/>
+                </a:cubicBezTo>
+                <a:cubicBezTo>
+                  <a:pt x="2380437" y="26593"/>
+                  <a:pt x="1909468" y="25818"/>
+                  <a:pt x="1673352" y="18288"/>
+                </a:cubicBezTo>
+                <a:cubicBezTo>
+                  <a:pt x="1437236" y="10758"/>
+                  <a:pt x="1131180" y="49884"/>
+                  <a:pt x="877824" y="18288"/>
+                </a:cubicBezTo>
+                <a:cubicBezTo>
+                  <a:pt x="624468" y="-13308"/>
+                  <a:pt x="206753" y="2195"/>
+                  <a:pt x="0" y="18288"/>
+                </a:cubicBezTo>
+                <a:cubicBezTo>
+                  <a:pt x="313" y="10654"/>
+                  <a:pt x="-263" y="4056"/>
+                  <a:pt x="0" y="0"/>
+                </a:cubicBezTo>
+                <a:close/>
+              </a:path>
+              <a:path w="10972800" h="18288" stroke="0" extrusionOk="0">
+                <a:moveTo>
+                  <a:pt x="0" y="0"/>
+                </a:moveTo>
+                <a:cubicBezTo>
+                  <a:pt x="164017" y="-17675"/>
+                  <a:pt x="309425" y="9913"/>
+                  <a:pt x="466344" y="0"/>
+                </a:cubicBezTo>
+                <a:cubicBezTo>
+                  <a:pt x="623263" y="-9913"/>
+                  <a:pt x="659300" y="-14524"/>
+                  <a:pt x="822960" y="0"/>
+                </a:cubicBezTo>
+                <a:cubicBezTo>
+                  <a:pt x="986620" y="14524"/>
+                  <a:pt x="1105222" y="-16481"/>
+                  <a:pt x="1289304" y="0"/>
+                </a:cubicBezTo>
+                <a:cubicBezTo>
+                  <a:pt x="1473386" y="16481"/>
+                  <a:pt x="1693223" y="26161"/>
+                  <a:pt x="1975104" y="0"/>
+                </a:cubicBezTo>
+                <a:cubicBezTo>
+                  <a:pt x="2256985" y="-26161"/>
+                  <a:pt x="2435781" y="23061"/>
+                  <a:pt x="2770632" y="0"/>
+                </a:cubicBezTo>
+                <a:cubicBezTo>
+                  <a:pt x="3105483" y="-23061"/>
+                  <a:pt x="3247479" y="-44011"/>
+                  <a:pt x="3675888" y="0"/>
+                </a:cubicBezTo>
+                <a:cubicBezTo>
+                  <a:pt x="4104297" y="44011"/>
+                  <a:pt x="4280918" y="4017"/>
+                  <a:pt x="4581144" y="0"/>
+                </a:cubicBezTo>
+                <a:cubicBezTo>
+                  <a:pt x="4881370" y="-4017"/>
+                  <a:pt x="5021699" y="-11889"/>
+                  <a:pt x="5157216" y="0"/>
+                </a:cubicBezTo>
+                <a:cubicBezTo>
+                  <a:pt x="5292733" y="11889"/>
+                  <a:pt x="5603398" y="-17698"/>
+                  <a:pt x="5952744" y="0"/>
+                </a:cubicBezTo>
+                <a:cubicBezTo>
+                  <a:pt x="6302090" y="17698"/>
+                  <a:pt x="6353093" y="-11909"/>
+                  <a:pt x="6638544" y="0"/>
+                </a:cubicBezTo>
+                <a:cubicBezTo>
+                  <a:pt x="6923995" y="11909"/>
+                  <a:pt x="7053404" y="21630"/>
+                  <a:pt x="7214616" y="0"/>
+                </a:cubicBezTo>
+                <a:cubicBezTo>
+                  <a:pt x="7375828" y="-21630"/>
+                  <a:pt x="7837963" y="3886"/>
+                  <a:pt x="8010144" y="0"/>
+                </a:cubicBezTo>
+                <a:cubicBezTo>
+                  <a:pt x="8182325" y="-3886"/>
+                  <a:pt x="8224183" y="16009"/>
+                  <a:pt x="8366760" y="0"/>
+                </a:cubicBezTo>
+                <a:cubicBezTo>
+                  <a:pt x="8509337" y="-16009"/>
+                  <a:pt x="8687920" y="-5720"/>
+                  <a:pt x="8942832" y="0"/>
+                </a:cubicBezTo>
+                <a:cubicBezTo>
+                  <a:pt x="9197744" y="5720"/>
+                  <a:pt x="9368437" y="20479"/>
+                  <a:pt x="9628632" y="0"/>
+                </a:cubicBezTo>
+                <a:cubicBezTo>
+                  <a:pt x="9888827" y="-20479"/>
+                  <a:pt x="10560858" y="-20746"/>
+                  <a:pt x="10972800" y="0"/>
+                </a:cubicBezTo>
+                <a:cubicBezTo>
+                  <a:pt x="10972186" y="5722"/>
+                  <a:pt x="10972980" y="12495"/>
+                  <a:pt x="10972800" y="18288"/>
+                </a:cubicBezTo>
+                <a:cubicBezTo>
+                  <a:pt x="10786146" y="12536"/>
+                  <a:pt x="10623717" y="14033"/>
+                  <a:pt x="10506456" y="18288"/>
+                </a:cubicBezTo>
+                <a:cubicBezTo>
+                  <a:pt x="10389195" y="22543"/>
+                  <a:pt x="10296178" y="20107"/>
+                  <a:pt x="10149840" y="18288"/>
+                </a:cubicBezTo>
+                <a:cubicBezTo>
+                  <a:pt x="10003502" y="16469"/>
+                  <a:pt x="9767530" y="28891"/>
+                  <a:pt x="9464040" y="18288"/>
+                </a:cubicBezTo>
+                <a:cubicBezTo>
+                  <a:pt x="9160550" y="7685"/>
+                  <a:pt x="9229050" y="2659"/>
+                  <a:pt x="8997696" y="18288"/>
+                </a:cubicBezTo>
+                <a:cubicBezTo>
+                  <a:pt x="8766342" y="33917"/>
+                  <a:pt x="8340136" y="34864"/>
+                  <a:pt x="8092440" y="18288"/>
+                </a:cubicBezTo>
+                <a:cubicBezTo>
+                  <a:pt x="7844744" y="1712"/>
+                  <a:pt x="7863720" y="27405"/>
+                  <a:pt x="7735824" y="18288"/>
+                </a:cubicBezTo>
+                <a:cubicBezTo>
+                  <a:pt x="7607928" y="9171"/>
+                  <a:pt x="7323619" y="461"/>
+                  <a:pt x="7050024" y="18288"/>
+                </a:cubicBezTo>
+                <a:cubicBezTo>
+                  <a:pt x="6776429" y="36115"/>
+                  <a:pt x="6787899" y="28206"/>
+                  <a:pt x="6693408" y="18288"/>
+                </a:cubicBezTo>
+                <a:cubicBezTo>
+                  <a:pt x="6598917" y="8370"/>
+                  <a:pt x="6395231" y="19114"/>
+                  <a:pt x="6227064" y="18288"/>
+                </a:cubicBezTo>
+                <a:cubicBezTo>
+                  <a:pt x="6058897" y="17462"/>
+                  <a:pt x="5618582" y="1091"/>
+                  <a:pt x="5431536" y="18288"/>
+                </a:cubicBezTo>
+                <a:cubicBezTo>
+                  <a:pt x="5244490" y="35485"/>
+                  <a:pt x="4729797" y="-9650"/>
+                  <a:pt x="4526280" y="18288"/>
+                </a:cubicBezTo>
+                <a:cubicBezTo>
+                  <a:pt x="4322763" y="46226"/>
+                  <a:pt x="4216797" y="756"/>
+                  <a:pt x="4059936" y="18288"/>
+                </a:cubicBezTo>
+                <a:cubicBezTo>
+                  <a:pt x="3903075" y="35820"/>
+                  <a:pt x="3537912" y="42098"/>
+                  <a:pt x="3374136" y="18288"/>
+                </a:cubicBezTo>
+                <a:cubicBezTo>
+                  <a:pt x="3210360" y="-5522"/>
+                  <a:pt x="3126842" y="39135"/>
+                  <a:pt x="2907792" y="18288"/>
+                </a:cubicBezTo>
+                <a:cubicBezTo>
+                  <a:pt x="2688742" y="-2559"/>
+                  <a:pt x="2490436" y="34100"/>
+                  <a:pt x="2112264" y="18288"/>
+                </a:cubicBezTo>
+                <a:cubicBezTo>
+                  <a:pt x="1734092" y="2476"/>
+                  <a:pt x="1744622" y="-7274"/>
+                  <a:pt x="1536192" y="18288"/>
+                </a:cubicBezTo>
+                <a:cubicBezTo>
+                  <a:pt x="1327762" y="43850"/>
+                  <a:pt x="1189025" y="6435"/>
+                  <a:pt x="1069848" y="18288"/>
+                </a:cubicBezTo>
+                <a:cubicBezTo>
+                  <a:pt x="950671" y="30141"/>
+                  <a:pt x="858345" y="33684"/>
+                  <a:pt x="713232" y="18288"/>
+                </a:cubicBezTo>
+                <a:cubicBezTo>
+                  <a:pt x="568119" y="2892"/>
+                  <a:pt x="250292" y="5410"/>
+                  <a:pt x="0" y="18288"/>
+                </a:cubicBezTo>
+                <a:cubicBezTo>
+                  <a:pt x="465" y="13062"/>
+                  <a:pt x="-894" y="9029"/>
+                  <a:pt x="0" y="0"/>
+                </a:cubicBezTo>
+                <a:close/>
+              </a:path>
+            </a:pathLst>
+          </a:custGeom>
+          <a:solidFill>
+            <a:schemeClr val="accent2">
+              <a:alpha val="75000"/>
+            </a:schemeClr>
+          </a:solidFill>
+          <a:ln w="44450" cap="rnd">
+            <a:solidFill>
+              <a:schemeClr val="accent2">
+                <a:alpha val="75000"/>
+              </a:schemeClr>
+            </a:solidFill>
+            <a:round/>
+            <a:extLst>
+              <a:ext uri="{C807C97D-BFC1-408E-A445-0C87EB9F89A2}">
+                <ask:lineSketchStyleProps xmlns:ask="http://schemas.microsoft.com/office/drawing/2018/sketchyshapes" sd="2727557108">
+                  <a:prstGeom prst="rect">
+                    <a:avLst/>
+                  </a:prstGeom>
+                  <ask:type>
+                    <ask:lineSketchFreehand/>
+                  </ask:type>
+                </ask:lineSketchStyleProps>
+              </a:ext>
+            </a:extLst>
+          </a:ln>
+        </p:spPr>
+        <p:style>
+          <a:lnRef idx="2">
+            <a:schemeClr val="accent1">
+              <a:shade val="50000"/>
+            </a:schemeClr>
+          </a:lnRef>
+          <a:fillRef idx="1">
+            <a:schemeClr val="accent1"/>
+          </a:fillRef>
+          <a:effectRef idx="0">
+            <a:schemeClr val="accent1"/>
+          </a:effectRef>
+          <a:fontRef idx="minor">
+            <a:schemeClr val="lt1"/>
+          </a:fontRef>
+        </p:style>
+        <p:txBody>
+          <a:bodyPr rtlCol="0" anchor="ctr"/>
+          <a:lstStyle/>
+          <a:p>
+            <a:pPr algn="ctr"/>
+            <a:endParaRPr lang="en-US"/>
+          </a:p>
+        </p:txBody>
+      </p:sp>
+      <p:sp>
+        <p:nvSpPr>
+          <p:cNvPr id="3" name="Segnaposto contenuto 2">
+            <a:extLst>
+              <a:ext uri="{FF2B5EF4-FFF2-40B4-BE49-F238E27FC236}">
+                <a16:creationId xmlns:a16="http://schemas.microsoft.com/office/drawing/2014/main" id="{EE7C8E6A-D826-8C2D-C194-28A69E749219}"/>
+              </a:ext>
+            </a:extLst>
+          </p:cNvPr>
+          <p:cNvSpPr>
+            <a:spLocks noGrp="1"/>
+          </p:cNvSpPr>
+          <p:nvPr>
+            <p:ph idx="1"/>
+          </p:nvPr>
+        </p:nvSpPr>
+        <p:spPr>
+          <a:xfrm>
+            <a:off x="572493" y="2071316"/>
+            <a:ext cx="6713552" cy="4119172"/>
+          </a:xfrm>
+        </p:spPr>
+        <p:txBody>
+          <a:bodyPr vert="horz" lIns="91440" tIns="45720" rIns="91440" bIns="45720" rtlCol="0">
+            <a:normAutofit/>
+          </a:bodyPr>
+          <a:lstStyle/>
+          <a:p>
+            <a:r>
+              <a:rPr lang="it-IT" sz="2200" dirty="0"/>
+              <a:t>Sostituire l’attuale sistema basato su Microsoft Access.</a:t>
+            </a:r>
+          </a:p>
+          <a:p>
+            <a:r>
+              <a:rPr lang="it-IT" sz="2200" dirty="0"/>
+              <a:t>Miglioramento dei tempi di realizzazione offerte</a:t>
+            </a:r>
+          </a:p>
+          <a:p>
+            <a:r>
+              <a:rPr lang="it-IT" sz="2200" dirty="0"/>
+              <a:t>Sistema integrato nell’ecosistema aziendale</a:t>
+            </a:r>
+          </a:p>
+          <a:p>
+            <a:r>
+              <a:rPr lang="it-IT" sz="2200" dirty="0"/>
+              <a:t>Strumento moderno ed estendibile</a:t>
+            </a:r>
+          </a:p>
+          <a:p>
+            <a:r>
+              <a:rPr lang="it-IT" sz="2200" dirty="0"/>
+              <a:t>Sistema affidabile che possa guidare i processi a valle dell’offerta</a:t>
+            </a:r>
+          </a:p>
+        </p:txBody>
+      </p:sp>
+      <p:pic>
+        <p:nvPicPr>
+          <p:cNvPr id="7" name="Immagine 6">
+            <a:extLst>
+              <a:ext uri="{FF2B5EF4-FFF2-40B4-BE49-F238E27FC236}">
+                <a16:creationId xmlns:a16="http://schemas.microsoft.com/office/drawing/2014/main" id="{7B1CD822-CAC1-2417-B6E1-3AEA40FE229F}"/>
+              </a:ext>
+            </a:extLst>
+          </p:cNvPr>
+          <p:cNvPicPr>
+            <a:picLocks noChangeAspect="1"/>
+          </p:cNvPicPr>
+          <p:nvPr/>
+        </p:nvPicPr>
+        <p:blipFill>
+          <a:blip r:embed="rId3">
+            <a:extLst>
+              <a:ext uri="{28A0092B-C50C-407E-A947-70E740481C1C}">
+                <a14:useLocalDpi xmlns:a14="http://schemas.microsoft.com/office/drawing/2010/main" val="0"/>
+              </a:ext>
+            </a:extLst>
+          </a:blip>
+          <a:stretch>
+            <a:fillRect/>
+          </a:stretch>
+        </p:blipFill>
+        <p:spPr>
+          <a:xfrm>
+            <a:off x="8661679" y="1277722"/>
+            <a:ext cx="3279063" cy="5388473"/>
+          </a:xfrm>
+          <a:prstGeom prst="rect">
+            <a:avLst/>
+          </a:prstGeom>
+        </p:spPr>
+      </p:pic>
+    </p:spTree>
+    <p:extLst>
+      <p:ext uri="{BB962C8B-B14F-4D97-AF65-F5344CB8AC3E}">
+        <p14:creationId xmlns:p14="http://schemas.microsoft.com/office/powerpoint/2010/main" val="701410278"/>
+      </p:ext>
+    </p:extLst>
+  </p:cSld>
+  <p:clrMapOvr>
+    <a:masterClrMapping/>
+  </p:clrMapOvr>
+</p:sld>
+</file>
+
+<file path=ppt/slides/slide4.xml><?xml version="1.0" encoding="utf-8"?>
+<p:sld xmlns:a="http://schemas.openxmlformats.org/drawingml/2006/main" xmlns:r="http://schemas.openxmlformats.org/officeDocument/2006/relationships" xmlns:p="http://schemas.openxmlformats.org/presentationml/2006/main">
+  <p:cSld>
+    <p:bg>
+      <p:bgPr>
+        <a:solidFill>
+          <a:schemeClr val="bg1"/>
+        </a:solidFill>
+        <a:effectLst/>
+      </p:bgPr>
+    </p:bg>
+    <p:spTree>
+      <p:nvGrpSpPr>
+        <p:cNvPr id="1" name=""/>
+        <p:cNvGrpSpPr/>
+        <p:nvPr/>
+      </p:nvGrpSpPr>
+      <p:grpSpPr>
+        <a:xfrm>
+          <a:off x="0" y="0"/>
+          <a:ext cx="0" cy="0"/>
+          <a:chOff x="0" y="0"/>
+          <a:chExt cx="0" cy="0"/>
+        </a:xfrm>
+      </p:grpSpPr>
+      <p:sp useBgFill="1">
+        <p:nvSpPr>
+          <p:cNvPr id="8" name="Rectangle 7">
+            <a:extLst>
+              <a:ext uri="{FF2B5EF4-FFF2-40B4-BE49-F238E27FC236}">
+                <a16:creationId xmlns:a16="http://schemas.microsoft.com/office/drawing/2014/main" id="{100EDD19-6802-4EC3-95CE-CFFAB042CFD6}"/>
+              </a:ext>
+              <a:ext uri="{C183D7F6-B498-43B3-948B-1728B52AA6E4}">
+                <adec:decorative xmlns:adec="http://schemas.microsoft.com/office/drawing/2017/decorative" val="1"/>
+              </a:ext>
+            </a:extLst>
+          </p:cNvPr>
+          <p:cNvSpPr>
+            <a:spLocks noGrp="1" noRot="1" noChangeAspect="1" noMove="1" noResize="1" noEditPoints="1" noAdjustHandles="1" noChangeArrowheads="1" noChangeShapeType="1" noTextEdit="1"/>
+          </p:cNvSpPr>
+          <p:nvPr>
+            <p:extLst>
+              <p:ext uri="{386F3935-93C4-4BCD-93E2-E3B085C9AB24}">
+                <p16:designElem xmlns:p16="http://schemas.microsoft.com/office/powerpoint/2015/main" val="1"/>
+              </p:ext>
+            </p:extLst>
+          </p:nvPr>
+        </p:nvSpPr>
+        <p:spPr>
+          <a:xfrm>
+            <a:off x="0" y="0"/>
+            <a:ext cx="12188952" cy="6858000"/>
+          </a:xfrm>
+          <a:prstGeom prst="rect">
+            <a:avLst/>
+          </a:prstGeom>
+          <a:ln>
+            <a:noFill/>
+          </a:ln>
+        </p:spPr>
+        <p:style>
+          <a:lnRef idx="2">
+            <a:schemeClr val="accent1">
+              <a:shade val="50000"/>
+            </a:schemeClr>
+          </a:lnRef>
+          <a:fillRef idx="1">
+            <a:schemeClr val="accent1"/>
+          </a:fillRef>
+          <a:effectRef idx="0">
+            <a:schemeClr val="accent1"/>
+          </a:effectRef>
+          <a:fontRef idx="minor">
+            <a:schemeClr val="lt1"/>
+          </a:fontRef>
+        </p:style>
+        <p:txBody>
+          <a:bodyPr rtlCol="0" anchor="ctr"/>
+          <a:lstStyle/>
+          <a:p>
+            <a:pPr algn="ctr"/>
+            <a:endParaRPr lang="en-US"/>
+          </a:p>
+        </p:txBody>
+      </p:sp>
+      <p:sp>
+        <p:nvSpPr>
+          <p:cNvPr id="2" name="Titolo 1">
+            <a:extLst>
+              <a:ext uri="{FF2B5EF4-FFF2-40B4-BE49-F238E27FC236}">
+                <a16:creationId xmlns:a16="http://schemas.microsoft.com/office/drawing/2014/main" id="{CCDF3F57-DBBE-149B-33FD-C002901CF177}"/>
+              </a:ext>
+            </a:extLst>
+          </p:cNvPr>
+          <p:cNvSpPr>
+            <a:spLocks noGrp="1"/>
+          </p:cNvSpPr>
+          <p:nvPr>
+            <p:ph type="title"/>
+          </p:nvPr>
+        </p:nvSpPr>
+        <p:spPr>
+          <a:xfrm>
+            <a:off x="838200" y="365125"/>
+            <a:ext cx="10515600" cy="1325563"/>
+          </a:xfrm>
+        </p:spPr>
+        <p:txBody>
+          <a:bodyPr>
+            <a:normAutofit/>
+          </a:bodyPr>
+          <a:lstStyle/>
+          <a:p>
+            <a:r>
+              <a:rPr lang="it-IT" sz="5400"/>
+              <a:t>Raccolta requisiti</a:t>
+            </a:r>
+          </a:p>
+        </p:txBody>
+      </p:sp>
+      <p:sp>
+        <p:nvSpPr>
+          <p:cNvPr id="10" name="sketch line">
+            <a:extLst>
+              <a:ext uri="{FF2B5EF4-FFF2-40B4-BE49-F238E27FC236}">
+                <a16:creationId xmlns:a16="http://schemas.microsoft.com/office/drawing/2014/main" id="{DB17E863-922E-4C26-BD64-E8FD41D28661}"/>
+              </a:ext>
+              <a:ext uri="{C183D7F6-B498-43B3-948B-1728B52AA6E4}">
+                <adec:decorative xmlns:adec="http://schemas.microsoft.com/office/drawing/2017/decorative" val="1"/>
+              </a:ext>
+            </a:extLst>
+          </p:cNvPr>
+          <p:cNvSpPr>
+            <a:spLocks noGrp="1" noRot="1" noChangeAspect="1" noMove="1" noResize="1" noEditPoints="1" noAdjustHandles="1" noChangeArrowheads="1" noChangeShapeType="1" noTextEdit="1"/>
+          </p:cNvSpPr>
+          <p:nvPr>
+            <p:extLst>
+              <p:ext uri="{386F3935-93C4-4BCD-93E2-E3B085C9AB24}">
+                <p16:designElem xmlns:p16="http://schemas.microsoft.com/office/powerpoint/2015/main" val="1"/>
+              </p:ext>
+            </p:extLst>
+          </p:nvPr>
+        </p:nvSpPr>
+        <p:spPr>
+          <a:xfrm>
+            <a:off x="669036" y="1677373"/>
+            <a:ext cx="10853928" cy="18288"/>
+          </a:xfrm>
+          <a:custGeom>
+            <a:avLst/>
+            <a:gdLst>
+              <a:gd name="csX0" fmla="*/ 0 w 10853928"/>
+              <a:gd name="csY0" fmla="*/ 0 h 18288"/>
+              <a:gd name="csX1" fmla="*/ 461292 w 10853928"/>
+              <a:gd name="csY1" fmla="*/ 0 h 18288"/>
+              <a:gd name="csX2" fmla="*/ 1139662 w 10853928"/>
+              <a:gd name="csY2" fmla="*/ 0 h 18288"/>
+              <a:gd name="csX3" fmla="*/ 1926572 w 10853928"/>
+              <a:gd name="csY3" fmla="*/ 0 h 18288"/>
+              <a:gd name="csX4" fmla="*/ 2279325 w 10853928"/>
+              <a:gd name="csY4" fmla="*/ 0 h 18288"/>
+              <a:gd name="csX5" fmla="*/ 2632078 w 10853928"/>
+              <a:gd name="csY5" fmla="*/ 0 h 18288"/>
+              <a:gd name="csX6" fmla="*/ 3527527 w 10853928"/>
+              <a:gd name="csY6" fmla="*/ 0 h 18288"/>
+              <a:gd name="csX7" fmla="*/ 4205897 w 10853928"/>
+              <a:gd name="csY7" fmla="*/ 0 h 18288"/>
+              <a:gd name="csX8" fmla="*/ 4558650 w 10853928"/>
+              <a:gd name="csY8" fmla="*/ 0 h 18288"/>
+              <a:gd name="csX9" fmla="*/ 5237020 w 10853928"/>
+              <a:gd name="csY9" fmla="*/ 0 h 18288"/>
+              <a:gd name="csX10" fmla="*/ 6132469 w 10853928"/>
+              <a:gd name="csY10" fmla="*/ 0 h 18288"/>
+              <a:gd name="csX11" fmla="*/ 6702301 w 10853928"/>
+              <a:gd name="csY11" fmla="*/ 0 h 18288"/>
+              <a:gd name="csX12" fmla="*/ 7272132 w 10853928"/>
+              <a:gd name="csY12" fmla="*/ 0 h 18288"/>
+              <a:gd name="csX13" fmla="*/ 7950502 w 10853928"/>
+              <a:gd name="csY13" fmla="*/ 0 h 18288"/>
+              <a:gd name="csX14" fmla="*/ 8737412 w 10853928"/>
+              <a:gd name="csY14" fmla="*/ 0 h 18288"/>
+              <a:gd name="csX15" fmla="*/ 9524322 w 10853928"/>
+              <a:gd name="csY15" fmla="*/ 0 h 18288"/>
+              <a:gd name="csX16" fmla="*/ 10853928 w 10853928"/>
+              <a:gd name="csY16" fmla="*/ 0 h 18288"/>
+              <a:gd name="csX17" fmla="*/ 10853928 w 10853928"/>
+              <a:gd name="csY17" fmla="*/ 18288 h 18288"/>
+              <a:gd name="csX18" fmla="*/ 10392636 w 10853928"/>
+              <a:gd name="csY18" fmla="*/ 18288 h 18288"/>
+              <a:gd name="csX19" fmla="*/ 9497187 w 10853928"/>
+              <a:gd name="csY19" fmla="*/ 18288 h 18288"/>
+              <a:gd name="csX20" fmla="*/ 8818817 w 10853928"/>
+              <a:gd name="csY20" fmla="*/ 18288 h 18288"/>
+              <a:gd name="csX21" fmla="*/ 8466064 w 10853928"/>
+              <a:gd name="csY21" fmla="*/ 18288 h 18288"/>
+              <a:gd name="csX22" fmla="*/ 7787693 w 10853928"/>
+              <a:gd name="csY22" fmla="*/ 18288 h 18288"/>
+              <a:gd name="csX23" fmla="*/ 7217862 w 10853928"/>
+              <a:gd name="csY23" fmla="*/ 18288 h 18288"/>
+              <a:gd name="csX24" fmla="*/ 6648031 w 10853928"/>
+              <a:gd name="csY24" fmla="*/ 18288 h 18288"/>
+              <a:gd name="csX25" fmla="*/ 6078200 w 10853928"/>
+              <a:gd name="csY25" fmla="*/ 18288 h 18288"/>
+              <a:gd name="csX26" fmla="*/ 5508368 w 10853928"/>
+              <a:gd name="csY26" fmla="*/ 18288 h 18288"/>
+              <a:gd name="csX27" fmla="*/ 4721459 w 10853928"/>
+              <a:gd name="csY27" fmla="*/ 18288 h 18288"/>
+              <a:gd name="csX28" fmla="*/ 4043088 w 10853928"/>
+              <a:gd name="csY28" fmla="*/ 18288 h 18288"/>
+              <a:gd name="csX29" fmla="*/ 3690336 w 10853928"/>
+              <a:gd name="csY29" fmla="*/ 18288 h 18288"/>
+              <a:gd name="csX30" fmla="*/ 3120504 w 10853928"/>
+              <a:gd name="csY30" fmla="*/ 18288 h 18288"/>
+              <a:gd name="csX31" fmla="*/ 2333595 w 10853928"/>
+              <a:gd name="csY31" fmla="*/ 18288 h 18288"/>
+              <a:gd name="csX32" fmla="*/ 1872303 w 10853928"/>
+              <a:gd name="csY32" fmla="*/ 18288 h 18288"/>
+              <a:gd name="csX33" fmla="*/ 976854 w 10853928"/>
+              <a:gd name="csY33" fmla="*/ 18288 h 18288"/>
+              <a:gd name="csX34" fmla="*/ 0 w 10853928"/>
+              <a:gd name="csY34" fmla="*/ 18288 h 18288"/>
+              <a:gd name="csX35" fmla="*/ 0 w 10853928"/>
+              <a:gd name="csY35" fmla="*/ 0 h 18288"/>
+            </a:gdLst>
+            <a:ahLst/>
+            <a:cxnLst>
+              <a:cxn ang="0">
+                <a:pos x="csX0" y="csY0"/>
+              </a:cxn>
+              <a:cxn ang="0">
+                <a:pos x="csX1" y="csY1"/>
+              </a:cxn>
+              <a:cxn ang="0">
+                <a:pos x="csX2" y="csY2"/>
+              </a:cxn>
+              <a:cxn ang="0">
+                <a:pos x="csX3" y="csY3"/>
+              </a:cxn>
+              <a:cxn ang="0">
+                <a:pos x="csX4" y="csY4"/>
+              </a:cxn>
+              <a:cxn ang="0">
+                <a:pos x="csX5" y="csY5"/>
+              </a:cxn>
+              <a:cxn ang="0">
+                <a:pos x="csX6" y="csY6"/>
+              </a:cxn>
+              <a:cxn ang="0">
+                <a:pos x="csX7" y="csY7"/>
+              </a:cxn>
+              <a:cxn ang="0">
+                <a:pos x="csX8" y="csY8"/>
+              </a:cxn>
+              <a:cxn ang="0">
+                <a:pos x="csX9" y="csY9"/>
+              </a:cxn>
+              <a:cxn ang="0">
+                <a:pos x="csX10" y="csY10"/>
+              </a:cxn>
+              <a:cxn ang="0">
+                <a:pos x="csX11" y="csY11"/>
+              </a:cxn>
+              <a:cxn ang="0">
+                <a:pos x="csX12" y="csY12"/>
+              </a:cxn>
+              <a:cxn ang="0">
+                <a:pos x="csX13" y="csY13"/>
+              </a:cxn>
+              <a:cxn ang="0">
+                <a:pos x="csX14" y="csY14"/>
+              </a:cxn>
+              <a:cxn ang="0">
+                <a:pos x="csX15" y="csY15"/>
+              </a:cxn>
+              <a:cxn ang="0">
+                <a:pos x="csX16" y="csY16"/>
+              </a:cxn>
+              <a:cxn ang="0">
+                <a:pos x="csX17" y="csY17"/>
+              </a:cxn>
+              <a:cxn ang="0">
+                <a:pos x="csX18" y="csY18"/>
+              </a:cxn>
+              <a:cxn ang="0">
+                <a:pos x="csX19" y="csY19"/>
+              </a:cxn>
+              <a:cxn ang="0">
+                <a:pos x="csX20" y="csY20"/>
+              </a:cxn>
+              <a:cxn ang="0">
+                <a:pos x="csX21" y="csY21"/>
+              </a:cxn>
+              <a:cxn ang="0">
+                <a:pos x="csX22" y="csY22"/>
+              </a:cxn>
+              <a:cxn ang="0">
+                <a:pos x="csX23" y="csY23"/>
+              </a:cxn>
+              <a:cxn ang="0">
+                <a:pos x="csX24" y="csY24"/>
+              </a:cxn>
+              <a:cxn ang="0">
+                <a:pos x="csX25" y="csY25"/>
+              </a:cxn>
+              <a:cxn ang="0">
+                <a:pos x="csX26" y="csY26"/>
+              </a:cxn>
+              <a:cxn ang="0">
+                <a:pos x="csX27" y="csY27"/>
+              </a:cxn>
+              <a:cxn ang="0">
+                <a:pos x="csX28" y="csY28"/>
+              </a:cxn>
+              <a:cxn ang="0">
+                <a:pos x="csX29" y="csY29"/>
+              </a:cxn>
+              <a:cxn ang="0">
+                <a:pos x="csX30" y="csY30"/>
+              </a:cxn>
+              <a:cxn ang="0">
+                <a:pos x="csX31" y="csY31"/>
+              </a:cxn>
+              <a:cxn ang="0">
+                <a:pos x="csX32" y="csY32"/>
+              </a:cxn>
+              <a:cxn ang="0">
+                <a:pos x="csX33" y="csY33"/>
+              </a:cxn>
+              <a:cxn ang="0">
+                <a:pos x="csX34" y="csY34"/>
+              </a:cxn>
+              <a:cxn ang="0">
+                <a:pos x="csX35" y="csY35"/>
+              </a:cxn>
+            </a:cxnLst>
+            <a:rect l="l" t="t" r="r" b="b"/>
+            <a:pathLst>
+              <a:path w="10853928" h="18288" fill="none" extrusionOk="0">
+                <a:moveTo>
+                  <a:pt x="0" y="0"/>
+                </a:moveTo>
+                <a:cubicBezTo>
+                  <a:pt x="146993" y="-19076"/>
+                  <a:pt x="347684" y="-4790"/>
+                  <a:pt x="461292" y="0"/>
+                </a:cubicBezTo>
+                <a:cubicBezTo>
+                  <a:pt x="574900" y="4790"/>
+                  <a:pt x="808367" y="19821"/>
+                  <a:pt x="1139662" y="0"/>
+                </a:cubicBezTo>
+                <a:cubicBezTo>
+                  <a:pt x="1470957" y="-19821"/>
+                  <a:pt x="1627405" y="5721"/>
+                  <a:pt x="1926572" y="0"/>
+                </a:cubicBezTo>
+                <a:cubicBezTo>
+                  <a:pt x="2225739" y="-5721"/>
+                  <a:pt x="2137730" y="-3235"/>
+                  <a:pt x="2279325" y="0"/>
+                </a:cubicBezTo>
+                <a:cubicBezTo>
+                  <a:pt x="2420920" y="3235"/>
+                  <a:pt x="2456518" y="9685"/>
+                  <a:pt x="2632078" y="0"/>
+                </a:cubicBezTo>
+                <a:cubicBezTo>
+                  <a:pt x="2807638" y="-9685"/>
+                  <a:pt x="3211516" y="-43007"/>
+                  <a:pt x="3527527" y="0"/>
+                </a:cubicBezTo>
+                <a:cubicBezTo>
+                  <a:pt x="3843538" y="43007"/>
+                  <a:pt x="4058833" y="22042"/>
+                  <a:pt x="4205897" y="0"/>
+                </a:cubicBezTo>
+                <a:cubicBezTo>
+                  <a:pt x="4352961" y="-22042"/>
+                  <a:pt x="4474805" y="-11846"/>
+                  <a:pt x="4558650" y="0"/>
+                </a:cubicBezTo>
+                <a:cubicBezTo>
+                  <a:pt x="4642495" y="11846"/>
+                  <a:pt x="5041928" y="-6069"/>
+                  <a:pt x="5237020" y="0"/>
+                </a:cubicBezTo>
+                <a:cubicBezTo>
+                  <a:pt x="5432112" y="6069"/>
+                  <a:pt x="5943266" y="-17479"/>
+                  <a:pt x="6132469" y="0"/>
+                </a:cubicBezTo>
+                <a:cubicBezTo>
+                  <a:pt x="6321672" y="17479"/>
+                  <a:pt x="6483872" y="26234"/>
+                  <a:pt x="6702301" y="0"/>
+                </a:cubicBezTo>
+                <a:cubicBezTo>
+                  <a:pt x="6920730" y="-26234"/>
+                  <a:pt x="6991194" y="-15156"/>
+                  <a:pt x="7272132" y="0"/>
+                </a:cubicBezTo>
+                <a:cubicBezTo>
+                  <a:pt x="7553070" y="15156"/>
+                  <a:pt x="7684444" y="-32961"/>
+                  <a:pt x="7950502" y="0"/>
+                </a:cubicBezTo>
+                <a:cubicBezTo>
+                  <a:pt x="8216560" y="32961"/>
+                  <a:pt x="8493290" y="-10491"/>
+                  <a:pt x="8737412" y="0"/>
+                </a:cubicBezTo>
+                <a:cubicBezTo>
+                  <a:pt x="8981534" y="10491"/>
+                  <a:pt x="9191586" y="-13899"/>
+                  <a:pt x="9524322" y="0"/>
+                </a:cubicBezTo>
+                <a:cubicBezTo>
+                  <a:pt x="9857058" y="13899"/>
+                  <a:pt x="10297509" y="7485"/>
+                  <a:pt x="10853928" y="0"/>
+                </a:cubicBezTo>
+                <a:cubicBezTo>
+                  <a:pt x="10854574" y="4451"/>
+                  <a:pt x="10854418" y="9226"/>
+                  <a:pt x="10853928" y="18288"/>
+                </a:cubicBezTo>
+                <a:cubicBezTo>
+                  <a:pt x="10691638" y="28522"/>
+                  <a:pt x="10574319" y="29578"/>
+                  <a:pt x="10392636" y="18288"/>
+                </a:cubicBezTo>
+                <a:cubicBezTo>
+                  <a:pt x="10210953" y="6998"/>
+                  <a:pt x="9836277" y="-16742"/>
+                  <a:pt x="9497187" y="18288"/>
+                </a:cubicBezTo>
+                <a:cubicBezTo>
+                  <a:pt x="9158097" y="53318"/>
+                  <a:pt x="9119479" y="30714"/>
+                  <a:pt x="8818817" y="18288"/>
+                </a:cubicBezTo>
+                <a:cubicBezTo>
+                  <a:pt x="8518155" y="5863"/>
+                  <a:pt x="8640037" y="6483"/>
+                  <a:pt x="8466064" y="18288"/>
+                </a:cubicBezTo>
+                <a:cubicBezTo>
+                  <a:pt x="8292091" y="30093"/>
+                  <a:pt x="7997656" y="18914"/>
+                  <a:pt x="7787693" y="18288"/>
+                </a:cubicBezTo>
+                <a:cubicBezTo>
+                  <a:pt x="7577730" y="17662"/>
+                  <a:pt x="7412468" y="21416"/>
+                  <a:pt x="7217862" y="18288"/>
+                </a:cubicBezTo>
+                <a:cubicBezTo>
+                  <a:pt x="7023256" y="15160"/>
+                  <a:pt x="6898018" y="14824"/>
+                  <a:pt x="6648031" y="18288"/>
+                </a:cubicBezTo>
+                <a:cubicBezTo>
+                  <a:pt x="6398044" y="21752"/>
+                  <a:pt x="6254402" y="38625"/>
+                  <a:pt x="6078200" y="18288"/>
+                </a:cubicBezTo>
+                <a:cubicBezTo>
+                  <a:pt x="5901998" y="-2049"/>
+                  <a:pt x="5622886" y="3213"/>
+                  <a:pt x="5508368" y="18288"/>
+                </a:cubicBezTo>
+                <a:cubicBezTo>
+                  <a:pt x="5393850" y="33363"/>
+                  <a:pt x="5036260" y="26830"/>
+                  <a:pt x="4721459" y="18288"/>
+                </a:cubicBezTo>
+                <a:cubicBezTo>
+                  <a:pt x="4406658" y="9746"/>
+                  <a:pt x="4239221" y="41551"/>
+                  <a:pt x="4043088" y="18288"/>
+                </a:cubicBezTo>
+                <a:cubicBezTo>
+                  <a:pt x="3846955" y="-4975"/>
+                  <a:pt x="3818802" y="34658"/>
+                  <a:pt x="3690336" y="18288"/>
+                </a:cubicBezTo>
+                <a:cubicBezTo>
+                  <a:pt x="3561870" y="1918"/>
+                  <a:pt x="3265491" y="42194"/>
+                  <a:pt x="3120504" y="18288"/>
+                </a:cubicBezTo>
+                <a:cubicBezTo>
+                  <a:pt x="2975517" y="-5618"/>
+                  <a:pt x="2720254" y="36673"/>
+                  <a:pt x="2333595" y="18288"/>
+                </a:cubicBezTo>
+                <a:cubicBezTo>
+                  <a:pt x="1946936" y="-97"/>
+                  <a:pt x="2097241" y="5776"/>
+                  <a:pt x="1872303" y="18288"/>
+                </a:cubicBezTo>
+                <a:cubicBezTo>
+                  <a:pt x="1647365" y="30800"/>
+                  <a:pt x="1282708" y="45380"/>
+                  <a:pt x="976854" y="18288"/>
+                </a:cubicBezTo>
+                <a:cubicBezTo>
+                  <a:pt x="671000" y="-8804"/>
+                  <a:pt x="408401" y="-12775"/>
+                  <a:pt x="0" y="18288"/>
+                </a:cubicBezTo>
+                <a:cubicBezTo>
+                  <a:pt x="-213" y="9468"/>
+                  <a:pt x="187" y="4459"/>
+                  <a:pt x="0" y="0"/>
+                </a:cubicBezTo>
+                <a:close/>
+              </a:path>
+              <a:path w="10853928" h="18288" stroke="0" extrusionOk="0">
+                <a:moveTo>
+                  <a:pt x="0" y="0"/>
+                </a:moveTo>
+                <a:cubicBezTo>
+                  <a:pt x="267322" y="15284"/>
+                  <a:pt x="415388" y="-21048"/>
+                  <a:pt x="569831" y="0"/>
+                </a:cubicBezTo>
+                <a:cubicBezTo>
+                  <a:pt x="724274" y="21048"/>
+                  <a:pt x="769333" y="-2353"/>
+                  <a:pt x="922584" y="0"/>
+                </a:cubicBezTo>
+                <a:cubicBezTo>
+                  <a:pt x="1075835" y="2353"/>
+                  <a:pt x="1399490" y="-145"/>
+                  <a:pt x="1818033" y="0"/>
+                </a:cubicBezTo>
+                <a:cubicBezTo>
+                  <a:pt x="2236576" y="145"/>
+                  <a:pt x="2145330" y="5482"/>
+                  <a:pt x="2387864" y="0"/>
+                </a:cubicBezTo>
+                <a:cubicBezTo>
+                  <a:pt x="2630398" y="-5482"/>
+                  <a:pt x="2793207" y="18487"/>
+                  <a:pt x="2957695" y="0"/>
+                </a:cubicBezTo>
+                <a:cubicBezTo>
+                  <a:pt x="3122183" y="-18487"/>
+                  <a:pt x="3579141" y="19003"/>
+                  <a:pt x="3853144" y="0"/>
+                </a:cubicBezTo>
+                <a:cubicBezTo>
+                  <a:pt x="4127147" y="-19003"/>
+                  <a:pt x="4209857" y="12211"/>
+                  <a:pt x="4314436" y="0"/>
+                </a:cubicBezTo>
+                <a:cubicBezTo>
+                  <a:pt x="4419015" y="-12211"/>
+                  <a:pt x="4762459" y="-17220"/>
+                  <a:pt x="5209885" y="0"/>
+                </a:cubicBezTo>
+                <a:cubicBezTo>
+                  <a:pt x="5657311" y="17220"/>
+                  <a:pt x="5692663" y="-3290"/>
+                  <a:pt x="6105335" y="0"/>
+                </a:cubicBezTo>
+                <a:cubicBezTo>
+                  <a:pt x="6518007" y="3290"/>
+                  <a:pt x="6455516" y="-5124"/>
+                  <a:pt x="6783705" y="0"/>
+                </a:cubicBezTo>
+                <a:cubicBezTo>
+                  <a:pt x="7111894" y="5124"/>
+                  <a:pt x="7441941" y="-17829"/>
+                  <a:pt x="7679154" y="0"/>
+                </a:cubicBezTo>
+                <a:cubicBezTo>
+                  <a:pt x="7916367" y="17829"/>
+                  <a:pt x="8102967" y="-24363"/>
+                  <a:pt x="8248985" y="0"/>
+                </a:cubicBezTo>
+                <a:cubicBezTo>
+                  <a:pt x="8395003" y="24363"/>
+                  <a:pt x="8552393" y="25505"/>
+                  <a:pt x="8818817" y="0"/>
+                </a:cubicBezTo>
+                <a:cubicBezTo>
+                  <a:pt x="9085241" y="-25505"/>
+                  <a:pt x="9411308" y="38000"/>
+                  <a:pt x="9605726" y="0"/>
+                </a:cubicBezTo>
+                <a:cubicBezTo>
+                  <a:pt x="9800144" y="-38000"/>
+                  <a:pt x="10006468" y="-25741"/>
+                  <a:pt x="10175558" y="0"/>
+                </a:cubicBezTo>
+                <a:cubicBezTo>
+                  <a:pt x="10344648" y="25741"/>
+                  <a:pt x="10696282" y="695"/>
+                  <a:pt x="10853928" y="0"/>
+                </a:cubicBezTo>
+                <a:cubicBezTo>
+                  <a:pt x="10853521" y="8690"/>
+                  <a:pt x="10853774" y="14141"/>
+                  <a:pt x="10853928" y="18288"/>
+                </a:cubicBezTo>
+                <a:cubicBezTo>
+                  <a:pt x="10608124" y="24255"/>
+                  <a:pt x="10343415" y="22307"/>
+                  <a:pt x="10067018" y="18288"/>
+                </a:cubicBezTo>
+                <a:cubicBezTo>
+                  <a:pt x="9790621" y="14270"/>
+                  <a:pt x="9843266" y="3564"/>
+                  <a:pt x="9714266" y="18288"/>
+                </a:cubicBezTo>
+                <a:cubicBezTo>
+                  <a:pt x="9585266" y="33012"/>
+                  <a:pt x="9379484" y="1875"/>
+                  <a:pt x="9252974" y="18288"/>
+                </a:cubicBezTo>
+                <a:cubicBezTo>
+                  <a:pt x="9126464" y="34701"/>
+                  <a:pt x="8580678" y="-4904"/>
+                  <a:pt x="8357525" y="18288"/>
+                </a:cubicBezTo>
+                <a:cubicBezTo>
+                  <a:pt x="8134372" y="41480"/>
+                  <a:pt x="7903199" y="26458"/>
+                  <a:pt x="7679154" y="18288"/>
+                </a:cubicBezTo>
+                <a:cubicBezTo>
+                  <a:pt x="7455109" y="10118"/>
+                  <a:pt x="7435944" y="27109"/>
+                  <a:pt x="7217862" y="18288"/>
+                </a:cubicBezTo>
+                <a:cubicBezTo>
+                  <a:pt x="6999780" y="9467"/>
+                  <a:pt x="6680409" y="18985"/>
+                  <a:pt x="6539492" y="18288"/>
+                </a:cubicBezTo>
+                <a:cubicBezTo>
+                  <a:pt x="6398575" y="17592"/>
+                  <a:pt x="6312077" y="33018"/>
+                  <a:pt x="6186739" y="18288"/>
+                </a:cubicBezTo>
+                <a:cubicBezTo>
+                  <a:pt x="6061401" y="3558"/>
+                  <a:pt x="5947033" y="12075"/>
+                  <a:pt x="5833986" y="18288"/>
+                </a:cubicBezTo>
+                <a:cubicBezTo>
+                  <a:pt x="5720939" y="24501"/>
+                  <a:pt x="5482226" y="8586"/>
+                  <a:pt x="5155616" y="18288"/>
+                </a:cubicBezTo>
+                <a:cubicBezTo>
+                  <a:pt x="4829006" y="27991"/>
+                  <a:pt x="4841274" y="29316"/>
+                  <a:pt x="4694324" y="18288"/>
+                </a:cubicBezTo>
+                <a:cubicBezTo>
+                  <a:pt x="4547374" y="7260"/>
+                  <a:pt x="4077675" y="7013"/>
+                  <a:pt x="3907414" y="18288"/>
+                </a:cubicBezTo>
+                <a:cubicBezTo>
+                  <a:pt x="3737153" y="29564"/>
+                  <a:pt x="3538393" y="21630"/>
+                  <a:pt x="3446122" y="18288"/>
+                </a:cubicBezTo>
+                <a:cubicBezTo>
+                  <a:pt x="3353851" y="14946"/>
+                  <a:pt x="2990320" y="-8091"/>
+                  <a:pt x="2659212" y="18288"/>
+                </a:cubicBezTo>
+                <a:cubicBezTo>
+                  <a:pt x="2328104" y="44667"/>
+                  <a:pt x="2427653" y="9607"/>
+                  <a:pt x="2306460" y="18288"/>
+                </a:cubicBezTo>
+                <a:cubicBezTo>
+                  <a:pt x="2185267" y="26969"/>
+                  <a:pt x="1719763" y="3717"/>
+                  <a:pt x="1519550" y="18288"/>
+                </a:cubicBezTo>
+                <a:cubicBezTo>
+                  <a:pt x="1319337" y="32860"/>
+                  <a:pt x="1167371" y="17040"/>
+                  <a:pt x="1058258" y="18288"/>
+                </a:cubicBezTo>
+                <a:cubicBezTo>
+                  <a:pt x="949145" y="19536"/>
+                  <a:pt x="780234" y="31447"/>
+                  <a:pt x="705505" y="18288"/>
+                </a:cubicBezTo>
+                <a:cubicBezTo>
+                  <a:pt x="630776" y="5129"/>
+                  <a:pt x="215796" y="30056"/>
+                  <a:pt x="0" y="18288"/>
+                </a:cubicBezTo>
+                <a:cubicBezTo>
+                  <a:pt x="-53" y="11301"/>
+                  <a:pt x="-649" y="7756"/>
+                  <a:pt x="0" y="0"/>
+                </a:cubicBezTo>
+                <a:close/>
+              </a:path>
+            </a:pathLst>
+          </a:custGeom>
+          <a:solidFill>
+            <a:schemeClr val="accent2"/>
+          </a:solidFill>
+          <a:ln w="41275" cap="rnd">
+            <a:solidFill>
+              <a:schemeClr val="accent2"/>
+            </a:solidFill>
+            <a:round/>
+            <a:extLst>
+              <a:ext uri="{C807C97D-BFC1-408E-A445-0C87EB9F89A2}">
+                <ask:lineSketchStyleProps xmlns:ask="http://schemas.microsoft.com/office/drawing/2018/sketchyshapes" sd="1219033472">
+                  <a:prstGeom prst="rect">
+                    <a:avLst/>
+                  </a:prstGeom>
+                  <ask:type>
+                    <ask:lineSketchFreehand/>
+                  </ask:type>
+                </ask:lineSketchStyleProps>
+              </a:ext>
+            </a:extLst>
+          </a:ln>
+        </p:spPr>
+        <p:style>
+          <a:lnRef idx="2">
+            <a:schemeClr val="accent1">
+              <a:shade val="50000"/>
+            </a:schemeClr>
+          </a:lnRef>
+          <a:fillRef idx="1">
+            <a:schemeClr val="accent1"/>
+          </a:fillRef>
+          <a:effectRef idx="0">
+            <a:schemeClr val="accent1"/>
+          </a:effectRef>
+          <a:fontRef idx="minor">
+            <a:schemeClr val="lt1"/>
+          </a:fontRef>
+        </p:style>
+        <p:txBody>
+          <a:bodyPr rtlCol="0" anchor="ctr"/>
+          <a:lstStyle/>
+          <a:p>
+            <a:pPr algn="ctr"/>
+            <a:endParaRPr lang="en-US"/>
+          </a:p>
+        </p:txBody>
+      </p:sp>
+      <p:sp>
+        <p:nvSpPr>
+          <p:cNvPr id="3" name="Segnaposto contenuto 2">
+            <a:extLst>
+              <a:ext uri="{FF2B5EF4-FFF2-40B4-BE49-F238E27FC236}">
+                <a16:creationId xmlns:a16="http://schemas.microsoft.com/office/drawing/2014/main" id="{EA2EB47B-9CEC-D6F2-EEB0-6ACDBC2CF3CC}"/>
+              </a:ext>
+            </a:extLst>
+          </p:cNvPr>
+          <p:cNvSpPr>
+            <a:spLocks noGrp="1"/>
+          </p:cNvSpPr>
+          <p:nvPr>
+            <p:ph idx="1"/>
+          </p:nvPr>
+        </p:nvSpPr>
+        <p:spPr>
+          <a:xfrm>
+            <a:off x="838200" y="1929384"/>
+            <a:ext cx="10515600" cy="4251960"/>
+          </a:xfrm>
+        </p:spPr>
+        <p:txBody>
+          <a:bodyPr vert="horz" lIns="91440" tIns="45720" rIns="91440" bIns="45720" rtlCol="0">
+            <a:normAutofit/>
+          </a:bodyPr>
+          <a:lstStyle/>
+          <a:p>
+            <a:pPr marL="0" indent="0">
+              <a:buNone/>
+            </a:pPr>
+            <a:r>
+              <a:rPr lang="it-IT" sz="2200" dirty="0"/>
+              <a:t>Interviste condotte a 14 utenti:</a:t>
+            </a:r>
+          </a:p>
+          <a:p>
+            <a:r>
+              <a:rPr lang="it-IT" sz="2200" dirty="0"/>
+              <a:t>3 soci con responsabilità distinte</a:t>
+            </a:r>
+          </a:p>
+          <a:p>
+            <a:r>
+              <a:rPr lang="it-IT" sz="2200" dirty="0"/>
+              <a:t>4 non utilizzatori</a:t>
+            </a:r>
+          </a:p>
+          <a:p>
+            <a:r>
+              <a:rPr lang="it-IT" sz="2200" dirty="0"/>
+              <a:t>7 utilizzatori dell’attuale programma</a:t>
+            </a:r>
+          </a:p>
+          <a:p>
+            <a:r>
+              <a:rPr lang="it-IT" sz="2200" dirty="0"/>
+              <a:t>Interviste condotte singolarmente con l’utilizzo di registrazione audio e video.</a:t>
+            </a:r>
+          </a:p>
+        </p:txBody>
+      </p:sp>
+    </p:spTree>
+    <p:extLst>
+      <p:ext uri="{BB962C8B-B14F-4D97-AF65-F5344CB8AC3E}">
+        <p14:creationId xmlns:p14="http://schemas.microsoft.com/office/powerpoint/2010/main" val="829791087"/>
+      </p:ext>
+    </p:extLst>
+  </p:cSld>
+  <p:clrMapOvr>
+    <a:masterClrMapping/>
+  </p:clrMapOvr>
+</p:sld>
+</file>
+
+<file path=ppt/slides/slide5.xml><?xml version="1.0" encoding="utf-8"?>
+<p:sld xmlns:a="http://schemas.openxmlformats.org/drawingml/2006/main" xmlns:r="http://schemas.openxmlformats.org/officeDocument/2006/relationships" xmlns:p="http://schemas.openxmlformats.org/presentationml/2006/main">
+  <p:cSld>
+    <p:spTree>
+      <p:nvGrpSpPr>
+        <p:cNvPr id="1" name=""/>
+        <p:cNvGrpSpPr/>
+        <p:nvPr/>
+      </p:nvGrpSpPr>
+      <p:grpSpPr>
+        <a:xfrm>
+          <a:off x="0" y="0"/>
+          <a:ext cx="0" cy="0"/>
+          <a:chOff x="0" y="0"/>
+          <a:chExt cx="0" cy="0"/>
+        </a:xfrm>
+      </p:grpSpPr>
+      <p:sp>
+        <p:nvSpPr>
+          <p:cNvPr id="2" name="Titolo 1">
+            <a:extLst>
+              <a:ext uri="{FF2B5EF4-FFF2-40B4-BE49-F238E27FC236}">
+                <a16:creationId xmlns:a16="http://schemas.microsoft.com/office/drawing/2014/main" id="{521BEB27-E375-CF7F-39A2-867984623FD5}"/>
+              </a:ext>
+            </a:extLst>
+          </p:cNvPr>
+          <p:cNvSpPr>
+            <a:spLocks noGrp="1"/>
+          </p:cNvSpPr>
+          <p:nvPr>
+            <p:ph type="title"/>
+          </p:nvPr>
+        </p:nvSpPr>
+        <p:spPr/>
+        <p:txBody>
+          <a:bodyPr/>
+          <a:lstStyle/>
+          <a:p>
+            <a:r>
+              <a:rPr lang="it-IT" dirty="0"/>
+              <a:t>Metodologia progettazione</a:t>
+            </a:r>
+          </a:p>
+        </p:txBody>
+      </p:sp>
+      <p:sp>
+        <p:nvSpPr>
+          <p:cNvPr id="3" name="Segnaposto contenuto 2">
+            <a:extLst>
+              <a:ext uri="{FF2B5EF4-FFF2-40B4-BE49-F238E27FC236}">
+                <a16:creationId xmlns:a16="http://schemas.microsoft.com/office/drawing/2014/main" id="{DA4D080A-264A-F3B7-BC24-D7277569B83F}"/>
+              </a:ext>
+            </a:extLst>
+          </p:cNvPr>
+          <p:cNvSpPr>
+            <a:spLocks noGrp="1"/>
+          </p:cNvSpPr>
+          <p:nvPr>
+            <p:ph idx="1"/>
+          </p:nvPr>
+        </p:nvSpPr>
+        <p:spPr>
+          <a:xfrm>
+            <a:off x="838200" y="1577360"/>
+            <a:ext cx="6526161" cy="1851640"/>
+          </a:xfrm>
+        </p:spPr>
+        <p:txBody>
+          <a:bodyPr vert="horz" lIns="91440" tIns="45720" rIns="91440" bIns="45720" rtlCol="0">
+            <a:normAutofit lnSpcReduction="10000"/>
+          </a:bodyPr>
+          <a:lstStyle/>
+          <a:p>
+            <a:r>
+              <a:rPr lang="it-IT" sz="2200" dirty="0"/>
+              <a:t>Scelta progettazione agile</a:t>
+            </a:r>
+          </a:p>
+          <a:p>
+            <a:r>
+              <a:rPr lang="it-IT" sz="2200" dirty="0"/>
+              <a:t>Frequenti focus group sfruttando mia presenza in azienda.</a:t>
+            </a:r>
+          </a:p>
+          <a:p>
+            <a:r>
+              <a:rPr lang="it-IT" sz="2200" dirty="0"/>
+              <a:t>Creazione di test per testare il back end</a:t>
+            </a:r>
+          </a:p>
+          <a:p>
+            <a:pPr marL="0" indent="0">
+              <a:buNone/>
+            </a:pPr>
+            <a:r>
+              <a:rPr lang="it-IT" sz="2200" dirty="0"/>
+              <a:t>Prototipazione interfacce </a:t>
+            </a:r>
+            <a:r>
+              <a:rPr lang="it-IT" sz="2200" dirty="0" err="1"/>
+              <a:t>view</a:t>
+            </a:r>
+            <a:endParaRPr lang="it-IT" sz="2200" dirty="0"/>
+          </a:p>
+          <a:p>
+            <a:pPr marL="0" indent="0">
+              <a:buNone/>
+            </a:pPr>
+            <a:endParaRPr lang="it-IT" sz="2200" dirty="0"/>
+          </a:p>
+        </p:txBody>
+      </p:sp>
+      <p:sp>
+        <p:nvSpPr>
+          <p:cNvPr id="4" name="Segnaposto contenuto 2">
+            <a:extLst>
+              <a:ext uri="{FF2B5EF4-FFF2-40B4-BE49-F238E27FC236}">
+                <a16:creationId xmlns:a16="http://schemas.microsoft.com/office/drawing/2014/main" id="{836541A7-24D1-4A13-148F-47556F2A3D00}"/>
+              </a:ext>
+            </a:extLst>
+          </p:cNvPr>
+          <p:cNvSpPr txBox="1">
+            <a:spLocks/>
+          </p:cNvSpPr>
+          <p:nvPr/>
+        </p:nvSpPr>
+        <p:spPr>
+          <a:xfrm>
+            <a:off x="838200" y="4682331"/>
+            <a:ext cx="7725697" cy="4351338"/>
+          </a:xfrm>
+          <a:prstGeom prst="rect">
+            <a:avLst/>
+          </a:prstGeom>
+        </p:spPr>
+        <p:txBody>
+          <a:bodyPr vert="horz" lIns="91440" tIns="45720" rIns="91440" bIns="45720" rtlCol="0">
+            <a:normAutofit/>
+          </a:bodyPr>
+          <a:lstStyle>
+            <a:lvl1pPr marL="228600" indent="-228600" algn="l" defTabSz="914400" rtl="0" eaLnBrk="1" latinLnBrk="0" hangingPunct="1">
+              <a:lnSpc>
+                <a:spcPct val="90000"/>
+              </a:lnSpc>
+              <a:spcBef>
+                <a:spcPts val="1000"/>
+              </a:spcBef>
+              <a:buFont typeface="Arial" panose="020B0604020202020204" pitchFamily="34" charset="0"/>
+              <a:buChar char="•"/>
+              <a:defRPr sz="2800" kern="1200">
+                <a:solidFill>
+                  <a:schemeClr val="tx1"/>
+                </a:solidFill>
+                <a:latin typeface="+mn-lt"/>
+                <a:ea typeface="+mn-ea"/>
+                <a:cs typeface="+mn-cs"/>
+              </a:defRPr>
+            </a:lvl1pPr>
+            <a:lvl2pPr marL="685800" indent="-228600" algn="l" defTabSz="914400" rtl="0" eaLnBrk="1" latinLnBrk="0" hangingPunct="1">
+              <a:lnSpc>
+                <a:spcPct val="90000"/>
+              </a:lnSpc>
+              <a:spcBef>
+                <a:spcPts val="500"/>
+              </a:spcBef>
+              <a:buFont typeface="Arial" panose="020B0604020202020204" pitchFamily="34" charset="0"/>
+              <a:buChar char="•"/>
+              <a:defRPr sz="2400" kern="1200">
+                <a:solidFill>
+                  <a:schemeClr val="tx1"/>
+                </a:solidFill>
+                <a:latin typeface="+mn-lt"/>
+                <a:ea typeface="+mn-ea"/>
+                <a:cs typeface="+mn-cs"/>
+              </a:defRPr>
+            </a:lvl2pPr>
+            <a:lvl3pPr marL="1143000" indent="-228600" algn="l" defTabSz="914400" rtl="0" eaLnBrk="1" latinLnBrk="0" hangingPunct="1">
+              <a:lnSpc>
+                <a:spcPct val="90000"/>
+              </a:lnSpc>
+              <a:spcBef>
+                <a:spcPts val="500"/>
+              </a:spcBef>
+              <a:buFont typeface="Arial" panose="020B0604020202020204" pitchFamily="34" charset="0"/>
+              <a:buChar char="•"/>
+              <a:defRPr sz="2000" kern="1200">
+                <a:solidFill>
+                  <a:schemeClr val="tx1"/>
+                </a:solidFill>
+                <a:latin typeface="+mn-lt"/>
+                <a:ea typeface="+mn-ea"/>
+                <a:cs typeface="+mn-cs"/>
+              </a:defRPr>
+            </a:lvl3pPr>
+            <a:lvl4pPr marL="1600200" indent="-228600" algn="l" defTabSz="914400" rtl="0" eaLnBrk="1" latinLnBrk="0" hangingPunct="1">
+              <a:lnSpc>
+                <a:spcPct val="90000"/>
+              </a:lnSpc>
+              <a:spcBef>
+                <a:spcPts val="500"/>
+              </a:spcBef>
+              <a:buFont typeface="Arial" panose="020B0604020202020204" pitchFamily="34" charset="0"/>
+              <a:buChar char="•"/>
+              <a:defRPr sz="1800" kern="1200">
+                <a:solidFill>
+                  <a:schemeClr val="tx1"/>
+                </a:solidFill>
+                <a:latin typeface="+mn-lt"/>
+                <a:ea typeface="+mn-ea"/>
+                <a:cs typeface="+mn-cs"/>
+              </a:defRPr>
+            </a:lvl4pPr>
+            <a:lvl5pPr marL="2057400" indent="-228600" algn="l" defTabSz="914400" rtl="0" eaLnBrk="1" latinLnBrk="0" hangingPunct="1">
+              <a:lnSpc>
+                <a:spcPct val="90000"/>
+              </a:lnSpc>
+              <a:spcBef>
+                <a:spcPts val="500"/>
+              </a:spcBef>
+              <a:buFont typeface="Arial" panose="020B0604020202020204" pitchFamily="34" charset="0"/>
+              <a:buChar char="•"/>
+              <a:defRPr sz="1800" kern="1200">
+                <a:solidFill>
+                  <a:schemeClr val="tx1"/>
+                </a:solidFill>
+                <a:latin typeface="+mn-lt"/>
+                <a:ea typeface="+mn-ea"/>
+                <a:cs typeface="+mn-cs"/>
+              </a:defRPr>
+            </a:lvl5pPr>
+            <a:lvl6pPr marL="2514600" indent="-228600" algn="l" defTabSz="914400" rtl="0" eaLnBrk="1" latinLnBrk="0" hangingPunct="1">
+              <a:lnSpc>
+                <a:spcPct val="90000"/>
+              </a:lnSpc>
+              <a:spcBef>
+                <a:spcPts val="500"/>
+              </a:spcBef>
+              <a:buFont typeface="Arial" panose="020B0604020202020204" pitchFamily="34" charset="0"/>
+              <a:buChar char="•"/>
+              <a:defRPr sz="1800" kern="1200">
+                <a:solidFill>
+                  <a:schemeClr val="tx1"/>
+                </a:solidFill>
+                <a:latin typeface="+mn-lt"/>
+                <a:ea typeface="+mn-ea"/>
+                <a:cs typeface="+mn-cs"/>
+              </a:defRPr>
+            </a:lvl6pPr>
+            <a:lvl7pPr marL="2971800" indent="-228600" algn="l" defTabSz="914400" rtl="0" eaLnBrk="1" latinLnBrk="0" hangingPunct="1">
+              <a:lnSpc>
+                <a:spcPct val="90000"/>
+              </a:lnSpc>
+              <a:spcBef>
+                <a:spcPts val="500"/>
+              </a:spcBef>
+              <a:buFont typeface="Arial" panose="020B0604020202020204" pitchFamily="34" charset="0"/>
+              <a:buChar char="•"/>
+              <a:defRPr sz="1800" kern="1200">
+                <a:solidFill>
+                  <a:schemeClr val="tx1"/>
+                </a:solidFill>
+                <a:latin typeface="+mn-lt"/>
+                <a:ea typeface="+mn-ea"/>
+                <a:cs typeface="+mn-cs"/>
+              </a:defRPr>
+            </a:lvl7pPr>
+            <a:lvl8pPr marL="3429000" indent="-228600" algn="l" defTabSz="914400" rtl="0" eaLnBrk="1" latinLnBrk="0" hangingPunct="1">
+              <a:lnSpc>
+                <a:spcPct val="90000"/>
+              </a:lnSpc>
+              <a:spcBef>
+                <a:spcPts val="500"/>
+              </a:spcBef>
+              <a:buFont typeface="Arial" panose="020B0604020202020204" pitchFamily="34" charset="0"/>
+              <a:buChar char="•"/>
+              <a:defRPr sz="1800" kern="1200">
+                <a:solidFill>
+                  <a:schemeClr val="tx1"/>
+                </a:solidFill>
+                <a:latin typeface="+mn-lt"/>
+                <a:ea typeface="+mn-ea"/>
+                <a:cs typeface="+mn-cs"/>
+              </a:defRPr>
+            </a:lvl8pPr>
+            <a:lvl9pPr marL="3886200" indent="-228600" algn="l" defTabSz="914400" rtl="0" eaLnBrk="1" latinLnBrk="0" hangingPunct="1">
+              <a:lnSpc>
+                <a:spcPct val="90000"/>
+              </a:lnSpc>
+              <a:spcBef>
+                <a:spcPts val="500"/>
+              </a:spcBef>
+              <a:buFont typeface="Arial" panose="020B0604020202020204" pitchFamily="34" charset="0"/>
+              <a:buChar char="•"/>
+              <a:defRPr sz="1800" kern="1200">
+                <a:solidFill>
+                  <a:schemeClr val="tx1"/>
+                </a:solidFill>
+                <a:latin typeface="+mn-lt"/>
+                <a:ea typeface="+mn-ea"/>
+                <a:cs typeface="+mn-cs"/>
+              </a:defRPr>
+            </a:lvl9pPr>
+          </a:lstStyle>
+          <a:p>
+            <a:pPr marL="0" indent="0">
+              <a:buNone/>
+            </a:pPr>
+            <a:r>
+              <a:rPr lang="it-IT" sz="2200" dirty="0"/>
+              <a:t>Coprire tutte le attuali funzioni</a:t>
+            </a:r>
+          </a:p>
+          <a:p>
+            <a:pPr marL="0" indent="0">
+              <a:buNone/>
+            </a:pPr>
+            <a:r>
+              <a:rPr lang="it-IT" sz="2200" dirty="0"/>
+              <a:t>Eliminare attuali problematiche bloccanti ( Es: deadlock)</a:t>
+            </a:r>
+          </a:p>
+        </p:txBody>
+      </p:sp>
+      <p:sp>
+        <p:nvSpPr>
+          <p:cNvPr id="5" name="Titolo 1">
+            <a:extLst>
+              <a:ext uri="{FF2B5EF4-FFF2-40B4-BE49-F238E27FC236}">
+                <a16:creationId xmlns:a16="http://schemas.microsoft.com/office/drawing/2014/main" id="{A228C782-48C8-DFBD-6236-FC8A67D9B6F4}"/>
+              </a:ext>
+            </a:extLst>
+          </p:cNvPr>
+          <p:cNvSpPr txBox="1">
+            <a:spLocks/>
+          </p:cNvSpPr>
+          <p:nvPr/>
+        </p:nvSpPr>
+        <p:spPr>
+          <a:xfrm>
+            <a:off x="838200" y="3429000"/>
+            <a:ext cx="10515600" cy="1325563"/>
+          </a:xfrm>
+          <a:prstGeom prst="rect">
+            <a:avLst/>
+          </a:prstGeom>
+        </p:spPr>
+        <p:txBody>
+          <a:bodyPr vert="horz" lIns="91440" tIns="45720" rIns="91440" bIns="45720" rtlCol="0" anchor="ctr">
+            <a:normAutofit/>
+          </a:bodyPr>
+          <a:lstStyle>
+            <a:lvl1pPr algn="l" defTabSz="914400" rtl="0" eaLnBrk="1" latinLnBrk="0" hangingPunct="1">
+              <a:lnSpc>
+                <a:spcPct val="90000"/>
+              </a:lnSpc>
+              <a:spcBef>
+                <a:spcPct val="0"/>
+              </a:spcBef>
+              <a:buNone/>
+              <a:defRPr sz="4400" kern="1200">
+                <a:solidFill>
+                  <a:schemeClr val="tx1"/>
+                </a:solidFill>
+                <a:latin typeface="+mj-lt"/>
+                <a:ea typeface="+mj-ea"/>
+                <a:cs typeface="+mj-cs"/>
+              </a:defRPr>
+            </a:lvl1pPr>
+          </a:lstStyle>
+          <a:p>
+            <a:r>
+              <a:rPr lang="it-IT" dirty="0"/>
+              <a:t>Obbiettivi primo rilascio</a:t>
+            </a:r>
+          </a:p>
+        </p:txBody>
+      </p:sp>
+    </p:spTree>
+    <p:extLst>
+      <p:ext uri="{BB962C8B-B14F-4D97-AF65-F5344CB8AC3E}">
+        <p14:creationId xmlns:p14="http://schemas.microsoft.com/office/powerpoint/2010/main" val="3810132980"/>
+      </p:ext>
+    </p:extLst>
+  </p:cSld>
+  <p:clrMapOvr>
+    <a:masterClrMapping/>
+  </p:clrMapOvr>
+</p:sld>
+</file>
+
+<file path=ppt/slides/slide6.xml><?xml version="1.0" encoding="utf-8"?>
+<p:sld xmlns:a="http://schemas.openxmlformats.org/drawingml/2006/main" xmlns:r="http://schemas.openxmlformats.org/officeDocument/2006/relationships" xmlns:p="http://schemas.openxmlformats.org/presentationml/2006/main">
+  <p:cSld>
+    <p:bg>
+      <p:bgPr>
+        <a:solidFill>
+          <a:schemeClr val="bg1"/>
+        </a:solidFill>
+        <a:effectLst/>
+      </p:bgPr>
+    </p:bg>
+    <p:spTree>
+      <p:nvGrpSpPr>
+        <p:cNvPr id="1" name=""/>
+        <p:cNvGrpSpPr/>
+        <p:nvPr/>
+      </p:nvGrpSpPr>
+      <p:grpSpPr>
+        <a:xfrm>
+          <a:off x="0" y="0"/>
+          <a:ext cx="0" cy="0"/>
+          <a:chOff x="0" y="0"/>
+          <a:chExt cx="0" cy="0"/>
+        </a:xfrm>
+      </p:grpSpPr>
+      <p:sp useBgFill="1">
+        <p:nvSpPr>
+          <p:cNvPr id="12" name="Rectangle 11">
+            <a:extLst>
+              <a:ext uri="{FF2B5EF4-FFF2-40B4-BE49-F238E27FC236}">
+                <a16:creationId xmlns:a16="http://schemas.microsoft.com/office/drawing/2014/main" id="{94BFCCA4-109C-4B21-816E-144FE75C38EE}"/>
+              </a:ext>
+              <a:ext uri="{C183D7F6-B498-43B3-948B-1728B52AA6E4}">
+                <adec:decorative xmlns:adec="http://schemas.microsoft.com/office/drawing/2017/decorative" val="1"/>
+              </a:ext>
+            </a:extLst>
+          </p:cNvPr>
+          <p:cNvSpPr>
+            <a:spLocks noGrp="1" noRot="1" noChangeAspect="1" noMove="1" noResize="1" noEditPoints="1" noAdjustHandles="1" noChangeArrowheads="1" noChangeShapeType="1" noTextEdit="1"/>
+          </p:cNvSpPr>
+          <p:nvPr>
+            <p:extLst>
+              <p:ext uri="{386F3935-93C4-4BCD-93E2-E3B085C9AB24}">
+                <p16:designElem xmlns:p16="http://schemas.microsoft.com/office/powerpoint/2015/main" val="1"/>
+              </p:ext>
+            </p:extLst>
+          </p:nvPr>
+        </p:nvSpPr>
+        <p:spPr>
+          <a:xfrm>
+            <a:off x="0" y="0"/>
+            <a:ext cx="12188952" cy="6858000"/>
+          </a:xfrm>
+          <a:prstGeom prst="rect">
+            <a:avLst/>
+          </a:prstGeom>
+          <a:ln>
+            <a:noFill/>
+          </a:ln>
+        </p:spPr>
+        <p:style>
+          <a:lnRef idx="2">
+            <a:schemeClr val="accent1">
+              <a:shade val="50000"/>
+            </a:schemeClr>
+          </a:lnRef>
+          <a:fillRef idx="1">
+            <a:schemeClr val="accent1"/>
+          </a:fillRef>
+          <a:effectRef idx="0">
+            <a:schemeClr val="accent1"/>
+          </a:effectRef>
+          <a:fontRef idx="minor">
+            <a:schemeClr val="lt1"/>
+          </a:fontRef>
+        </p:style>
+        <p:txBody>
+          <a:bodyPr rtlCol="0" anchor="ctr"/>
+          <a:lstStyle/>
+          <a:p>
+            <a:pPr algn="ctr"/>
+            <a:endParaRPr lang="en-US"/>
+          </a:p>
+        </p:txBody>
+      </p:sp>
+      <p:sp>
+        <p:nvSpPr>
+          <p:cNvPr id="2" name="Titolo 1">
+            <a:extLst>
+              <a:ext uri="{FF2B5EF4-FFF2-40B4-BE49-F238E27FC236}">
+                <a16:creationId xmlns:a16="http://schemas.microsoft.com/office/drawing/2014/main" id="{E33604B6-9F7C-4494-DC22-A966888C2DED}"/>
+              </a:ext>
+            </a:extLst>
+          </p:cNvPr>
+          <p:cNvSpPr>
+            <a:spLocks noGrp="1"/>
+          </p:cNvSpPr>
+          <p:nvPr>
+            <p:ph type="title"/>
+          </p:nvPr>
+        </p:nvSpPr>
+        <p:spPr>
+          <a:xfrm>
+            <a:off x="630918" y="643465"/>
+            <a:ext cx="3895359" cy="1846615"/>
+          </a:xfrm>
+        </p:spPr>
+        <p:txBody>
+          <a:bodyPr anchor="b">
+            <a:normAutofit/>
+          </a:bodyPr>
+          <a:lstStyle/>
+          <a:p>
+            <a:r>
+              <a:rPr lang="it-IT" sz="5400" dirty="0"/>
+              <a:t>Framework scelti</a:t>
+            </a:r>
+          </a:p>
+        </p:txBody>
+      </p:sp>
+      <p:sp>
+        <p:nvSpPr>
+          <p:cNvPr id="14" name="sketch line">
+            <a:extLst>
+              <a:ext uri="{FF2B5EF4-FFF2-40B4-BE49-F238E27FC236}">
+                <a16:creationId xmlns:a16="http://schemas.microsoft.com/office/drawing/2014/main" id="{0059B5C0-FEC8-4370-AF45-02E3AEF6FA6D}"/>
+              </a:ext>
+              <a:ext uri="{C183D7F6-B498-43B3-948B-1728B52AA6E4}">
+                <adec:decorative xmlns:adec="http://schemas.microsoft.com/office/drawing/2017/decorative" val="1"/>
+              </a:ext>
+            </a:extLst>
+          </p:cNvPr>
+          <p:cNvSpPr>
+            <a:spLocks noGrp="1" noRot="1" noChangeAspect="1" noMove="1" noResize="1" noEditPoints="1" noAdjustHandles="1" noChangeArrowheads="1" noChangeShapeType="1" noTextEdit="1"/>
+          </p:cNvSpPr>
+          <p:nvPr>
+            <p:extLst>
+              <p:ext uri="{386F3935-93C4-4BCD-93E2-E3B085C9AB24}">
+                <p16:designElem xmlns:p16="http://schemas.microsoft.com/office/powerpoint/2015/main" val="1"/>
+              </p:ext>
+            </p:extLst>
+          </p:nvPr>
+        </p:nvSpPr>
+        <p:spPr>
+          <a:xfrm>
+            <a:off x="640080" y="2659144"/>
+            <a:ext cx="3566160" cy="18288"/>
+          </a:xfrm>
+          <a:custGeom>
+            <a:avLst/>
+            <a:gdLst>
+              <a:gd name="csX0" fmla="*/ 0 w 3566160"/>
+              <a:gd name="csY0" fmla="*/ 0 h 18288"/>
+              <a:gd name="csX1" fmla="*/ 665683 w 3566160"/>
+              <a:gd name="csY1" fmla="*/ 0 h 18288"/>
+              <a:gd name="csX2" fmla="*/ 1331366 w 3566160"/>
+              <a:gd name="csY2" fmla="*/ 0 h 18288"/>
+              <a:gd name="csX3" fmla="*/ 1818742 w 3566160"/>
+              <a:gd name="csY3" fmla="*/ 0 h 18288"/>
+              <a:gd name="csX4" fmla="*/ 2413102 w 3566160"/>
+              <a:gd name="csY4" fmla="*/ 0 h 18288"/>
+              <a:gd name="csX5" fmla="*/ 2936138 w 3566160"/>
+              <a:gd name="csY5" fmla="*/ 0 h 18288"/>
+              <a:gd name="csX6" fmla="*/ 3566160 w 3566160"/>
+              <a:gd name="csY6" fmla="*/ 0 h 18288"/>
+              <a:gd name="csX7" fmla="*/ 3566160 w 3566160"/>
+              <a:gd name="csY7" fmla="*/ 18288 h 18288"/>
+              <a:gd name="csX8" fmla="*/ 2971800 w 3566160"/>
+              <a:gd name="csY8" fmla="*/ 18288 h 18288"/>
+              <a:gd name="csX9" fmla="*/ 2448763 w 3566160"/>
+              <a:gd name="csY9" fmla="*/ 18288 h 18288"/>
+              <a:gd name="csX10" fmla="*/ 1854403 w 3566160"/>
+              <a:gd name="csY10" fmla="*/ 18288 h 18288"/>
+              <a:gd name="csX11" fmla="*/ 1295705 w 3566160"/>
+              <a:gd name="csY11" fmla="*/ 18288 h 18288"/>
+              <a:gd name="csX12" fmla="*/ 772668 w 3566160"/>
+              <a:gd name="csY12" fmla="*/ 18288 h 18288"/>
+              <a:gd name="csX13" fmla="*/ 0 w 3566160"/>
+              <a:gd name="csY13" fmla="*/ 18288 h 18288"/>
+              <a:gd name="csX14" fmla="*/ 0 w 3566160"/>
+              <a:gd name="csY14" fmla="*/ 0 h 18288"/>
+            </a:gdLst>
+            <a:ahLst/>
+            <a:cxnLst>
+              <a:cxn ang="0">
+                <a:pos x="csX0" y="csY0"/>
+              </a:cxn>
+              <a:cxn ang="0">
+                <a:pos x="csX1" y="csY1"/>
+              </a:cxn>
+              <a:cxn ang="0">
+                <a:pos x="csX2" y="csY2"/>
+              </a:cxn>
+              <a:cxn ang="0">
+                <a:pos x="csX3" y="csY3"/>
+              </a:cxn>
+              <a:cxn ang="0">
+                <a:pos x="csX4" y="csY4"/>
+              </a:cxn>
+              <a:cxn ang="0">
+                <a:pos x="csX5" y="csY5"/>
+              </a:cxn>
+              <a:cxn ang="0">
+                <a:pos x="csX6" y="csY6"/>
+              </a:cxn>
+              <a:cxn ang="0">
+                <a:pos x="csX7" y="csY7"/>
+              </a:cxn>
+              <a:cxn ang="0">
+                <a:pos x="csX8" y="csY8"/>
+              </a:cxn>
+              <a:cxn ang="0">
+                <a:pos x="csX9" y="csY9"/>
+              </a:cxn>
+              <a:cxn ang="0">
+                <a:pos x="csX10" y="csY10"/>
+              </a:cxn>
+              <a:cxn ang="0">
+                <a:pos x="csX11" y="csY11"/>
+              </a:cxn>
+              <a:cxn ang="0">
+                <a:pos x="csX12" y="csY12"/>
+              </a:cxn>
+              <a:cxn ang="0">
+                <a:pos x="csX13" y="csY13"/>
+              </a:cxn>
+              <a:cxn ang="0">
+                <a:pos x="csX14" y="csY14"/>
+              </a:cxn>
+            </a:cxnLst>
+            <a:rect l="l" t="t" r="r" b="b"/>
+            <a:pathLst>
+              <a:path w="3566160" h="18288" fill="none" extrusionOk="0">
+                <a:moveTo>
+                  <a:pt x="0" y="0"/>
+                </a:moveTo>
+                <a:cubicBezTo>
+                  <a:pt x="222644" y="15773"/>
+                  <a:pt x="447078" y="-30288"/>
+                  <a:pt x="665683" y="0"/>
+                </a:cubicBezTo>
+                <a:cubicBezTo>
+                  <a:pt x="884288" y="30288"/>
+                  <a:pt x="1132425" y="-6167"/>
+                  <a:pt x="1331366" y="0"/>
+                </a:cubicBezTo>
+                <a:cubicBezTo>
+                  <a:pt x="1530307" y="6167"/>
+                  <a:pt x="1680942" y="17562"/>
+                  <a:pt x="1818742" y="0"/>
+                </a:cubicBezTo>
+                <a:cubicBezTo>
+                  <a:pt x="1956542" y="-17562"/>
+                  <a:pt x="2130227" y="23032"/>
+                  <a:pt x="2413102" y="0"/>
+                </a:cubicBezTo>
+                <a:cubicBezTo>
+                  <a:pt x="2695977" y="-23032"/>
+                  <a:pt x="2679988" y="-13260"/>
+                  <a:pt x="2936138" y="0"/>
+                </a:cubicBezTo>
+                <a:cubicBezTo>
+                  <a:pt x="3192288" y="13260"/>
+                  <a:pt x="3378668" y="16268"/>
+                  <a:pt x="3566160" y="0"/>
+                </a:cubicBezTo>
+                <a:cubicBezTo>
+                  <a:pt x="3566199" y="7328"/>
+                  <a:pt x="3566779" y="9982"/>
+                  <a:pt x="3566160" y="18288"/>
+                </a:cubicBezTo>
+                <a:cubicBezTo>
+                  <a:pt x="3315478" y="45899"/>
+                  <a:pt x="3188272" y="-7574"/>
+                  <a:pt x="2971800" y="18288"/>
+                </a:cubicBezTo>
+                <a:cubicBezTo>
+                  <a:pt x="2755328" y="44150"/>
+                  <a:pt x="2598570" y="34692"/>
+                  <a:pt x="2448763" y="18288"/>
+                </a:cubicBezTo>
+                <a:cubicBezTo>
+                  <a:pt x="2298956" y="1884"/>
+                  <a:pt x="2011344" y="-7043"/>
+                  <a:pt x="1854403" y="18288"/>
+                </a:cubicBezTo>
+                <a:cubicBezTo>
+                  <a:pt x="1697462" y="43619"/>
+                  <a:pt x="1444994" y="618"/>
+                  <a:pt x="1295705" y="18288"/>
+                </a:cubicBezTo>
+                <a:cubicBezTo>
+                  <a:pt x="1146416" y="35958"/>
+                  <a:pt x="965401" y="42167"/>
+                  <a:pt x="772668" y="18288"/>
+                </a:cubicBezTo>
+                <a:cubicBezTo>
+                  <a:pt x="579935" y="-5591"/>
+                  <a:pt x="352420" y="-19381"/>
+                  <a:pt x="0" y="18288"/>
+                </a:cubicBezTo>
+                <a:cubicBezTo>
+                  <a:pt x="-593" y="9736"/>
+                  <a:pt x="244" y="6610"/>
+                  <a:pt x="0" y="0"/>
+                </a:cubicBezTo>
+                <a:close/>
+              </a:path>
+              <a:path w="3566160" h="18288" stroke="0" extrusionOk="0">
+                <a:moveTo>
+                  <a:pt x="0" y="0"/>
+                </a:moveTo>
+                <a:cubicBezTo>
+                  <a:pt x="169947" y="-5008"/>
+                  <a:pt x="340602" y="-17518"/>
+                  <a:pt x="594360" y="0"/>
+                </a:cubicBezTo>
+                <a:cubicBezTo>
+                  <a:pt x="848118" y="17518"/>
+                  <a:pt x="997921" y="8866"/>
+                  <a:pt x="1224382" y="0"/>
+                </a:cubicBezTo>
+                <a:cubicBezTo>
+                  <a:pt x="1450843" y="-8866"/>
+                  <a:pt x="1572343" y="8392"/>
+                  <a:pt x="1783080" y="0"/>
+                </a:cubicBezTo>
+                <a:cubicBezTo>
+                  <a:pt x="1993817" y="-8392"/>
+                  <a:pt x="2266728" y="2126"/>
+                  <a:pt x="2448763" y="0"/>
+                </a:cubicBezTo>
+                <a:cubicBezTo>
+                  <a:pt x="2630798" y="-2126"/>
+                  <a:pt x="2815508" y="-13843"/>
+                  <a:pt x="3043123" y="0"/>
+                </a:cubicBezTo>
+                <a:cubicBezTo>
+                  <a:pt x="3270738" y="13843"/>
+                  <a:pt x="3420568" y="2184"/>
+                  <a:pt x="3566160" y="0"/>
+                </a:cubicBezTo>
+                <a:cubicBezTo>
+                  <a:pt x="3566487" y="8595"/>
+                  <a:pt x="3566088" y="13110"/>
+                  <a:pt x="3566160" y="18288"/>
+                </a:cubicBezTo>
+                <a:cubicBezTo>
+                  <a:pt x="3421748" y="9323"/>
+                  <a:pt x="3176383" y="-3939"/>
+                  <a:pt x="2971800" y="18288"/>
+                </a:cubicBezTo>
+                <a:cubicBezTo>
+                  <a:pt x="2767217" y="40515"/>
+                  <a:pt x="2590769" y="4336"/>
+                  <a:pt x="2306117" y="18288"/>
+                </a:cubicBezTo>
+                <a:cubicBezTo>
+                  <a:pt x="2021465" y="32240"/>
+                  <a:pt x="1860727" y="-9280"/>
+                  <a:pt x="1676095" y="18288"/>
+                </a:cubicBezTo>
+                <a:cubicBezTo>
+                  <a:pt x="1491463" y="45856"/>
+                  <a:pt x="1329173" y="5765"/>
+                  <a:pt x="1153058" y="18288"/>
+                </a:cubicBezTo>
+                <a:cubicBezTo>
+                  <a:pt x="976943" y="30811"/>
+                  <a:pt x="895178" y="4751"/>
+                  <a:pt x="665683" y="18288"/>
+                </a:cubicBezTo>
+                <a:cubicBezTo>
+                  <a:pt x="436189" y="31825"/>
+                  <a:pt x="302924" y="2002"/>
+                  <a:pt x="0" y="18288"/>
+                </a:cubicBezTo>
+                <a:cubicBezTo>
+                  <a:pt x="822" y="10564"/>
+                  <a:pt x="-23" y="4571"/>
+                  <a:pt x="0" y="0"/>
+                </a:cubicBezTo>
+                <a:close/>
+              </a:path>
+            </a:pathLst>
+          </a:custGeom>
+          <a:solidFill>
+            <a:schemeClr val="accent2"/>
+          </a:solidFill>
+          <a:ln w="41275" cap="rnd">
+            <a:solidFill>
+              <a:schemeClr val="accent2"/>
+            </a:solidFill>
+            <a:round/>
+            <a:extLst>
+              <a:ext uri="{C807C97D-BFC1-408E-A445-0C87EB9F89A2}">
+                <ask:lineSketchStyleProps xmlns:ask="http://schemas.microsoft.com/office/drawing/2018/sketchyshapes" sd="2448976505">
+                  <a:prstGeom prst="rect">
+                    <a:avLst/>
+                  </a:prstGeom>
+                  <ask:type>
+                    <ask:lineSketchFreehand/>
+                  </ask:type>
+                </ask:lineSketchStyleProps>
+              </a:ext>
+            </a:extLst>
+          </a:ln>
+        </p:spPr>
+        <p:style>
+          <a:lnRef idx="2">
+            <a:schemeClr val="accent1">
+              <a:shade val="50000"/>
+            </a:schemeClr>
+          </a:lnRef>
+          <a:fillRef idx="1">
+            <a:schemeClr val="accent1"/>
+          </a:fillRef>
+          <a:effectRef idx="0">
+            <a:schemeClr val="accent1"/>
+          </a:effectRef>
+          <a:fontRef idx="minor">
+            <a:schemeClr val="lt1"/>
+          </a:fontRef>
+        </p:style>
+        <p:txBody>
+          <a:bodyPr rtlCol="0" anchor="ctr"/>
+          <a:lstStyle/>
+          <a:p>
+            <a:pPr algn="ctr"/>
+            <a:endParaRPr lang="en-US"/>
+          </a:p>
+        </p:txBody>
+      </p:sp>
+      <p:sp>
+        <p:nvSpPr>
+          <p:cNvPr id="3" name="Segnaposto contenuto 2">
+            <a:extLst>
+              <a:ext uri="{FF2B5EF4-FFF2-40B4-BE49-F238E27FC236}">
+                <a16:creationId xmlns:a16="http://schemas.microsoft.com/office/drawing/2014/main" id="{45E327B6-0246-D362-20D8-1DF78DE1F9F8}"/>
+              </a:ext>
+            </a:extLst>
+          </p:cNvPr>
+          <p:cNvSpPr>
+            <a:spLocks noGrp="1"/>
+          </p:cNvSpPr>
+          <p:nvPr>
+            <p:ph idx="1"/>
+          </p:nvPr>
+        </p:nvSpPr>
+        <p:spPr>
+          <a:xfrm>
+            <a:off x="630936" y="2807167"/>
+            <a:ext cx="3895522" cy="3386399"/>
+          </a:xfrm>
+        </p:spPr>
+        <p:txBody>
+          <a:bodyPr vert="horz" lIns="91440" tIns="45720" rIns="91440" bIns="45720" rtlCol="0">
+            <a:normAutofit/>
+          </a:bodyPr>
+          <a:lstStyle/>
+          <a:p>
+            <a:r>
+              <a:rPr lang="it-IT" sz="2000"/>
+              <a:t>Database scelto, nonché già presente in azienda, SQL Server.</a:t>
+            </a:r>
+          </a:p>
+          <a:p>
+            <a:r>
+              <a:rPr lang="it-IT" sz="2000"/>
+              <a:t>Back end base .NET con l’utilizzo di EF Core</a:t>
+            </a:r>
+          </a:p>
+          <a:p>
+            <a:r>
+              <a:rPr lang="it-IT" sz="2000"/>
+              <a:t>Front end cross-platform con .NET MAUI</a:t>
+            </a:r>
+          </a:p>
+          <a:p>
+            <a:r>
+              <a:rPr lang="it-IT" sz="2000"/>
+              <a:t>Interfacce grafiche scritte mediante componenti</a:t>
+            </a:r>
+            <a:br>
+              <a:rPr lang="it-IT" sz="2000"/>
+            </a:br>
+            <a:r>
+              <a:rPr lang="it-IT" sz="2000"/>
+              <a:t>Microsoft MAUI toolkit.</a:t>
+            </a:r>
+          </a:p>
+        </p:txBody>
+      </p:sp>
+      <p:pic>
+        <p:nvPicPr>
+          <p:cNvPr id="6" name="Immagine 5" descr=".NET Application Consulting | Keyhole Software">
+            <a:extLst>
+              <a:ext uri="{FF2B5EF4-FFF2-40B4-BE49-F238E27FC236}">
+                <a16:creationId xmlns:a16="http://schemas.microsoft.com/office/drawing/2014/main" id="{C1FE4AC1-0127-1BB8-DB16-AA38A7BB21C2}"/>
+              </a:ext>
+            </a:extLst>
+          </p:cNvPr>
+          <p:cNvPicPr>
+            <a:picLocks noChangeAspect="1"/>
+          </p:cNvPicPr>
+          <p:nvPr/>
+        </p:nvPicPr>
+        <p:blipFill>
+          <a:blip r:embed="rId3"/>
+          <a:stretch>
+            <a:fillRect/>
+          </a:stretch>
+        </p:blipFill>
+        <p:spPr>
+          <a:xfrm>
+            <a:off x="4992624" y="342900"/>
+            <a:ext cx="3099816" cy="3099816"/>
+          </a:xfrm>
+          <a:prstGeom prst="rect">
+            <a:avLst/>
+          </a:prstGeom>
+        </p:spPr>
+      </p:pic>
+      <p:pic>
+        <p:nvPicPr>
+          <p:cNvPr id="5" name="Immagine 4" descr="SQL Server 2025: Built-in AI, Native JSON, and What's New">
+            <a:extLst>
+              <a:ext uri="{FF2B5EF4-FFF2-40B4-BE49-F238E27FC236}">
+                <a16:creationId xmlns:a16="http://schemas.microsoft.com/office/drawing/2014/main" id="{918AB919-6270-20AB-7346-6C6262BAEDE7}"/>
+              </a:ext>
+            </a:extLst>
+          </p:cNvPr>
+          <p:cNvPicPr>
+            <a:picLocks noChangeAspect="1"/>
+          </p:cNvPicPr>
+          <p:nvPr/>
+        </p:nvPicPr>
+        <p:blipFill>
+          <a:blip r:embed="rId4"/>
+          <a:stretch>
+            <a:fillRect/>
+          </a:stretch>
+        </p:blipFill>
+        <p:spPr>
+          <a:xfrm>
+            <a:off x="8247888" y="619920"/>
+            <a:ext cx="3785616" cy="1731919"/>
+          </a:xfrm>
+          <a:prstGeom prst="rect">
+            <a:avLst/>
+          </a:prstGeom>
+        </p:spPr>
+      </p:pic>
+      <p:pic>
+        <p:nvPicPr>
+          <p:cNvPr id="7" name="Immagine 6" descr="Entity Framework Core – Database first – jenx.si">
+            <a:extLst>
+              <a:ext uri="{FF2B5EF4-FFF2-40B4-BE49-F238E27FC236}">
+                <a16:creationId xmlns:a16="http://schemas.microsoft.com/office/drawing/2014/main" id="{D31DCFC7-F5A7-F41A-FFCD-E016453F7E95}"/>
+              </a:ext>
+            </a:extLst>
+          </p:cNvPr>
+          <p:cNvPicPr>
+            <a:picLocks noChangeAspect="1"/>
+          </p:cNvPicPr>
+          <p:nvPr/>
+        </p:nvPicPr>
+        <p:blipFill>
+          <a:blip r:embed="rId5"/>
+          <a:stretch>
+            <a:fillRect/>
+          </a:stretch>
+        </p:blipFill>
+        <p:spPr>
+          <a:xfrm>
+            <a:off x="4992624" y="4052975"/>
+            <a:ext cx="3099816" cy="1883137"/>
+          </a:xfrm>
+          <a:prstGeom prst="rect">
+            <a:avLst/>
+          </a:prstGeom>
+        </p:spPr>
+      </p:pic>
+      <p:pic>
+        <p:nvPicPr>
+          <p:cNvPr id="4" name="Immagine 3" descr="Microsoft .NET SVG Icon - Free Download | Official Logo SVG | theSVG ...">
+            <a:extLst>
+              <a:ext uri="{FF2B5EF4-FFF2-40B4-BE49-F238E27FC236}">
+                <a16:creationId xmlns:a16="http://schemas.microsoft.com/office/drawing/2014/main" id="{6AA95384-7DA9-71BF-90DD-D64C354FE46B}"/>
+              </a:ext>
+            </a:extLst>
+          </p:cNvPr>
+          <p:cNvPicPr>
+            <a:picLocks noChangeAspect="1"/>
+          </p:cNvPicPr>
+          <p:nvPr/>
+        </p:nvPicPr>
+        <p:blipFill>
+          <a:blip r:embed="rId6"/>
+          <a:stretch>
+            <a:fillRect/>
+          </a:stretch>
+        </p:blipFill>
+        <p:spPr>
+          <a:xfrm>
+            <a:off x="8529792" y="2971759"/>
+            <a:ext cx="3221807" cy="3221807"/>
+          </a:xfrm>
+          <a:prstGeom prst="rect">
+            <a:avLst/>
+          </a:prstGeom>
+        </p:spPr>
+      </p:pic>
+    </p:spTree>
+    <p:extLst>
+      <p:ext uri="{BB962C8B-B14F-4D97-AF65-F5344CB8AC3E}">
+        <p14:creationId xmlns:p14="http://schemas.microsoft.com/office/powerpoint/2010/main" val="2242663862"/>
+      </p:ext>
+    </p:extLst>
+  </p:cSld>
+  <p:clrMapOvr>
+    <a:masterClrMapping/>
+  </p:clrMapOvr>
+</p:sld>
+</file>
+
+<file path=ppt/slides/slide7.xml><?xml version="1.0" encoding="utf-8"?>
+<p:sld xmlns:a="http://schemas.openxmlformats.org/drawingml/2006/main" xmlns:r="http://schemas.openxmlformats.org/officeDocument/2006/relationships" xmlns:p="http://schemas.openxmlformats.org/presentationml/2006/main">
+  <p:cSld>
+    <p:bg>
+      <p:bgPr>
+        <a:solidFill>
+          <a:schemeClr val="bg1"/>
+        </a:solidFill>
+        <a:effectLst/>
+      </p:bgPr>
+    </p:bg>
+    <p:spTree>
+      <p:nvGrpSpPr>
+        <p:cNvPr id="1" name=""/>
+        <p:cNvGrpSpPr/>
+        <p:nvPr/>
+      </p:nvGrpSpPr>
+      <p:grpSpPr>
+        <a:xfrm>
+          <a:off x="0" y="0"/>
+          <a:ext cx="0" cy="0"/>
+          <a:chOff x="0" y="0"/>
+          <a:chExt cx="0" cy="0"/>
+        </a:xfrm>
+      </p:grpSpPr>
+      <p:sp useBgFill="1">
+        <p:nvSpPr>
+          <p:cNvPr id="12" name="Rectangle 11">
+            <a:extLst>
+              <a:ext uri="{FF2B5EF4-FFF2-40B4-BE49-F238E27FC236}">
+                <a16:creationId xmlns:a16="http://schemas.microsoft.com/office/drawing/2014/main" id="{C4879EFC-8E62-4E00-973C-C45EE9EC676D}"/>
+              </a:ext>
+              <a:ext uri="{C183D7F6-B498-43B3-948B-1728B52AA6E4}">
+                <adec:decorative xmlns:adec="http://schemas.microsoft.com/office/drawing/2017/decorative" val="1"/>
+              </a:ext>
+            </a:extLst>
+          </p:cNvPr>
+          <p:cNvSpPr>
+            <a:spLocks noGrp="1" noRot="1" noChangeAspect="1" noMove="1" noResize="1" noEditPoints="1" noAdjustHandles="1" noChangeArrowheads="1" noChangeShapeType="1" noTextEdit="1"/>
+          </p:cNvSpPr>
+          <p:nvPr>
+            <p:extLst>
+              <p:ext uri="{386F3935-93C4-4BCD-93E2-E3B085C9AB24}">
+                <p16:designElem xmlns:p16="http://schemas.microsoft.com/office/powerpoint/2015/main" val="1"/>
+              </p:ext>
+            </p:extLst>
+          </p:nvPr>
+        </p:nvSpPr>
+        <p:spPr>
+          <a:xfrm>
+            <a:off x="0" y="0"/>
+            <a:ext cx="12188952" cy="6858000"/>
+          </a:xfrm>
+          <a:prstGeom prst="rect">
+            <a:avLst/>
+          </a:prstGeom>
+          <a:ln>
+            <a:noFill/>
+          </a:ln>
+        </p:spPr>
+        <p:style>
+          <a:lnRef idx="2">
+            <a:schemeClr val="accent1">
+              <a:shade val="50000"/>
+            </a:schemeClr>
+          </a:lnRef>
+          <a:fillRef idx="1">
+            <a:schemeClr val="accent1"/>
+          </a:fillRef>
+          <a:effectRef idx="0">
+            <a:schemeClr val="accent1"/>
+          </a:effectRef>
+          <a:fontRef idx="minor">
+            <a:schemeClr val="lt1"/>
+          </a:fontRef>
+        </p:style>
+        <p:txBody>
+          <a:bodyPr rtlCol="0" anchor="ctr"/>
+          <a:lstStyle/>
+          <a:p>
+            <a:pPr algn="ctr"/>
+            <a:endParaRPr lang="en-US"/>
+          </a:p>
+        </p:txBody>
+      </p:sp>
+      <p:sp>
+        <p:nvSpPr>
+          <p:cNvPr id="2" name="Titolo 1">
+            <a:extLst>
+              <a:ext uri="{FF2B5EF4-FFF2-40B4-BE49-F238E27FC236}">
+                <a16:creationId xmlns:a16="http://schemas.microsoft.com/office/drawing/2014/main" id="{19623637-6F9F-635B-9899-6231BDE30A88}"/>
+              </a:ext>
+            </a:extLst>
+          </p:cNvPr>
+          <p:cNvSpPr>
+            <a:spLocks noGrp="1"/>
+          </p:cNvSpPr>
+          <p:nvPr>
+            <p:ph type="title"/>
+          </p:nvPr>
+        </p:nvSpPr>
+        <p:spPr>
+          <a:xfrm>
+            <a:off x="638881" y="457200"/>
+            <a:ext cx="10909640" cy="1368614"/>
+          </a:xfrm>
+        </p:spPr>
+        <p:txBody>
+          <a:bodyPr vert="horz" lIns="91440" tIns="45720" rIns="91440" bIns="45720" rtlCol="0" anchor="ctr">
+            <a:normAutofit/>
+          </a:bodyPr>
+          <a:lstStyle/>
+          <a:p>
+            <a:pPr algn="ctr"/>
+            <a:r>
+              <a:rPr lang="en-US" sz="5400" dirty="0" err="1"/>
+              <a:t>Diagrammi</a:t>
+            </a:r>
+            <a:r>
+              <a:rPr lang="en-US" sz="6100" dirty="0"/>
+              <a:t> deployment e package</a:t>
+            </a:r>
+          </a:p>
+        </p:txBody>
+      </p:sp>
+      <p:sp>
+        <p:nvSpPr>
+          <p:cNvPr id="14" name="sketch line">
+            <a:extLst>
+              <a:ext uri="{FF2B5EF4-FFF2-40B4-BE49-F238E27FC236}">
+                <a16:creationId xmlns:a16="http://schemas.microsoft.com/office/drawing/2014/main" id="{D6A9C53F-5F90-40A5-8C85-5412D39C8C68}"/>
+              </a:ext>
+              <a:ext uri="{C183D7F6-B498-43B3-948B-1728B52AA6E4}">
+                <adec:decorative xmlns:adec="http://schemas.microsoft.com/office/drawing/2017/decorative" val="1"/>
+              </a:ext>
+            </a:extLst>
+          </p:cNvPr>
+          <p:cNvSpPr>
+            <a:spLocks noGrp="1" noRot="1" noChangeAspect="1" noMove="1" noResize="1" noEditPoints="1" noAdjustHandles="1" noChangeArrowheads="1" noChangeShapeType="1" noTextEdit="1"/>
+          </p:cNvSpPr>
+          <p:nvPr>
+            <p:extLst>
+              <p:ext uri="{386F3935-93C4-4BCD-93E2-E3B085C9AB24}">
+                <p16:designElem xmlns:p16="http://schemas.microsoft.com/office/powerpoint/2015/main" val="1"/>
+              </p:ext>
+            </p:extLst>
+          </p:nvPr>
+        </p:nvSpPr>
+        <p:spPr>
+          <a:xfrm>
+            <a:off x="4450080" y="1850683"/>
+            <a:ext cx="3291840" cy="18288"/>
+          </a:xfrm>
+          <a:custGeom>
+            <a:avLst/>
+            <a:gdLst>
+              <a:gd name="csX0" fmla="*/ 0 w 3291840"/>
+              <a:gd name="csY0" fmla="*/ 0 h 18288"/>
+              <a:gd name="csX1" fmla="*/ 658368 w 3291840"/>
+              <a:gd name="csY1" fmla="*/ 0 h 18288"/>
+              <a:gd name="csX2" fmla="*/ 1283818 w 3291840"/>
+              <a:gd name="csY2" fmla="*/ 0 h 18288"/>
+              <a:gd name="csX3" fmla="*/ 1909267 w 3291840"/>
+              <a:gd name="csY3" fmla="*/ 0 h 18288"/>
+              <a:gd name="csX4" fmla="*/ 2633472 w 3291840"/>
+              <a:gd name="csY4" fmla="*/ 0 h 18288"/>
+              <a:gd name="csX5" fmla="*/ 3291840 w 3291840"/>
+              <a:gd name="csY5" fmla="*/ 0 h 18288"/>
+              <a:gd name="csX6" fmla="*/ 3291840 w 3291840"/>
+              <a:gd name="csY6" fmla="*/ 18288 h 18288"/>
+              <a:gd name="csX7" fmla="*/ 2633472 w 3291840"/>
+              <a:gd name="csY7" fmla="*/ 18288 h 18288"/>
+              <a:gd name="csX8" fmla="*/ 2073859 w 3291840"/>
+              <a:gd name="csY8" fmla="*/ 18288 h 18288"/>
+              <a:gd name="csX9" fmla="*/ 1448410 w 3291840"/>
+              <a:gd name="csY9" fmla="*/ 18288 h 18288"/>
+              <a:gd name="csX10" fmla="*/ 822960 w 3291840"/>
+              <a:gd name="csY10" fmla="*/ 18288 h 18288"/>
+              <a:gd name="csX11" fmla="*/ 0 w 3291840"/>
+              <a:gd name="csY11" fmla="*/ 18288 h 18288"/>
+              <a:gd name="csX12" fmla="*/ 0 w 3291840"/>
+              <a:gd name="csY12" fmla="*/ 0 h 18288"/>
+            </a:gdLst>
+            <a:ahLst/>
+            <a:cxnLst>
+              <a:cxn ang="0">
+                <a:pos x="csX0" y="csY0"/>
+              </a:cxn>
+              <a:cxn ang="0">
+                <a:pos x="csX1" y="csY1"/>
+              </a:cxn>
+              <a:cxn ang="0">
+                <a:pos x="csX2" y="csY2"/>
+              </a:cxn>
+              <a:cxn ang="0">
+                <a:pos x="csX3" y="csY3"/>
+              </a:cxn>
+              <a:cxn ang="0">
+                <a:pos x="csX4" y="csY4"/>
+              </a:cxn>
+              <a:cxn ang="0">
+                <a:pos x="csX5" y="csY5"/>
+              </a:cxn>
+              <a:cxn ang="0">
+                <a:pos x="csX6" y="csY6"/>
+              </a:cxn>
+              <a:cxn ang="0">
+                <a:pos x="csX7" y="csY7"/>
+              </a:cxn>
+              <a:cxn ang="0">
+                <a:pos x="csX8" y="csY8"/>
+              </a:cxn>
+              <a:cxn ang="0">
+                <a:pos x="csX9" y="csY9"/>
+              </a:cxn>
+              <a:cxn ang="0">
+                <a:pos x="csX10" y="csY10"/>
+              </a:cxn>
+              <a:cxn ang="0">
+                <a:pos x="csX11" y="csY11"/>
+              </a:cxn>
+              <a:cxn ang="0">
+                <a:pos x="csX12" y="csY12"/>
+              </a:cxn>
+            </a:cxnLst>
+            <a:rect l="l" t="t" r="r" b="b"/>
+            <a:pathLst>
+              <a:path w="3291840" h="18288" fill="none" extrusionOk="0">
+                <a:moveTo>
+                  <a:pt x="0" y="0"/>
+                </a:moveTo>
+                <a:cubicBezTo>
+                  <a:pt x="173077" y="-20031"/>
+                  <a:pt x="443104" y="6424"/>
+                  <a:pt x="658368" y="0"/>
+                </a:cubicBezTo>
+                <a:cubicBezTo>
+                  <a:pt x="873632" y="-6424"/>
+                  <a:pt x="1034028" y="11764"/>
+                  <a:pt x="1283818" y="0"/>
+                </a:cubicBezTo>
+                <a:cubicBezTo>
+                  <a:pt x="1533608" y="-11764"/>
+                  <a:pt x="1691227" y="-30112"/>
+                  <a:pt x="1909267" y="0"/>
+                </a:cubicBezTo>
+                <a:cubicBezTo>
+                  <a:pt x="2127307" y="30112"/>
+                  <a:pt x="2272465" y="-18735"/>
+                  <a:pt x="2633472" y="0"/>
+                </a:cubicBezTo>
+                <a:cubicBezTo>
+                  <a:pt x="2994479" y="18735"/>
+                  <a:pt x="3023324" y="-32030"/>
+                  <a:pt x="3291840" y="0"/>
+                </a:cubicBezTo>
+                <a:cubicBezTo>
+                  <a:pt x="3291406" y="7551"/>
+                  <a:pt x="3291373" y="9822"/>
+                  <a:pt x="3291840" y="18288"/>
+                </a:cubicBezTo>
+                <a:cubicBezTo>
+                  <a:pt x="3048445" y="38989"/>
+                  <a:pt x="2846548" y="-14400"/>
+                  <a:pt x="2633472" y="18288"/>
+                </a:cubicBezTo>
+                <a:cubicBezTo>
+                  <a:pt x="2420396" y="50976"/>
+                  <a:pt x="2304099" y="6336"/>
+                  <a:pt x="2073859" y="18288"/>
+                </a:cubicBezTo>
+                <a:cubicBezTo>
+                  <a:pt x="1843619" y="30240"/>
+                  <a:pt x="1706926" y="10778"/>
+                  <a:pt x="1448410" y="18288"/>
+                </a:cubicBezTo>
+                <a:cubicBezTo>
+                  <a:pt x="1189894" y="25798"/>
+                  <a:pt x="1002278" y="8992"/>
+                  <a:pt x="822960" y="18288"/>
+                </a:cubicBezTo>
+                <a:cubicBezTo>
+                  <a:pt x="643642" y="27585"/>
+                  <a:pt x="307039" y="38051"/>
+                  <a:pt x="0" y="18288"/>
+                </a:cubicBezTo>
+                <a:cubicBezTo>
+                  <a:pt x="60" y="11696"/>
+                  <a:pt x="66" y="3758"/>
+                  <a:pt x="0" y="0"/>
+                </a:cubicBezTo>
+                <a:close/>
+              </a:path>
+              <a:path w="3291840" h="18288" stroke="0" extrusionOk="0">
+                <a:moveTo>
+                  <a:pt x="0" y="0"/>
+                </a:moveTo>
+                <a:cubicBezTo>
+                  <a:pt x="195850" y="28018"/>
+                  <a:pt x="434891" y="17390"/>
+                  <a:pt x="592531" y="0"/>
+                </a:cubicBezTo>
+                <a:cubicBezTo>
+                  <a:pt x="750171" y="-17390"/>
+                  <a:pt x="1018709" y="32200"/>
+                  <a:pt x="1316736" y="0"/>
+                </a:cubicBezTo>
+                <a:cubicBezTo>
+                  <a:pt x="1614763" y="-32200"/>
+                  <a:pt x="1696480" y="-11367"/>
+                  <a:pt x="1876349" y="0"/>
+                </a:cubicBezTo>
+                <a:cubicBezTo>
+                  <a:pt x="2056218" y="11367"/>
+                  <a:pt x="2193364" y="13433"/>
+                  <a:pt x="2435962" y="0"/>
+                </a:cubicBezTo>
+                <a:cubicBezTo>
+                  <a:pt x="2678560" y="-13433"/>
+                  <a:pt x="3010901" y="-42367"/>
+                  <a:pt x="3291840" y="0"/>
+                </a:cubicBezTo>
+                <a:cubicBezTo>
+                  <a:pt x="3291758" y="4406"/>
+                  <a:pt x="3291751" y="9982"/>
+                  <a:pt x="3291840" y="18288"/>
+                </a:cubicBezTo>
+                <a:cubicBezTo>
+                  <a:pt x="3108993" y="14228"/>
+                  <a:pt x="2952658" y="46900"/>
+                  <a:pt x="2666390" y="18288"/>
+                </a:cubicBezTo>
+                <a:cubicBezTo>
+                  <a:pt x="2380122" y="-10324"/>
+                  <a:pt x="2263855" y="41055"/>
+                  <a:pt x="2040941" y="18288"/>
+                </a:cubicBezTo>
+                <a:cubicBezTo>
+                  <a:pt x="1818027" y="-4479"/>
+                  <a:pt x="1675097" y="6509"/>
+                  <a:pt x="1415491" y="18288"/>
+                </a:cubicBezTo>
+                <a:cubicBezTo>
+                  <a:pt x="1155885" y="30068"/>
+                  <a:pt x="852976" y="36210"/>
+                  <a:pt x="691286" y="18288"/>
+                </a:cubicBezTo>
+                <a:cubicBezTo>
+                  <a:pt x="529596" y="366"/>
+                  <a:pt x="187183" y="13912"/>
+                  <a:pt x="0" y="18288"/>
+                </a:cubicBezTo>
+                <a:cubicBezTo>
+                  <a:pt x="189" y="14288"/>
+                  <a:pt x="-703" y="3747"/>
+                  <a:pt x="0" y="0"/>
+                </a:cubicBezTo>
+                <a:close/>
+              </a:path>
+            </a:pathLst>
+          </a:custGeom>
+          <a:solidFill>
+            <a:schemeClr val="accent2"/>
+          </a:solidFill>
+          <a:ln w="41275" cap="rnd">
+            <a:solidFill>
+              <a:schemeClr val="accent2"/>
+            </a:solidFill>
+            <a:round/>
+            <a:extLst>
+              <a:ext uri="{C807C97D-BFC1-408E-A445-0C87EB9F89A2}">
+                <ask:lineSketchStyleProps xmlns:ask="http://schemas.microsoft.com/office/drawing/2018/sketchyshapes" sd="2863741219">
+                  <a:prstGeom prst="rect">
+                    <a:avLst/>
+                  </a:prstGeom>
+                  <ask:type>
+                    <ask:lineSketchFreehand/>
+                  </ask:type>
+                </ask:lineSketchStyleProps>
+              </a:ext>
+            </a:extLst>
+          </a:ln>
+        </p:spPr>
+        <p:style>
+          <a:lnRef idx="2">
+            <a:schemeClr val="accent1">
+              <a:shade val="50000"/>
+            </a:schemeClr>
+          </a:lnRef>
+          <a:fillRef idx="1">
+            <a:schemeClr val="accent1"/>
+          </a:fillRef>
+          <a:effectRef idx="0">
+            <a:schemeClr val="accent1"/>
+          </a:effectRef>
+          <a:fontRef idx="minor">
+            <a:schemeClr val="lt1"/>
+          </a:fontRef>
+        </p:style>
+        <p:txBody>
+          <a:bodyPr rtlCol="0" anchor="ctr"/>
+          <a:lstStyle/>
+          <a:p>
+            <a:pPr algn="ctr"/>
+            <a:endParaRPr lang="en-US"/>
+          </a:p>
+        </p:txBody>
+      </p:sp>
+      <p:pic>
+        <p:nvPicPr>
+          <p:cNvPr id="5" name="Segnaposto contenuto 4">
+            <a:extLst>
+              <a:ext uri="{FF2B5EF4-FFF2-40B4-BE49-F238E27FC236}">
+                <a16:creationId xmlns:a16="http://schemas.microsoft.com/office/drawing/2014/main" id="{DA965A1F-EE09-23EB-397C-63EEBB924984}"/>
+              </a:ext>
+            </a:extLst>
+          </p:cNvPr>
+          <p:cNvPicPr>
+            <a:picLocks noGrp="1" noChangeAspect="1"/>
+          </p:cNvPicPr>
+          <p:nvPr>
+            <p:ph idx="1"/>
+          </p:nvPr>
+        </p:nvPicPr>
+        <p:blipFill>
+          <a:blip r:embed="rId2">
+            <a:extLst>
+              <a:ext uri="{28A0092B-C50C-407E-A947-70E740481C1C}">
+                <a14:useLocalDpi xmlns:a14="http://schemas.microsoft.com/office/drawing/2010/main" val="0"/>
+              </a:ext>
+            </a:extLst>
+          </a:blip>
+          <a:stretch>
+            <a:fillRect/>
+          </a:stretch>
+        </p:blipFill>
+        <p:spPr>
+          <a:xfrm>
+            <a:off x="902238" y="2642616"/>
+            <a:ext cx="4450020" cy="3605784"/>
+          </a:xfrm>
+          <a:prstGeom prst="rect">
+            <a:avLst/>
+          </a:prstGeom>
+        </p:spPr>
+      </p:pic>
+      <p:pic>
+        <p:nvPicPr>
+          <p:cNvPr id="7" name="Immagine 6">
+            <a:extLst>
+              <a:ext uri="{FF2B5EF4-FFF2-40B4-BE49-F238E27FC236}">
+                <a16:creationId xmlns:a16="http://schemas.microsoft.com/office/drawing/2014/main" id="{5337F9E6-131D-86DB-B088-E292615542D5}"/>
+              </a:ext>
+            </a:extLst>
+          </p:cNvPr>
+          <p:cNvPicPr>
+            <a:picLocks noChangeAspect="1"/>
+          </p:cNvPicPr>
+          <p:nvPr/>
+        </p:nvPicPr>
+        <p:blipFill>
+          <a:blip r:embed="rId3">
+            <a:extLst>
+              <a:ext uri="{28A0092B-C50C-407E-A947-70E740481C1C}">
+                <a14:useLocalDpi xmlns:a14="http://schemas.microsoft.com/office/drawing/2010/main" val="0"/>
+              </a:ext>
+            </a:extLst>
+          </a:blip>
+          <a:stretch>
+            <a:fillRect/>
+          </a:stretch>
+        </p:blipFill>
+        <p:spPr>
+          <a:xfrm>
+            <a:off x="6254496" y="2880490"/>
+            <a:ext cx="5614416" cy="3130036"/>
+          </a:xfrm>
+          <a:prstGeom prst="rect">
+            <a:avLst/>
+          </a:prstGeom>
+          <a:solidFill>
+            <a:srgbClr val="FFFFFF">
+              <a:shade val="85000"/>
+            </a:srgbClr>
+          </a:solidFill>
+        </p:spPr>
+      </p:pic>
+    </p:spTree>
+    <p:extLst>
+      <p:ext uri="{BB962C8B-B14F-4D97-AF65-F5344CB8AC3E}">
+        <p14:creationId xmlns:p14="http://schemas.microsoft.com/office/powerpoint/2010/main" val="1039889019"/>
+      </p:ext>
+    </p:extLst>
+  </p:cSld>
+  <p:clrMapOvr>
+    <a:masterClrMapping/>
+  </p:clrMapOvr>
+</p:sld>
+</file>
+
+<file path=ppt/slides/slide8.xml><?xml version="1.0" encoding="utf-8"?>
+<p:sld xmlns:a="http://schemas.openxmlformats.org/drawingml/2006/main" xmlns:r="http://schemas.openxmlformats.org/officeDocument/2006/relationships" xmlns:p="http://schemas.openxmlformats.org/presentationml/2006/main">
+  <p:cSld>
+    <p:bg>
+      <p:bgPr>
+        <a:solidFill>
+          <a:schemeClr val="bg1"/>
+        </a:solidFill>
+        <a:effectLst/>
+      </p:bgPr>
+    </p:bg>
+    <p:spTree>
+      <p:nvGrpSpPr>
+        <p:cNvPr id="1" name=""/>
+        <p:cNvGrpSpPr/>
+        <p:nvPr/>
+      </p:nvGrpSpPr>
+      <p:grpSpPr>
+        <a:xfrm>
+          <a:off x="0" y="0"/>
+          <a:ext cx="0" cy="0"/>
+          <a:chOff x="0" y="0"/>
+          <a:chExt cx="0" cy="0"/>
+        </a:xfrm>
+      </p:grpSpPr>
+      <p:sp useBgFill="1">
+        <p:nvSpPr>
+          <p:cNvPr id="8" name="Rectangle 7">
+            <a:extLst>
+              <a:ext uri="{FF2B5EF4-FFF2-40B4-BE49-F238E27FC236}">
+                <a16:creationId xmlns:a16="http://schemas.microsoft.com/office/drawing/2014/main" id="{100EDD19-6802-4EC3-95CE-CFFAB042CFD6}"/>
+              </a:ext>
+              <a:ext uri="{C183D7F6-B498-43B3-948B-1728B52AA6E4}">
+                <adec:decorative xmlns:adec="http://schemas.microsoft.com/office/drawing/2017/decorative" val="1"/>
+              </a:ext>
+            </a:extLst>
+          </p:cNvPr>
+          <p:cNvSpPr>
+            <a:spLocks noGrp="1" noRot="1" noChangeAspect="1" noMove="1" noResize="1" noEditPoints="1" noAdjustHandles="1" noChangeArrowheads="1" noChangeShapeType="1" noTextEdit="1"/>
+          </p:cNvSpPr>
+          <p:nvPr>
+            <p:extLst>
+              <p:ext uri="{386F3935-93C4-4BCD-93E2-E3B085C9AB24}">
+                <p16:designElem xmlns:p16="http://schemas.microsoft.com/office/powerpoint/2015/main" val="1"/>
+              </p:ext>
+            </p:extLst>
+          </p:nvPr>
+        </p:nvSpPr>
+        <p:spPr>
+          <a:xfrm>
+            <a:off x="0" y="0"/>
+            <a:ext cx="12188952" cy="6858000"/>
+          </a:xfrm>
+          <a:prstGeom prst="rect">
+            <a:avLst/>
+          </a:prstGeom>
+          <a:ln>
+            <a:noFill/>
+          </a:ln>
+        </p:spPr>
+        <p:style>
+          <a:lnRef idx="2">
+            <a:schemeClr val="accent1">
+              <a:shade val="50000"/>
+            </a:schemeClr>
+          </a:lnRef>
+          <a:fillRef idx="1">
+            <a:schemeClr val="accent1"/>
+          </a:fillRef>
+          <a:effectRef idx="0">
+            <a:schemeClr val="accent1"/>
+          </a:effectRef>
+          <a:fontRef idx="minor">
+            <a:schemeClr val="lt1"/>
+          </a:fontRef>
+        </p:style>
+        <p:txBody>
+          <a:bodyPr rtlCol="0" anchor="ctr"/>
+          <a:lstStyle/>
+          <a:p>
+            <a:pPr algn="ctr"/>
+            <a:endParaRPr lang="en-US"/>
+          </a:p>
+        </p:txBody>
+      </p:sp>
+      <p:sp>
+        <p:nvSpPr>
+          <p:cNvPr id="2" name="Titolo 1">
+            <a:extLst>
+              <a:ext uri="{FF2B5EF4-FFF2-40B4-BE49-F238E27FC236}">
+                <a16:creationId xmlns:a16="http://schemas.microsoft.com/office/drawing/2014/main" id="{3CC1CF9C-F841-44AC-6DD2-61FC3AD3F3CF}"/>
+              </a:ext>
+            </a:extLst>
+          </p:cNvPr>
+          <p:cNvSpPr>
+            <a:spLocks noGrp="1"/>
+          </p:cNvSpPr>
+          <p:nvPr>
+            <p:ph type="title"/>
+          </p:nvPr>
+        </p:nvSpPr>
+        <p:spPr>
+          <a:xfrm>
+            <a:off x="838200" y="365125"/>
+            <a:ext cx="10515600" cy="1325563"/>
+          </a:xfrm>
+        </p:spPr>
+        <p:txBody>
+          <a:bodyPr>
+            <a:normAutofit/>
+          </a:bodyPr>
+          <a:lstStyle/>
+          <a:p>
+            <a:r>
+              <a:rPr lang="it-IT" sz="5400"/>
+              <a:t>Progettazione database</a:t>
+            </a:r>
+          </a:p>
+        </p:txBody>
+      </p:sp>
+      <p:sp>
+        <p:nvSpPr>
+          <p:cNvPr id="10" name="sketch line">
+            <a:extLst>
+              <a:ext uri="{FF2B5EF4-FFF2-40B4-BE49-F238E27FC236}">
+                <a16:creationId xmlns:a16="http://schemas.microsoft.com/office/drawing/2014/main" id="{DB17E863-922E-4C26-BD64-E8FD41D28661}"/>
+              </a:ext>
+              <a:ext uri="{C183D7F6-B498-43B3-948B-1728B52AA6E4}">
+                <adec:decorative xmlns:adec="http://schemas.microsoft.com/office/drawing/2017/decorative" val="1"/>
+              </a:ext>
+            </a:extLst>
+          </p:cNvPr>
+          <p:cNvSpPr>
+            <a:spLocks noGrp="1" noRot="1" noChangeAspect="1" noMove="1" noResize="1" noEditPoints="1" noAdjustHandles="1" noChangeArrowheads="1" noChangeShapeType="1" noTextEdit="1"/>
+          </p:cNvSpPr>
+          <p:nvPr>
+            <p:extLst>
+              <p:ext uri="{386F3935-93C4-4BCD-93E2-E3B085C9AB24}">
+                <p16:designElem xmlns:p16="http://schemas.microsoft.com/office/powerpoint/2015/main" val="1"/>
+              </p:ext>
+            </p:extLst>
+          </p:nvPr>
+        </p:nvSpPr>
+        <p:spPr>
+          <a:xfrm>
+            <a:off x="669036" y="1677373"/>
+            <a:ext cx="10853928" cy="18288"/>
+          </a:xfrm>
+          <a:custGeom>
+            <a:avLst/>
+            <a:gdLst>
+              <a:gd name="csX0" fmla="*/ 0 w 10853928"/>
+              <a:gd name="csY0" fmla="*/ 0 h 18288"/>
+              <a:gd name="csX1" fmla="*/ 461292 w 10853928"/>
+              <a:gd name="csY1" fmla="*/ 0 h 18288"/>
+              <a:gd name="csX2" fmla="*/ 1139662 w 10853928"/>
+              <a:gd name="csY2" fmla="*/ 0 h 18288"/>
+              <a:gd name="csX3" fmla="*/ 1926572 w 10853928"/>
+              <a:gd name="csY3" fmla="*/ 0 h 18288"/>
+              <a:gd name="csX4" fmla="*/ 2279325 w 10853928"/>
+              <a:gd name="csY4" fmla="*/ 0 h 18288"/>
+              <a:gd name="csX5" fmla="*/ 2632078 w 10853928"/>
+              <a:gd name="csY5" fmla="*/ 0 h 18288"/>
+              <a:gd name="csX6" fmla="*/ 3527527 w 10853928"/>
+              <a:gd name="csY6" fmla="*/ 0 h 18288"/>
+              <a:gd name="csX7" fmla="*/ 4205897 w 10853928"/>
+              <a:gd name="csY7" fmla="*/ 0 h 18288"/>
+              <a:gd name="csX8" fmla="*/ 4558650 w 10853928"/>
+              <a:gd name="csY8" fmla="*/ 0 h 18288"/>
+              <a:gd name="csX9" fmla="*/ 5237020 w 10853928"/>
+              <a:gd name="csY9" fmla="*/ 0 h 18288"/>
+              <a:gd name="csX10" fmla="*/ 6132469 w 10853928"/>
+              <a:gd name="csY10" fmla="*/ 0 h 18288"/>
+              <a:gd name="csX11" fmla="*/ 6702301 w 10853928"/>
+              <a:gd name="csY11" fmla="*/ 0 h 18288"/>
+              <a:gd name="csX12" fmla="*/ 7272132 w 10853928"/>
+              <a:gd name="csY12" fmla="*/ 0 h 18288"/>
+              <a:gd name="csX13" fmla="*/ 7950502 w 10853928"/>
+              <a:gd name="csY13" fmla="*/ 0 h 18288"/>
+              <a:gd name="csX14" fmla="*/ 8737412 w 10853928"/>
+              <a:gd name="csY14" fmla="*/ 0 h 18288"/>
+              <a:gd name="csX15" fmla="*/ 9524322 w 10853928"/>
+              <a:gd name="csY15" fmla="*/ 0 h 18288"/>
+              <a:gd name="csX16" fmla="*/ 10853928 w 10853928"/>
+              <a:gd name="csY16" fmla="*/ 0 h 18288"/>
+              <a:gd name="csX17" fmla="*/ 10853928 w 10853928"/>
+              <a:gd name="csY17" fmla="*/ 18288 h 18288"/>
+              <a:gd name="csX18" fmla="*/ 10392636 w 10853928"/>
+              <a:gd name="csY18" fmla="*/ 18288 h 18288"/>
+              <a:gd name="csX19" fmla="*/ 9497187 w 10853928"/>
+              <a:gd name="csY19" fmla="*/ 18288 h 18288"/>
+              <a:gd name="csX20" fmla="*/ 8818817 w 10853928"/>
+              <a:gd name="csY20" fmla="*/ 18288 h 18288"/>
+              <a:gd name="csX21" fmla="*/ 8466064 w 10853928"/>
+              <a:gd name="csY21" fmla="*/ 18288 h 18288"/>
+              <a:gd name="csX22" fmla="*/ 7787693 w 10853928"/>
+              <a:gd name="csY22" fmla="*/ 18288 h 18288"/>
+              <a:gd name="csX23" fmla="*/ 7217862 w 10853928"/>
+              <a:gd name="csY23" fmla="*/ 18288 h 18288"/>
+              <a:gd name="csX24" fmla="*/ 6648031 w 10853928"/>
+              <a:gd name="csY24" fmla="*/ 18288 h 18288"/>
+              <a:gd name="csX25" fmla="*/ 6078200 w 10853928"/>
+              <a:gd name="csY25" fmla="*/ 18288 h 18288"/>
+              <a:gd name="csX26" fmla="*/ 5508368 w 10853928"/>
+              <a:gd name="csY26" fmla="*/ 18288 h 18288"/>
+              <a:gd name="csX27" fmla="*/ 4721459 w 10853928"/>
+              <a:gd name="csY27" fmla="*/ 18288 h 18288"/>
+              <a:gd name="csX28" fmla="*/ 4043088 w 10853928"/>
+              <a:gd name="csY28" fmla="*/ 18288 h 18288"/>
+              <a:gd name="csX29" fmla="*/ 3690336 w 10853928"/>
+              <a:gd name="csY29" fmla="*/ 18288 h 18288"/>
+              <a:gd name="csX30" fmla="*/ 3120504 w 10853928"/>
+              <a:gd name="csY30" fmla="*/ 18288 h 18288"/>
+              <a:gd name="csX31" fmla="*/ 2333595 w 10853928"/>
+              <a:gd name="csY31" fmla="*/ 18288 h 18288"/>
+              <a:gd name="csX32" fmla="*/ 1872303 w 10853928"/>
+              <a:gd name="csY32" fmla="*/ 18288 h 18288"/>
+              <a:gd name="csX33" fmla="*/ 976854 w 10853928"/>
+              <a:gd name="csY33" fmla="*/ 18288 h 18288"/>
+              <a:gd name="csX34" fmla="*/ 0 w 10853928"/>
+              <a:gd name="csY34" fmla="*/ 18288 h 18288"/>
+              <a:gd name="csX35" fmla="*/ 0 w 10853928"/>
+              <a:gd name="csY35" fmla="*/ 0 h 18288"/>
+            </a:gdLst>
+            <a:ahLst/>
+            <a:cxnLst>
+              <a:cxn ang="0">
+                <a:pos x="csX0" y="csY0"/>
+              </a:cxn>
+              <a:cxn ang="0">
+                <a:pos x="csX1" y="csY1"/>
+              </a:cxn>
+              <a:cxn ang="0">
+                <a:pos x="csX2" y="csY2"/>
+              </a:cxn>
+              <a:cxn ang="0">
+                <a:pos x="csX3" y="csY3"/>
+              </a:cxn>
+              <a:cxn ang="0">
+                <a:pos x="csX4" y="csY4"/>
+              </a:cxn>
+              <a:cxn ang="0">
+                <a:pos x="csX5" y="csY5"/>
+              </a:cxn>
+              <a:cxn ang="0">
+                <a:pos x="csX6" y="csY6"/>
+              </a:cxn>
+              <a:cxn ang="0">
+                <a:pos x="csX7" y="csY7"/>
+              </a:cxn>
+              <a:cxn ang="0">
+                <a:pos x="csX8" y="csY8"/>
+              </a:cxn>
+              <a:cxn ang="0">
+                <a:pos x="csX9" y="csY9"/>
+              </a:cxn>
+              <a:cxn ang="0">
+                <a:pos x="csX10" y="csY10"/>
+              </a:cxn>
+              <a:cxn ang="0">
+                <a:pos x="csX11" y="csY11"/>
+              </a:cxn>
+              <a:cxn ang="0">
+                <a:pos x="csX12" y="csY12"/>
+              </a:cxn>
+              <a:cxn ang="0">
+                <a:pos x="csX13" y="csY13"/>
+              </a:cxn>
+              <a:cxn ang="0">
+                <a:pos x="csX14" y="csY14"/>
+              </a:cxn>
+              <a:cxn ang="0">
+                <a:pos x="csX15" y="csY15"/>
+              </a:cxn>
+              <a:cxn ang="0">
+                <a:pos x="csX16" y="csY16"/>
+              </a:cxn>
+              <a:cxn ang="0">
+                <a:pos x="csX17" y="csY17"/>
+              </a:cxn>
+              <a:cxn ang="0">
+                <a:pos x="csX18" y="csY18"/>
+              </a:cxn>
+              <a:cxn ang="0">
+                <a:pos x="csX19" y="csY19"/>
+              </a:cxn>
+              <a:cxn ang="0">
+                <a:pos x="csX20" y="csY20"/>
+              </a:cxn>
+              <a:cxn ang="0">
+                <a:pos x="csX21" y="csY21"/>
+              </a:cxn>
+              <a:cxn ang="0">
+                <a:pos x="csX22" y="csY22"/>
+              </a:cxn>
+              <a:cxn ang="0">
+                <a:pos x="csX23" y="csY23"/>
+              </a:cxn>
+              <a:cxn ang="0">
+                <a:pos x="csX24" y="csY24"/>
+              </a:cxn>
+              <a:cxn ang="0">
+                <a:pos x="csX25" y="csY25"/>
+              </a:cxn>
+              <a:cxn ang="0">
+                <a:pos x="csX26" y="csY26"/>
+              </a:cxn>
+              <a:cxn ang="0">
+                <a:pos x="csX27" y="csY27"/>
+              </a:cxn>
+              <a:cxn ang="0">
+                <a:pos x="csX28" y="csY28"/>
+              </a:cxn>
+              <a:cxn ang="0">
+                <a:pos x="csX29" y="csY29"/>
+              </a:cxn>
+              <a:cxn ang="0">
+                <a:pos x="csX30" y="csY30"/>
+              </a:cxn>
+              <a:cxn ang="0">
+                <a:pos x="csX31" y="csY31"/>
+              </a:cxn>
+              <a:cxn ang="0">
+                <a:pos x="csX32" y="csY32"/>
+              </a:cxn>
+              <a:cxn ang="0">
+                <a:pos x="csX33" y="csY33"/>
+              </a:cxn>
+              <a:cxn ang="0">
+                <a:pos x="csX34" y="csY34"/>
+              </a:cxn>
+              <a:cxn ang="0">
+                <a:pos x="csX35" y="csY35"/>
+              </a:cxn>
+            </a:cxnLst>
+            <a:rect l="l" t="t" r="r" b="b"/>
+            <a:pathLst>
+              <a:path w="10853928" h="18288" fill="none" extrusionOk="0">
+                <a:moveTo>
+                  <a:pt x="0" y="0"/>
+                </a:moveTo>
+                <a:cubicBezTo>
+                  <a:pt x="146993" y="-19076"/>
+                  <a:pt x="347684" y="-4790"/>
+                  <a:pt x="461292" y="0"/>
+                </a:cubicBezTo>
+                <a:cubicBezTo>
+                  <a:pt x="574900" y="4790"/>
+                  <a:pt x="808367" y="19821"/>
+                  <a:pt x="1139662" y="0"/>
+                </a:cubicBezTo>
+                <a:cubicBezTo>
+                  <a:pt x="1470957" y="-19821"/>
+                  <a:pt x="1627405" y="5721"/>
+                  <a:pt x="1926572" y="0"/>
+                </a:cubicBezTo>
+                <a:cubicBezTo>
+                  <a:pt x="2225739" y="-5721"/>
+                  <a:pt x="2137730" y="-3235"/>
+                  <a:pt x="2279325" y="0"/>
+                </a:cubicBezTo>
+                <a:cubicBezTo>
+                  <a:pt x="2420920" y="3235"/>
+                  <a:pt x="2456518" y="9685"/>
+                  <a:pt x="2632078" y="0"/>
+                </a:cubicBezTo>
+                <a:cubicBezTo>
+                  <a:pt x="2807638" y="-9685"/>
+                  <a:pt x="3211516" y="-43007"/>
+                  <a:pt x="3527527" y="0"/>
+                </a:cubicBezTo>
+                <a:cubicBezTo>
+                  <a:pt x="3843538" y="43007"/>
+                  <a:pt x="4058833" y="22042"/>
+                  <a:pt x="4205897" y="0"/>
+                </a:cubicBezTo>
+                <a:cubicBezTo>
+                  <a:pt x="4352961" y="-22042"/>
+                  <a:pt x="4474805" y="-11846"/>
+                  <a:pt x="4558650" y="0"/>
+                </a:cubicBezTo>
+                <a:cubicBezTo>
+                  <a:pt x="4642495" y="11846"/>
+                  <a:pt x="5041928" y="-6069"/>
+                  <a:pt x="5237020" y="0"/>
+                </a:cubicBezTo>
+                <a:cubicBezTo>
+                  <a:pt x="5432112" y="6069"/>
+                  <a:pt x="5943266" y="-17479"/>
+                  <a:pt x="6132469" y="0"/>
+                </a:cubicBezTo>
+                <a:cubicBezTo>
+                  <a:pt x="6321672" y="17479"/>
+                  <a:pt x="6483872" y="26234"/>
+                  <a:pt x="6702301" y="0"/>
+                </a:cubicBezTo>
+                <a:cubicBezTo>
+                  <a:pt x="6920730" y="-26234"/>
+                  <a:pt x="6991194" y="-15156"/>
+                  <a:pt x="7272132" y="0"/>
+                </a:cubicBezTo>
+                <a:cubicBezTo>
+                  <a:pt x="7553070" y="15156"/>
+                  <a:pt x="7684444" y="-32961"/>
+                  <a:pt x="7950502" y="0"/>
+                </a:cubicBezTo>
+                <a:cubicBezTo>
+                  <a:pt x="8216560" y="32961"/>
+                  <a:pt x="8493290" y="-10491"/>
+                  <a:pt x="8737412" y="0"/>
+                </a:cubicBezTo>
+                <a:cubicBezTo>
+                  <a:pt x="8981534" y="10491"/>
+                  <a:pt x="9191586" y="-13899"/>
+                  <a:pt x="9524322" y="0"/>
+                </a:cubicBezTo>
+                <a:cubicBezTo>
+                  <a:pt x="9857058" y="13899"/>
+                  <a:pt x="10297509" y="7485"/>
+                  <a:pt x="10853928" y="0"/>
+                </a:cubicBezTo>
+                <a:cubicBezTo>
+                  <a:pt x="10854574" y="4451"/>
+                  <a:pt x="10854418" y="9226"/>
+                  <a:pt x="10853928" y="18288"/>
+                </a:cubicBezTo>
+                <a:cubicBezTo>
+                  <a:pt x="10691638" y="28522"/>
+                  <a:pt x="10574319" y="29578"/>
+                  <a:pt x="10392636" y="18288"/>
+                </a:cubicBezTo>
+                <a:cubicBezTo>
+                  <a:pt x="10210953" y="6998"/>
+                  <a:pt x="9836277" y="-16742"/>
+                  <a:pt x="9497187" y="18288"/>
+                </a:cubicBezTo>
+                <a:cubicBezTo>
+                  <a:pt x="9158097" y="53318"/>
+                  <a:pt x="9119479" y="30714"/>
+                  <a:pt x="8818817" y="18288"/>
+                </a:cubicBezTo>
+                <a:cubicBezTo>
+                  <a:pt x="8518155" y="5863"/>
+                  <a:pt x="8640037" y="6483"/>
+                  <a:pt x="8466064" y="18288"/>
+                </a:cubicBezTo>
+                <a:cubicBezTo>
+                  <a:pt x="8292091" y="30093"/>
+                  <a:pt x="7997656" y="18914"/>
+                  <a:pt x="7787693" y="18288"/>
+                </a:cubicBezTo>
+                <a:cubicBezTo>
+                  <a:pt x="7577730" y="17662"/>
+                  <a:pt x="7412468" y="21416"/>
+                  <a:pt x="7217862" y="18288"/>
+                </a:cubicBezTo>
+                <a:cubicBezTo>
+                  <a:pt x="7023256" y="15160"/>
+                  <a:pt x="6898018" y="14824"/>
+                  <a:pt x="6648031" y="18288"/>
+                </a:cubicBezTo>
+                <a:cubicBezTo>
+                  <a:pt x="6398044" y="21752"/>
+                  <a:pt x="6254402" y="38625"/>
+                  <a:pt x="6078200" y="18288"/>
+                </a:cubicBezTo>
+                <a:cubicBezTo>
+                  <a:pt x="5901998" y="-2049"/>
+                  <a:pt x="5622886" y="3213"/>
+                  <a:pt x="5508368" y="18288"/>
+                </a:cubicBezTo>
+                <a:cubicBezTo>
+                  <a:pt x="5393850" y="33363"/>
+                  <a:pt x="5036260" y="26830"/>
+                  <a:pt x="4721459" y="18288"/>
+                </a:cubicBezTo>
+                <a:cubicBezTo>
+                  <a:pt x="4406658" y="9746"/>
+                  <a:pt x="4239221" y="41551"/>
+                  <a:pt x="4043088" y="18288"/>
+                </a:cubicBezTo>
+                <a:cubicBezTo>
+                  <a:pt x="3846955" y="-4975"/>
+                  <a:pt x="3818802" y="34658"/>
+                  <a:pt x="3690336" y="18288"/>
+                </a:cubicBezTo>
+                <a:cubicBezTo>
+                  <a:pt x="3561870" y="1918"/>
+                  <a:pt x="3265491" y="42194"/>
+                  <a:pt x="3120504" y="18288"/>
+                </a:cubicBezTo>
+                <a:cubicBezTo>
+                  <a:pt x="2975517" y="-5618"/>
+                  <a:pt x="2720254" y="36673"/>
+                  <a:pt x="2333595" y="18288"/>
+                </a:cubicBezTo>
+                <a:cubicBezTo>
+                  <a:pt x="1946936" y="-97"/>
+                  <a:pt x="2097241" y="5776"/>
+                  <a:pt x="1872303" y="18288"/>
+                </a:cubicBezTo>
+                <a:cubicBezTo>
+                  <a:pt x="1647365" y="30800"/>
+                  <a:pt x="1282708" y="45380"/>
+                  <a:pt x="976854" y="18288"/>
+                </a:cubicBezTo>
+                <a:cubicBezTo>
+                  <a:pt x="671000" y="-8804"/>
+                  <a:pt x="408401" y="-12775"/>
+                  <a:pt x="0" y="18288"/>
+                </a:cubicBezTo>
+                <a:cubicBezTo>
+                  <a:pt x="-213" y="9468"/>
+                  <a:pt x="187" y="4459"/>
+                  <a:pt x="0" y="0"/>
+                </a:cubicBezTo>
+                <a:close/>
+              </a:path>
+              <a:path w="10853928" h="18288" stroke="0" extrusionOk="0">
+                <a:moveTo>
+                  <a:pt x="0" y="0"/>
+                </a:moveTo>
+                <a:cubicBezTo>
+                  <a:pt x="267322" y="15284"/>
+                  <a:pt x="415388" y="-21048"/>
+                  <a:pt x="569831" y="0"/>
+                </a:cubicBezTo>
+                <a:cubicBezTo>
+                  <a:pt x="724274" y="21048"/>
+                  <a:pt x="769333" y="-2353"/>
+                  <a:pt x="922584" y="0"/>
+                </a:cubicBezTo>
+                <a:cubicBezTo>
+                  <a:pt x="1075835" y="2353"/>
+                  <a:pt x="1399490" y="-145"/>
+                  <a:pt x="1818033" y="0"/>
+                </a:cubicBezTo>
+                <a:cubicBezTo>
+                  <a:pt x="2236576" y="145"/>
+                  <a:pt x="2145330" y="5482"/>
+                  <a:pt x="2387864" y="0"/>
+                </a:cubicBezTo>
+                <a:cubicBezTo>
+                  <a:pt x="2630398" y="-5482"/>
+                  <a:pt x="2793207" y="18487"/>
+                  <a:pt x="2957695" y="0"/>
+                </a:cubicBezTo>
+                <a:cubicBezTo>
+                  <a:pt x="3122183" y="-18487"/>
+                  <a:pt x="3579141" y="19003"/>
+                  <a:pt x="3853144" y="0"/>
+                </a:cubicBezTo>
+                <a:cubicBezTo>
+                  <a:pt x="4127147" y="-19003"/>
+                  <a:pt x="4209857" y="12211"/>
+                  <a:pt x="4314436" y="0"/>
+                </a:cubicBezTo>
+                <a:cubicBezTo>
+                  <a:pt x="4419015" y="-12211"/>
+                  <a:pt x="4762459" y="-17220"/>
+                  <a:pt x="5209885" y="0"/>
+                </a:cubicBezTo>
+                <a:cubicBezTo>
+                  <a:pt x="5657311" y="17220"/>
+                  <a:pt x="5692663" y="-3290"/>
+                  <a:pt x="6105335" y="0"/>
+                </a:cubicBezTo>
+                <a:cubicBezTo>
+                  <a:pt x="6518007" y="3290"/>
+                  <a:pt x="6455516" y="-5124"/>
+                  <a:pt x="6783705" y="0"/>
+                </a:cubicBezTo>
+                <a:cubicBezTo>
+                  <a:pt x="7111894" y="5124"/>
+                  <a:pt x="7441941" y="-17829"/>
+                  <a:pt x="7679154" y="0"/>
+                </a:cubicBezTo>
+                <a:cubicBezTo>
+                  <a:pt x="7916367" y="17829"/>
+                  <a:pt x="8102967" y="-24363"/>
+                  <a:pt x="8248985" y="0"/>
+                </a:cubicBezTo>
+                <a:cubicBezTo>
+                  <a:pt x="8395003" y="24363"/>
+                  <a:pt x="8552393" y="25505"/>
+                  <a:pt x="8818817" y="0"/>
+                </a:cubicBezTo>
+                <a:cubicBezTo>
+                  <a:pt x="9085241" y="-25505"/>
+                  <a:pt x="9411308" y="38000"/>
+                  <a:pt x="9605726" y="0"/>
+                </a:cubicBezTo>
+                <a:cubicBezTo>
+                  <a:pt x="9800144" y="-38000"/>
+                  <a:pt x="10006468" y="-25741"/>
+                  <a:pt x="10175558" y="0"/>
+                </a:cubicBezTo>
+                <a:cubicBezTo>
+                  <a:pt x="10344648" y="25741"/>
+                  <a:pt x="10696282" y="695"/>
+                  <a:pt x="10853928" y="0"/>
+                </a:cubicBezTo>
+                <a:cubicBezTo>
+                  <a:pt x="10853521" y="8690"/>
+                  <a:pt x="10853774" y="14141"/>
+                  <a:pt x="10853928" y="18288"/>
+                </a:cubicBezTo>
+                <a:cubicBezTo>
+                  <a:pt x="10608124" y="24255"/>
+                  <a:pt x="10343415" y="22307"/>
+                  <a:pt x="10067018" y="18288"/>
+                </a:cubicBezTo>
+                <a:cubicBezTo>
+                  <a:pt x="9790621" y="14270"/>
+                  <a:pt x="9843266" y="3564"/>
+                  <a:pt x="9714266" y="18288"/>
+                </a:cubicBezTo>
+                <a:cubicBezTo>
+                  <a:pt x="9585266" y="33012"/>
+                  <a:pt x="9379484" y="1875"/>
+                  <a:pt x="9252974" y="18288"/>
+                </a:cubicBezTo>
+                <a:cubicBezTo>
+                  <a:pt x="9126464" y="34701"/>
+                  <a:pt x="8580678" y="-4904"/>
+                  <a:pt x="8357525" y="18288"/>
+                </a:cubicBezTo>
+                <a:cubicBezTo>
+                  <a:pt x="8134372" y="41480"/>
+                  <a:pt x="7903199" y="26458"/>
+                  <a:pt x="7679154" y="18288"/>
+                </a:cubicBezTo>
+                <a:cubicBezTo>
+                  <a:pt x="7455109" y="10118"/>
+                  <a:pt x="7435944" y="27109"/>
+                  <a:pt x="7217862" y="18288"/>
+                </a:cubicBezTo>
+                <a:cubicBezTo>
+                  <a:pt x="6999780" y="9467"/>
+                  <a:pt x="6680409" y="18985"/>
+                  <a:pt x="6539492" y="18288"/>
+                </a:cubicBezTo>
+                <a:cubicBezTo>
+                  <a:pt x="6398575" y="17592"/>
+                  <a:pt x="6312077" y="33018"/>
+                  <a:pt x="6186739" y="18288"/>
+                </a:cubicBezTo>
+                <a:cubicBezTo>
+                  <a:pt x="6061401" y="3558"/>
+                  <a:pt x="5947033" y="12075"/>
+                  <a:pt x="5833986" y="18288"/>
+                </a:cubicBezTo>
+                <a:cubicBezTo>
+                  <a:pt x="5720939" y="24501"/>
+                  <a:pt x="5482226" y="8586"/>
+                  <a:pt x="5155616" y="18288"/>
+                </a:cubicBezTo>
+                <a:cubicBezTo>
+                  <a:pt x="4829006" y="27991"/>
+                  <a:pt x="4841274" y="29316"/>
+                  <a:pt x="4694324" y="18288"/>
+                </a:cubicBezTo>
+                <a:cubicBezTo>
+                  <a:pt x="4547374" y="7260"/>
+                  <a:pt x="4077675" y="7013"/>
+                  <a:pt x="3907414" y="18288"/>
+                </a:cubicBezTo>
+                <a:cubicBezTo>
+                  <a:pt x="3737153" y="29564"/>
+                  <a:pt x="3538393" y="21630"/>
+                  <a:pt x="3446122" y="18288"/>
+                </a:cubicBezTo>
+                <a:cubicBezTo>
+                  <a:pt x="3353851" y="14946"/>
+                  <a:pt x="2990320" y="-8091"/>
+                  <a:pt x="2659212" y="18288"/>
+                </a:cubicBezTo>
+                <a:cubicBezTo>
+                  <a:pt x="2328104" y="44667"/>
+                  <a:pt x="2427653" y="9607"/>
+                  <a:pt x="2306460" y="18288"/>
+                </a:cubicBezTo>
+                <a:cubicBezTo>
+                  <a:pt x="2185267" y="26969"/>
+                  <a:pt x="1719763" y="3717"/>
+                  <a:pt x="1519550" y="18288"/>
+                </a:cubicBezTo>
+                <a:cubicBezTo>
+                  <a:pt x="1319337" y="32860"/>
+                  <a:pt x="1167371" y="17040"/>
+                  <a:pt x="1058258" y="18288"/>
+                </a:cubicBezTo>
+                <a:cubicBezTo>
+                  <a:pt x="949145" y="19536"/>
+                  <a:pt x="780234" y="31447"/>
+                  <a:pt x="705505" y="18288"/>
+                </a:cubicBezTo>
+                <a:cubicBezTo>
+                  <a:pt x="630776" y="5129"/>
+                  <a:pt x="215796" y="30056"/>
+                  <a:pt x="0" y="18288"/>
+                </a:cubicBezTo>
+                <a:cubicBezTo>
+                  <a:pt x="-53" y="11301"/>
+                  <a:pt x="-649" y="7756"/>
+                  <a:pt x="0" y="0"/>
+                </a:cubicBezTo>
+                <a:close/>
+              </a:path>
+            </a:pathLst>
+          </a:custGeom>
+          <a:solidFill>
+            <a:schemeClr val="accent2"/>
+          </a:solidFill>
+          <a:ln w="41275" cap="rnd">
+            <a:solidFill>
+              <a:schemeClr val="accent2"/>
+            </a:solidFill>
+            <a:round/>
+            <a:extLst>
+              <a:ext uri="{C807C97D-BFC1-408E-A445-0C87EB9F89A2}">
+                <ask:lineSketchStyleProps xmlns:ask="http://schemas.microsoft.com/office/drawing/2018/sketchyshapes" sd="1219033472">
+                  <a:prstGeom prst="rect">
+                    <a:avLst/>
+                  </a:prstGeom>
+                  <ask:type>
+                    <ask:lineSketchFreehand/>
+                  </ask:type>
+                </ask:lineSketchStyleProps>
+              </a:ext>
+            </a:extLst>
+          </a:ln>
+        </p:spPr>
+        <p:style>
+          <a:lnRef idx="2">
+            <a:schemeClr val="accent1">
+              <a:shade val="50000"/>
+            </a:schemeClr>
+          </a:lnRef>
+          <a:fillRef idx="1">
+            <a:schemeClr val="accent1"/>
+          </a:fillRef>
+          <a:effectRef idx="0">
+            <a:schemeClr val="accent1"/>
+          </a:effectRef>
+          <a:fontRef idx="minor">
+            <a:schemeClr val="lt1"/>
+          </a:fontRef>
+        </p:style>
+        <p:txBody>
+          <a:bodyPr rtlCol="0" anchor="ctr"/>
+          <a:lstStyle/>
+          <a:p>
+            <a:pPr algn="ctr"/>
+            <a:endParaRPr lang="en-US"/>
+          </a:p>
+        </p:txBody>
+      </p:sp>
+      <p:sp>
+        <p:nvSpPr>
+          <p:cNvPr id="3" name="Segnaposto contenuto 2">
+            <a:extLst>
+              <a:ext uri="{FF2B5EF4-FFF2-40B4-BE49-F238E27FC236}">
+                <a16:creationId xmlns:a16="http://schemas.microsoft.com/office/drawing/2014/main" id="{60A1460C-748D-043D-06F3-42BB287A51DA}"/>
+              </a:ext>
+            </a:extLst>
+          </p:cNvPr>
+          <p:cNvSpPr>
+            <a:spLocks noGrp="1"/>
+          </p:cNvSpPr>
+          <p:nvPr>
+            <p:ph idx="1"/>
+          </p:nvPr>
+        </p:nvSpPr>
+        <p:spPr>
+          <a:xfrm>
+            <a:off x="838200" y="1929384"/>
+            <a:ext cx="10515600" cy="4251960"/>
+          </a:xfrm>
+        </p:spPr>
+        <p:txBody>
+          <a:bodyPr>
+            <a:normAutofit/>
+          </a:bodyPr>
+          <a:lstStyle/>
+          <a:p>
+            <a:r>
+              <a:rPr lang="it-IT" sz="2200"/>
+              <a:t>Importazione da Access mediante SSMA</a:t>
+            </a:r>
+          </a:p>
+          <a:p>
+            <a:r>
+              <a:rPr lang="it-IT" sz="2200"/>
+              <a:t>Ristrutturazione, normalizzazione, modifiche tramite SSIS.</a:t>
+            </a:r>
+          </a:p>
+          <a:p>
+            <a:r>
+              <a:rPr lang="it-IT" sz="2200"/>
+              <a:t>Unificato tabelle simili e differenziate mediante appositi Lookup</a:t>
+            </a:r>
+          </a:p>
+          <a:p>
+            <a:r>
+              <a:rPr lang="it-IT" sz="2200"/>
+              <a:t>Replicate strutture di database da cui si deve importare dati</a:t>
+            </a:r>
+          </a:p>
+          <a:p>
+            <a:r>
+              <a:rPr lang="it-IT" sz="2200"/>
+              <a:t>Generate tabelle e trigger di backup</a:t>
+            </a:r>
+          </a:p>
+          <a:p>
+            <a:r>
+              <a:rPr lang="it-IT" sz="2200"/>
+              <a:t>Generate stored procedure di import dati.</a:t>
+            </a:r>
+          </a:p>
+        </p:txBody>
+      </p:sp>
+    </p:spTree>
+    <p:extLst>
+      <p:ext uri="{BB962C8B-B14F-4D97-AF65-F5344CB8AC3E}">
+        <p14:creationId xmlns:p14="http://schemas.microsoft.com/office/powerpoint/2010/main" val="2051537522"/>
+      </p:ext>
+    </p:extLst>
+  </p:cSld>
+  <p:clrMapOvr>
+    <a:masterClrMapping/>
+  </p:clrMapOvr>
+</p:sld>
+</file>
+
+<file path=ppt/slides/slide9.xml><?xml version="1.0" encoding="utf-8"?>
+<p:sld xmlns:a="http://schemas.openxmlformats.org/drawingml/2006/main" xmlns:r="http://schemas.openxmlformats.org/officeDocument/2006/relationships" xmlns:p="http://schemas.openxmlformats.org/presentationml/2006/main">
+  <p:cSld>
+    <p:bg>
+      <p:bgPr>
+        <a:solidFill>
+          <a:schemeClr val="bg1"/>
+        </a:solidFill>
+        <a:effectLst/>
+      </p:bgPr>
+    </p:bg>
+    <p:spTree>
+      <p:nvGrpSpPr>
+        <p:cNvPr id="1" name=""/>
+        <p:cNvGrpSpPr/>
+        <p:nvPr/>
+      </p:nvGrpSpPr>
+      <p:grpSpPr>
+        <a:xfrm>
+          <a:off x="0" y="0"/>
+          <a:ext cx="0" cy="0"/>
+          <a:chOff x="0" y="0"/>
+          <a:chExt cx="0" cy="0"/>
+        </a:xfrm>
+      </p:grpSpPr>
+      <p:sp useBgFill="1">
+        <p:nvSpPr>
+          <p:cNvPr id="10" name="Rectangle 9">
+            <a:extLst>
+              <a:ext uri="{FF2B5EF4-FFF2-40B4-BE49-F238E27FC236}">
+                <a16:creationId xmlns:a16="http://schemas.microsoft.com/office/drawing/2014/main" id="{100EDD19-6802-4EC3-95CE-CFFAB042CFD6}"/>
+              </a:ext>
+              <a:ext uri="{C183D7F6-B498-43B3-948B-1728B52AA6E4}">
+                <adec:decorative xmlns:adec="http://schemas.microsoft.com/office/drawing/2017/decorative" val="1"/>
+              </a:ext>
+            </a:extLst>
+          </p:cNvPr>
+          <p:cNvSpPr>
+            <a:spLocks noGrp="1" noRot="1" noChangeAspect="1" noMove="1" noResize="1" noEditPoints="1" noAdjustHandles="1" noChangeArrowheads="1" noChangeShapeType="1" noTextEdit="1"/>
+          </p:cNvSpPr>
+          <p:nvPr>
+            <p:extLst>
+              <p:ext uri="{386F3935-93C4-4BCD-93E2-E3B085C9AB24}">
+                <p16:designElem xmlns:p16="http://schemas.microsoft.com/office/powerpoint/2015/main" val="1"/>
+              </p:ext>
+            </p:extLst>
+          </p:nvPr>
+        </p:nvSpPr>
+        <p:spPr>
+          <a:xfrm>
+            <a:off x="0" y="0"/>
+            <a:ext cx="12188952" cy="6858000"/>
+          </a:xfrm>
+          <a:prstGeom prst="rect">
+            <a:avLst/>
+          </a:prstGeom>
+          <a:ln>
+            <a:noFill/>
+          </a:ln>
+        </p:spPr>
+        <p:style>
+          <a:lnRef idx="2">
+            <a:schemeClr val="accent1">
+              <a:shade val="50000"/>
+            </a:schemeClr>
+          </a:lnRef>
+          <a:fillRef idx="1">
+            <a:schemeClr val="accent1"/>
+          </a:fillRef>
+          <a:effectRef idx="0">
+            <a:schemeClr val="accent1"/>
+          </a:effectRef>
+          <a:fontRef idx="minor">
+            <a:schemeClr val="lt1"/>
+          </a:fontRef>
+        </p:style>
+        <p:txBody>
+          <a:bodyPr rtlCol="0" anchor="ctr"/>
+          <a:lstStyle/>
+          <a:p>
+            <a:pPr algn="ctr"/>
+            <a:endParaRPr lang="en-US"/>
+          </a:p>
+        </p:txBody>
+      </p:sp>
+      <p:sp>
+        <p:nvSpPr>
+          <p:cNvPr id="2" name="Titolo 1">
+            <a:extLst>
+              <a:ext uri="{FF2B5EF4-FFF2-40B4-BE49-F238E27FC236}">
+                <a16:creationId xmlns:a16="http://schemas.microsoft.com/office/drawing/2014/main" id="{B5A35E18-9BF4-93D1-67E4-6F232152BAC7}"/>
+              </a:ext>
+            </a:extLst>
+          </p:cNvPr>
+          <p:cNvSpPr>
+            <a:spLocks noGrp="1"/>
+          </p:cNvSpPr>
+          <p:nvPr>
+            <p:ph type="title"/>
+          </p:nvPr>
+        </p:nvSpPr>
+        <p:spPr>
+          <a:xfrm>
+            <a:off x="838200" y="365125"/>
+            <a:ext cx="10515600" cy="1325563"/>
+          </a:xfrm>
+        </p:spPr>
+        <p:txBody>
+          <a:bodyPr vert="horz" lIns="91440" tIns="45720" rIns="91440" bIns="45720" rtlCol="0" anchor="ctr">
+            <a:normAutofit/>
+          </a:bodyPr>
+          <a:lstStyle/>
+          <a:p>
+            <a:r>
+              <a:rPr lang="en-US" sz="5400" kern="1200">
+                <a:solidFill>
+                  <a:schemeClr val="tx1"/>
+                </a:solidFill>
+                <a:latin typeface="+mj-lt"/>
+                <a:ea typeface="+mj-ea"/>
+                <a:cs typeface="+mj-cs"/>
+              </a:rPr>
+              <a:t>Progettazione model	</a:t>
+            </a:r>
+          </a:p>
+        </p:txBody>
+      </p:sp>
+      <p:sp>
+        <p:nvSpPr>
+          <p:cNvPr id="12" name="sketch line">
+            <a:extLst>
+              <a:ext uri="{FF2B5EF4-FFF2-40B4-BE49-F238E27FC236}">
+                <a16:creationId xmlns:a16="http://schemas.microsoft.com/office/drawing/2014/main" id="{DB17E863-922E-4C26-BD64-E8FD41D28661}"/>
+              </a:ext>
+              <a:ext uri="{C183D7F6-B498-43B3-948B-1728B52AA6E4}">
+                <adec:decorative xmlns:adec="http://schemas.microsoft.com/office/drawing/2017/decorative" val="1"/>
+              </a:ext>
+            </a:extLst>
+          </p:cNvPr>
+          <p:cNvSpPr>
+            <a:spLocks noGrp="1" noRot="1" noChangeAspect="1" noMove="1" noResize="1" noEditPoints="1" noAdjustHandles="1" noChangeArrowheads="1" noChangeShapeType="1" noTextEdit="1"/>
+          </p:cNvSpPr>
+          <p:nvPr>
+            <p:extLst>
+              <p:ext uri="{386F3935-93C4-4BCD-93E2-E3B085C9AB24}">
+                <p16:designElem xmlns:p16="http://schemas.microsoft.com/office/powerpoint/2015/main" val="1"/>
+              </p:ext>
+            </p:extLst>
+          </p:nvPr>
+        </p:nvSpPr>
+        <p:spPr>
+          <a:xfrm>
+            <a:off x="669036" y="1677373"/>
+            <a:ext cx="10853928" cy="18288"/>
+          </a:xfrm>
+          <a:custGeom>
+            <a:avLst/>
+            <a:gdLst>
+              <a:gd name="csX0" fmla="*/ 0 w 10853928"/>
+              <a:gd name="csY0" fmla="*/ 0 h 18288"/>
+              <a:gd name="csX1" fmla="*/ 461292 w 10853928"/>
+              <a:gd name="csY1" fmla="*/ 0 h 18288"/>
+              <a:gd name="csX2" fmla="*/ 1139662 w 10853928"/>
+              <a:gd name="csY2" fmla="*/ 0 h 18288"/>
+              <a:gd name="csX3" fmla="*/ 1926572 w 10853928"/>
+              <a:gd name="csY3" fmla="*/ 0 h 18288"/>
+              <a:gd name="csX4" fmla="*/ 2279325 w 10853928"/>
+              <a:gd name="csY4" fmla="*/ 0 h 18288"/>
+              <a:gd name="csX5" fmla="*/ 2632078 w 10853928"/>
+              <a:gd name="csY5" fmla="*/ 0 h 18288"/>
+              <a:gd name="csX6" fmla="*/ 3527527 w 10853928"/>
+              <a:gd name="csY6" fmla="*/ 0 h 18288"/>
+              <a:gd name="csX7" fmla="*/ 4205897 w 10853928"/>
+              <a:gd name="csY7" fmla="*/ 0 h 18288"/>
+              <a:gd name="csX8" fmla="*/ 4558650 w 10853928"/>
+              <a:gd name="csY8" fmla="*/ 0 h 18288"/>
+              <a:gd name="csX9" fmla="*/ 5237020 w 10853928"/>
+              <a:gd name="csY9" fmla="*/ 0 h 18288"/>
+              <a:gd name="csX10" fmla="*/ 6132469 w 10853928"/>
+              <a:gd name="csY10" fmla="*/ 0 h 18288"/>
+              <a:gd name="csX11" fmla="*/ 6702301 w 10853928"/>
+              <a:gd name="csY11" fmla="*/ 0 h 18288"/>
+              <a:gd name="csX12" fmla="*/ 7272132 w 10853928"/>
+              <a:gd name="csY12" fmla="*/ 0 h 18288"/>
+              <a:gd name="csX13" fmla="*/ 7950502 w 10853928"/>
+              <a:gd name="csY13" fmla="*/ 0 h 18288"/>
+              <a:gd name="csX14" fmla="*/ 8737412 w 10853928"/>
+              <a:gd name="csY14" fmla="*/ 0 h 18288"/>
+              <a:gd name="csX15" fmla="*/ 9524322 w 10853928"/>
+              <a:gd name="csY15" fmla="*/ 0 h 18288"/>
+              <a:gd name="csX16" fmla="*/ 10853928 w 10853928"/>
+              <a:gd name="csY16" fmla="*/ 0 h 18288"/>
+              <a:gd name="csX17" fmla="*/ 10853928 w 10853928"/>
+              <a:gd name="csY17" fmla="*/ 18288 h 18288"/>
+              <a:gd name="csX18" fmla="*/ 10392636 w 10853928"/>
+              <a:gd name="csY18" fmla="*/ 18288 h 18288"/>
+              <a:gd name="csX19" fmla="*/ 9497187 w 10853928"/>
+              <a:gd name="csY19" fmla="*/ 18288 h 18288"/>
+              <a:gd name="csX20" fmla="*/ 8818817 w 10853928"/>
+              <a:gd name="csY20" fmla="*/ 18288 h 18288"/>
+              <a:gd name="csX21" fmla="*/ 8466064 w 10853928"/>
+              <a:gd name="csY21" fmla="*/ 18288 h 18288"/>
+              <a:gd name="csX22" fmla="*/ 7787693 w 10853928"/>
+              <a:gd name="csY22" fmla="*/ 18288 h 18288"/>
+              <a:gd name="csX23" fmla="*/ 7217862 w 10853928"/>
+              <a:gd name="csY23" fmla="*/ 18288 h 18288"/>
+              <a:gd name="csX24" fmla="*/ 6648031 w 10853928"/>
+              <a:gd name="csY24" fmla="*/ 18288 h 18288"/>
+              <a:gd name="csX25" fmla="*/ 6078200 w 10853928"/>
+              <a:gd name="csY25" fmla="*/ 18288 h 18288"/>
+              <a:gd name="csX26" fmla="*/ 5508368 w 10853928"/>
+              <a:gd name="csY26" fmla="*/ 18288 h 18288"/>
+              <a:gd name="csX27" fmla="*/ 4721459 w 10853928"/>
+              <a:gd name="csY27" fmla="*/ 18288 h 18288"/>
+              <a:gd name="csX28" fmla="*/ 4043088 w 10853928"/>
+              <a:gd name="csY28" fmla="*/ 18288 h 18288"/>
+              <a:gd name="csX29" fmla="*/ 3690336 w 10853928"/>
+              <a:gd name="csY29" fmla="*/ 18288 h 18288"/>
+              <a:gd name="csX30" fmla="*/ 3120504 w 10853928"/>
+              <a:gd name="csY30" fmla="*/ 18288 h 18288"/>
+              <a:gd name="csX31" fmla="*/ 2333595 w 10853928"/>
+              <a:gd name="csY31" fmla="*/ 18288 h 18288"/>
+              <a:gd name="csX32" fmla="*/ 1872303 w 10853928"/>
+              <a:gd name="csY32" fmla="*/ 18288 h 18288"/>
+              <a:gd name="csX33" fmla="*/ 976854 w 10853928"/>
+              <a:gd name="csY33" fmla="*/ 18288 h 18288"/>
+              <a:gd name="csX34" fmla="*/ 0 w 10853928"/>
+              <a:gd name="csY34" fmla="*/ 18288 h 18288"/>
+              <a:gd name="csX35" fmla="*/ 0 w 10853928"/>
+              <a:gd name="csY35" fmla="*/ 0 h 18288"/>
+            </a:gdLst>
+            <a:ahLst/>
+            <a:cxnLst>
+              <a:cxn ang="0">
+                <a:pos x="csX0" y="csY0"/>
+              </a:cxn>
+              <a:cxn ang="0">
+                <a:pos x="csX1" y="csY1"/>
+              </a:cxn>
+              <a:cxn ang="0">
+                <a:pos x="csX2" y="csY2"/>
+              </a:cxn>
+              <a:cxn ang="0">
+                <a:pos x="csX3" y="csY3"/>
+              </a:cxn>
+              <a:cxn ang="0">
+                <a:pos x="csX4" y="csY4"/>
+              </a:cxn>
+              <a:cxn ang="0">
+                <a:pos x="csX5" y="csY5"/>
+              </a:cxn>
+              <a:cxn ang="0">
+                <a:pos x="csX6" y="csY6"/>
+              </a:cxn>
+              <a:cxn ang="0">
+                <a:pos x="csX7" y="csY7"/>
+              </a:cxn>
+              <a:cxn ang="0">
+                <a:pos x="csX8" y="csY8"/>
+              </a:cxn>
+              <a:cxn ang="0">
+                <a:pos x="csX9" y="csY9"/>
+              </a:cxn>
+              <a:cxn ang="0">
+                <a:pos x="csX10" y="csY10"/>
+              </a:cxn>
+              <a:cxn ang="0">
+                <a:pos x="csX11" y="csY11"/>
+              </a:cxn>
+              <a:cxn ang="0">
+                <a:pos x="csX12" y="csY12"/>
+              </a:cxn>
+              <a:cxn ang="0">
+                <a:pos x="csX13" y="csY13"/>
+              </a:cxn>
+              <a:cxn ang="0">
+                <a:pos x="csX14" y="csY14"/>
+              </a:cxn>
+              <a:cxn ang="0">
+                <a:pos x="csX15" y="csY15"/>
+              </a:cxn>
+              <a:cxn ang="0">
+                <a:pos x="csX16" y="csY16"/>
+              </a:cxn>
+              <a:cxn ang="0">
+                <a:pos x="csX17" y="csY17"/>
+              </a:cxn>
+              <a:cxn ang="0">
+                <a:pos x="csX18" y="csY18"/>
+              </a:cxn>
+              <a:cxn ang="0">
+                <a:pos x="csX19" y="csY19"/>
+              </a:cxn>
+              <a:cxn ang="0">
+                <a:pos x="csX20" y="csY20"/>
+              </a:cxn>
+              <a:cxn ang="0">
+                <a:pos x="csX21" y="csY21"/>
+              </a:cxn>
+              <a:cxn ang="0">
+                <a:pos x="csX22" y="csY22"/>
+              </a:cxn>
+              <a:cxn ang="0">
+                <a:pos x="csX23" y="csY23"/>
+              </a:cxn>
+              <a:cxn ang="0">
+                <a:pos x="csX24" y="csY24"/>
+              </a:cxn>
+              <a:cxn ang="0">
+                <a:pos x="csX25" y="csY25"/>
+              </a:cxn>
+              <a:cxn ang="0">
+                <a:pos x="csX26" y="csY26"/>
+              </a:cxn>
+              <a:cxn ang="0">
+                <a:pos x="csX27" y="csY27"/>
+              </a:cxn>
+              <a:cxn ang="0">
+                <a:pos x="csX28" y="csY28"/>
+              </a:cxn>
+              <a:cxn ang="0">
+                <a:pos x="csX29" y="csY29"/>
+              </a:cxn>
+              <a:cxn ang="0">
+                <a:pos x="csX30" y="csY30"/>
+              </a:cxn>
+              <a:cxn ang="0">
+                <a:pos x="csX31" y="csY31"/>
+              </a:cxn>
+              <a:cxn ang="0">
+                <a:pos x="csX32" y="csY32"/>
+              </a:cxn>
+              <a:cxn ang="0">
+                <a:pos x="csX33" y="csY33"/>
+              </a:cxn>
+              <a:cxn ang="0">
+                <a:pos x="csX34" y="csY34"/>
+              </a:cxn>
+              <a:cxn ang="0">
+                <a:pos x="csX35" y="csY35"/>
+              </a:cxn>
+            </a:cxnLst>
+            <a:rect l="l" t="t" r="r" b="b"/>
+            <a:pathLst>
+              <a:path w="10853928" h="18288" fill="none" extrusionOk="0">
+                <a:moveTo>
+                  <a:pt x="0" y="0"/>
+                </a:moveTo>
+                <a:cubicBezTo>
+                  <a:pt x="146993" y="-19076"/>
+                  <a:pt x="347684" y="-4790"/>
+                  <a:pt x="461292" y="0"/>
+                </a:cubicBezTo>
+                <a:cubicBezTo>
+                  <a:pt x="574900" y="4790"/>
+                  <a:pt x="808367" y="19821"/>
+                  <a:pt x="1139662" y="0"/>
+                </a:cubicBezTo>
+                <a:cubicBezTo>
+                  <a:pt x="1470957" y="-19821"/>
+                  <a:pt x="1627405" y="5721"/>
+                  <a:pt x="1926572" y="0"/>
+                </a:cubicBezTo>
+                <a:cubicBezTo>
+                  <a:pt x="2225739" y="-5721"/>
+                  <a:pt x="2137730" y="-3235"/>
+                  <a:pt x="2279325" y="0"/>
+                </a:cubicBezTo>
+                <a:cubicBezTo>
+                  <a:pt x="2420920" y="3235"/>
+                  <a:pt x="2456518" y="9685"/>
+                  <a:pt x="2632078" y="0"/>
+                </a:cubicBezTo>
+                <a:cubicBezTo>
+                  <a:pt x="2807638" y="-9685"/>
+                  <a:pt x="3211516" y="-43007"/>
+                  <a:pt x="3527527" y="0"/>
+                </a:cubicBezTo>
+                <a:cubicBezTo>
+                  <a:pt x="3843538" y="43007"/>
+                  <a:pt x="4058833" y="22042"/>
+                  <a:pt x="4205897" y="0"/>
+                </a:cubicBezTo>
+                <a:cubicBezTo>
+                  <a:pt x="4352961" y="-22042"/>
+                  <a:pt x="4474805" y="-11846"/>
+                  <a:pt x="4558650" y="0"/>
+                </a:cubicBezTo>
+                <a:cubicBezTo>
+                  <a:pt x="4642495" y="11846"/>
+                  <a:pt x="5041928" y="-6069"/>
+                  <a:pt x="5237020" y="0"/>
+                </a:cubicBezTo>
+                <a:cubicBezTo>
+                  <a:pt x="5432112" y="6069"/>
+                  <a:pt x="5943266" y="-17479"/>
+                  <a:pt x="6132469" y="0"/>
+                </a:cubicBezTo>
+                <a:cubicBezTo>
+                  <a:pt x="6321672" y="17479"/>
+                  <a:pt x="6483872" y="26234"/>
+                  <a:pt x="6702301" y="0"/>
+                </a:cubicBezTo>
+                <a:cubicBezTo>
+                  <a:pt x="6920730" y="-26234"/>
+                  <a:pt x="6991194" y="-15156"/>
+                  <a:pt x="7272132" y="0"/>
+                </a:cubicBezTo>
+                <a:cubicBezTo>
+                  <a:pt x="7553070" y="15156"/>
+                  <a:pt x="7684444" y="-32961"/>
+                  <a:pt x="7950502" y="0"/>
+                </a:cubicBezTo>
+                <a:cubicBezTo>
+                  <a:pt x="8216560" y="32961"/>
+                  <a:pt x="8493290" y="-10491"/>
+                  <a:pt x="8737412" y="0"/>
+                </a:cubicBezTo>
+                <a:cubicBezTo>
+                  <a:pt x="8981534" y="10491"/>
+                  <a:pt x="9191586" y="-13899"/>
+                  <a:pt x="9524322" y="0"/>
+                </a:cubicBezTo>
+                <a:cubicBezTo>
+                  <a:pt x="9857058" y="13899"/>
+                  <a:pt x="10297509" y="7485"/>
+                  <a:pt x="10853928" y="0"/>
+                </a:cubicBezTo>
+                <a:cubicBezTo>
+                  <a:pt x="10854574" y="4451"/>
+                  <a:pt x="10854418" y="9226"/>
+                  <a:pt x="10853928" y="18288"/>
+                </a:cubicBezTo>
+                <a:cubicBezTo>
+                  <a:pt x="10691638" y="28522"/>
+                  <a:pt x="10574319" y="29578"/>
+                  <a:pt x="10392636" y="18288"/>
+                </a:cubicBezTo>
+                <a:cubicBezTo>
+                  <a:pt x="10210953" y="6998"/>
+                  <a:pt x="9836277" y="-16742"/>
+                  <a:pt x="9497187" y="18288"/>
+                </a:cubicBezTo>
+                <a:cubicBezTo>
+                  <a:pt x="9158097" y="53318"/>
+                  <a:pt x="9119479" y="30714"/>
+                  <a:pt x="8818817" y="18288"/>
+                </a:cubicBezTo>
+                <a:cubicBezTo>
+                  <a:pt x="8518155" y="5863"/>
+                  <a:pt x="8640037" y="6483"/>
+                  <a:pt x="8466064" y="18288"/>
+                </a:cubicBezTo>
+                <a:cubicBezTo>
+                  <a:pt x="8292091" y="30093"/>
+                  <a:pt x="7997656" y="18914"/>
+                  <a:pt x="7787693" y="18288"/>
+                </a:cubicBezTo>
+                <a:cubicBezTo>
+                  <a:pt x="7577730" y="17662"/>
+                  <a:pt x="7412468" y="21416"/>
+                  <a:pt x="7217862" y="18288"/>
+                </a:cubicBezTo>
+                <a:cubicBezTo>
+                  <a:pt x="7023256" y="15160"/>
+                  <a:pt x="6898018" y="14824"/>
+                  <a:pt x="6648031" y="18288"/>
+                </a:cubicBezTo>
+                <a:cubicBezTo>
+                  <a:pt x="6398044" y="21752"/>
+                  <a:pt x="6254402" y="38625"/>
+                  <a:pt x="6078200" y="18288"/>
+                </a:cubicBezTo>
+                <a:cubicBezTo>
+                  <a:pt x="5901998" y="-2049"/>
+                  <a:pt x="5622886" y="3213"/>
+                  <a:pt x="5508368" y="18288"/>
+                </a:cubicBezTo>
+                <a:cubicBezTo>
+                  <a:pt x="5393850" y="33363"/>
+                  <a:pt x="5036260" y="26830"/>
+                  <a:pt x="4721459" y="18288"/>
+                </a:cubicBezTo>
+                <a:cubicBezTo>
+                  <a:pt x="4406658" y="9746"/>
+                  <a:pt x="4239221" y="41551"/>
+                  <a:pt x="4043088" y="18288"/>
+                </a:cubicBezTo>
+                <a:cubicBezTo>
+                  <a:pt x="3846955" y="-4975"/>
+                  <a:pt x="3818802" y="34658"/>
+                  <a:pt x="3690336" y="18288"/>
+                </a:cubicBezTo>
+                <a:cubicBezTo>
+                  <a:pt x="3561870" y="1918"/>
+                  <a:pt x="3265491" y="42194"/>
+                  <a:pt x="3120504" y="18288"/>
+                </a:cubicBezTo>
+                <a:cubicBezTo>
+                  <a:pt x="2975517" y="-5618"/>
+                  <a:pt x="2720254" y="36673"/>
+                  <a:pt x="2333595" y="18288"/>
+                </a:cubicBezTo>
+                <a:cubicBezTo>
+                  <a:pt x="1946936" y="-97"/>
+                  <a:pt x="2097241" y="5776"/>
+                  <a:pt x="1872303" y="18288"/>
+                </a:cubicBezTo>
+                <a:cubicBezTo>
+                  <a:pt x="1647365" y="30800"/>
+                  <a:pt x="1282708" y="45380"/>
+                  <a:pt x="976854" y="18288"/>
+                </a:cubicBezTo>
+                <a:cubicBezTo>
+                  <a:pt x="671000" y="-8804"/>
+                  <a:pt x="408401" y="-12775"/>
+                  <a:pt x="0" y="18288"/>
+                </a:cubicBezTo>
+                <a:cubicBezTo>
+                  <a:pt x="-213" y="9468"/>
+                  <a:pt x="187" y="4459"/>
+                  <a:pt x="0" y="0"/>
+                </a:cubicBezTo>
+                <a:close/>
+              </a:path>
+              <a:path w="10853928" h="18288" stroke="0" extrusionOk="0">
+                <a:moveTo>
+                  <a:pt x="0" y="0"/>
+                </a:moveTo>
+                <a:cubicBezTo>
+                  <a:pt x="267322" y="15284"/>
+                  <a:pt x="415388" y="-21048"/>
+                  <a:pt x="569831" y="0"/>
+                </a:cubicBezTo>
+                <a:cubicBezTo>
+                  <a:pt x="724274" y="21048"/>
+                  <a:pt x="769333" y="-2353"/>
+                  <a:pt x="922584" y="0"/>
+                </a:cubicBezTo>
+                <a:cubicBezTo>
+                  <a:pt x="1075835" y="2353"/>
+                  <a:pt x="1399490" y="-145"/>
+                  <a:pt x="1818033" y="0"/>
+                </a:cubicBezTo>
+                <a:cubicBezTo>
+                  <a:pt x="2236576" y="145"/>
+                  <a:pt x="2145330" y="5482"/>
+                  <a:pt x="2387864" y="0"/>
+                </a:cubicBezTo>
+                <a:cubicBezTo>
+                  <a:pt x="2630398" y="-5482"/>
+                  <a:pt x="2793207" y="18487"/>
+                  <a:pt x="2957695" y="0"/>
+                </a:cubicBezTo>
+                <a:cubicBezTo>
+                  <a:pt x="3122183" y="-18487"/>
+                  <a:pt x="3579141" y="19003"/>
+                  <a:pt x="3853144" y="0"/>
+                </a:cubicBezTo>
+                <a:cubicBezTo>
+                  <a:pt x="4127147" y="-19003"/>
+                  <a:pt x="4209857" y="12211"/>
+                  <a:pt x="4314436" y="0"/>
+                </a:cubicBezTo>
+                <a:cubicBezTo>
+                  <a:pt x="4419015" y="-12211"/>
+                  <a:pt x="4762459" y="-17220"/>
+                  <a:pt x="5209885" y="0"/>
+                </a:cubicBezTo>
+                <a:cubicBezTo>
+                  <a:pt x="5657311" y="17220"/>
+                  <a:pt x="5692663" y="-3290"/>
+                  <a:pt x="6105335" y="0"/>
+                </a:cubicBezTo>
+                <a:cubicBezTo>
+                  <a:pt x="6518007" y="3290"/>
+                  <a:pt x="6455516" y="-5124"/>
+                  <a:pt x="6783705" y="0"/>
+                </a:cubicBezTo>
+                <a:cubicBezTo>
+                  <a:pt x="7111894" y="5124"/>
+                  <a:pt x="7441941" y="-17829"/>
+                  <a:pt x="7679154" y="0"/>
+                </a:cubicBezTo>
+                <a:cubicBezTo>
+                  <a:pt x="7916367" y="17829"/>
+                  <a:pt x="8102967" y="-24363"/>
+                  <a:pt x="8248985" y="0"/>
+                </a:cubicBezTo>
+                <a:cubicBezTo>
+                  <a:pt x="8395003" y="24363"/>
+                  <a:pt x="8552393" y="25505"/>
+                  <a:pt x="8818817" y="0"/>
+                </a:cubicBezTo>
+                <a:cubicBezTo>
+                  <a:pt x="9085241" y="-25505"/>
+                  <a:pt x="9411308" y="38000"/>
+                  <a:pt x="9605726" y="0"/>
+                </a:cubicBezTo>
+                <a:cubicBezTo>
+                  <a:pt x="9800144" y="-38000"/>
+                  <a:pt x="10006468" y="-25741"/>
+                  <a:pt x="10175558" y="0"/>
+                </a:cubicBezTo>
+                <a:cubicBezTo>
+                  <a:pt x="10344648" y="25741"/>
+                  <a:pt x="10696282" y="695"/>
+                  <a:pt x="10853928" y="0"/>
+                </a:cubicBezTo>
+                <a:cubicBezTo>
+                  <a:pt x="10853521" y="8690"/>
+                  <a:pt x="10853774" y="14141"/>
+                  <a:pt x="10853928" y="18288"/>
+                </a:cubicBezTo>
+                <a:cubicBezTo>
+                  <a:pt x="10608124" y="24255"/>
+                  <a:pt x="10343415" y="22307"/>
+                  <a:pt x="10067018" y="18288"/>
+                </a:cubicBezTo>
+                <a:cubicBezTo>
+                  <a:pt x="9790621" y="14270"/>
+                  <a:pt x="9843266" y="3564"/>
+                  <a:pt x="9714266" y="18288"/>
+                </a:cubicBezTo>
+                <a:cubicBezTo>
+                  <a:pt x="9585266" y="33012"/>
+                  <a:pt x="9379484" y="1875"/>
+                  <a:pt x="9252974" y="18288"/>
+                </a:cubicBezTo>
+                <a:cubicBezTo>
+                  <a:pt x="9126464" y="34701"/>
+                  <a:pt x="8580678" y="-4904"/>
+                  <a:pt x="8357525" y="18288"/>
+                </a:cubicBezTo>
+                <a:cubicBezTo>
+                  <a:pt x="8134372" y="41480"/>
+                  <a:pt x="7903199" y="26458"/>
+                  <a:pt x="7679154" y="18288"/>
+                </a:cubicBezTo>
+                <a:cubicBezTo>
+                  <a:pt x="7455109" y="10118"/>
+                  <a:pt x="7435944" y="27109"/>
+                  <a:pt x="7217862" y="18288"/>
+                </a:cubicBezTo>
+                <a:cubicBezTo>
+                  <a:pt x="6999780" y="9467"/>
+                  <a:pt x="6680409" y="18985"/>
+                  <a:pt x="6539492" y="18288"/>
+                </a:cubicBezTo>
+                <a:cubicBezTo>
+                  <a:pt x="6398575" y="17592"/>
+                  <a:pt x="6312077" y="33018"/>
+                  <a:pt x="6186739" y="18288"/>
+                </a:cubicBezTo>
+                <a:cubicBezTo>
+                  <a:pt x="6061401" y="3558"/>
+                  <a:pt x="5947033" y="12075"/>
+                  <a:pt x="5833986" y="18288"/>
+                </a:cubicBezTo>
+                <a:cubicBezTo>
+                  <a:pt x="5720939" y="24501"/>
+                  <a:pt x="5482226" y="8586"/>
+                  <a:pt x="5155616" y="18288"/>
+                </a:cubicBezTo>
+                <a:cubicBezTo>
+                  <a:pt x="4829006" y="27991"/>
+                  <a:pt x="4841274" y="29316"/>
+                  <a:pt x="4694324" y="18288"/>
+                </a:cubicBezTo>
+                <a:cubicBezTo>
+                  <a:pt x="4547374" y="7260"/>
+                  <a:pt x="4077675" y="7013"/>
+                  <a:pt x="3907414" y="18288"/>
+                </a:cubicBezTo>
+                <a:cubicBezTo>
+                  <a:pt x="3737153" y="29564"/>
+                  <a:pt x="3538393" y="21630"/>
+                  <a:pt x="3446122" y="18288"/>
+                </a:cubicBezTo>
+                <a:cubicBezTo>
+                  <a:pt x="3353851" y="14946"/>
+                  <a:pt x="2990320" y="-8091"/>
+                  <a:pt x="2659212" y="18288"/>
+                </a:cubicBezTo>
+                <a:cubicBezTo>
+                  <a:pt x="2328104" y="44667"/>
+                  <a:pt x="2427653" y="9607"/>
+                  <a:pt x="2306460" y="18288"/>
+                </a:cubicBezTo>
+                <a:cubicBezTo>
+                  <a:pt x="2185267" y="26969"/>
+                  <a:pt x="1719763" y="3717"/>
+                  <a:pt x="1519550" y="18288"/>
+                </a:cubicBezTo>
+                <a:cubicBezTo>
+                  <a:pt x="1319337" y="32860"/>
+                  <a:pt x="1167371" y="17040"/>
+                  <a:pt x="1058258" y="18288"/>
+                </a:cubicBezTo>
+                <a:cubicBezTo>
+                  <a:pt x="949145" y="19536"/>
+                  <a:pt x="780234" y="31447"/>
+                  <a:pt x="705505" y="18288"/>
+                </a:cubicBezTo>
+                <a:cubicBezTo>
+                  <a:pt x="630776" y="5129"/>
+                  <a:pt x="215796" y="30056"/>
+                  <a:pt x="0" y="18288"/>
+                </a:cubicBezTo>
+                <a:cubicBezTo>
+                  <a:pt x="-53" y="11301"/>
+                  <a:pt x="-649" y="7756"/>
+                  <a:pt x="0" y="0"/>
+                </a:cubicBezTo>
+                <a:close/>
+              </a:path>
+            </a:pathLst>
+          </a:custGeom>
+          <a:solidFill>
+            <a:schemeClr val="accent2"/>
+          </a:solidFill>
+          <a:ln w="41275" cap="rnd">
+            <a:solidFill>
+              <a:schemeClr val="accent2"/>
+            </a:solidFill>
+            <a:round/>
+            <a:extLst>
+              <a:ext uri="{C807C97D-BFC1-408E-A445-0C87EB9F89A2}">
+                <ask:lineSketchStyleProps xmlns:ask="http://schemas.microsoft.com/office/drawing/2018/sketchyshapes" sd="1219033472">
+                  <a:prstGeom prst="rect">
+                    <a:avLst/>
+                  </a:prstGeom>
+                  <ask:type>
+                    <ask:lineSketchFreehand/>
+                  </ask:type>
+                </ask:lineSketchStyleProps>
+              </a:ext>
+            </a:extLst>
+          </a:ln>
+        </p:spPr>
+        <p:style>
+          <a:lnRef idx="2">
+            <a:schemeClr val="accent1">
+              <a:shade val="50000"/>
+            </a:schemeClr>
+          </a:lnRef>
+          <a:fillRef idx="1">
+            <a:schemeClr val="accent1"/>
+          </a:fillRef>
+          <a:effectRef idx="0">
+            <a:schemeClr val="accent1"/>
+          </a:effectRef>
+          <a:fontRef idx="minor">
+            <a:schemeClr val="lt1"/>
+          </a:fontRef>
+        </p:style>
+        <p:txBody>
+          <a:bodyPr rtlCol="0" anchor="ctr"/>
+          <a:lstStyle/>
+          <a:p>
+            <a:pPr algn="ctr"/>
+            <a:endParaRPr lang="en-US"/>
+          </a:p>
+        </p:txBody>
+      </p:sp>
+      <p:sp>
+        <p:nvSpPr>
+          <p:cNvPr id="5" name="Segnaposto contenuto 2">
+            <a:extLst>
+              <a:ext uri="{FF2B5EF4-FFF2-40B4-BE49-F238E27FC236}">
+                <a16:creationId xmlns:a16="http://schemas.microsoft.com/office/drawing/2014/main" id="{ACF8CDA2-8526-AF27-9839-4BB1D949735E}"/>
+              </a:ext>
+            </a:extLst>
+          </p:cNvPr>
+          <p:cNvSpPr txBox="1">
+            <a:spLocks/>
+          </p:cNvSpPr>
+          <p:nvPr/>
+        </p:nvSpPr>
+        <p:spPr>
+          <a:xfrm>
+            <a:off x="838200" y="1929384"/>
+            <a:ext cx="10515600" cy="4251960"/>
+          </a:xfrm>
+          <a:prstGeom prst="rect">
+            <a:avLst/>
+          </a:prstGeom>
+        </p:spPr>
+        <p:txBody>
+          <a:bodyPr vert="horz" lIns="91440" tIns="45720" rIns="91440" bIns="45720" rtlCol="0">
+            <a:normAutofit/>
+          </a:bodyPr>
+          <a:lstStyle>
+            <a:lvl1pPr marL="228600" indent="-228600" algn="l" defTabSz="914400" rtl="0" eaLnBrk="1" latinLnBrk="0" hangingPunct="1">
+              <a:lnSpc>
+                <a:spcPct val="90000"/>
+              </a:lnSpc>
+              <a:spcBef>
+                <a:spcPts val="1000"/>
+              </a:spcBef>
+              <a:buFont typeface="Arial" panose="020B0604020202020204" pitchFamily="34" charset="0"/>
+              <a:buChar char="•"/>
+              <a:defRPr sz="2800" kern="1200">
+                <a:solidFill>
+                  <a:schemeClr val="tx1"/>
+                </a:solidFill>
+                <a:latin typeface="+mn-lt"/>
+                <a:ea typeface="+mn-ea"/>
+                <a:cs typeface="+mn-cs"/>
+              </a:defRPr>
+            </a:lvl1pPr>
+            <a:lvl2pPr marL="685800" indent="-228600" algn="l" defTabSz="914400" rtl="0" eaLnBrk="1" latinLnBrk="0" hangingPunct="1">
+              <a:lnSpc>
+                <a:spcPct val="90000"/>
+              </a:lnSpc>
+              <a:spcBef>
+                <a:spcPts val="500"/>
+              </a:spcBef>
+              <a:buFont typeface="Arial" panose="020B0604020202020204" pitchFamily="34" charset="0"/>
+              <a:buChar char="•"/>
+              <a:defRPr sz="2400" kern="1200">
+                <a:solidFill>
+                  <a:schemeClr val="tx1"/>
+                </a:solidFill>
+                <a:latin typeface="+mn-lt"/>
+                <a:ea typeface="+mn-ea"/>
+                <a:cs typeface="+mn-cs"/>
+              </a:defRPr>
+            </a:lvl2pPr>
+            <a:lvl3pPr marL="1143000" indent="-228600" algn="l" defTabSz="914400" rtl="0" eaLnBrk="1" latinLnBrk="0" hangingPunct="1">
+              <a:lnSpc>
+                <a:spcPct val="90000"/>
+              </a:lnSpc>
+              <a:spcBef>
+                <a:spcPts val="500"/>
+              </a:spcBef>
+              <a:buFont typeface="Arial" panose="020B0604020202020204" pitchFamily="34" charset="0"/>
+              <a:buChar char="•"/>
+              <a:defRPr sz="2000" kern="1200">
+                <a:solidFill>
+                  <a:schemeClr val="tx1"/>
+                </a:solidFill>
+                <a:latin typeface="+mn-lt"/>
+                <a:ea typeface="+mn-ea"/>
+                <a:cs typeface="+mn-cs"/>
+              </a:defRPr>
+            </a:lvl3pPr>
+            <a:lvl4pPr marL="1600200" indent="-228600" algn="l" defTabSz="914400" rtl="0" eaLnBrk="1" latinLnBrk="0" hangingPunct="1">
+              <a:lnSpc>
+                <a:spcPct val="90000"/>
+              </a:lnSpc>
+              <a:spcBef>
+                <a:spcPts val="500"/>
+              </a:spcBef>
+              <a:buFont typeface="Arial" panose="020B0604020202020204" pitchFamily="34" charset="0"/>
+              <a:buChar char="•"/>
+              <a:defRPr sz="1800" kern="1200">
+                <a:solidFill>
+                  <a:schemeClr val="tx1"/>
+                </a:solidFill>
+                <a:latin typeface="+mn-lt"/>
+                <a:ea typeface="+mn-ea"/>
+                <a:cs typeface="+mn-cs"/>
+              </a:defRPr>
+            </a:lvl4pPr>
+            <a:lvl5pPr marL="2057400" indent="-228600" algn="l" defTabSz="914400" rtl="0" eaLnBrk="1" latinLnBrk="0" hangingPunct="1">
+              <a:lnSpc>
+                <a:spcPct val="90000"/>
+              </a:lnSpc>
+              <a:spcBef>
+                <a:spcPts val="500"/>
+              </a:spcBef>
+              <a:buFont typeface="Arial" panose="020B0604020202020204" pitchFamily="34" charset="0"/>
+              <a:buChar char="•"/>
+              <a:defRPr sz="1800" kern="1200">
+                <a:solidFill>
+                  <a:schemeClr val="tx1"/>
+                </a:solidFill>
+                <a:latin typeface="+mn-lt"/>
+                <a:ea typeface="+mn-ea"/>
+                <a:cs typeface="+mn-cs"/>
+              </a:defRPr>
+            </a:lvl5pPr>
+            <a:lvl6pPr marL="2514600" indent="-228600" algn="l" defTabSz="914400" rtl="0" eaLnBrk="1" latinLnBrk="0" hangingPunct="1">
+              <a:lnSpc>
+                <a:spcPct val="90000"/>
+              </a:lnSpc>
+              <a:spcBef>
+                <a:spcPts val="500"/>
+              </a:spcBef>
+              <a:buFont typeface="Arial" panose="020B0604020202020204" pitchFamily="34" charset="0"/>
+              <a:buChar char="•"/>
+              <a:defRPr sz="1800" kern="1200">
+                <a:solidFill>
+                  <a:schemeClr val="tx1"/>
+                </a:solidFill>
+                <a:latin typeface="+mn-lt"/>
+                <a:ea typeface="+mn-ea"/>
+                <a:cs typeface="+mn-cs"/>
+              </a:defRPr>
+            </a:lvl6pPr>
+            <a:lvl7pPr marL="2971800" indent="-228600" algn="l" defTabSz="914400" rtl="0" eaLnBrk="1" latinLnBrk="0" hangingPunct="1">
+              <a:lnSpc>
+                <a:spcPct val="90000"/>
+              </a:lnSpc>
+              <a:spcBef>
+                <a:spcPts val="500"/>
+              </a:spcBef>
+              <a:buFont typeface="Arial" panose="020B0604020202020204" pitchFamily="34" charset="0"/>
+              <a:buChar char="•"/>
+              <a:defRPr sz="1800" kern="1200">
+                <a:solidFill>
+                  <a:schemeClr val="tx1"/>
+                </a:solidFill>
+                <a:latin typeface="+mn-lt"/>
+                <a:ea typeface="+mn-ea"/>
+                <a:cs typeface="+mn-cs"/>
+              </a:defRPr>
+            </a:lvl7pPr>
+            <a:lvl8pPr marL="3429000" indent="-228600" algn="l" defTabSz="914400" rtl="0" eaLnBrk="1" latinLnBrk="0" hangingPunct="1">
+              <a:lnSpc>
+                <a:spcPct val="90000"/>
+              </a:lnSpc>
+              <a:spcBef>
+                <a:spcPts val="500"/>
+              </a:spcBef>
+              <a:buFont typeface="Arial" panose="020B0604020202020204" pitchFamily="34" charset="0"/>
+              <a:buChar char="•"/>
+              <a:defRPr sz="1800" kern="1200">
+                <a:solidFill>
+                  <a:schemeClr val="tx1"/>
+                </a:solidFill>
+                <a:latin typeface="+mn-lt"/>
+                <a:ea typeface="+mn-ea"/>
+                <a:cs typeface="+mn-cs"/>
+              </a:defRPr>
+            </a:lvl8pPr>
+            <a:lvl9pPr marL="3886200" indent="-228600" algn="l" defTabSz="914400" rtl="0" eaLnBrk="1" latinLnBrk="0" hangingPunct="1">
+              <a:lnSpc>
+                <a:spcPct val="90000"/>
+              </a:lnSpc>
+              <a:spcBef>
+                <a:spcPts val="500"/>
+              </a:spcBef>
+              <a:buFont typeface="Arial" panose="020B0604020202020204" pitchFamily="34" charset="0"/>
+              <a:buChar char="•"/>
+              <a:defRPr sz="1800" kern="1200">
+                <a:solidFill>
+                  <a:schemeClr val="tx1"/>
+                </a:solidFill>
+                <a:latin typeface="+mn-lt"/>
+                <a:ea typeface="+mn-ea"/>
+                <a:cs typeface="+mn-cs"/>
+              </a:defRPr>
+            </a:lvl9pPr>
+          </a:lstStyle>
+          <a:p>
+            <a:r>
+              <a:rPr lang="en-US" sz="2200"/>
+              <a:t>Utilizzato EF Core per mappare il database in entity</a:t>
+            </a:r>
+          </a:p>
+          <a:p>
+            <a:r>
+              <a:rPr lang="en-US" sz="2200"/>
+              <a:t>Mappate in classi neutre dette DTO, mediante NuGet Mapster</a:t>
+            </a:r>
+          </a:p>
+          <a:p>
+            <a:r>
+              <a:rPr lang="en-US" sz="2200"/>
+              <a:t>Creati Repository per gestire il database e relativi test di validazione</a:t>
+            </a:r>
+          </a:p>
+          <a:p>
+            <a:r>
+              <a:rPr lang="en-US" sz="2200"/>
+              <a:t>Esposto all’esterno solo l’interfaccia DbManager</a:t>
+            </a:r>
+          </a:p>
+          <a:p>
+            <a:r>
+              <a:rPr lang="en-US" sz="2200"/>
+              <a:t>Query scritte mediante LINQ.</a:t>
+            </a:r>
+          </a:p>
+        </p:txBody>
+      </p:sp>
+      <p:pic>
+        <p:nvPicPr>
+          <p:cNvPr id="11" name="Immagine 10" descr="oop - What should application layer return? entity or dto? - Stack Overflow">
+            <a:extLst>
+              <a:ext uri="{FF2B5EF4-FFF2-40B4-BE49-F238E27FC236}">
+                <a16:creationId xmlns:a16="http://schemas.microsoft.com/office/drawing/2014/main" id="{9ADC1BA7-1C4F-9BD7-5A05-3B984A880E3E}"/>
+              </a:ext>
+            </a:extLst>
+          </p:cNvPr>
+          <p:cNvPicPr>
+            <a:picLocks noChangeAspect="1"/>
+          </p:cNvPicPr>
+          <p:nvPr/>
+        </p:nvPicPr>
+        <p:blipFill>
+          <a:blip r:embed="rId3"/>
+          <a:stretch>
+            <a:fillRect/>
+          </a:stretch>
+        </p:blipFill>
+        <p:spPr>
+          <a:xfrm>
+            <a:off x="458876" y="4699566"/>
+            <a:ext cx="7007049" cy="1820106"/>
+          </a:xfrm>
+          <a:prstGeom prst="rect">
+            <a:avLst/>
+          </a:prstGeom>
+        </p:spPr>
+      </p:pic>
+    </p:spTree>
+    <p:extLst>
+      <p:ext uri="{BB962C8B-B14F-4D97-AF65-F5344CB8AC3E}">
+        <p14:creationId xmlns:p14="http://schemas.microsoft.com/office/powerpoint/2010/main" val="2489447122"/>
       </p:ext>
     </p:extLst>
   </p:cSld>
@@ -4042,4 +11469,319 @@
     </a:ext>
   </a:extLst>
 </a:theme>
+</file>
+
+<file path=ppt/theme/theme2.xml><?xml version="1.0" encoding="utf-8"?>
+<a:theme xmlns:a="http://schemas.openxmlformats.org/drawingml/2006/main" name="Tema di Office">
+  <a:themeElements>
+    <a:clrScheme name="Office">
+      <a:dk1>
+        <a:sysClr val="windowText" lastClr="000000"/>
+      </a:dk1>
+      <a:lt1>
+        <a:sysClr val="window" lastClr="FFFFFF"/>
+      </a:lt1>
+      <a:dk2>
+        <a:srgbClr val="0E2841"/>
+      </a:dk2>
+      <a:lt2>
+        <a:srgbClr val="E8E8E8"/>
+      </a:lt2>
+      <a:accent1>
+        <a:srgbClr val="156082"/>
+      </a:accent1>
+      <a:accent2>
+        <a:srgbClr val="E97132"/>
+      </a:accent2>
+      <a:accent3>
+        <a:srgbClr val="196B24"/>
+      </a:accent3>
+      <a:accent4>
+        <a:srgbClr val="0F9ED5"/>
+      </a:accent4>
+      <a:accent5>
+        <a:srgbClr val="A02B93"/>
+      </a:accent5>
+      <a:accent6>
+        <a:srgbClr val="4EA72E"/>
+      </a:accent6>
+      <a:hlink>
+        <a:srgbClr val="467886"/>
+      </a:hlink>
+      <a:folHlink>
+        <a:srgbClr val="96607D"/>
+      </a:folHlink>
+    </a:clrScheme>
+    <a:fontScheme name="Office">
+      <a:majorFont>
+        <a:latin typeface="Aptos Display" panose="02110004020202020204"/>
+        <a:ea typeface=""/>
+        <a:cs typeface=""/>
+        <a:font script="Jpan" typeface="游ゴシック Light"/>
+        <a:font script="Hang" typeface="맑은 고딕"/>
+        <a:font script="Hans" typeface="等线 Light"/>
+        <a:font script="Hant" typeface="新細明體"/>
+        <a:font script="Arab" typeface="Times New Roman"/>
+        <a:font script="Hebr" typeface="Times New Roman"/>
+        <a:font script="Thai" typeface="Angsana New"/>
+        <a:font script="Ethi" typeface="Nyala"/>
+        <a:font script="Beng" typeface="Vrinda"/>
+        <a:font script="Gujr" typeface="Shruti"/>
+        <a:font script="Khmr" typeface="MoolBoran"/>
+        <a:font script="Knda" typeface="Tunga"/>
+        <a:font script="Guru" typeface="Raavi"/>
+        <a:font script="Cans" typeface="Euphemia"/>
+        <a:font script="Cher" typeface="Plantagenet Cherokee"/>
+        <a:font script="Yiii" typeface="Microsoft Yi Baiti"/>
+        <a:font script="Tibt" typeface="Microsoft Himalaya"/>
+        <a:font script="Thaa" typeface="MV Boli"/>
+        <a:font script="Deva" typeface="Mangal"/>
+        <a:font script="Telu" typeface="Gautami"/>
+        <a:font script="Taml" typeface="Latha"/>
+        <a:font script="Syrc" typeface="Estrangelo Edessa"/>
+        <a:font script="Orya" typeface="Kalinga"/>
+        <a:font script="Mlym" typeface="Kartika"/>
+        <a:font script="Laoo" typeface="DokChampa"/>
+        <a:font script="Sinh" typeface="Iskoola Pota"/>
+        <a:font script="Mong" typeface="Mongolian Baiti"/>
+        <a:font script="Viet" typeface="Times New Roman"/>
+        <a:font script="Uigh" typeface="Microsoft Uighur"/>
+        <a:font script="Geor" typeface="Sylfaen"/>
+        <a:font script="Armn" typeface="Arial"/>
+        <a:font script="Bugi" typeface="Leelawadee UI"/>
+        <a:font script="Bopo" typeface="Microsoft JhengHei"/>
+        <a:font script="Java" typeface="Javanese Text"/>
+        <a:font script="Lisu" typeface="Segoe UI"/>
+        <a:font script="Mymr" typeface="Myanmar Text"/>
+        <a:font script="Nkoo" typeface="Ebrima"/>
+        <a:font script="Olck" typeface="Nirmala UI"/>
+        <a:font script="Osma" typeface="Ebrima"/>
+        <a:font script="Phag" typeface="Phagspa"/>
+        <a:font script="Syrn" typeface="Estrangelo Edessa"/>
+        <a:font script="Syrj" typeface="Estrangelo Edessa"/>
+        <a:font script="Syre" typeface="Estrangelo Edessa"/>
+        <a:font script="Sora" typeface="Nirmala UI"/>
+        <a:font script="Tale" typeface="Microsoft Tai Le"/>
+        <a:font script="Talu" typeface="Microsoft New Tai Lue"/>
+        <a:font script="Tfng" typeface="Ebrima"/>
+      </a:majorFont>
+      <a:minorFont>
+        <a:latin typeface="Aptos" panose="02110004020202020204"/>
+        <a:ea typeface=""/>
+        <a:cs typeface=""/>
+        <a:font script="Jpan" typeface="游ゴシック"/>
+        <a:font script="Hang" typeface="맑은 고딕"/>
+        <a:font script="Hans" typeface="等线"/>
+        <a:font script="Hant" typeface="新細明體"/>
+        <a:font script="Arab" typeface="Arial"/>
+        <a:font script="Hebr" typeface="Arial"/>
+        <a:font script="Thai" typeface="Cordia New"/>
+        <a:font script="Ethi" typeface="Nyala"/>
+        <a:font script="Beng" typeface="Vrinda"/>
+        <a:font script="Gujr" typeface="Shruti"/>
+        <a:font script="Khmr" typeface="DaunPenh"/>
+        <a:font script="Knda" typeface="Tunga"/>
+        <a:font script="Guru" typeface="Raavi"/>
+        <a:font script="Cans" typeface="Euphemia"/>
+        <a:font script="Cher" typeface="Plantagenet Cherokee"/>
+        <a:font script="Yiii" typeface="Microsoft Yi Baiti"/>
+        <a:font script="Tibt" typeface="Microsoft Himalaya"/>
+        <a:font script="Thaa" typeface="MV Boli"/>
+        <a:font script="Deva" typeface="Mangal"/>
+        <a:font script="Telu" typeface="Gautami"/>
+        <a:font script="Taml" typeface="Latha"/>
+        <a:font script="Syrc" typeface="Estrangelo Edessa"/>
+        <a:font script="Orya" typeface="Kalinga"/>
+        <a:font script="Mlym" typeface="Kartika"/>
+        <a:font script="Laoo" typeface="DokChampa"/>
+        <a:font script="Sinh" typeface="Iskoola Pota"/>
+        <a:font script="Mong" typeface="Mongolian Baiti"/>
+        <a:font script="Viet" typeface="Arial"/>
+        <a:font script="Uigh" typeface="Microsoft Uighur"/>
+        <a:font script="Geor" typeface="Sylfaen"/>
+        <a:font script="Armn" typeface="Arial"/>
+        <a:font script="Bugi" typeface="Leelawadee UI"/>
+        <a:font script="Bopo" typeface="Microsoft JhengHei"/>
+        <a:font script="Java" typeface="Javanese Text"/>
+        <a:font script="Lisu" typeface="Segoe UI"/>
+        <a:font script="Mymr" typeface="Myanmar Text"/>
+        <a:font script="Nkoo" typeface="Ebrima"/>
+        <a:font script="Olck" typeface="Nirmala UI"/>
+        <a:font script="Osma" typeface="Ebrima"/>
+        <a:font script="Phag" typeface="Phagspa"/>
+        <a:font script="Syrn" typeface="Estrangelo Edessa"/>
+        <a:font script="Syrj" typeface="Estrangelo Edessa"/>
+        <a:font script="Syre" typeface="Estrangelo Edessa"/>
+        <a:font script="Sora" typeface="Nirmala UI"/>
+        <a:font script="Tale" typeface="Microsoft Tai Le"/>
+        <a:font script="Talu" typeface="Microsoft New Tai Lue"/>
+        <a:font script="Tfng" typeface="Ebrima"/>
+      </a:minorFont>
+    </a:fontScheme>
+    <a:fmtScheme name="Office">
+      <a:fillStyleLst>
+        <a:solidFill>
+          <a:schemeClr val="phClr"/>
+        </a:solidFill>
+        <a:gradFill rotWithShape="1">
+          <a:gsLst>
+            <a:gs pos="0">
+              <a:schemeClr val="phClr">
+                <a:lumMod val="110000"/>
+                <a:satMod val="105000"/>
+                <a:tint val="67000"/>
+              </a:schemeClr>
+            </a:gs>
+            <a:gs pos="50000">
+              <a:schemeClr val="phClr">
+                <a:lumMod val="105000"/>
+                <a:satMod val="103000"/>
+                <a:tint val="73000"/>
+              </a:schemeClr>
+            </a:gs>
+            <a:gs pos="100000">
+              <a:schemeClr val="phClr">
+                <a:lumMod val="105000"/>
+                <a:satMod val="109000"/>
+                <a:tint val="81000"/>
+              </a:schemeClr>
+            </a:gs>
+          </a:gsLst>
+          <a:lin ang="5400000" scaled="0"/>
+        </a:gradFill>
+        <a:gradFill rotWithShape="1">
+          <a:gsLst>
+            <a:gs pos="0">
+              <a:schemeClr val="phClr">
+                <a:satMod val="103000"/>
+                <a:lumMod val="102000"/>
+                <a:tint val="94000"/>
+              </a:schemeClr>
+            </a:gs>
+            <a:gs pos="50000">
+              <a:schemeClr val="phClr">
+                <a:satMod val="110000"/>
+                <a:lumMod val="100000"/>
+                <a:shade val="100000"/>
+              </a:schemeClr>
+            </a:gs>
+            <a:gs pos="100000">
+              <a:schemeClr val="phClr">
+                <a:lumMod val="99000"/>
+                <a:satMod val="120000"/>
+                <a:shade val="78000"/>
+              </a:schemeClr>
+            </a:gs>
+          </a:gsLst>
+          <a:lin ang="5400000" scaled="0"/>
+        </a:gradFill>
+      </a:fillStyleLst>
+      <a:lnStyleLst>
+        <a:ln w="12700" cap="flat" cmpd="sng" algn="ctr">
+          <a:solidFill>
+            <a:schemeClr val="phClr"/>
+          </a:solidFill>
+          <a:prstDash val="solid"/>
+          <a:miter lim="800000"/>
+        </a:ln>
+        <a:ln w="19050" cap="flat" cmpd="sng" algn="ctr">
+          <a:solidFill>
+            <a:schemeClr val="phClr"/>
+          </a:solidFill>
+          <a:prstDash val="solid"/>
+          <a:miter lim="800000"/>
+        </a:ln>
+        <a:ln w="25400" cap="flat" cmpd="sng" algn="ctr">
+          <a:solidFill>
+            <a:schemeClr val="phClr"/>
+          </a:solidFill>
+          <a:prstDash val="solid"/>
+          <a:miter lim="800000"/>
+        </a:ln>
+      </a:lnStyleLst>
+      <a:effectStyleLst>
+        <a:effectStyle>
+          <a:effectLst/>
+        </a:effectStyle>
+        <a:effectStyle>
+          <a:effectLst/>
+        </a:effectStyle>
+        <a:effectStyle>
+          <a:effectLst>
+            <a:outerShdw blurRad="57150" dist="19050" dir="5400000" algn="ctr" rotWithShape="0">
+              <a:srgbClr val="000000">
+                <a:alpha val="63000"/>
+              </a:srgbClr>
+            </a:outerShdw>
+          </a:effectLst>
+        </a:effectStyle>
+      </a:effectStyleLst>
+      <a:bgFillStyleLst>
+        <a:solidFill>
+          <a:schemeClr val="phClr"/>
+        </a:solidFill>
+        <a:solidFill>
+          <a:schemeClr val="phClr">
+            <a:tint val="95000"/>
+            <a:satMod val="170000"/>
+          </a:schemeClr>
+        </a:solidFill>
+        <a:gradFill rotWithShape="1">
+          <a:gsLst>
+            <a:gs pos="0">
+              <a:schemeClr val="phClr">
+                <a:tint val="93000"/>
+                <a:satMod val="150000"/>
+                <a:shade val="98000"/>
+                <a:lumMod val="102000"/>
+              </a:schemeClr>
+            </a:gs>
+            <a:gs pos="50000">
+              <a:schemeClr val="phClr">
+                <a:tint val="98000"/>
+                <a:satMod val="130000"/>
+                <a:shade val="90000"/>
+                <a:lumMod val="103000"/>
+              </a:schemeClr>
+            </a:gs>
+            <a:gs pos="100000">
+              <a:schemeClr val="phClr">
+                <a:shade val="63000"/>
+                <a:satMod val="120000"/>
+              </a:schemeClr>
+            </a:gs>
+          </a:gsLst>
+          <a:lin ang="5400000" scaled="0"/>
+        </a:gradFill>
+      </a:bgFillStyleLst>
+    </a:fmtScheme>
+  </a:themeElements>
+  <a:objectDefaults>
+    <a:lnDef>
+      <a:spPr/>
+      <a:bodyPr/>
+      <a:lstStyle/>
+      <a:style>
+        <a:lnRef idx="2">
+          <a:schemeClr val="accent1"/>
+        </a:lnRef>
+        <a:fillRef idx="0">
+          <a:schemeClr val="accent1"/>
+        </a:fillRef>
+        <a:effectRef idx="1">
+          <a:schemeClr val="accent1"/>
+        </a:effectRef>
+        <a:fontRef idx="minor">
+          <a:schemeClr val="tx1"/>
+        </a:fontRef>
+      </a:style>
+    </a:lnDef>
+  </a:objectDefaults>
+  <a:extraClrSchemeLst/>
+  <a:extLst>
+    <a:ext uri="{05A4C25C-085E-4340-85A3-A5531E510DB2}">
+      <thm15:themeFamily xmlns:thm15="http://schemas.microsoft.com/office/thememl/2012/main" name="Office Theme" id="{2E142A2C-CD16-42D6-873A-C26D2A0506FA}" vid="{1BDDFF52-6CD6-40A5-AB3C-68EB2F1E4D0A}"/>
+    </a:ext>
+  </a:extLst>
+</a:theme>
 </file>
--- a/Slide/Configuratore di prodotto per le vendite.pptx
+++ b/Slide/Configuratore di prodotto per le vendite.pptx
@@ -208,7 +208,7 @@
           <a:p>
             <a:fld id="{2FC382D0-E5E5-42D8-AA41-3ABE763FF4D8}" type="datetimeFigureOut">
               <a:rPr lang="it-IT" smtClean="0"/>
-              <a:t>26/10/2026</a:t>
+              <a:t>27/10/2026</a:t>
             </a:fld>
             <a:endParaRPr lang="it-IT"/>
           </a:p>
@@ -1150,7 +1150,7 @@
           <a:p>
             <a:fld id="{8837FF2D-06F0-4022-BD05-94C850C7DAA6}" type="datetimeFigureOut">
               <a:rPr lang="it-IT" smtClean="0"/>
-              <a:t>26/10/2026</a:t>
+              <a:t>27/10/2026</a:t>
             </a:fld>
             <a:endParaRPr lang="it-IT"/>
           </a:p>
@@ -1348,7 +1348,7 @@
           <a:p>
             <a:fld id="{8837FF2D-06F0-4022-BD05-94C850C7DAA6}" type="datetimeFigureOut">
               <a:rPr lang="it-IT" smtClean="0"/>
-              <a:t>26/10/2026</a:t>
+              <a:t>27/10/2026</a:t>
             </a:fld>
             <a:endParaRPr lang="it-IT"/>
           </a:p>
@@ -1556,7 +1556,7 @@
           <a:p>
             <a:fld id="{8837FF2D-06F0-4022-BD05-94C850C7DAA6}" type="datetimeFigureOut">
               <a:rPr lang="it-IT" smtClean="0"/>
-              <a:t>26/10/2026</a:t>
+              <a:t>27/10/2026</a:t>
             </a:fld>
             <a:endParaRPr lang="it-IT"/>
           </a:p>
@@ -1754,7 +1754,7 @@
           <a:p>
             <a:fld id="{8837FF2D-06F0-4022-BD05-94C850C7DAA6}" type="datetimeFigureOut">
               <a:rPr lang="it-IT" smtClean="0"/>
-              <a:t>26/10/2026</a:t>
+              <a:t>27/10/2026</a:t>
             </a:fld>
             <a:endParaRPr lang="it-IT"/>
           </a:p>
@@ -2029,7 +2029,7 @@
           <a:p>
             <a:fld id="{8837FF2D-06F0-4022-BD05-94C850C7DAA6}" type="datetimeFigureOut">
               <a:rPr lang="it-IT" smtClean="0"/>
-              <a:t>26/10/2026</a:t>
+              <a:t>27/10/2026</a:t>
             </a:fld>
             <a:endParaRPr lang="it-IT"/>
           </a:p>
@@ -2294,7 +2294,7 @@
           <a:p>
             <a:fld id="{8837FF2D-06F0-4022-BD05-94C850C7DAA6}" type="datetimeFigureOut">
               <a:rPr lang="it-IT" smtClean="0"/>
-              <a:t>26/10/2026</a:t>
+              <a:t>27/10/2026</a:t>
             </a:fld>
             <a:endParaRPr lang="it-IT"/>
           </a:p>
@@ -2706,7 +2706,7 @@
           <a:p>
             <a:fld id="{8837FF2D-06F0-4022-BD05-94C850C7DAA6}" type="datetimeFigureOut">
               <a:rPr lang="it-IT" smtClean="0"/>
-              <a:t>26/10/2026</a:t>
+              <a:t>27/10/2026</a:t>
             </a:fld>
             <a:endParaRPr lang="it-IT"/>
           </a:p>
@@ -2847,7 +2847,7 @@
           <a:p>
             <a:fld id="{8837FF2D-06F0-4022-BD05-94C850C7DAA6}" type="datetimeFigureOut">
               <a:rPr lang="it-IT" smtClean="0"/>
-              <a:t>26/10/2026</a:t>
+              <a:t>27/10/2026</a:t>
             </a:fld>
             <a:endParaRPr lang="it-IT"/>
           </a:p>
@@ -2960,7 +2960,7 @@
           <a:p>
             <a:fld id="{8837FF2D-06F0-4022-BD05-94C850C7DAA6}" type="datetimeFigureOut">
               <a:rPr lang="it-IT" smtClean="0"/>
-              <a:t>26/10/2026</a:t>
+              <a:t>27/10/2026</a:t>
             </a:fld>
             <a:endParaRPr lang="it-IT"/>
           </a:p>
@@ -3271,7 +3271,7 @@
           <a:p>
             <a:fld id="{8837FF2D-06F0-4022-BD05-94C850C7DAA6}" type="datetimeFigureOut">
               <a:rPr lang="it-IT" smtClean="0"/>
-              <a:t>26/10/2026</a:t>
+              <a:t>27/10/2026</a:t>
             </a:fld>
             <a:endParaRPr lang="it-IT"/>
           </a:p>
@@ -3559,7 +3559,7 @@
           <a:p>
             <a:fld id="{8837FF2D-06F0-4022-BD05-94C850C7DAA6}" type="datetimeFigureOut">
               <a:rPr lang="it-IT" smtClean="0"/>
-              <a:t>26/10/2026</a:t>
+              <a:t>27/10/2026</a:t>
             </a:fld>
             <a:endParaRPr lang="it-IT"/>
           </a:p>
@@ -3800,7 +3800,7 @@
           <a:p>
             <a:fld id="{8837FF2D-06F0-4022-BD05-94C850C7DAA6}" type="datetimeFigureOut">
               <a:rPr lang="it-IT" smtClean="0"/>
-              <a:t>26/10/2026</a:t>
+              <a:t>27/10/2026</a:t>
             </a:fld>
             <a:endParaRPr lang="it-IT"/>
           </a:p>
@@ -4497,14 +4497,6 @@
 <file path=ppt/slides/slide10.xml><?xml version="1.0" encoding="utf-8"?>
 <p:sld xmlns:a="http://schemas.openxmlformats.org/drawingml/2006/main" xmlns:r="http://schemas.openxmlformats.org/officeDocument/2006/relationships" xmlns:p="http://schemas.openxmlformats.org/presentationml/2006/main">
   <p:cSld>
-    <p:bg>
-      <p:bgPr>
-        <a:solidFill>
-          <a:schemeClr val="bg1"/>
-        </a:solidFill>
-        <a:effectLst/>
-      </p:bgPr>
-    </p:bg>
     <p:spTree>
       <p:nvGrpSpPr>
         <p:cNvPr id="1" name="">
@@ -5261,6 +5253,642 @@
           </a:prstGeom>
         </p:spPr>
       </p:pic>
+      <p:sp>
+        <p:nvSpPr>
+          <p:cNvPr id="7" name="sketch line">
+            <a:extLst>
+              <a:ext uri="{FF2B5EF4-FFF2-40B4-BE49-F238E27FC236}">
+                <a16:creationId xmlns:a16="http://schemas.microsoft.com/office/drawing/2014/main" id="{4CE470A8-F040-6CBF-EEB9-9FC15D0045E3}"/>
+              </a:ext>
+              <a:ext uri="{C183D7F6-B498-43B3-948B-1728B52AA6E4}">
+                <adec:decorative xmlns:adec="http://schemas.microsoft.com/office/drawing/2017/decorative" val="1"/>
+              </a:ext>
+            </a:extLst>
+          </p:cNvPr>
+          <p:cNvSpPr/>
+          <p:nvPr>
+            <p:extLst>
+              <p:ext uri="{386F3935-93C4-4BCD-93E2-E3B085C9AB24}">
+                <p16:designElem xmlns:p16="http://schemas.microsoft.com/office/powerpoint/2015/main" val="1"/>
+              </p:ext>
+            </p:extLst>
+          </p:nvPr>
+        </p:nvSpPr>
+        <p:spPr>
+          <a:xfrm>
+            <a:off x="603504" y="1649942"/>
+            <a:ext cx="10919460" cy="45719"/>
+          </a:xfrm>
+          <a:custGeom>
+            <a:avLst/>
+            <a:gdLst>
+              <a:gd name="csX0" fmla="*/ 0 w 10919460"/>
+              <a:gd name="csY0" fmla="*/ 0 h 45719"/>
+              <a:gd name="csX1" fmla="*/ 464077 w 10919460"/>
+              <a:gd name="csY1" fmla="*/ 0 h 45719"/>
+              <a:gd name="csX2" fmla="*/ 1146543 w 10919460"/>
+              <a:gd name="csY2" fmla="*/ 0 h 45719"/>
+              <a:gd name="csX3" fmla="*/ 1938204 w 10919460"/>
+              <a:gd name="csY3" fmla="*/ 0 h 45719"/>
+              <a:gd name="csX4" fmla="*/ 2293087 w 10919460"/>
+              <a:gd name="csY4" fmla="*/ 0 h 45719"/>
+              <a:gd name="csX5" fmla="*/ 2647969 w 10919460"/>
+              <a:gd name="csY5" fmla="*/ 0 h 45719"/>
+              <a:gd name="csX6" fmla="*/ 3548825 w 10919460"/>
+              <a:gd name="csY6" fmla="*/ 0 h 45719"/>
+              <a:gd name="csX7" fmla="*/ 4231291 w 10919460"/>
+              <a:gd name="csY7" fmla="*/ 0 h 45719"/>
+              <a:gd name="csX8" fmla="*/ 4586173 w 10919460"/>
+              <a:gd name="csY8" fmla="*/ 0 h 45719"/>
+              <a:gd name="csX9" fmla="*/ 5268639 w 10919460"/>
+              <a:gd name="csY9" fmla="*/ 0 h 45719"/>
+              <a:gd name="csX10" fmla="*/ 6169495 w 10919460"/>
+              <a:gd name="csY10" fmla="*/ 0 h 45719"/>
+              <a:gd name="csX11" fmla="*/ 6742767 w 10919460"/>
+              <a:gd name="csY11" fmla="*/ 0 h 45719"/>
+              <a:gd name="csX12" fmla="*/ 7316038 w 10919460"/>
+              <a:gd name="csY12" fmla="*/ 0 h 45719"/>
+              <a:gd name="csX13" fmla="*/ 7998504 w 10919460"/>
+              <a:gd name="csY13" fmla="*/ 0 h 45719"/>
+              <a:gd name="csX14" fmla="*/ 8790165 w 10919460"/>
+              <a:gd name="csY14" fmla="*/ 0 h 45719"/>
+              <a:gd name="csX15" fmla="*/ 9581826 w 10919460"/>
+              <a:gd name="csY15" fmla="*/ 0 h 45719"/>
+              <a:gd name="csX16" fmla="*/ 10919460 w 10919460"/>
+              <a:gd name="csY16" fmla="*/ 0 h 45719"/>
+              <a:gd name="csX17" fmla="*/ 10919460 w 10919460"/>
+              <a:gd name="csY17" fmla="*/ 45719 h 45719"/>
+              <a:gd name="csX18" fmla="*/ 10455383 w 10919460"/>
+              <a:gd name="csY18" fmla="*/ 45719 h 45719"/>
+              <a:gd name="csX19" fmla="*/ 9554528 w 10919460"/>
+              <a:gd name="csY19" fmla="*/ 45719 h 45719"/>
+              <a:gd name="csX20" fmla="*/ 8872061 w 10919460"/>
+              <a:gd name="csY20" fmla="*/ 45719 h 45719"/>
+              <a:gd name="csX21" fmla="*/ 8517179 w 10919460"/>
+              <a:gd name="csY21" fmla="*/ 45719 h 45719"/>
+              <a:gd name="csX22" fmla="*/ 7834713 w 10919460"/>
+              <a:gd name="csY22" fmla="*/ 45719 h 45719"/>
+              <a:gd name="csX23" fmla="*/ 7261441 w 10919460"/>
+              <a:gd name="csY23" fmla="*/ 45719 h 45719"/>
+              <a:gd name="csX24" fmla="*/ 6688169 w 10919460"/>
+              <a:gd name="csY24" fmla="*/ 45719 h 45719"/>
+              <a:gd name="csX25" fmla="*/ 6114898 w 10919460"/>
+              <a:gd name="csY25" fmla="*/ 45719 h 45719"/>
+              <a:gd name="csX26" fmla="*/ 5541626 w 10919460"/>
+              <a:gd name="csY26" fmla="*/ 45719 h 45719"/>
+              <a:gd name="csX27" fmla="*/ 4749965 w 10919460"/>
+              <a:gd name="csY27" fmla="*/ 45719 h 45719"/>
+              <a:gd name="csX28" fmla="*/ 4067499 w 10919460"/>
+              <a:gd name="csY28" fmla="*/ 45719 h 45719"/>
+              <a:gd name="csX29" fmla="*/ 3712616 w 10919460"/>
+              <a:gd name="csY29" fmla="*/ 45719 h 45719"/>
+              <a:gd name="csX30" fmla="*/ 3139345 w 10919460"/>
+              <a:gd name="csY30" fmla="*/ 45719 h 45719"/>
+              <a:gd name="csX31" fmla="*/ 2347684 w 10919460"/>
+              <a:gd name="csY31" fmla="*/ 45719 h 45719"/>
+              <a:gd name="csX32" fmla="*/ 1883607 w 10919460"/>
+              <a:gd name="csY32" fmla="*/ 45719 h 45719"/>
+              <a:gd name="csX33" fmla="*/ 982751 w 10919460"/>
+              <a:gd name="csY33" fmla="*/ 45719 h 45719"/>
+              <a:gd name="csX34" fmla="*/ 0 w 10919460"/>
+              <a:gd name="csY34" fmla="*/ 45719 h 45719"/>
+              <a:gd name="csX35" fmla="*/ 0 w 10919460"/>
+              <a:gd name="csY35" fmla="*/ 0 h 45719"/>
+            </a:gdLst>
+            <a:ahLst/>
+            <a:cxnLst>
+              <a:cxn ang="0">
+                <a:pos x="csX0" y="csY0"/>
+              </a:cxn>
+              <a:cxn ang="0">
+                <a:pos x="csX1" y="csY1"/>
+              </a:cxn>
+              <a:cxn ang="0">
+                <a:pos x="csX2" y="csY2"/>
+              </a:cxn>
+              <a:cxn ang="0">
+                <a:pos x="csX3" y="csY3"/>
+              </a:cxn>
+              <a:cxn ang="0">
+                <a:pos x="csX4" y="csY4"/>
+              </a:cxn>
+              <a:cxn ang="0">
+                <a:pos x="csX5" y="csY5"/>
+              </a:cxn>
+              <a:cxn ang="0">
+                <a:pos x="csX6" y="csY6"/>
+              </a:cxn>
+              <a:cxn ang="0">
+                <a:pos x="csX7" y="csY7"/>
+              </a:cxn>
+              <a:cxn ang="0">
+                <a:pos x="csX8" y="csY8"/>
+              </a:cxn>
+              <a:cxn ang="0">
+                <a:pos x="csX9" y="csY9"/>
+              </a:cxn>
+              <a:cxn ang="0">
+                <a:pos x="csX10" y="csY10"/>
+              </a:cxn>
+              <a:cxn ang="0">
+                <a:pos x="csX11" y="csY11"/>
+              </a:cxn>
+              <a:cxn ang="0">
+                <a:pos x="csX12" y="csY12"/>
+              </a:cxn>
+              <a:cxn ang="0">
+                <a:pos x="csX13" y="csY13"/>
+              </a:cxn>
+              <a:cxn ang="0">
+                <a:pos x="csX14" y="csY14"/>
+              </a:cxn>
+              <a:cxn ang="0">
+                <a:pos x="csX15" y="csY15"/>
+              </a:cxn>
+              <a:cxn ang="0">
+                <a:pos x="csX16" y="csY16"/>
+              </a:cxn>
+              <a:cxn ang="0">
+                <a:pos x="csX17" y="csY17"/>
+              </a:cxn>
+              <a:cxn ang="0">
+                <a:pos x="csX18" y="csY18"/>
+              </a:cxn>
+              <a:cxn ang="0">
+                <a:pos x="csX19" y="csY19"/>
+              </a:cxn>
+              <a:cxn ang="0">
+                <a:pos x="csX20" y="csY20"/>
+              </a:cxn>
+              <a:cxn ang="0">
+                <a:pos x="csX21" y="csY21"/>
+              </a:cxn>
+              <a:cxn ang="0">
+                <a:pos x="csX22" y="csY22"/>
+              </a:cxn>
+              <a:cxn ang="0">
+                <a:pos x="csX23" y="csY23"/>
+              </a:cxn>
+              <a:cxn ang="0">
+                <a:pos x="csX24" y="csY24"/>
+              </a:cxn>
+              <a:cxn ang="0">
+                <a:pos x="csX25" y="csY25"/>
+              </a:cxn>
+              <a:cxn ang="0">
+                <a:pos x="csX26" y="csY26"/>
+              </a:cxn>
+              <a:cxn ang="0">
+                <a:pos x="csX27" y="csY27"/>
+              </a:cxn>
+              <a:cxn ang="0">
+                <a:pos x="csX28" y="csY28"/>
+              </a:cxn>
+              <a:cxn ang="0">
+                <a:pos x="csX29" y="csY29"/>
+              </a:cxn>
+              <a:cxn ang="0">
+                <a:pos x="csX30" y="csY30"/>
+              </a:cxn>
+              <a:cxn ang="0">
+                <a:pos x="csX31" y="csY31"/>
+              </a:cxn>
+              <a:cxn ang="0">
+                <a:pos x="csX32" y="csY32"/>
+              </a:cxn>
+              <a:cxn ang="0">
+                <a:pos x="csX33" y="csY33"/>
+              </a:cxn>
+              <a:cxn ang="0">
+                <a:pos x="csX34" y="csY34"/>
+              </a:cxn>
+              <a:cxn ang="0">
+                <a:pos x="csX35" y="csY35"/>
+              </a:cxn>
+            </a:cxnLst>
+            <a:rect l="l" t="t" r="r" b="b"/>
+            <a:pathLst>
+              <a:path w="10919460" h="45719" fill="none" extrusionOk="0">
+                <a:moveTo>
+                  <a:pt x="0" y="0"/>
+                </a:moveTo>
+                <a:cubicBezTo>
+                  <a:pt x="111780" y="8901"/>
+                  <a:pt x="286298" y="-7094"/>
+                  <a:pt x="464077" y="0"/>
+                </a:cubicBezTo>
+                <a:cubicBezTo>
+                  <a:pt x="641856" y="7094"/>
+                  <a:pt x="969590" y="-753"/>
+                  <a:pt x="1146543" y="0"/>
+                </a:cubicBezTo>
+                <a:cubicBezTo>
+                  <a:pt x="1323496" y="753"/>
+                  <a:pt x="1644635" y="555"/>
+                  <a:pt x="1938204" y="0"/>
+                </a:cubicBezTo>
+                <a:cubicBezTo>
+                  <a:pt x="2231773" y="-555"/>
+                  <a:pt x="2156065" y="7608"/>
+                  <a:pt x="2293087" y="0"/>
+                </a:cubicBezTo>
+                <a:cubicBezTo>
+                  <a:pt x="2430109" y="-7608"/>
+                  <a:pt x="2571854" y="-297"/>
+                  <a:pt x="2647969" y="0"/>
+                </a:cubicBezTo>
+                <a:cubicBezTo>
+                  <a:pt x="2724084" y="297"/>
+                  <a:pt x="3212352" y="-21617"/>
+                  <a:pt x="3548825" y="0"/>
+                </a:cubicBezTo>
+                <a:cubicBezTo>
+                  <a:pt x="3885298" y="21617"/>
+                  <a:pt x="4005027" y="-23664"/>
+                  <a:pt x="4231291" y="0"/>
+                </a:cubicBezTo>
+                <a:cubicBezTo>
+                  <a:pt x="4457555" y="23664"/>
+                  <a:pt x="4426290" y="-1906"/>
+                  <a:pt x="4586173" y="0"/>
+                </a:cubicBezTo>
+                <a:cubicBezTo>
+                  <a:pt x="4746056" y="1906"/>
+                  <a:pt x="4959798" y="18656"/>
+                  <a:pt x="5268639" y="0"/>
+                </a:cubicBezTo>
+                <a:cubicBezTo>
+                  <a:pt x="5577480" y="-18656"/>
+                  <a:pt x="5987480" y="39498"/>
+                  <a:pt x="6169495" y="0"/>
+                </a:cubicBezTo>
+                <a:cubicBezTo>
+                  <a:pt x="6351510" y="-39498"/>
+                  <a:pt x="6515937" y="-22231"/>
+                  <a:pt x="6742767" y="0"/>
+                </a:cubicBezTo>
+                <a:cubicBezTo>
+                  <a:pt x="6969597" y="22231"/>
+                  <a:pt x="7121664" y="22236"/>
+                  <a:pt x="7316038" y="0"/>
+                </a:cubicBezTo>
+                <a:cubicBezTo>
+                  <a:pt x="7510412" y="-22236"/>
+                  <a:pt x="7776857" y="19023"/>
+                  <a:pt x="7998504" y="0"/>
+                </a:cubicBezTo>
+                <a:cubicBezTo>
+                  <a:pt x="8220151" y="-19023"/>
+                  <a:pt x="8583272" y="-37482"/>
+                  <a:pt x="8790165" y="0"/>
+                </a:cubicBezTo>
+                <a:cubicBezTo>
+                  <a:pt x="8997058" y="37482"/>
+                  <a:pt x="9327709" y="-4645"/>
+                  <a:pt x="9581826" y="0"/>
+                </a:cubicBezTo>
+                <a:cubicBezTo>
+                  <a:pt x="9835943" y="4645"/>
+                  <a:pt x="10392610" y="27519"/>
+                  <a:pt x="10919460" y="0"/>
+                </a:cubicBezTo>
+                <a:cubicBezTo>
+                  <a:pt x="10917336" y="19935"/>
+                  <a:pt x="10920898" y="34425"/>
+                  <a:pt x="10919460" y="45719"/>
+                </a:cubicBezTo>
+                <a:cubicBezTo>
+                  <a:pt x="10820000" y="58312"/>
+                  <a:pt x="10637034" y="62973"/>
+                  <a:pt x="10455383" y="45719"/>
+                </a:cubicBezTo>
+                <a:cubicBezTo>
+                  <a:pt x="10273732" y="28465"/>
+                  <a:pt x="9977957" y="81507"/>
+                  <a:pt x="9554528" y="45719"/>
+                </a:cubicBezTo>
+                <a:cubicBezTo>
+                  <a:pt x="9131100" y="9931"/>
+                  <a:pt x="9169979" y="49035"/>
+                  <a:pt x="8872061" y="45719"/>
+                </a:cubicBezTo>
+                <a:cubicBezTo>
+                  <a:pt x="8574143" y="42403"/>
+                  <a:pt x="8634360" y="41473"/>
+                  <a:pt x="8517179" y="45719"/>
+                </a:cubicBezTo>
+                <a:cubicBezTo>
+                  <a:pt x="8399998" y="49965"/>
+                  <a:pt x="8058553" y="52293"/>
+                  <a:pt x="7834713" y="45719"/>
+                </a:cubicBezTo>
+                <a:cubicBezTo>
+                  <a:pt x="7610873" y="39145"/>
+                  <a:pt x="7545630" y="26456"/>
+                  <a:pt x="7261441" y="45719"/>
+                </a:cubicBezTo>
+                <a:cubicBezTo>
+                  <a:pt x="6977252" y="64982"/>
+                  <a:pt x="6812329" y="49269"/>
+                  <a:pt x="6688169" y="45719"/>
+                </a:cubicBezTo>
+                <a:cubicBezTo>
+                  <a:pt x="6564009" y="42169"/>
+                  <a:pt x="6323641" y="51712"/>
+                  <a:pt x="6114898" y="45719"/>
+                </a:cubicBezTo>
+                <a:cubicBezTo>
+                  <a:pt x="5906155" y="39726"/>
+                  <a:pt x="5733569" y="48059"/>
+                  <a:pt x="5541626" y="45719"/>
+                </a:cubicBezTo>
+                <a:cubicBezTo>
+                  <a:pt x="5349683" y="43379"/>
+                  <a:pt x="4920834" y="19924"/>
+                  <a:pt x="4749965" y="45719"/>
+                </a:cubicBezTo>
+                <a:cubicBezTo>
+                  <a:pt x="4579096" y="71514"/>
+                  <a:pt x="4312601" y="60459"/>
+                  <a:pt x="4067499" y="45719"/>
+                </a:cubicBezTo>
+                <a:cubicBezTo>
+                  <a:pt x="3822397" y="30979"/>
+                  <a:pt x="3857728" y="38827"/>
+                  <a:pt x="3712616" y="45719"/>
+                </a:cubicBezTo>
+                <a:cubicBezTo>
+                  <a:pt x="3567504" y="52611"/>
+                  <a:pt x="3281455" y="23326"/>
+                  <a:pt x="3139345" y="45719"/>
+                </a:cubicBezTo>
+                <a:cubicBezTo>
+                  <a:pt x="2997235" y="68112"/>
+                  <a:pt x="2554941" y="11718"/>
+                  <a:pt x="2347684" y="45719"/>
+                </a:cubicBezTo>
+                <a:cubicBezTo>
+                  <a:pt x="2140427" y="79720"/>
+                  <a:pt x="2115332" y="56864"/>
+                  <a:pt x="1883607" y="45719"/>
+                </a:cubicBezTo>
+                <a:cubicBezTo>
+                  <a:pt x="1651882" y="34574"/>
+                  <a:pt x="1386173" y="20724"/>
+                  <a:pt x="982751" y="45719"/>
+                </a:cubicBezTo>
+                <a:cubicBezTo>
+                  <a:pt x="579329" y="70714"/>
+                  <a:pt x="261740" y="27397"/>
+                  <a:pt x="0" y="45719"/>
+                </a:cubicBezTo>
+                <a:cubicBezTo>
+                  <a:pt x="-1084" y="27838"/>
+                  <a:pt x="1796" y="15675"/>
+                  <a:pt x="0" y="0"/>
+                </a:cubicBezTo>
+                <a:close/>
+              </a:path>
+              <a:path w="10919460" h="45719" stroke="0" extrusionOk="0">
+                <a:moveTo>
+                  <a:pt x="0" y="0"/>
+                </a:moveTo>
+                <a:cubicBezTo>
+                  <a:pt x="129536" y="28072"/>
+                  <a:pt x="448365" y="-16501"/>
+                  <a:pt x="573272" y="0"/>
+                </a:cubicBezTo>
+                <a:cubicBezTo>
+                  <a:pt x="698179" y="16501"/>
+                  <a:pt x="832458" y="-10417"/>
+                  <a:pt x="928154" y="0"/>
+                </a:cubicBezTo>
+                <a:cubicBezTo>
+                  <a:pt x="1023850" y="10417"/>
+                  <a:pt x="1624061" y="39542"/>
+                  <a:pt x="1829010" y="0"/>
+                </a:cubicBezTo>
+                <a:cubicBezTo>
+                  <a:pt x="2033959" y="-39542"/>
+                  <a:pt x="2262388" y="-1691"/>
+                  <a:pt x="2402281" y="0"/>
+                </a:cubicBezTo>
+                <a:cubicBezTo>
+                  <a:pt x="2542174" y="1691"/>
+                  <a:pt x="2833758" y="9201"/>
+                  <a:pt x="2975553" y="0"/>
+                </a:cubicBezTo>
+                <a:cubicBezTo>
+                  <a:pt x="3117348" y="-9201"/>
+                  <a:pt x="3611694" y="1655"/>
+                  <a:pt x="3876408" y="0"/>
+                </a:cubicBezTo>
+                <a:cubicBezTo>
+                  <a:pt x="4141123" y="-1655"/>
+                  <a:pt x="4246930" y="-22543"/>
+                  <a:pt x="4340485" y="0"/>
+                </a:cubicBezTo>
+                <a:cubicBezTo>
+                  <a:pt x="4434040" y="22543"/>
+                  <a:pt x="4972933" y="27835"/>
+                  <a:pt x="5241341" y="0"/>
+                </a:cubicBezTo>
+                <a:cubicBezTo>
+                  <a:pt x="5509749" y="-27835"/>
+                  <a:pt x="5894061" y="-18214"/>
+                  <a:pt x="6142196" y="0"/>
+                </a:cubicBezTo>
+                <a:cubicBezTo>
+                  <a:pt x="6390331" y="18214"/>
+                  <a:pt x="6506442" y="28166"/>
+                  <a:pt x="6824663" y="0"/>
+                </a:cubicBezTo>
+                <a:cubicBezTo>
+                  <a:pt x="7142884" y="-28166"/>
+                  <a:pt x="7385871" y="2849"/>
+                  <a:pt x="7725518" y="0"/>
+                </a:cubicBezTo>
+                <a:cubicBezTo>
+                  <a:pt x="8065165" y="-2849"/>
+                  <a:pt x="8031368" y="11260"/>
+                  <a:pt x="8298790" y="0"/>
+                </a:cubicBezTo>
+                <a:cubicBezTo>
+                  <a:pt x="8566212" y="-11260"/>
+                  <a:pt x="8637830" y="-23165"/>
+                  <a:pt x="8872061" y="0"/>
+                </a:cubicBezTo>
+                <a:cubicBezTo>
+                  <a:pt x="9106292" y="23165"/>
+                  <a:pt x="9408526" y="12786"/>
+                  <a:pt x="9663722" y="0"/>
+                </a:cubicBezTo>
+                <a:cubicBezTo>
+                  <a:pt x="9918918" y="-12786"/>
+                  <a:pt x="10041966" y="23623"/>
+                  <a:pt x="10236994" y="0"/>
+                </a:cubicBezTo>
+                <a:cubicBezTo>
+                  <a:pt x="10432022" y="-23623"/>
+                  <a:pt x="10699803" y="28874"/>
+                  <a:pt x="10919460" y="0"/>
+                </a:cubicBezTo>
+                <a:cubicBezTo>
+                  <a:pt x="10920767" y="9710"/>
+                  <a:pt x="10918366" y="28664"/>
+                  <a:pt x="10919460" y="45719"/>
+                </a:cubicBezTo>
+                <a:cubicBezTo>
+                  <a:pt x="10594188" y="20841"/>
+                  <a:pt x="10387639" y="70251"/>
+                  <a:pt x="10127799" y="45719"/>
+                </a:cubicBezTo>
+                <a:cubicBezTo>
+                  <a:pt x="9867959" y="21187"/>
+                  <a:pt x="9883918" y="30154"/>
+                  <a:pt x="9772917" y="45719"/>
+                </a:cubicBezTo>
+                <a:cubicBezTo>
+                  <a:pt x="9661916" y="61284"/>
+                  <a:pt x="9433802" y="34722"/>
+                  <a:pt x="9308840" y="45719"/>
+                </a:cubicBezTo>
+                <a:cubicBezTo>
+                  <a:pt x="9183878" y="56716"/>
+                  <a:pt x="8649658" y="19411"/>
+                  <a:pt x="8407984" y="45719"/>
+                </a:cubicBezTo>
+                <a:cubicBezTo>
+                  <a:pt x="8166310" y="72027"/>
+                  <a:pt x="7939799" y="31424"/>
+                  <a:pt x="7725518" y="45719"/>
+                </a:cubicBezTo>
+                <a:cubicBezTo>
+                  <a:pt x="7511237" y="60014"/>
+                  <a:pt x="7379508" y="32639"/>
+                  <a:pt x="7261441" y="45719"/>
+                </a:cubicBezTo>
+                <a:cubicBezTo>
+                  <a:pt x="7143374" y="58799"/>
+                  <a:pt x="6735180" y="68714"/>
+                  <a:pt x="6578975" y="45719"/>
+                </a:cubicBezTo>
+                <a:cubicBezTo>
+                  <a:pt x="6422770" y="22724"/>
+                  <a:pt x="6338749" y="50927"/>
+                  <a:pt x="6224092" y="45719"/>
+                </a:cubicBezTo>
+                <a:cubicBezTo>
+                  <a:pt x="6109435" y="40511"/>
+                  <a:pt x="6029877" y="41360"/>
+                  <a:pt x="5869210" y="45719"/>
+                </a:cubicBezTo>
+                <a:cubicBezTo>
+                  <a:pt x="5708543" y="50078"/>
+                  <a:pt x="5497986" y="27293"/>
+                  <a:pt x="5186744" y="45719"/>
+                </a:cubicBezTo>
+                <a:cubicBezTo>
+                  <a:pt x="4875502" y="64145"/>
+                  <a:pt x="4821913" y="47197"/>
+                  <a:pt x="4722666" y="45719"/>
+                </a:cubicBezTo>
+                <a:cubicBezTo>
+                  <a:pt x="4623419" y="44241"/>
+                  <a:pt x="4224779" y="53205"/>
+                  <a:pt x="3931006" y="45719"/>
+                </a:cubicBezTo>
+                <a:cubicBezTo>
+                  <a:pt x="3637233" y="38233"/>
+                  <a:pt x="3590042" y="23677"/>
+                  <a:pt x="3466929" y="45719"/>
+                </a:cubicBezTo>
+                <a:cubicBezTo>
+                  <a:pt x="3343816" y="67761"/>
+                  <a:pt x="2886632" y="52240"/>
+                  <a:pt x="2675268" y="45719"/>
+                </a:cubicBezTo>
+                <a:cubicBezTo>
+                  <a:pt x="2463904" y="39198"/>
+                  <a:pt x="2438108" y="45670"/>
+                  <a:pt x="2320385" y="45719"/>
+                </a:cubicBezTo>
+                <a:cubicBezTo>
+                  <a:pt x="2202662" y="45768"/>
+                  <a:pt x="1861927" y="59554"/>
+                  <a:pt x="1528724" y="45719"/>
+                </a:cubicBezTo>
+                <a:cubicBezTo>
+                  <a:pt x="1195521" y="31884"/>
+                  <a:pt x="1277853" y="63462"/>
+                  <a:pt x="1064647" y="45719"/>
+                </a:cubicBezTo>
+                <a:cubicBezTo>
+                  <a:pt x="851441" y="27976"/>
+                  <a:pt x="850219" y="32016"/>
+                  <a:pt x="709765" y="45719"/>
+                </a:cubicBezTo>
+                <a:cubicBezTo>
+                  <a:pt x="569311" y="59422"/>
+                  <a:pt x="245802" y="76359"/>
+                  <a:pt x="0" y="45719"/>
+                </a:cubicBezTo>
+                <a:cubicBezTo>
+                  <a:pt x="-1950" y="30550"/>
+                  <a:pt x="-477" y="12490"/>
+                  <a:pt x="0" y="0"/>
+                </a:cubicBezTo>
+                <a:close/>
+              </a:path>
+            </a:pathLst>
+          </a:custGeom>
+          <a:solidFill>
+            <a:schemeClr val="accent2"/>
+          </a:solidFill>
+          <a:ln w="41275" cap="rnd">
+            <a:solidFill>
+              <a:schemeClr val="accent2"/>
+            </a:solidFill>
+            <a:round/>
+            <a:extLst>
+              <a:ext uri="{C807C97D-BFC1-408E-A445-0C87EB9F89A2}">
+                <ask:lineSketchStyleProps xmlns:ask="http://schemas.microsoft.com/office/drawing/2018/sketchyshapes" sd="1219033472">
+                  <a:prstGeom prst="rect">
+                    <a:avLst/>
+                  </a:prstGeom>
+                  <ask:type>
+                    <ask:lineSketchFreehand/>
+                  </ask:type>
+                </ask:lineSketchStyleProps>
+              </a:ext>
+            </a:extLst>
+          </a:ln>
+        </p:spPr>
+        <p:style>
+          <a:lnRef idx="2">
+            <a:schemeClr val="accent1">
+              <a:shade val="50000"/>
+            </a:schemeClr>
+          </a:lnRef>
+          <a:fillRef idx="1">
+            <a:schemeClr val="accent1"/>
+          </a:fillRef>
+          <a:effectRef idx="0">
+            <a:schemeClr val="accent1"/>
+          </a:effectRef>
+          <a:fontRef idx="minor">
+            <a:schemeClr val="lt1"/>
+          </a:fontRef>
+        </p:style>
+        <p:txBody>
+          <a:bodyPr rtlCol="0" anchor="ctr"/>
+          <a:lstStyle/>
+          <a:p>
+            <a:pPr algn="ctr"/>
+            <a:endParaRPr lang="en-US"/>
+          </a:p>
+        </p:txBody>
+      </p:sp>
     </p:spTree>
     <p:extLst>
       <p:ext uri="{BB962C8B-B14F-4D97-AF65-F5344CB8AC3E}">
@@ -5361,14 +5989,6 @@
 <file path=ppt/slides/slide2.xml><?xml version="1.0" encoding="utf-8"?>
 <p:sld xmlns:a="http://schemas.openxmlformats.org/drawingml/2006/main" xmlns:r="http://schemas.openxmlformats.org/officeDocument/2006/relationships" xmlns:p="http://schemas.openxmlformats.org/presentationml/2006/main">
   <p:cSld>
-    <p:bg>
-      <p:bgPr>
-        <a:solidFill>
-          <a:schemeClr val="bg1"/>
-        </a:solidFill>
-        <a:effectLst/>
-      </p:bgPr>
-    </p:bg>
     <p:spTree>
       <p:nvGrpSpPr>
         <p:cNvPr id="1" name="">
@@ -6003,7 +6623,7 @@
               <a:t>Richiedente: azienda </a:t>
             </a:r>
             <a:r>
-              <a:rPr lang="it-IT" sz="2200"/>
+              <a:rPr lang="it-IT" sz="2200" dirty="0" err="1"/>
               <a:t>Cepi.s.p.a</a:t>
             </a:r>
             <a:r>
@@ -6053,14 +6673,6 @@
 <file path=ppt/slides/slide3.xml><?xml version="1.0" encoding="utf-8"?>
 <p:sld xmlns:a="http://schemas.openxmlformats.org/drawingml/2006/main" xmlns:r="http://schemas.openxmlformats.org/officeDocument/2006/relationships" xmlns:p="http://schemas.openxmlformats.org/presentationml/2006/main">
   <p:cSld>
-    <p:bg>
-      <p:bgPr>
-        <a:solidFill>
-          <a:schemeClr val="bg1"/>
-        </a:solidFill>
-        <a:effectLst/>
-      </p:bgPr>
-    </p:bg>
     <p:spTree>
       <p:nvGrpSpPr>
         <p:cNvPr id="1" name=""/>
@@ -6943,14 +7555,6 @@
 <file path=ppt/slides/slide4.xml><?xml version="1.0" encoding="utf-8"?>
 <p:sld xmlns:a="http://schemas.openxmlformats.org/drawingml/2006/main" xmlns:r="http://schemas.openxmlformats.org/officeDocument/2006/relationships" xmlns:p="http://schemas.openxmlformats.org/presentationml/2006/main">
   <p:cSld>
-    <p:bg>
-      <p:bgPr>
-        <a:solidFill>
-          <a:schemeClr val="bg1"/>
-        </a:solidFill>
-        <a:effectLst/>
-      </p:bgPr>
-    </p:bg>
     <p:spTree>
       <p:nvGrpSpPr>
         <p:cNvPr id="1" name=""/>
@@ -7842,7 +8446,7 @@
         </p:spPr>
         <p:txBody>
           <a:bodyPr vert="horz" lIns="91440" tIns="45720" rIns="91440" bIns="45720" rtlCol="0">
-            <a:normAutofit lnSpcReduction="10000"/>
+            <a:normAutofit fontScale="85000" lnSpcReduction="10000"/>
           </a:bodyPr>
           <a:lstStyle/>
           <a:p>
@@ -7854,19 +8458,22 @@
           <a:p>
             <a:r>
               <a:rPr lang="it-IT" sz="2200" dirty="0"/>
+              <a:t>Uso database di test in locale per lo sviluppo</a:t>
+            </a:r>
+          </a:p>
+          <a:p>
+            <a:r>
+              <a:rPr lang="it-IT" sz="2200" dirty="0"/>
+              <a:t>Creazione di test per validare il back end</a:t>
+            </a:r>
+          </a:p>
+          <a:p>
+            <a:r>
+              <a:rPr lang="it-IT" sz="2200" dirty="0"/>
               <a:t>Frequenti focus group sfruttando mia presenza in azienda.</a:t>
             </a:r>
           </a:p>
           <a:p>
-            <a:r>
-              <a:rPr lang="it-IT" sz="2200" dirty="0"/>
-              <a:t>Creazione di test per testare il back end</a:t>
-            </a:r>
-          </a:p>
-          <a:p>
-            <a:pPr marL="0" indent="0">
-              <a:buNone/>
-            </a:pPr>
             <a:r>
               <a:rPr lang="it-IT" sz="2200" dirty="0"/>
               <a:t>Prototipazione interfacce </a:t>
@@ -7875,7 +8482,10 @@
               <a:rPr lang="it-IT" sz="2200" dirty="0" err="1"/>
               <a:t>view</a:t>
             </a:r>
-            <a:endParaRPr lang="it-IT" sz="2200" dirty="0"/>
+            <a:r>
+              <a:rPr lang="it-IT" sz="2200" dirty="0"/>
+              <a:t>.</a:t>
+            </a:r>
           </a:p>
           <a:p>
             <a:pPr marL="0" indent="0">
@@ -8077,21 +8687,21 @@
             </a:lvl9pPr>
           </a:lstStyle>
           <a:p>
-            <a:pPr marL="0" indent="0">
-              <a:buNone/>
-            </a:pPr>
             <a:r>
               <a:rPr lang="it-IT" sz="2200" dirty="0"/>
               <a:t>Coprire tutte le attuali funzioni</a:t>
             </a:r>
           </a:p>
           <a:p>
-            <a:pPr marL="0" indent="0">
-              <a:buNone/>
-            </a:pPr>
             <a:r>
               <a:rPr lang="it-IT" sz="2200" dirty="0"/>
               <a:t>Eliminare attuali problematiche bloccanti ( Es: deadlock)</a:t>
+            </a:r>
+          </a:p>
+          <a:p>
+            <a:r>
+              <a:rPr lang="it-IT" sz="2200" dirty="0"/>
+              <a:t>Integrare il programma nel ciclo di produzione aziendale.</a:t>
             </a:r>
           </a:p>
         </p:txBody>
@@ -8150,6 +8760,948 @@
           </a:p>
         </p:txBody>
       </p:sp>
+      <p:sp>
+        <p:nvSpPr>
+          <p:cNvPr id="7" name="sketch line">
+            <a:extLst>
+              <a:ext uri="{FF2B5EF4-FFF2-40B4-BE49-F238E27FC236}">
+                <a16:creationId xmlns:a16="http://schemas.microsoft.com/office/drawing/2014/main" id="{24E7BBD4-6AA0-1729-0813-92612811BDFA}"/>
+              </a:ext>
+              <a:ext uri="{C183D7F6-B498-43B3-948B-1728B52AA6E4}">
+                <adec:decorative xmlns:adec="http://schemas.microsoft.com/office/drawing/2017/decorative" val="1"/>
+              </a:ext>
+            </a:extLst>
+          </p:cNvPr>
+          <p:cNvSpPr/>
+          <p:nvPr>
+            <p:extLst>
+              <p:ext uri="{386F3935-93C4-4BCD-93E2-E3B085C9AB24}">
+                <p16:designElem xmlns:p16="http://schemas.microsoft.com/office/powerpoint/2015/main" val="1"/>
+              </p:ext>
+            </p:extLst>
+          </p:nvPr>
+        </p:nvSpPr>
+        <p:spPr>
+          <a:xfrm flipV="1">
+            <a:off x="499872" y="1375622"/>
+            <a:ext cx="6769608" cy="45719"/>
+          </a:xfrm>
+          <a:custGeom>
+            <a:avLst/>
+            <a:gdLst>
+              <a:gd name="csX0" fmla="*/ 0 w 6769608"/>
+              <a:gd name="csY0" fmla="*/ 0 h 45719"/>
+              <a:gd name="csX1" fmla="*/ 676961 w 6769608"/>
+              <a:gd name="csY1" fmla="*/ 0 h 45719"/>
+              <a:gd name="csX2" fmla="*/ 1353922 w 6769608"/>
+              <a:gd name="csY2" fmla="*/ 0 h 45719"/>
+              <a:gd name="csX3" fmla="*/ 2030882 w 6769608"/>
+              <a:gd name="csY3" fmla="*/ 0 h 45719"/>
+              <a:gd name="csX4" fmla="*/ 2843235 w 6769608"/>
+              <a:gd name="csY4" fmla="*/ 0 h 45719"/>
+              <a:gd name="csX5" fmla="*/ 3587892 w 6769608"/>
+              <a:gd name="csY5" fmla="*/ 0 h 45719"/>
+              <a:gd name="csX6" fmla="*/ 4061765 w 6769608"/>
+              <a:gd name="csY6" fmla="*/ 0 h 45719"/>
+              <a:gd name="csX7" fmla="*/ 4671030 w 6769608"/>
+              <a:gd name="csY7" fmla="*/ 0 h 45719"/>
+              <a:gd name="csX8" fmla="*/ 5483382 w 6769608"/>
+              <a:gd name="csY8" fmla="*/ 0 h 45719"/>
+              <a:gd name="csX9" fmla="*/ 6160343 w 6769608"/>
+              <a:gd name="csY9" fmla="*/ 0 h 45719"/>
+              <a:gd name="csX10" fmla="*/ 6769608 w 6769608"/>
+              <a:gd name="csY10" fmla="*/ 0 h 45719"/>
+              <a:gd name="csX11" fmla="*/ 6769608 w 6769608"/>
+              <a:gd name="csY11" fmla="*/ 45719 h 45719"/>
+              <a:gd name="csX12" fmla="*/ 6228039 w 6769608"/>
+              <a:gd name="csY12" fmla="*/ 45719 h 45719"/>
+              <a:gd name="csX13" fmla="*/ 5415686 w 6769608"/>
+              <a:gd name="csY13" fmla="*/ 45719 h 45719"/>
+              <a:gd name="csX14" fmla="*/ 4874118 w 6769608"/>
+              <a:gd name="csY14" fmla="*/ 45719 h 45719"/>
+              <a:gd name="csX15" fmla="*/ 4400245 w 6769608"/>
+              <a:gd name="csY15" fmla="*/ 45719 h 45719"/>
+              <a:gd name="csX16" fmla="*/ 3926373 w 6769608"/>
+              <a:gd name="csY16" fmla="*/ 45719 h 45719"/>
+              <a:gd name="csX17" fmla="*/ 3181716 w 6769608"/>
+              <a:gd name="csY17" fmla="*/ 45719 h 45719"/>
+              <a:gd name="csX18" fmla="*/ 2707843 w 6769608"/>
+              <a:gd name="csY18" fmla="*/ 45719 h 45719"/>
+              <a:gd name="csX19" fmla="*/ 2030882 w 6769608"/>
+              <a:gd name="csY19" fmla="*/ 45719 h 45719"/>
+              <a:gd name="csX20" fmla="*/ 1489314 w 6769608"/>
+              <a:gd name="csY20" fmla="*/ 45719 h 45719"/>
+              <a:gd name="csX21" fmla="*/ 812353 w 6769608"/>
+              <a:gd name="csY21" fmla="*/ 45719 h 45719"/>
+              <a:gd name="csX22" fmla="*/ 0 w 6769608"/>
+              <a:gd name="csY22" fmla="*/ 45719 h 45719"/>
+              <a:gd name="csX23" fmla="*/ 0 w 6769608"/>
+              <a:gd name="csY23" fmla="*/ 0 h 45719"/>
+            </a:gdLst>
+            <a:ahLst/>
+            <a:cxnLst>
+              <a:cxn ang="0">
+                <a:pos x="csX0" y="csY0"/>
+              </a:cxn>
+              <a:cxn ang="0">
+                <a:pos x="csX1" y="csY1"/>
+              </a:cxn>
+              <a:cxn ang="0">
+                <a:pos x="csX2" y="csY2"/>
+              </a:cxn>
+              <a:cxn ang="0">
+                <a:pos x="csX3" y="csY3"/>
+              </a:cxn>
+              <a:cxn ang="0">
+                <a:pos x="csX4" y="csY4"/>
+              </a:cxn>
+              <a:cxn ang="0">
+                <a:pos x="csX5" y="csY5"/>
+              </a:cxn>
+              <a:cxn ang="0">
+                <a:pos x="csX6" y="csY6"/>
+              </a:cxn>
+              <a:cxn ang="0">
+                <a:pos x="csX7" y="csY7"/>
+              </a:cxn>
+              <a:cxn ang="0">
+                <a:pos x="csX8" y="csY8"/>
+              </a:cxn>
+              <a:cxn ang="0">
+                <a:pos x="csX9" y="csY9"/>
+              </a:cxn>
+              <a:cxn ang="0">
+                <a:pos x="csX10" y="csY10"/>
+              </a:cxn>
+              <a:cxn ang="0">
+                <a:pos x="csX11" y="csY11"/>
+              </a:cxn>
+              <a:cxn ang="0">
+                <a:pos x="csX12" y="csY12"/>
+              </a:cxn>
+              <a:cxn ang="0">
+                <a:pos x="csX13" y="csY13"/>
+              </a:cxn>
+              <a:cxn ang="0">
+                <a:pos x="csX14" y="csY14"/>
+              </a:cxn>
+              <a:cxn ang="0">
+                <a:pos x="csX15" y="csY15"/>
+              </a:cxn>
+              <a:cxn ang="0">
+                <a:pos x="csX16" y="csY16"/>
+              </a:cxn>
+              <a:cxn ang="0">
+                <a:pos x="csX17" y="csY17"/>
+              </a:cxn>
+              <a:cxn ang="0">
+                <a:pos x="csX18" y="csY18"/>
+              </a:cxn>
+              <a:cxn ang="0">
+                <a:pos x="csX19" y="csY19"/>
+              </a:cxn>
+              <a:cxn ang="0">
+                <a:pos x="csX20" y="csY20"/>
+              </a:cxn>
+              <a:cxn ang="0">
+                <a:pos x="csX21" y="csY21"/>
+              </a:cxn>
+              <a:cxn ang="0">
+                <a:pos x="csX22" y="csY22"/>
+              </a:cxn>
+              <a:cxn ang="0">
+                <a:pos x="csX23" y="csY23"/>
+              </a:cxn>
+            </a:cxnLst>
+            <a:rect l="l" t="t" r="r" b="b"/>
+            <a:pathLst>
+              <a:path w="6769608" h="45719" fill="none" extrusionOk="0">
+                <a:moveTo>
+                  <a:pt x="0" y="0"/>
+                </a:moveTo>
+                <a:cubicBezTo>
+                  <a:pt x="325733" y="32600"/>
+                  <a:pt x="482259" y="24902"/>
+                  <a:pt x="676961" y="0"/>
+                </a:cubicBezTo>
+                <a:cubicBezTo>
+                  <a:pt x="871663" y="-24902"/>
+                  <a:pt x="1213193" y="27588"/>
+                  <a:pt x="1353922" y="0"/>
+                </a:cubicBezTo>
+                <a:cubicBezTo>
+                  <a:pt x="1494651" y="-27588"/>
+                  <a:pt x="1881292" y="2783"/>
+                  <a:pt x="2030882" y="0"/>
+                </a:cubicBezTo>
+                <a:cubicBezTo>
+                  <a:pt x="2180472" y="-2783"/>
+                  <a:pt x="2632211" y="-20338"/>
+                  <a:pt x="2843235" y="0"/>
+                </a:cubicBezTo>
+                <a:cubicBezTo>
+                  <a:pt x="3054259" y="20338"/>
+                  <a:pt x="3313343" y="27971"/>
+                  <a:pt x="3587892" y="0"/>
+                </a:cubicBezTo>
+                <a:cubicBezTo>
+                  <a:pt x="3862441" y="-27971"/>
+                  <a:pt x="3941422" y="12766"/>
+                  <a:pt x="4061765" y="0"/>
+                </a:cubicBezTo>
+                <a:cubicBezTo>
+                  <a:pt x="4182108" y="-12766"/>
+                  <a:pt x="4370576" y="-26789"/>
+                  <a:pt x="4671030" y="0"/>
+                </a:cubicBezTo>
+                <a:cubicBezTo>
+                  <a:pt x="4971484" y="26789"/>
+                  <a:pt x="5309281" y="28580"/>
+                  <a:pt x="5483382" y="0"/>
+                </a:cubicBezTo>
+                <a:cubicBezTo>
+                  <a:pt x="5657483" y="-28580"/>
+                  <a:pt x="6009129" y="-1723"/>
+                  <a:pt x="6160343" y="0"/>
+                </a:cubicBezTo>
+                <a:cubicBezTo>
+                  <a:pt x="6311557" y="1723"/>
+                  <a:pt x="6495002" y="-16094"/>
+                  <a:pt x="6769608" y="0"/>
+                </a:cubicBezTo>
+                <a:cubicBezTo>
+                  <a:pt x="6771613" y="9458"/>
+                  <a:pt x="6768440" y="33623"/>
+                  <a:pt x="6769608" y="45719"/>
+                </a:cubicBezTo>
+                <a:cubicBezTo>
+                  <a:pt x="6578959" y="27744"/>
+                  <a:pt x="6404107" y="61066"/>
+                  <a:pt x="6228039" y="45719"/>
+                </a:cubicBezTo>
+                <a:cubicBezTo>
+                  <a:pt x="6051971" y="30372"/>
+                  <a:pt x="5595990" y="63681"/>
+                  <a:pt x="5415686" y="45719"/>
+                </a:cubicBezTo>
+                <a:cubicBezTo>
+                  <a:pt x="5235382" y="27757"/>
+                  <a:pt x="5001384" y="65626"/>
+                  <a:pt x="4874118" y="45719"/>
+                </a:cubicBezTo>
+                <a:cubicBezTo>
+                  <a:pt x="4746852" y="25812"/>
+                  <a:pt x="4590972" y="51940"/>
+                  <a:pt x="4400245" y="45719"/>
+                </a:cubicBezTo>
+                <a:cubicBezTo>
+                  <a:pt x="4209518" y="39498"/>
+                  <a:pt x="4160521" y="34858"/>
+                  <a:pt x="3926373" y="45719"/>
+                </a:cubicBezTo>
+                <a:cubicBezTo>
+                  <a:pt x="3692225" y="56580"/>
+                  <a:pt x="3448064" y="49928"/>
+                  <a:pt x="3181716" y="45719"/>
+                </a:cubicBezTo>
+                <a:cubicBezTo>
+                  <a:pt x="2915368" y="41510"/>
+                  <a:pt x="2829106" y="37464"/>
+                  <a:pt x="2707843" y="45719"/>
+                </a:cubicBezTo>
+                <a:cubicBezTo>
+                  <a:pt x="2586580" y="53974"/>
+                  <a:pt x="2331104" y="47454"/>
+                  <a:pt x="2030882" y="45719"/>
+                </a:cubicBezTo>
+                <a:cubicBezTo>
+                  <a:pt x="1730660" y="43984"/>
+                  <a:pt x="1651675" y="27858"/>
+                  <a:pt x="1489314" y="45719"/>
+                </a:cubicBezTo>
+                <a:cubicBezTo>
+                  <a:pt x="1326953" y="63580"/>
+                  <a:pt x="973718" y="25531"/>
+                  <a:pt x="812353" y="45719"/>
+                </a:cubicBezTo>
+                <a:cubicBezTo>
+                  <a:pt x="650988" y="65907"/>
+                  <a:pt x="303021" y="57521"/>
+                  <a:pt x="0" y="45719"/>
+                </a:cubicBezTo>
+                <a:cubicBezTo>
+                  <a:pt x="2258" y="31131"/>
+                  <a:pt x="2017" y="19611"/>
+                  <a:pt x="0" y="0"/>
+                </a:cubicBezTo>
+                <a:close/>
+              </a:path>
+              <a:path w="6769608" h="45719" stroke="0" extrusionOk="0">
+                <a:moveTo>
+                  <a:pt x="0" y="0"/>
+                </a:moveTo>
+                <a:cubicBezTo>
+                  <a:pt x="210805" y="-30211"/>
+                  <a:pt x="312098" y="29212"/>
+                  <a:pt x="609265" y="0"/>
+                </a:cubicBezTo>
+                <a:cubicBezTo>
+                  <a:pt x="906433" y="-29212"/>
+                  <a:pt x="918805" y="21315"/>
+                  <a:pt x="1083137" y="0"/>
+                </a:cubicBezTo>
+                <a:cubicBezTo>
+                  <a:pt x="1247469" y="-21315"/>
+                  <a:pt x="1725382" y="15381"/>
+                  <a:pt x="1895490" y="0"/>
+                </a:cubicBezTo>
+                <a:cubicBezTo>
+                  <a:pt x="2065598" y="-15381"/>
+                  <a:pt x="2325077" y="-2788"/>
+                  <a:pt x="2504755" y="0"/>
+                </a:cubicBezTo>
+                <a:cubicBezTo>
+                  <a:pt x="2684434" y="2788"/>
+                  <a:pt x="2809474" y="5633"/>
+                  <a:pt x="3114020" y="0"/>
+                </a:cubicBezTo>
+                <a:cubicBezTo>
+                  <a:pt x="3418567" y="-5633"/>
+                  <a:pt x="3602048" y="38067"/>
+                  <a:pt x="3926373" y="0"/>
+                </a:cubicBezTo>
+                <a:cubicBezTo>
+                  <a:pt x="4250698" y="-38067"/>
+                  <a:pt x="4306755" y="-4207"/>
+                  <a:pt x="4467941" y="0"/>
+                </a:cubicBezTo>
+                <a:cubicBezTo>
+                  <a:pt x="4629127" y="4207"/>
+                  <a:pt x="4938440" y="31846"/>
+                  <a:pt x="5280294" y="0"/>
+                </a:cubicBezTo>
+                <a:cubicBezTo>
+                  <a:pt x="5622148" y="-31846"/>
+                  <a:pt x="5702169" y="39065"/>
+                  <a:pt x="6092647" y="0"/>
+                </a:cubicBezTo>
+                <a:cubicBezTo>
+                  <a:pt x="6483125" y="-39065"/>
+                  <a:pt x="6571287" y="7725"/>
+                  <a:pt x="6769608" y="0"/>
+                </a:cubicBezTo>
+                <a:cubicBezTo>
+                  <a:pt x="6767884" y="20889"/>
+                  <a:pt x="6771718" y="23290"/>
+                  <a:pt x="6769608" y="45719"/>
+                </a:cubicBezTo>
+                <a:cubicBezTo>
+                  <a:pt x="6523287" y="44715"/>
+                  <a:pt x="6342335" y="11265"/>
+                  <a:pt x="6024951" y="45719"/>
+                </a:cubicBezTo>
+                <a:cubicBezTo>
+                  <a:pt x="5707567" y="80173"/>
+                  <a:pt x="5532086" y="5602"/>
+                  <a:pt x="5212598" y="45719"/>
+                </a:cubicBezTo>
+                <a:cubicBezTo>
+                  <a:pt x="4893110" y="85836"/>
+                  <a:pt x="4673197" y="78552"/>
+                  <a:pt x="4400245" y="45719"/>
+                </a:cubicBezTo>
+                <a:cubicBezTo>
+                  <a:pt x="4127293" y="12886"/>
+                  <a:pt x="4054108" y="34724"/>
+                  <a:pt x="3858677" y="45719"/>
+                </a:cubicBezTo>
+                <a:cubicBezTo>
+                  <a:pt x="3663246" y="56714"/>
+                  <a:pt x="3478136" y="55270"/>
+                  <a:pt x="3181716" y="45719"/>
+                </a:cubicBezTo>
+                <a:cubicBezTo>
+                  <a:pt x="2885296" y="36168"/>
+                  <a:pt x="2600300" y="57868"/>
+                  <a:pt x="2369363" y="45719"/>
+                </a:cubicBezTo>
+                <a:cubicBezTo>
+                  <a:pt x="2138426" y="33570"/>
+                  <a:pt x="1896157" y="31306"/>
+                  <a:pt x="1692402" y="45719"/>
+                </a:cubicBezTo>
+                <a:cubicBezTo>
+                  <a:pt x="1488647" y="60132"/>
+                  <a:pt x="1328363" y="65501"/>
+                  <a:pt x="1218529" y="45719"/>
+                </a:cubicBezTo>
+                <a:cubicBezTo>
+                  <a:pt x="1108695" y="25937"/>
+                  <a:pt x="905435" y="72718"/>
+                  <a:pt x="676961" y="45719"/>
+                </a:cubicBezTo>
+                <a:cubicBezTo>
+                  <a:pt x="448487" y="18720"/>
+                  <a:pt x="286513" y="53033"/>
+                  <a:pt x="0" y="45719"/>
+                </a:cubicBezTo>
+                <a:cubicBezTo>
+                  <a:pt x="661" y="28309"/>
+                  <a:pt x="-1934" y="19710"/>
+                  <a:pt x="0" y="0"/>
+                </a:cubicBezTo>
+                <a:close/>
+              </a:path>
+            </a:pathLst>
+          </a:custGeom>
+          <a:solidFill>
+            <a:schemeClr val="accent2"/>
+          </a:solidFill>
+          <a:ln w="41275" cap="rnd">
+            <a:solidFill>
+              <a:schemeClr val="accent2"/>
+            </a:solidFill>
+            <a:round/>
+            <a:extLst>
+              <a:ext uri="{C807C97D-BFC1-408E-A445-0C87EB9F89A2}">
+                <ask:lineSketchStyleProps xmlns:ask="http://schemas.microsoft.com/office/drawing/2018/sketchyshapes" sd="1219033472">
+                  <a:prstGeom prst="rect">
+                    <a:avLst/>
+                  </a:prstGeom>
+                  <ask:type>
+                    <ask:lineSketchFreehand/>
+                  </ask:type>
+                </ask:lineSketchStyleProps>
+              </a:ext>
+            </a:extLst>
+          </a:ln>
+        </p:spPr>
+        <p:style>
+          <a:lnRef idx="2">
+            <a:schemeClr val="accent1">
+              <a:shade val="50000"/>
+            </a:schemeClr>
+          </a:lnRef>
+          <a:fillRef idx="1">
+            <a:schemeClr val="accent1"/>
+          </a:fillRef>
+          <a:effectRef idx="0">
+            <a:schemeClr val="accent1"/>
+          </a:effectRef>
+          <a:fontRef idx="minor">
+            <a:schemeClr val="lt1"/>
+          </a:fontRef>
+        </p:style>
+        <p:txBody>
+          <a:bodyPr rtlCol="0" anchor="ctr"/>
+          <a:lstStyle/>
+          <a:p>
+            <a:pPr algn="ctr"/>
+            <a:endParaRPr lang="en-US"/>
+          </a:p>
+        </p:txBody>
+      </p:sp>
+      <p:sp>
+        <p:nvSpPr>
+          <p:cNvPr id="9" name="sketch line">
+            <a:extLst>
+              <a:ext uri="{FF2B5EF4-FFF2-40B4-BE49-F238E27FC236}">
+                <a16:creationId xmlns:a16="http://schemas.microsoft.com/office/drawing/2014/main" id="{49843C4F-10A2-411C-79F7-23F9D3B4E72F}"/>
+              </a:ext>
+              <a:ext uri="{C183D7F6-B498-43B3-948B-1728B52AA6E4}">
+                <adec:decorative xmlns:adec="http://schemas.microsoft.com/office/drawing/2017/decorative" val="1"/>
+              </a:ext>
+            </a:extLst>
+          </p:cNvPr>
+          <p:cNvSpPr/>
+          <p:nvPr>
+            <p:extLst>
+              <p:ext uri="{386F3935-93C4-4BCD-93E2-E3B085C9AB24}">
+                <p16:designElem xmlns:p16="http://schemas.microsoft.com/office/powerpoint/2015/main" val="1"/>
+              </p:ext>
+            </p:extLst>
+          </p:nvPr>
+        </p:nvSpPr>
+        <p:spPr>
+          <a:xfrm flipV="1">
+            <a:off x="499872" y="4502867"/>
+            <a:ext cx="6650736" cy="45719"/>
+          </a:xfrm>
+          <a:custGeom>
+            <a:avLst/>
+            <a:gdLst>
+              <a:gd name="csX0" fmla="*/ 0 w 6650736"/>
+              <a:gd name="csY0" fmla="*/ 0 h 45719"/>
+              <a:gd name="csX1" fmla="*/ 665074 w 6650736"/>
+              <a:gd name="csY1" fmla="*/ 0 h 45719"/>
+              <a:gd name="csX2" fmla="*/ 1330147 w 6650736"/>
+              <a:gd name="csY2" fmla="*/ 0 h 45719"/>
+              <a:gd name="csX3" fmla="*/ 1995221 w 6650736"/>
+              <a:gd name="csY3" fmla="*/ 0 h 45719"/>
+              <a:gd name="csX4" fmla="*/ 2793309 w 6650736"/>
+              <a:gd name="csY4" fmla="*/ 0 h 45719"/>
+              <a:gd name="csX5" fmla="*/ 3524890 w 6650736"/>
+              <a:gd name="csY5" fmla="*/ 0 h 45719"/>
+              <a:gd name="csX6" fmla="*/ 3990442 w 6650736"/>
+              <a:gd name="csY6" fmla="*/ 0 h 45719"/>
+              <a:gd name="csX7" fmla="*/ 4589008 w 6650736"/>
+              <a:gd name="csY7" fmla="*/ 0 h 45719"/>
+              <a:gd name="csX8" fmla="*/ 5387096 w 6650736"/>
+              <a:gd name="csY8" fmla="*/ 0 h 45719"/>
+              <a:gd name="csX9" fmla="*/ 6052170 w 6650736"/>
+              <a:gd name="csY9" fmla="*/ 0 h 45719"/>
+              <a:gd name="csX10" fmla="*/ 6650736 w 6650736"/>
+              <a:gd name="csY10" fmla="*/ 0 h 45719"/>
+              <a:gd name="csX11" fmla="*/ 6650736 w 6650736"/>
+              <a:gd name="csY11" fmla="*/ 45719 h 45719"/>
+              <a:gd name="csX12" fmla="*/ 6118677 w 6650736"/>
+              <a:gd name="csY12" fmla="*/ 45719 h 45719"/>
+              <a:gd name="csX13" fmla="*/ 5320589 w 6650736"/>
+              <a:gd name="csY13" fmla="*/ 45719 h 45719"/>
+              <a:gd name="csX14" fmla="*/ 4788530 w 6650736"/>
+              <a:gd name="csY14" fmla="*/ 45719 h 45719"/>
+              <a:gd name="csX15" fmla="*/ 4322978 w 6650736"/>
+              <a:gd name="csY15" fmla="*/ 45719 h 45719"/>
+              <a:gd name="csX16" fmla="*/ 3857427 w 6650736"/>
+              <a:gd name="csY16" fmla="*/ 45719 h 45719"/>
+              <a:gd name="csX17" fmla="*/ 3125846 w 6650736"/>
+              <a:gd name="csY17" fmla="*/ 45719 h 45719"/>
+              <a:gd name="csX18" fmla="*/ 2660294 w 6650736"/>
+              <a:gd name="csY18" fmla="*/ 45719 h 45719"/>
+              <a:gd name="csX19" fmla="*/ 1995221 w 6650736"/>
+              <a:gd name="csY19" fmla="*/ 45719 h 45719"/>
+              <a:gd name="csX20" fmla="*/ 1463162 w 6650736"/>
+              <a:gd name="csY20" fmla="*/ 45719 h 45719"/>
+              <a:gd name="csX21" fmla="*/ 798088 w 6650736"/>
+              <a:gd name="csY21" fmla="*/ 45719 h 45719"/>
+              <a:gd name="csX22" fmla="*/ 0 w 6650736"/>
+              <a:gd name="csY22" fmla="*/ 45719 h 45719"/>
+              <a:gd name="csX23" fmla="*/ 0 w 6650736"/>
+              <a:gd name="csY23" fmla="*/ 0 h 45719"/>
+            </a:gdLst>
+            <a:ahLst/>
+            <a:cxnLst>
+              <a:cxn ang="0">
+                <a:pos x="csX0" y="csY0"/>
+              </a:cxn>
+              <a:cxn ang="0">
+                <a:pos x="csX1" y="csY1"/>
+              </a:cxn>
+              <a:cxn ang="0">
+                <a:pos x="csX2" y="csY2"/>
+              </a:cxn>
+              <a:cxn ang="0">
+                <a:pos x="csX3" y="csY3"/>
+              </a:cxn>
+              <a:cxn ang="0">
+                <a:pos x="csX4" y="csY4"/>
+              </a:cxn>
+              <a:cxn ang="0">
+                <a:pos x="csX5" y="csY5"/>
+              </a:cxn>
+              <a:cxn ang="0">
+                <a:pos x="csX6" y="csY6"/>
+              </a:cxn>
+              <a:cxn ang="0">
+                <a:pos x="csX7" y="csY7"/>
+              </a:cxn>
+              <a:cxn ang="0">
+                <a:pos x="csX8" y="csY8"/>
+              </a:cxn>
+              <a:cxn ang="0">
+                <a:pos x="csX9" y="csY9"/>
+              </a:cxn>
+              <a:cxn ang="0">
+                <a:pos x="csX10" y="csY10"/>
+              </a:cxn>
+              <a:cxn ang="0">
+                <a:pos x="csX11" y="csY11"/>
+              </a:cxn>
+              <a:cxn ang="0">
+                <a:pos x="csX12" y="csY12"/>
+              </a:cxn>
+              <a:cxn ang="0">
+                <a:pos x="csX13" y="csY13"/>
+              </a:cxn>
+              <a:cxn ang="0">
+                <a:pos x="csX14" y="csY14"/>
+              </a:cxn>
+              <a:cxn ang="0">
+                <a:pos x="csX15" y="csY15"/>
+              </a:cxn>
+              <a:cxn ang="0">
+                <a:pos x="csX16" y="csY16"/>
+              </a:cxn>
+              <a:cxn ang="0">
+                <a:pos x="csX17" y="csY17"/>
+              </a:cxn>
+              <a:cxn ang="0">
+                <a:pos x="csX18" y="csY18"/>
+              </a:cxn>
+              <a:cxn ang="0">
+                <a:pos x="csX19" y="csY19"/>
+              </a:cxn>
+              <a:cxn ang="0">
+                <a:pos x="csX20" y="csY20"/>
+              </a:cxn>
+              <a:cxn ang="0">
+                <a:pos x="csX21" y="csY21"/>
+              </a:cxn>
+              <a:cxn ang="0">
+                <a:pos x="csX22" y="csY22"/>
+              </a:cxn>
+              <a:cxn ang="0">
+                <a:pos x="csX23" y="csY23"/>
+              </a:cxn>
+            </a:cxnLst>
+            <a:rect l="l" t="t" r="r" b="b"/>
+            <a:pathLst>
+              <a:path w="6650736" h="45719" fill="none" extrusionOk="0">
+                <a:moveTo>
+                  <a:pt x="0" y="0"/>
+                </a:moveTo>
+                <a:cubicBezTo>
+                  <a:pt x="285561" y="1591"/>
+                  <a:pt x="439593" y="-10022"/>
+                  <a:pt x="665074" y="0"/>
+                </a:cubicBezTo>
+                <a:cubicBezTo>
+                  <a:pt x="890555" y="10022"/>
+                  <a:pt x="1127381" y="-335"/>
+                  <a:pt x="1330147" y="0"/>
+                </a:cubicBezTo>
+                <a:cubicBezTo>
+                  <a:pt x="1532913" y="335"/>
+                  <a:pt x="1788457" y="22825"/>
+                  <a:pt x="1995221" y="0"/>
+                </a:cubicBezTo>
+                <a:cubicBezTo>
+                  <a:pt x="2201985" y="-22825"/>
+                  <a:pt x="2526949" y="33838"/>
+                  <a:pt x="2793309" y="0"/>
+                </a:cubicBezTo>
+                <a:cubicBezTo>
+                  <a:pt x="3059669" y="-33838"/>
+                  <a:pt x="3236472" y="-12009"/>
+                  <a:pt x="3524890" y="0"/>
+                </a:cubicBezTo>
+                <a:cubicBezTo>
+                  <a:pt x="3813308" y="12009"/>
+                  <a:pt x="3806151" y="-13249"/>
+                  <a:pt x="3990442" y="0"/>
+                </a:cubicBezTo>
+                <a:cubicBezTo>
+                  <a:pt x="4174733" y="13249"/>
+                  <a:pt x="4320783" y="-680"/>
+                  <a:pt x="4589008" y="0"/>
+                </a:cubicBezTo>
+                <a:cubicBezTo>
+                  <a:pt x="4857233" y="680"/>
+                  <a:pt x="5039291" y="29720"/>
+                  <a:pt x="5387096" y="0"/>
+                </a:cubicBezTo>
+                <a:cubicBezTo>
+                  <a:pt x="5734901" y="-29720"/>
+                  <a:pt x="5803689" y="-9220"/>
+                  <a:pt x="6052170" y="0"/>
+                </a:cubicBezTo>
+                <a:cubicBezTo>
+                  <a:pt x="6300651" y="9220"/>
+                  <a:pt x="6416330" y="-21758"/>
+                  <a:pt x="6650736" y="0"/>
+                </a:cubicBezTo>
+                <a:cubicBezTo>
+                  <a:pt x="6652741" y="9458"/>
+                  <a:pt x="6649568" y="33623"/>
+                  <a:pt x="6650736" y="45719"/>
+                </a:cubicBezTo>
+                <a:cubicBezTo>
+                  <a:pt x="6479183" y="39389"/>
+                  <a:pt x="6286386" y="24148"/>
+                  <a:pt x="6118677" y="45719"/>
+                </a:cubicBezTo>
+                <a:cubicBezTo>
+                  <a:pt x="5950968" y="67290"/>
+                  <a:pt x="5699875" y="43616"/>
+                  <a:pt x="5320589" y="45719"/>
+                </a:cubicBezTo>
+                <a:cubicBezTo>
+                  <a:pt x="4941303" y="47822"/>
+                  <a:pt x="4966560" y="60635"/>
+                  <a:pt x="4788530" y="45719"/>
+                </a:cubicBezTo>
+                <a:cubicBezTo>
+                  <a:pt x="4610500" y="30803"/>
+                  <a:pt x="4476687" y="52452"/>
+                  <a:pt x="4322978" y="45719"/>
+                </a:cubicBezTo>
+                <a:cubicBezTo>
+                  <a:pt x="4169269" y="38986"/>
+                  <a:pt x="3998147" y="64120"/>
+                  <a:pt x="3857427" y="45719"/>
+                </a:cubicBezTo>
+                <a:cubicBezTo>
+                  <a:pt x="3716707" y="27318"/>
+                  <a:pt x="3467901" y="82014"/>
+                  <a:pt x="3125846" y="45719"/>
+                </a:cubicBezTo>
+                <a:cubicBezTo>
+                  <a:pt x="2783791" y="9424"/>
+                  <a:pt x="2809772" y="45114"/>
+                  <a:pt x="2660294" y="45719"/>
+                </a:cubicBezTo>
+                <a:cubicBezTo>
+                  <a:pt x="2510816" y="46324"/>
+                  <a:pt x="2326313" y="31086"/>
+                  <a:pt x="1995221" y="45719"/>
+                </a:cubicBezTo>
+                <a:cubicBezTo>
+                  <a:pt x="1664129" y="60352"/>
+                  <a:pt x="1605438" y="23797"/>
+                  <a:pt x="1463162" y="45719"/>
+                </a:cubicBezTo>
+                <a:cubicBezTo>
+                  <a:pt x="1320886" y="67641"/>
+                  <a:pt x="1125030" y="13776"/>
+                  <a:pt x="798088" y="45719"/>
+                </a:cubicBezTo>
+                <a:cubicBezTo>
+                  <a:pt x="471146" y="77662"/>
+                  <a:pt x="239915" y="51755"/>
+                  <a:pt x="0" y="45719"/>
+                </a:cubicBezTo>
+                <a:cubicBezTo>
+                  <a:pt x="2258" y="31131"/>
+                  <a:pt x="2017" y="19611"/>
+                  <a:pt x="0" y="0"/>
+                </a:cubicBezTo>
+                <a:close/>
+              </a:path>
+              <a:path w="6650736" h="45719" stroke="0" extrusionOk="0">
+                <a:moveTo>
+                  <a:pt x="0" y="0"/>
+                </a:moveTo>
+                <a:cubicBezTo>
+                  <a:pt x="210440" y="22099"/>
+                  <a:pt x="353245" y="-7378"/>
+                  <a:pt x="598566" y="0"/>
+                </a:cubicBezTo>
+                <a:cubicBezTo>
+                  <a:pt x="843887" y="7378"/>
+                  <a:pt x="955413" y="19632"/>
+                  <a:pt x="1064118" y="0"/>
+                </a:cubicBezTo>
+                <a:cubicBezTo>
+                  <a:pt x="1172823" y="-19632"/>
+                  <a:pt x="1519194" y="13782"/>
+                  <a:pt x="1862206" y="0"/>
+                </a:cubicBezTo>
+                <a:cubicBezTo>
+                  <a:pt x="2205218" y="-13782"/>
+                  <a:pt x="2175944" y="5410"/>
+                  <a:pt x="2460772" y="0"/>
+                </a:cubicBezTo>
+                <a:cubicBezTo>
+                  <a:pt x="2745600" y="-5410"/>
+                  <a:pt x="2916730" y="-28185"/>
+                  <a:pt x="3059339" y="0"/>
+                </a:cubicBezTo>
+                <a:cubicBezTo>
+                  <a:pt x="3201948" y="28185"/>
+                  <a:pt x="3496384" y="-31115"/>
+                  <a:pt x="3857427" y="0"/>
+                </a:cubicBezTo>
+                <a:cubicBezTo>
+                  <a:pt x="4218470" y="31115"/>
+                  <a:pt x="4202040" y="25124"/>
+                  <a:pt x="4389486" y="0"/>
+                </a:cubicBezTo>
+                <a:cubicBezTo>
+                  <a:pt x="4576932" y="-25124"/>
+                  <a:pt x="4822538" y="-32383"/>
+                  <a:pt x="5187574" y="0"/>
+                </a:cubicBezTo>
+                <a:cubicBezTo>
+                  <a:pt x="5552610" y="32383"/>
+                  <a:pt x="5718027" y="-29272"/>
+                  <a:pt x="5985662" y="0"/>
+                </a:cubicBezTo>
+                <a:cubicBezTo>
+                  <a:pt x="6253297" y="29272"/>
+                  <a:pt x="6376537" y="-21249"/>
+                  <a:pt x="6650736" y="0"/>
+                </a:cubicBezTo>
+                <a:cubicBezTo>
+                  <a:pt x="6649012" y="20889"/>
+                  <a:pt x="6652846" y="23290"/>
+                  <a:pt x="6650736" y="45719"/>
+                </a:cubicBezTo>
+                <a:cubicBezTo>
+                  <a:pt x="6318271" y="75638"/>
+                  <a:pt x="6089440" y="40932"/>
+                  <a:pt x="5919155" y="45719"/>
+                </a:cubicBezTo>
+                <a:cubicBezTo>
+                  <a:pt x="5748870" y="50506"/>
+                  <a:pt x="5510077" y="78809"/>
+                  <a:pt x="5121067" y="45719"/>
+                </a:cubicBezTo>
+                <a:cubicBezTo>
+                  <a:pt x="4732057" y="12629"/>
+                  <a:pt x="4625177" y="33352"/>
+                  <a:pt x="4322978" y="45719"/>
+                </a:cubicBezTo>
+                <a:cubicBezTo>
+                  <a:pt x="4020779" y="58086"/>
+                  <a:pt x="3916991" y="37132"/>
+                  <a:pt x="3790920" y="45719"/>
+                </a:cubicBezTo>
+                <a:cubicBezTo>
+                  <a:pt x="3664849" y="54306"/>
+                  <a:pt x="3404524" y="30051"/>
+                  <a:pt x="3125846" y="45719"/>
+                </a:cubicBezTo>
+                <a:cubicBezTo>
+                  <a:pt x="2847168" y="61387"/>
+                  <a:pt x="2703203" y="50287"/>
+                  <a:pt x="2327758" y="45719"/>
+                </a:cubicBezTo>
+                <a:cubicBezTo>
+                  <a:pt x="1952313" y="41151"/>
+                  <a:pt x="1926090" y="15866"/>
+                  <a:pt x="1662684" y="45719"/>
+                </a:cubicBezTo>
+                <a:cubicBezTo>
+                  <a:pt x="1399278" y="75572"/>
+                  <a:pt x="1347040" y="33842"/>
+                  <a:pt x="1197132" y="45719"/>
+                </a:cubicBezTo>
+                <a:cubicBezTo>
+                  <a:pt x="1047224" y="57596"/>
+                  <a:pt x="917525" y="71988"/>
+                  <a:pt x="665074" y="45719"/>
+                </a:cubicBezTo>
+                <a:cubicBezTo>
+                  <a:pt x="412623" y="19450"/>
+                  <a:pt x="237752" y="23484"/>
+                  <a:pt x="0" y="45719"/>
+                </a:cubicBezTo>
+                <a:cubicBezTo>
+                  <a:pt x="661" y="28309"/>
+                  <a:pt x="-1934" y="19710"/>
+                  <a:pt x="0" y="0"/>
+                </a:cubicBezTo>
+                <a:close/>
+              </a:path>
+            </a:pathLst>
+          </a:custGeom>
+          <a:solidFill>
+            <a:schemeClr val="accent2"/>
+          </a:solidFill>
+          <a:ln w="41275" cap="rnd">
+            <a:solidFill>
+              <a:schemeClr val="accent2"/>
+            </a:solidFill>
+            <a:round/>
+            <a:extLst>
+              <a:ext uri="{C807C97D-BFC1-408E-A445-0C87EB9F89A2}">
+                <ask:lineSketchStyleProps xmlns:ask="http://schemas.microsoft.com/office/drawing/2018/sketchyshapes" sd="1219033472">
+                  <a:prstGeom prst="rect">
+                    <a:avLst/>
+                  </a:prstGeom>
+                  <ask:type>
+                    <ask:lineSketchFreehand/>
+                  </ask:type>
+                </ask:lineSketchStyleProps>
+              </a:ext>
+            </a:extLst>
+          </a:ln>
+        </p:spPr>
+        <p:style>
+          <a:lnRef idx="2">
+            <a:schemeClr val="accent1">
+              <a:shade val="50000"/>
+            </a:schemeClr>
+          </a:lnRef>
+          <a:fillRef idx="1">
+            <a:schemeClr val="accent1"/>
+          </a:fillRef>
+          <a:effectRef idx="0">
+            <a:schemeClr val="accent1"/>
+          </a:effectRef>
+          <a:fontRef idx="minor">
+            <a:schemeClr val="lt1"/>
+          </a:fontRef>
+        </p:style>
+        <p:txBody>
+          <a:bodyPr rtlCol="0" anchor="ctr"/>
+          <a:lstStyle/>
+          <a:p>
+            <a:pPr algn="ctr"/>
+            <a:endParaRPr lang="en-US"/>
+          </a:p>
+        </p:txBody>
+      </p:sp>
+      <p:pic>
+        <p:nvPicPr>
+          <p:cNvPr id="11" name="Immagine 10">
+            <a:extLst>
+              <a:ext uri="{FF2B5EF4-FFF2-40B4-BE49-F238E27FC236}">
+                <a16:creationId xmlns:a16="http://schemas.microsoft.com/office/drawing/2014/main" id="{901C42DB-92CF-989D-0B5F-A1789BD73719}"/>
+              </a:ext>
+            </a:extLst>
+          </p:cNvPr>
+          <p:cNvPicPr>
+            <a:picLocks noChangeAspect="1"/>
+          </p:cNvPicPr>
+          <p:nvPr/>
+        </p:nvPicPr>
+        <p:blipFill>
+          <a:blip r:embed="rId3"/>
+          <a:stretch>
+            <a:fillRect/>
+          </a:stretch>
+        </p:blipFill>
+        <p:spPr>
+          <a:xfrm>
+            <a:off x="8980864" y="178791"/>
+            <a:ext cx="2911770" cy="3996315"/>
+          </a:xfrm>
+          <a:prstGeom prst="rect">
+            <a:avLst/>
+          </a:prstGeom>
+        </p:spPr>
+      </p:pic>
+      <p:pic>
+        <p:nvPicPr>
+          <p:cNvPr id="12" name="Immagine 11" descr="Figma Logo and symbol, meaning, history, PNG, brand">
+            <a:extLst>
+              <a:ext uri="{FF2B5EF4-FFF2-40B4-BE49-F238E27FC236}">
+                <a16:creationId xmlns:a16="http://schemas.microsoft.com/office/drawing/2014/main" id="{1A84B517-2658-D47A-2812-04DC374D13A6}"/>
+              </a:ext>
+            </a:extLst>
+          </p:cNvPr>
+          <p:cNvPicPr>
+            <a:picLocks noChangeAspect="1"/>
+          </p:cNvPicPr>
+          <p:nvPr/>
+        </p:nvPicPr>
+        <p:blipFill>
+          <a:blip r:embed="rId4"/>
+          <a:stretch>
+            <a:fillRect/>
+          </a:stretch>
+        </p:blipFill>
+        <p:spPr>
+          <a:xfrm>
+            <a:off x="8679117" y="4361440"/>
+            <a:ext cx="3213517" cy="1807603"/>
+          </a:xfrm>
+          <a:prstGeom prst="rect">
+            <a:avLst/>
+          </a:prstGeom>
+        </p:spPr>
+      </p:pic>
     </p:spTree>
     <p:extLst>
       <p:ext uri="{BB962C8B-B14F-4D97-AF65-F5344CB8AC3E}">
@@ -8166,14 +9718,6 @@
 <file path=ppt/slides/slide6.xml><?xml version="1.0" encoding="utf-8"?>
 <p:sld xmlns:a="http://schemas.openxmlformats.org/drawingml/2006/main" xmlns:r="http://schemas.openxmlformats.org/officeDocument/2006/relationships" xmlns:p="http://schemas.openxmlformats.org/presentationml/2006/main">
   <p:cSld>
-    <p:bg>
-      <p:bgPr>
-        <a:solidFill>
-          <a:schemeClr val="bg1"/>
-        </a:solidFill>
-        <a:effectLst/>
-      </p:bgPr>
-    </p:bg>
     <p:spTree>
       <p:nvGrpSpPr>
         <p:cNvPr id="1" name=""/>
@@ -8792,14 +10336,6 @@
 <file path=ppt/slides/slide7.xml><?xml version="1.0" encoding="utf-8"?>
 <p:sld xmlns:a="http://schemas.openxmlformats.org/drawingml/2006/main" xmlns:r="http://schemas.openxmlformats.org/officeDocument/2006/relationships" xmlns:p="http://schemas.openxmlformats.org/presentationml/2006/main">
   <p:cSld>
-    <p:bg>
-      <p:bgPr>
-        <a:solidFill>
-          <a:schemeClr val="bg1"/>
-        </a:solidFill>
-        <a:effectLst/>
-      </p:bgPr>
-    </p:bg>
     <p:spTree>
       <p:nvGrpSpPr>
         <p:cNvPr id="1" name=""/>
@@ -8892,7 +10428,7 @@
         </p:nvSpPr>
         <p:spPr>
           <a:xfrm>
-            <a:off x="638881" y="457200"/>
+            <a:off x="-2327572" y="222374"/>
             <a:ext cx="10909640" cy="1368614"/>
           </a:xfrm>
         </p:spPr>
@@ -8904,12 +10440,12 @@
           <a:p>
             <a:pPr algn="ctr"/>
             <a:r>
-              <a:rPr lang="en-US" sz="5400" dirty="0" err="1"/>
-              <a:t>Diagrammi</a:t>
-            </a:r>
-            <a:r>
-              <a:rPr lang="en-US" sz="6100" dirty="0"/>
-              <a:t> deployment e package</a:t>
+              <a:rPr lang="en-US" sz="4800" dirty="0" err="1"/>
+              <a:t>Diagramma</a:t>
+            </a:r>
+            <a:r>
+              <a:rPr lang="en-US" sz="4800" dirty="0"/>
+              <a:t> deployment</a:t>
             </a:r>
           </a:p>
         </p:txBody>
@@ -8927,7 +10463,7 @@
             </a:extLst>
           </p:cNvPr>
           <p:cNvSpPr>
-            <a:spLocks noGrp="1" noRot="1" noChangeAspect="1" noMove="1" noResize="1" noEditPoints="1" noAdjustHandles="1" noChangeArrowheads="1" noChangeShapeType="1" noTextEdit="1"/>
+            <a:spLocks noChangeAspect="1"/>
           </p:cNvSpPr>
           <p:nvPr>
             <p:extLst>
@@ -8939,7 +10475,7 @@
         </p:nvSpPr>
         <p:spPr>
           <a:xfrm>
-            <a:off x="4450080" y="1850683"/>
+            <a:off x="232418" y="1350258"/>
             <a:ext cx="3291840" cy="18288"/>
           </a:xfrm>
           <a:custGeom>
@@ -9227,7 +10763,7 @@
         </p:blipFill>
         <p:spPr>
           <a:xfrm>
-            <a:off x="902238" y="2642616"/>
+            <a:off x="7048515" y="63881"/>
             <a:ext cx="4450020" cy="3605784"/>
           </a:xfrm>
           <a:prstGeom prst="rect">
@@ -9263,7 +10799,7 @@
         </p:blipFill>
         <p:spPr>
           <a:xfrm>
-            <a:off x="6254496" y="2880490"/>
+            <a:off x="6169655" y="3598235"/>
             <a:ext cx="5614416" cy="3130036"/>
           </a:xfrm>
           <a:prstGeom prst="rect">
@@ -9276,6 +10812,547 @@
           </a:solidFill>
         </p:spPr>
       </p:pic>
+      <p:sp>
+        <p:nvSpPr>
+          <p:cNvPr id="3" name="Titolo 1">
+            <a:extLst>
+              <a:ext uri="{FF2B5EF4-FFF2-40B4-BE49-F238E27FC236}">
+                <a16:creationId xmlns:a16="http://schemas.microsoft.com/office/drawing/2014/main" id="{9022145A-6E42-883F-1152-468F28A6C073}"/>
+              </a:ext>
+            </a:extLst>
+          </p:cNvPr>
+          <p:cNvSpPr txBox="1">
+            <a:spLocks/>
+          </p:cNvSpPr>
+          <p:nvPr/>
+        </p:nvSpPr>
+        <p:spPr>
+          <a:xfrm>
+            <a:off x="-2755272" y="3428966"/>
+            <a:ext cx="10909640" cy="1368614"/>
+          </a:xfrm>
+          <a:prstGeom prst="rect">
+            <a:avLst/>
+          </a:prstGeom>
+        </p:spPr>
+        <p:txBody>
+          <a:bodyPr vert="horz" lIns="91440" tIns="45720" rIns="91440" bIns="45720" rtlCol="0" anchor="ctr">
+            <a:normAutofit/>
+          </a:bodyPr>
+          <a:lstStyle>
+            <a:lvl1pPr algn="l" defTabSz="914400" rtl="0" eaLnBrk="1" latinLnBrk="0" hangingPunct="1">
+              <a:lnSpc>
+                <a:spcPct val="90000"/>
+              </a:lnSpc>
+              <a:spcBef>
+                <a:spcPct val="0"/>
+              </a:spcBef>
+              <a:buNone/>
+              <a:defRPr sz="4400" kern="1200">
+                <a:solidFill>
+                  <a:schemeClr val="tx1"/>
+                </a:solidFill>
+                <a:latin typeface="+mj-lt"/>
+                <a:ea typeface="+mj-ea"/>
+                <a:cs typeface="+mj-cs"/>
+              </a:defRPr>
+            </a:lvl1pPr>
+          </a:lstStyle>
+          <a:p>
+            <a:pPr algn="ctr"/>
+            <a:r>
+              <a:rPr lang="en-US" sz="4800" dirty="0" err="1"/>
+              <a:t>Diagramma</a:t>
+            </a:r>
+            <a:r>
+              <a:rPr lang="en-US" sz="4800" dirty="0"/>
+              <a:t> package</a:t>
+            </a:r>
+          </a:p>
+        </p:txBody>
+      </p:sp>
+      <p:sp>
+        <p:nvSpPr>
+          <p:cNvPr id="6" name="sketch line">
+            <a:extLst>
+              <a:ext uri="{FF2B5EF4-FFF2-40B4-BE49-F238E27FC236}">
+                <a16:creationId xmlns:a16="http://schemas.microsoft.com/office/drawing/2014/main" id="{7F1C818B-744F-1FA9-56F7-B03800F45D89}"/>
+              </a:ext>
+              <a:ext uri="{C183D7F6-B498-43B3-948B-1728B52AA6E4}">
+                <adec:decorative xmlns:adec="http://schemas.microsoft.com/office/drawing/2017/decorative" val="1"/>
+              </a:ext>
+            </a:extLst>
+          </p:cNvPr>
+          <p:cNvSpPr>
+            <a:spLocks noChangeAspect="1"/>
+          </p:cNvSpPr>
+          <p:nvPr>
+            <p:extLst>
+              <p:ext uri="{386F3935-93C4-4BCD-93E2-E3B085C9AB24}">
+                <p16:designElem xmlns:p16="http://schemas.microsoft.com/office/powerpoint/2015/main" val="1"/>
+              </p:ext>
+            </p:extLst>
+          </p:nvPr>
+        </p:nvSpPr>
+        <p:spPr>
+          <a:xfrm>
+            <a:off x="232418" y="4472102"/>
+            <a:ext cx="3291840" cy="18288"/>
+          </a:xfrm>
+          <a:custGeom>
+            <a:avLst/>
+            <a:gdLst>
+              <a:gd name="csX0" fmla="*/ 0 w 3291840"/>
+              <a:gd name="csY0" fmla="*/ 0 h 18288"/>
+              <a:gd name="csX1" fmla="*/ 658368 w 3291840"/>
+              <a:gd name="csY1" fmla="*/ 0 h 18288"/>
+              <a:gd name="csX2" fmla="*/ 1283818 w 3291840"/>
+              <a:gd name="csY2" fmla="*/ 0 h 18288"/>
+              <a:gd name="csX3" fmla="*/ 1909267 w 3291840"/>
+              <a:gd name="csY3" fmla="*/ 0 h 18288"/>
+              <a:gd name="csX4" fmla="*/ 2633472 w 3291840"/>
+              <a:gd name="csY4" fmla="*/ 0 h 18288"/>
+              <a:gd name="csX5" fmla="*/ 3291840 w 3291840"/>
+              <a:gd name="csY5" fmla="*/ 0 h 18288"/>
+              <a:gd name="csX6" fmla="*/ 3291840 w 3291840"/>
+              <a:gd name="csY6" fmla="*/ 18288 h 18288"/>
+              <a:gd name="csX7" fmla="*/ 2633472 w 3291840"/>
+              <a:gd name="csY7" fmla="*/ 18288 h 18288"/>
+              <a:gd name="csX8" fmla="*/ 2073859 w 3291840"/>
+              <a:gd name="csY8" fmla="*/ 18288 h 18288"/>
+              <a:gd name="csX9" fmla="*/ 1448410 w 3291840"/>
+              <a:gd name="csY9" fmla="*/ 18288 h 18288"/>
+              <a:gd name="csX10" fmla="*/ 822960 w 3291840"/>
+              <a:gd name="csY10" fmla="*/ 18288 h 18288"/>
+              <a:gd name="csX11" fmla="*/ 0 w 3291840"/>
+              <a:gd name="csY11" fmla="*/ 18288 h 18288"/>
+              <a:gd name="csX12" fmla="*/ 0 w 3291840"/>
+              <a:gd name="csY12" fmla="*/ 0 h 18288"/>
+            </a:gdLst>
+            <a:ahLst/>
+            <a:cxnLst>
+              <a:cxn ang="0">
+                <a:pos x="csX0" y="csY0"/>
+              </a:cxn>
+              <a:cxn ang="0">
+                <a:pos x="csX1" y="csY1"/>
+              </a:cxn>
+              <a:cxn ang="0">
+                <a:pos x="csX2" y="csY2"/>
+              </a:cxn>
+              <a:cxn ang="0">
+                <a:pos x="csX3" y="csY3"/>
+              </a:cxn>
+              <a:cxn ang="0">
+                <a:pos x="csX4" y="csY4"/>
+              </a:cxn>
+              <a:cxn ang="0">
+                <a:pos x="csX5" y="csY5"/>
+              </a:cxn>
+              <a:cxn ang="0">
+                <a:pos x="csX6" y="csY6"/>
+              </a:cxn>
+              <a:cxn ang="0">
+                <a:pos x="csX7" y="csY7"/>
+              </a:cxn>
+              <a:cxn ang="0">
+                <a:pos x="csX8" y="csY8"/>
+              </a:cxn>
+              <a:cxn ang="0">
+                <a:pos x="csX9" y="csY9"/>
+              </a:cxn>
+              <a:cxn ang="0">
+                <a:pos x="csX10" y="csY10"/>
+              </a:cxn>
+              <a:cxn ang="0">
+                <a:pos x="csX11" y="csY11"/>
+              </a:cxn>
+              <a:cxn ang="0">
+                <a:pos x="csX12" y="csY12"/>
+              </a:cxn>
+            </a:cxnLst>
+            <a:rect l="l" t="t" r="r" b="b"/>
+            <a:pathLst>
+              <a:path w="3291840" h="18288" fill="none" extrusionOk="0">
+                <a:moveTo>
+                  <a:pt x="0" y="0"/>
+                </a:moveTo>
+                <a:cubicBezTo>
+                  <a:pt x="173077" y="-20031"/>
+                  <a:pt x="443104" y="6424"/>
+                  <a:pt x="658368" y="0"/>
+                </a:cubicBezTo>
+                <a:cubicBezTo>
+                  <a:pt x="873632" y="-6424"/>
+                  <a:pt x="1034028" y="11764"/>
+                  <a:pt x="1283818" y="0"/>
+                </a:cubicBezTo>
+                <a:cubicBezTo>
+                  <a:pt x="1533608" y="-11764"/>
+                  <a:pt x="1691227" y="-30112"/>
+                  <a:pt x="1909267" y="0"/>
+                </a:cubicBezTo>
+                <a:cubicBezTo>
+                  <a:pt x="2127307" y="30112"/>
+                  <a:pt x="2272465" y="-18735"/>
+                  <a:pt x="2633472" y="0"/>
+                </a:cubicBezTo>
+                <a:cubicBezTo>
+                  <a:pt x="2994479" y="18735"/>
+                  <a:pt x="3023324" y="-32030"/>
+                  <a:pt x="3291840" y="0"/>
+                </a:cubicBezTo>
+                <a:cubicBezTo>
+                  <a:pt x="3291406" y="7551"/>
+                  <a:pt x="3291373" y="9822"/>
+                  <a:pt x="3291840" y="18288"/>
+                </a:cubicBezTo>
+                <a:cubicBezTo>
+                  <a:pt x="3048445" y="38989"/>
+                  <a:pt x="2846548" y="-14400"/>
+                  <a:pt x="2633472" y="18288"/>
+                </a:cubicBezTo>
+                <a:cubicBezTo>
+                  <a:pt x="2420396" y="50976"/>
+                  <a:pt x="2304099" y="6336"/>
+                  <a:pt x="2073859" y="18288"/>
+                </a:cubicBezTo>
+                <a:cubicBezTo>
+                  <a:pt x="1843619" y="30240"/>
+                  <a:pt x="1706926" y="10778"/>
+                  <a:pt x="1448410" y="18288"/>
+                </a:cubicBezTo>
+                <a:cubicBezTo>
+                  <a:pt x="1189894" y="25798"/>
+                  <a:pt x="1002278" y="8992"/>
+                  <a:pt x="822960" y="18288"/>
+                </a:cubicBezTo>
+                <a:cubicBezTo>
+                  <a:pt x="643642" y="27585"/>
+                  <a:pt x="307039" y="38051"/>
+                  <a:pt x="0" y="18288"/>
+                </a:cubicBezTo>
+                <a:cubicBezTo>
+                  <a:pt x="60" y="11696"/>
+                  <a:pt x="66" y="3758"/>
+                  <a:pt x="0" y="0"/>
+                </a:cubicBezTo>
+                <a:close/>
+              </a:path>
+              <a:path w="3291840" h="18288" stroke="0" extrusionOk="0">
+                <a:moveTo>
+                  <a:pt x="0" y="0"/>
+                </a:moveTo>
+                <a:cubicBezTo>
+                  <a:pt x="195850" y="28018"/>
+                  <a:pt x="434891" y="17390"/>
+                  <a:pt x="592531" y="0"/>
+                </a:cubicBezTo>
+                <a:cubicBezTo>
+                  <a:pt x="750171" y="-17390"/>
+                  <a:pt x="1018709" y="32200"/>
+                  <a:pt x="1316736" y="0"/>
+                </a:cubicBezTo>
+                <a:cubicBezTo>
+                  <a:pt x="1614763" y="-32200"/>
+                  <a:pt x="1696480" y="-11367"/>
+                  <a:pt x="1876349" y="0"/>
+                </a:cubicBezTo>
+                <a:cubicBezTo>
+                  <a:pt x="2056218" y="11367"/>
+                  <a:pt x="2193364" y="13433"/>
+                  <a:pt x="2435962" y="0"/>
+                </a:cubicBezTo>
+                <a:cubicBezTo>
+                  <a:pt x="2678560" y="-13433"/>
+                  <a:pt x="3010901" y="-42367"/>
+                  <a:pt x="3291840" y="0"/>
+                </a:cubicBezTo>
+                <a:cubicBezTo>
+                  <a:pt x="3291758" y="4406"/>
+                  <a:pt x="3291751" y="9982"/>
+                  <a:pt x="3291840" y="18288"/>
+                </a:cubicBezTo>
+                <a:cubicBezTo>
+                  <a:pt x="3108993" y="14228"/>
+                  <a:pt x="2952658" y="46900"/>
+                  <a:pt x="2666390" y="18288"/>
+                </a:cubicBezTo>
+                <a:cubicBezTo>
+                  <a:pt x="2380122" y="-10324"/>
+                  <a:pt x="2263855" y="41055"/>
+                  <a:pt x="2040941" y="18288"/>
+                </a:cubicBezTo>
+                <a:cubicBezTo>
+                  <a:pt x="1818027" y="-4479"/>
+                  <a:pt x="1675097" y="6509"/>
+                  <a:pt x="1415491" y="18288"/>
+                </a:cubicBezTo>
+                <a:cubicBezTo>
+                  <a:pt x="1155885" y="30068"/>
+                  <a:pt x="852976" y="36210"/>
+                  <a:pt x="691286" y="18288"/>
+                </a:cubicBezTo>
+                <a:cubicBezTo>
+                  <a:pt x="529596" y="366"/>
+                  <a:pt x="187183" y="13912"/>
+                  <a:pt x="0" y="18288"/>
+                </a:cubicBezTo>
+                <a:cubicBezTo>
+                  <a:pt x="189" y="14288"/>
+                  <a:pt x="-703" y="3747"/>
+                  <a:pt x="0" y="0"/>
+                </a:cubicBezTo>
+                <a:close/>
+              </a:path>
+            </a:pathLst>
+          </a:custGeom>
+          <a:solidFill>
+            <a:schemeClr val="accent2"/>
+          </a:solidFill>
+          <a:ln w="41275" cap="rnd">
+            <a:solidFill>
+              <a:schemeClr val="accent2"/>
+            </a:solidFill>
+            <a:round/>
+            <a:extLst>
+              <a:ext uri="{C807C97D-BFC1-408E-A445-0C87EB9F89A2}">
+                <ask:lineSketchStyleProps xmlns:ask="http://schemas.microsoft.com/office/drawing/2018/sketchyshapes" sd="2863741219">
+                  <a:prstGeom prst="rect">
+                    <a:avLst/>
+                  </a:prstGeom>
+                  <ask:type>
+                    <ask:lineSketchFreehand/>
+                  </ask:type>
+                </ask:lineSketchStyleProps>
+              </a:ext>
+            </a:extLst>
+          </a:ln>
+        </p:spPr>
+        <p:style>
+          <a:lnRef idx="2">
+            <a:schemeClr val="accent1">
+              <a:shade val="50000"/>
+            </a:schemeClr>
+          </a:lnRef>
+          <a:fillRef idx="1">
+            <a:schemeClr val="accent1"/>
+          </a:fillRef>
+          <a:effectRef idx="0">
+            <a:schemeClr val="accent1"/>
+          </a:effectRef>
+          <a:fontRef idx="minor">
+            <a:schemeClr val="lt1"/>
+          </a:fontRef>
+        </p:style>
+        <p:txBody>
+          <a:bodyPr rtlCol="0" anchor="ctr"/>
+          <a:lstStyle/>
+          <a:p>
+            <a:pPr algn="ctr"/>
+            <a:endParaRPr lang="en-US"/>
+          </a:p>
+        </p:txBody>
+      </p:sp>
+      <p:sp>
+        <p:nvSpPr>
+          <p:cNvPr id="10" name="CasellaDiTesto 9">
+            <a:extLst>
+              <a:ext uri="{FF2B5EF4-FFF2-40B4-BE49-F238E27FC236}">
+                <a16:creationId xmlns:a16="http://schemas.microsoft.com/office/drawing/2014/main" id="{74C318A7-7874-F9E8-34B3-DAC2E330DDDA}"/>
+              </a:ext>
+            </a:extLst>
+          </p:cNvPr>
+          <p:cNvSpPr txBox="1"/>
+          <p:nvPr/>
+        </p:nvSpPr>
+        <p:spPr>
+          <a:xfrm>
+            <a:off x="232418" y="1517543"/>
+            <a:ext cx="5595506" cy="1477328"/>
+          </a:xfrm>
+          <a:prstGeom prst="rect">
+            <a:avLst/>
+          </a:prstGeom>
+          <a:noFill/>
+        </p:spPr>
+        <p:txBody>
+          <a:bodyPr wrap="none" rtlCol="0">
+            <a:spAutoFit/>
+          </a:bodyPr>
+          <a:lstStyle/>
+          <a:p>
+            <a:pPr marL="285750" indent="-285750">
+              <a:buFont typeface="Arial" panose="020B0604020202020204" pitchFamily="34" charset="0"/>
+              <a:buChar char="•"/>
+            </a:pPr>
+            <a:r>
+              <a:rPr lang="it-IT" dirty="0"/>
+              <a:t>Uso della LAN locale supportata da Active Directory</a:t>
+            </a:r>
+          </a:p>
+          <a:p>
+            <a:pPr marL="285750" indent="-285750">
+              <a:buFont typeface="Arial" panose="020B0604020202020204" pitchFamily="34" charset="0"/>
+              <a:buChar char="•"/>
+            </a:pPr>
+            <a:r>
+              <a:rPr lang="it-IT" dirty="0"/>
+              <a:t>Connessione mediante </a:t>
+            </a:r>
+            <a:r>
+              <a:rPr lang="it-IT" dirty="0" err="1"/>
+              <a:t>TCP</a:t>
+            </a:r>
+            <a:endParaRPr lang="it-IT" dirty="0"/>
+          </a:p>
+          <a:p>
+            <a:pPr marL="285750" indent="-285750">
+              <a:buFont typeface="Arial" panose="020B0604020202020204" pitchFamily="34" charset="0"/>
+              <a:buChar char="•"/>
+            </a:pPr>
+            <a:r>
+              <a:rPr lang="it-IT" dirty="0"/>
+              <a:t>Se esterni alla LAN connessione mediante VPN</a:t>
+            </a:r>
+          </a:p>
+          <a:p>
+            <a:pPr marL="285750" indent="-285750">
+              <a:buFont typeface="Arial" panose="020B0604020202020204" pitchFamily="34" charset="0"/>
+              <a:buChar char="•"/>
+            </a:pPr>
+            <a:r>
+              <a:rPr lang="it-IT" dirty="0"/>
+              <a:t>Software installati localmente</a:t>
+            </a:r>
+          </a:p>
+          <a:p>
+            <a:pPr marL="285750" indent="-285750">
+              <a:buFont typeface="Arial" panose="020B0604020202020204" pitchFamily="34" charset="0"/>
+              <a:buChar char="•"/>
+            </a:pPr>
+            <a:r>
+              <a:rPr lang="it-IT" dirty="0"/>
+              <a:t>Previsto database locale </a:t>
+            </a:r>
+            <a:r>
+              <a:rPr lang="it-IT" dirty="0" err="1"/>
+              <a:t>SQLite</a:t>
+            </a:r>
+            <a:r>
+              <a:rPr lang="it-IT" dirty="0"/>
+              <a:t> per gestione offline</a:t>
+            </a:r>
+          </a:p>
+        </p:txBody>
+      </p:sp>
+      <p:sp>
+        <p:nvSpPr>
+          <p:cNvPr id="11" name="CasellaDiTesto 10">
+            <a:extLst>
+              <a:ext uri="{FF2B5EF4-FFF2-40B4-BE49-F238E27FC236}">
+                <a16:creationId xmlns:a16="http://schemas.microsoft.com/office/drawing/2014/main" id="{6BEF7D56-14B3-0F3D-A990-05C3F09C1CC4}"/>
+              </a:ext>
+            </a:extLst>
+          </p:cNvPr>
+          <p:cNvSpPr txBox="1"/>
+          <p:nvPr/>
+        </p:nvSpPr>
+        <p:spPr>
+          <a:xfrm>
+            <a:off x="295332" y="4797580"/>
+            <a:ext cx="4808432" cy="1754326"/>
+          </a:xfrm>
+          <a:prstGeom prst="rect">
+            <a:avLst/>
+          </a:prstGeom>
+          <a:noFill/>
+        </p:spPr>
+        <p:txBody>
+          <a:bodyPr wrap="none" rtlCol="0">
+            <a:spAutoFit/>
+          </a:bodyPr>
+          <a:lstStyle/>
+          <a:p>
+            <a:pPr marL="285750" indent="-285750">
+              <a:buFont typeface="Arial" panose="020B0604020202020204" pitchFamily="34" charset="0"/>
+              <a:buChar char="•"/>
+            </a:pPr>
+            <a:r>
+              <a:rPr lang="it-IT" dirty="0"/>
+              <a:t>Package utilizzati dell’ecosistema .NET</a:t>
+            </a:r>
+          </a:p>
+          <a:p>
+            <a:pPr marL="285750" indent="-285750">
+              <a:buFont typeface="Arial" panose="020B0604020202020204" pitchFamily="34" charset="0"/>
+              <a:buChar char="•"/>
+            </a:pPr>
+            <a:r>
+              <a:rPr lang="it-IT" dirty="0"/>
+              <a:t>Aggiunti mediante NuGet</a:t>
+            </a:r>
+          </a:p>
+          <a:p>
+            <a:pPr marL="285750" indent="-285750">
+              <a:buFont typeface="Arial" panose="020B0604020202020204" pitchFamily="34" charset="0"/>
+              <a:buChar char="•"/>
+            </a:pPr>
+            <a:r>
+              <a:rPr lang="it-IT" dirty="0"/>
+              <a:t>Creati tre package distinti per la gestione di:</a:t>
+            </a:r>
+          </a:p>
+          <a:p>
+            <a:pPr marL="742950" lvl="1" indent="-285750">
+              <a:buFont typeface="Arial" panose="020B0604020202020204" pitchFamily="34" charset="0"/>
+              <a:buChar char="•"/>
+            </a:pPr>
+            <a:r>
+              <a:rPr lang="it-IT" dirty="0"/>
+              <a:t>View e </a:t>
+            </a:r>
+            <a:r>
+              <a:rPr lang="it-IT" dirty="0" err="1"/>
+              <a:t>main</a:t>
+            </a:r>
+            <a:r>
+              <a:rPr lang="it-IT" dirty="0"/>
+              <a:t> </a:t>
+            </a:r>
+            <a:r>
+              <a:rPr lang="it-IT" dirty="0" err="1"/>
+              <a:t>programm</a:t>
+            </a:r>
+            <a:endParaRPr lang="it-IT" dirty="0"/>
+          </a:p>
+          <a:p>
+            <a:pPr marL="742950" lvl="1" indent="-285750">
+              <a:buFont typeface="Arial" panose="020B0604020202020204" pitchFamily="34" charset="0"/>
+              <a:buChar char="•"/>
+            </a:pPr>
+            <a:r>
+              <a:rPr lang="it-IT" dirty="0"/>
+              <a:t>Interazione col database</a:t>
+            </a:r>
+          </a:p>
+          <a:p>
+            <a:pPr marL="742950" lvl="1" indent="-285750">
+              <a:buFont typeface="Arial" panose="020B0604020202020204" pitchFamily="34" charset="0"/>
+              <a:buChar char="•"/>
+            </a:pPr>
+            <a:r>
+              <a:rPr lang="it-IT" dirty="0"/>
+              <a:t>Libreria di componenti per le </a:t>
+            </a:r>
+            <a:r>
+              <a:rPr lang="it-IT" dirty="0" err="1"/>
+              <a:t>view</a:t>
+            </a:r>
+            <a:endParaRPr lang="it-IT" dirty="0"/>
+          </a:p>
+        </p:txBody>
+      </p:sp>
     </p:spTree>
     <p:extLst>
       <p:ext uri="{BB962C8B-B14F-4D97-AF65-F5344CB8AC3E}">
@@ -9292,14 +11369,6 @@
 <file path=ppt/slides/slide8.xml><?xml version="1.0" encoding="utf-8"?>
 <p:sld xmlns:a="http://schemas.openxmlformats.org/drawingml/2006/main" xmlns:r="http://schemas.openxmlformats.org/officeDocument/2006/relationships" xmlns:p="http://schemas.openxmlformats.org/presentationml/2006/main">
   <p:cSld>
-    <p:bg>
-      <p:bgPr>
-        <a:solidFill>
-          <a:schemeClr val="bg1"/>
-        </a:solidFill>
-        <a:effectLst/>
-      </p:bgPr>
-    </p:bg>
     <p:spTree>
       <p:nvGrpSpPr>
         <p:cNvPr id="1" name=""/>
@@ -9392,7 +11461,7 @@
         </p:nvSpPr>
         <p:spPr>
           <a:xfrm>
-            <a:off x="838200" y="365125"/>
+            <a:off x="836676" y="384926"/>
             <a:ext cx="10515600" cy="1325563"/>
           </a:xfrm>
         </p:spPr>
@@ -10128,14 +12197,6 @@
 <file path=ppt/slides/slide9.xml><?xml version="1.0" encoding="utf-8"?>
 <p:sld xmlns:a="http://schemas.openxmlformats.org/drawingml/2006/main" xmlns:r="http://schemas.openxmlformats.org/officeDocument/2006/relationships" xmlns:p="http://schemas.openxmlformats.org/presentationml/2006/main">
   <p:cSld>
-    <p:bg>
-      <p:bgPr>
-        <a:solidFill>
-          <a:schemeClr val="bg1"/>
-        </a:solidFill>
-        <a:effectLst/>
-      </p:bgPr>
-    </p:bg>
     <p:spTree>
       <p:nvGrpSpPr>
         <p:cNvPr id="1" name=""/>

--- a/Slide/Configuratore di prodotto per le vendite.pptx
+++ b/Slide/Configuratore di prodotto per le vendite.pptx
@@ -208,7 +208,7 @@
           <a:p>
             <a:fld id="{2FC382D0-E5E5-42D8-AA41-3ABE763FF4D8}" type="datetimeFigureOut">
               <a:rPr lang="it-IT" smtClean="0"/>
-              <a:t>27/10/2026</a:t>
+              <a:t>29/10/2026</a:t>
             </a:fld>
             <a:endParaRPr lang="it-IT"/>
           </a:p>
@@ -1150,7 +1150,7 @@
           <a:p>
             <a:fld id="{8837FF2D-06F0-4022-BD05-94C850C7DAA6}" type="datetimeFigureOut">
               <a:rPr lang="it-IT" smtClean="0"/>
-              <a:t>27/10/2026</a:t>
+              <a:t>29/10/2026</a:t>
             </a:fld>
             <a:endParaRPr lang="it-IT"/>
           </a:p>
@@ -1348,7 +1348,7 @@
           <a:p>
             <a:fld id="{8837FF2D-06F0-4022-BD05-94C850C7DAA6}" type="datetimeFigureOut">
               <a:rPr lang="it-IT" smtClean="0"/>
-              <a:t>27/10/2026</a:t>
+              <a:t>29/10/2026</a:t>
             </a:fld>
             <a:endParaRPr lang="it-IT"/>
           </a:p>
@@ -1556,7 +1556,7 @@
           <a:p>
             <a:fld id="{8837FF2D-06F0-4022-BD05-94C850C7DAA6}" type="datetimeFigureOut">
               <a:rPr lang="it-IT" smtClean="0"/>
-              <a:t>27/10/2026</a:t>
+              <a:t>29/10/2026</a:t>
             </a:fld>
             <a:endParaRPr lang="it-IT"/>
           </a:p>
@@ -1754,7 +1754,7 @@
           <a:p>
             <a:fld id="{8837FF2D-06F0-4022-BD05-94C850C7DAA6}" type="datetimeFigureOut">
               <a:rPr lang="it-IT" smtClean="0"/>
-              <a:t>27/10/2026</a:t>
+              <a:t>29/10/2026</a:t>
             </a:fld>
             <a:endParaRPr lang="it-IT"/>
           </a:p>
@@ -2029,7 +2029,7 @@
           <a:p>
             <a:fld id="{8837FF2D-06F0-4022-BD05-94C850C7DAA6}" type="datetimeFigureOut">
               <a:rPr lang="it-IT" smtClean="0"/>
-              <a:t>27/10/2026</a:t>
+              <a:t>29/10/2026</a:t>
             </a:fld>
             <a:endParaRPr lang="it-IT"/>
           </a:p>
@@ -2294,7 +2294,7 @@
           <a:p>
             <a:fld id="{8837FF2D-06F0-4022-BD05-94C850C7DAA6}" type="datetimeFigureOut">
               <a:rPr lang="it-IT" smtClean="0"/>
-              <a:t>27/10/2026</a:t>
+              <a:t>29/10/2026</a:t>
             </a:fld>
             <a:endParaRPr lang="it-IT"/>
           </a:p>
@@ -2706,7 +2706,7 @@
           <a:p>
             <a:fld id="{8837FF2D-06F0-4022-BD05-94C850C7DAA6}" type="datetimeFigureOut">
               <a:rPr lang="it-IT" smtClean="0"/>
-              <a:t>27/10/2026</a:t>
+              <a:t>29/10/2026</a:t>
             </a:fld>
             <a:endParaRPr lang="it-IT"/>
           </a:p>
@@ -2847,7 +2847,7 @@
           <a:p>
             <a:fld id="{8837FF2D-06F0-4022-BD05-94C850C7DAA6}" type="datetimeFigureOut">
               <a:rPr lang="it-IT" smtClean="0"/>
-              <a:t>27/10/2026</a:t>
+              <a:t>29/10/2026</a:t>
             </a:fld>
             <a:endParaRPr lang="it-IT"/>
           </a:p>
@@ -2960,7 +2960,7 @@
           <a:p>
             <a:fld id="{8837FF2D-06F0-4022-BD05-94C850C7DAA6}" type="datetimeFigureOut">
               <a:rPr lang="it-IT" smtClean="0"/>
-              <a:t>27/10/2026</a:t>
+              <a:t>29/10/2026</a:t>
             </a:fld>
             <a:endParaRPr lang="it-IT"/>
           </a:p>
@@ -3271,7 +3271,7 @@
           <a:p>
             <a:fld id="{8837FF2D-06F0-4022-BD05-94C850C7DAA6}" type="datetimeFigureOut">
               <a:rPr lang="it-IT" smtClean="0"/>
-              <a:t>27/10/2026</a:t>
+              <a:t>29/10/2026</a:t>
             </a:fld>
             <a:endParaRPr lang="it-IT"/>
           </a:p>
@@ -3559,7 +3559,7 @@
           <a:p>
             <a:fld id="{8837FF2D-06F0-4022-BD05-94C850C7DAA6}" type="datetimeFigureOut">
               <a:rPr lang="it-IT" smtClean="0"/>
-              <a:t>27/10/2026</a:t>
+              <a:t>29/10/2026</a:t>
             </a:fld>
             <a:endParaRPr lang="it-IT"/>
           </a:p>
@@ -3800,7 +3800,7 @@
           <a:p>
             <a:fld id="{8837FF2D-06F0-4022-BD05-94C850C7DAA6}" type="datetimeFigureOut">
               <a:rPr lang="it-IT" smtClean="0"/>
-              <a:t>27/10/2026</a:t>
+              <a:t>29/10/2026</a:t>
             </a:fld>
             <a:endParaRPr lang="it-IT"/>
           </a:p>
@@ -5245,8 +5245,8 @@
         </p:blipFill>
         <p:spPr>
           <a:xfrm>
-            <a:off x="978012" y="1825625"/>
-            <a:ext cx="10235976" cy="4351338"/>
+            <a:off x="3198987" y="4470904"/>
+            <a:ext cx="5615343" cy="2387096"/>
           </a:xfrm>
           <a:prstGeom prst="rect">
             <a:avLst/>
@@ -5886,6 +5886,459 @@
           <a:p>
             <a:pPr algn="ctr"/>
             <a:endParaRPr lang="en-US"/>
+          </a:p>
+        </p:txBody>
+      </p:sp>
+      <p:sp>
+        <p:nvSpPr>
+          <p:cNvPr id="4" name="Segnaposto contenuto 2">
+            <a:extLst>
+              <a:ext uri="{FF2B5EF4-FFF2-40B4-BE49-F238E27FC236}">
+                <a16:creationId xmlns:a16="http://schemas.microsoft.com/office/drawing/2014/main" id="{9140C400-4E52-AE75-4E88-3E68CA683F39}"/>
+              </a:ext>
+            </a:extLst>
+          </p:cNvPr>
+          <p:cNvSpPr txBox="1">
+            <a:spLocks/>
+          </p:cNvSpPr>
+          <p:nvPr/>
+        </p:nvSpPr>
+        <p:spPr>
+          <a:xfrm>
+            <a:off x="6518787" y="1894366"/>
+            <a:ext cx="5820463" cy="3483864"/>
+          </a:xfrm>
+          <a:prstGeom prst="rect">
+            <a:avLst/>
+          </a:prstGeom>
+        </p:spPr>
+        <p:txBody>
+          <a:bodyPr vert="horz" lIns="91440" tIns="45720" rIns="91440" bIns="45720" rtlCol="0">
+            <a:normAutofit/>
+          </a:bodyPr>
+          <a:lstStyle>
+            <a:lvl1pPr marL="228600" indent="-228600" algn="l" defTabSz="914400" rtl="0" eaLnBrk="1" latinLnBrk="0" hangingPunct="1">
+              <a:lnSpc>
+                <a:spcPct val="90000"/>
+              </a:lnSpc>
+              <a:spcBef>
+                <a:spcPts val="1000"/>
+              </a:spcBef>
+              <a:buFont typeface="Arial" panose="020B0604020202020204" pitchFamily="34" charset="0"/>
+              <a:buChar char="•"/>
+              <a:defRPr sz="2800" kern="1200">
+                <a:solidFill>
+                  <a:schemeClr val="tx1"/>
+                </a:solidFill>
+                <a:latin typeface="+mn-lt"/>
+                <a:ea typeface="+mn-ea"/>
+                <a:cs typeface="+mn-cs"/>
+              </a:defRPr>
+            </a:lvl1pPr>
+            <a:lvl2pPr marL="685800" indent="-228600" algn="l" defTabSz="914400" rtl="0" eaLnBrk="1" latinLnBrk="0" hangingPunct="1">
+              <a:lnSpc>
+                <a:spcPct val="90000"/>
+              </a:lnSpc>
+              <a:spcBef>
+                <a:spcPts val="500"/>
+              </a:spcBef>
+              <a:buFont typeface="Arial" panose="020B0604020202020204" pitchFamily="34" charset="0"/>
+              <a:buChar char="•"/>
+              <a:defRPr sz="2400" kern="1200">
+                <a:solidFill>
+                  <a:schemeClr val="tx1"/>
+                </a:solidFill>
+                <a:latin typeface="+mn-lt"/>
+                <a:ea typeface="+mn-ea"/>
+                <a:cs typeface="+mn-cs"/>
+              </a:defRPr>
+            </a:lvl2pPr>
+            <a:lvl3pPr marL="1143000" indent="-228600" algn="l" defTabSz="914400" rtl="0" eaLnBrk="1" latinLnBrk="0" hangingPunct="1">
+              <a:lnSpc>
+                <a:spcPct val="90000"/>
+              </a:lnSpc>
+              <a:spcBef>
+                <a:spcPts val="500"/>
+              </a:spcBef>
+              <a:buFont typeface="Arial" panose="020B0604020202020204" pitchFamily="34" charset="0"/>
+              <a:buChar char="•"/>
+              <a:defRPr sz="2000" kern="1200">
+                <a:solidFill>
+                  <a:schemeClr val="tx1"/>
+                </a:solidFill>
+                <a:latin typeface="+mn-lt"/>
+                <a:ea typeface="+mn-ea"/>
+                <a:cs typeface="+mn-cs"/>
+              </a:defRPr>
+            </a:lvl3pPr>
+            <a:lvl4pPr marL="1600200" indent="-228600" algn="l" defTabSz="914400" rtl="0" eaLnBrk="1" latinLnBrk="0" hangingPunct="1">
+              <a:lnSpc>
+                <a:spcPct val="90000"/>
+              </a:lnSpc>
+              <a:spcBef>
+                <a:spcPts val="500"/>
+              </a:spcBef>
+              <a:buFont typeface="Arial" panose="020B0604020202020204" pitchFamily="34" charset="0"/>
+              <a:buChar char="•"/>
+              <a:defRPr sz="1800" kern="1200">
+                <a:solidFill>
+                  <a:schemeClr val="tx1"/>
+                </a:solidFill>
+                <a:latin typeface="+mn-lt"/>
+                <a:ea typeface="+mn-ea"/>
+                <a:cs typeface="+mn-cs"/>
+              </a:defRPr>
+            </a:lvl4pPr>
+            <a:lvl5pPr marL="2057400" indent="-228600" algn="l" defTabSz="914400" rtl="0" eaLnBrk="1" latinLnBrk="0" hangingPunct="1">
+              <a:lnSpc>
+                <a:spcPct val="90000"/>
+              </a:lnSpc>
+              <a:spcBef>
+                <a:spcPts val="500"/>
+              </a:spcBef>
+              <a:buFont typeface="Arial" panose="020B0604020202020204" pitchFamily="34" charset="0"/>
+              <a:buChar char="•"/>
+              <a:defRPr sz="1800" kern="1200">
+                <a:solidFill>
+                  <a:schemeClr val="tx1"/>
+                </a:solidFill>
+                <a:latin typeface="+mn-lt"/>
+                <a:ea typeface="+mn-ea"/>
+                <a:cs typeface="+mn-cs"/>
+              </a:defRPr>
+            </a:lvl5pPr>
+            <a:lvl6pPr marL="2514600" indent="-228600" algn="l" defTabSz="914400" rtl="0" eaLnBrk="1" latinLnBrk="0" hangingPunct="1">
+              <a:lnSpc>
+                <a:spcPct val="90000"/>
+              </a:lnSpc>
+              <a:spcBef>
+                <a:spcPts val="500"/>
+              </a:spcBef>
+              <a:buFont typeface="Arial" panose="020B0604020202020204" pitchFamily="34" charset="0"/>
+              <a:buChar char="•"/>
+              <a:defRPr sz="1800" kern="1200">
+                <a:solidFill>
+                  <a:schemeClr val="tx1"/>
+                </a:solidFill>
+                <a:latin typeface="+mn-lt"/>
+                <a:ea typeface="+mn-ea"/>
+                <a:cs typeface="+mn-cs"/>
+              </a:defRPr>
+            </a:lvl6pPr>
+            <a:lvl7pPr marL="2971800" indent="-228600" algn="l" defTabSz="914400" rtl="0" eaLnBrk="1" latinLnBrk="0" hangingPunct="1">
+              <a:lnSpc>
+                <a:spcPct val="90000"/>
+              </a:lnSpc>
+              <a:spcBef>
+                <a:spcPts val="500"/>
+              </a:spcBef>
+              <a:buFont typeface="Arial" panose="020B0604020202020204" pitchFamily="34" charset="0"/>
+              <a:buChar char="•"/>
+              <a:defRPr sz="1800" kern="1200">
+                <a:solidFill>
+                  <a:schemeClr val="tx1"/>
+                </a:solidFill>
+                <a:latin typeface="+mn-lt"/>
+                <a:ea typeface="+mn-ea"/>
+                <a:cs typeface="+mn-cs"/>
+              </a:defRPr>
+            </a:lvl7pPr>
+            <a:lvl8pPr marL="3429000" indent="-228600" algn="l" defTabSz="914400" rtl="0" eaLnBrk="1" latinLnBrk="0" hangingPunct="1">
+              <a:lnSpc>
+                <a:spcPct val="90000"/>
+              </a:lnSpc>
+              <a:spcBef>
+                <a:spcPts val="500"/>
+              </a:spcBef>
+              <a:buFont typeface="Arial" panose="020B0604020202020204" pitchFamily="34" charset="0"/>
+              <a:buChar char="•"/>
+              <a:defRPr sz="1800" kern="1200">
+                <a:solidFill>
+                  <a:schemeClr val="tx1"/>
+                </a:solidFill>
+                <a:latin typeface="+mn-lt"/>
+                <a:ea typeface="+mn-ea"/>
+                <a:cs typeface="+mn-cs"/>
+              </a:defRPr>
+            </a:lvl8pPr>
+            <a:lvl9pPr marL="3886200" indent="-228600" algn="l" defTabSz="914400" rtl="0" eaLnBrk="1" latinLnBrk="0" hangingPunct="1">
+              <a:lnSpc>
+                <a:spcPct val="90000"/>
+              </a:lnSpc>
+              <a:spcBef>
+                <a:spcPts val="500"/>
+              </a:spcBef>
+              <a:buFont typeface="Arial" panose="020B0604020202020204" pitchFamily="34" charset="0"/>
+              <a:buChar char="•"/>
+              <a:defRPr sz="1800" kern="1200">
+                <a:solidFill>
+                  <a:schemeClr val="tx1"/>
+                </a:solidFill>
+                <a:latin typeface="+mn-lt"/>
+                <a:ea typeface="+mn-ea"/>
+                <a:cs typeface="+mn-cs"/>
+              </a:defRPr>
+            </a:lvl9pPr>
+          </a:lstStyle>
+          <a:p>
+            <a:pPr marL="0" indent="0">
+              <a:buNone/>
+            </a:pPr>
+            <a:r>
+              <a:rPr lang="it-IT" sz="2400" dirty="0"/>
+              <a:t>Flusso configurazione lato utente</a:t>
+            </a:r>
+          </a:p>
+          <a:p>
+            <a:r>
+              <a:rPr lang="it-IT" sz="2200" dirty="0"/>
+              <a:t>Si sceglie la macchina da configura</a:t>
+            </a:r>
+          </a:p>
+          <a:p>
+            <a:r>
+              <a:rPr lang="it-IT" sz="2200" dirty="0"/>
+              <a:t>Si compila un form con selezioni a tendina</a:t>
+            </a:r>
+          </a:p>
+          <a:p>
+            <a:r>
+              <a:rPr lang="it-IT" sz="2200" dirty="0"/>
+              <a:t>In base alle risposte si filtrano dei componenti</a:t>
+            </a:r>
+          </a:p>
+          <a:p>
+            <a:r>
+              <a:rPr lang="it-IT" sz="2200" dirty="0"/>
+              <a:t>Si genera un prodotto con dei componenti filtrati</a:t>
+            </a:r>
+          </a:p>
+        </p:txBody>
+      </p:sp>
+      <p:sp>
+        <p:nvSpPr>
+          <p:cNvPr id="8" name="Segnaposto contenuto 2">
+            <a:extLst>
+              <a:ext uri="{FF2B5EF4-FFF2-40B4-BE49-F238E27FC236}">
+                <a16:creationId xmlns:a16="http://schemas.microsoft.com/office/drawing/2014/main" id="{057FC94D-E306-A00E-5373-71369C9B0787}"/>
+              </a:ext>
+            </a:extLst>
+          </p:cNvPr>
+          <p:cNvSpPr txBox="1">
+            <a:spLocks/>
+          </p:cNvSpPr>
+          <p:nvPr/>
+        </p:nvSpPr>
+        <p:spPr>
+          <a:xfrm>
+            <a:off x="469122" y="1894366"/>
+            <a:ext cx="5459730" cy="3483864"/>
+          </a:xfrm>
+          <a:prstGeom prst="rect">
+            <a:avLst/>
+          </a:prstGeom>
+        </p:spPr>
+        <p:txBody>
+          <a:bodyPr vert="horz" lIns="91440" tIns="45720" rIns="91440" bIns="45720" rtlCol="0">
+            <a:normAutofit/>
+          </a:bodyPr>
+          <a:lstStyle>
+            <a:lvl1pPr marL="228600" indent="-228600" algn="l" defTabSz="914400" rtl="0" eaLnBrk="1" latinLnBrk="0" hangingPunct="1">
+              <a:lnSpc>
+                <a:spcPct val="90000"/>
+              </a:lnSpc>
+              <a:spcBef>
+                <a:spcPts val="1000"/>
+              </a:spcBef>
+              <a:buFont typeface="Arial" panose="020B0604020202020204" pitchFamily="34" charset="0"/>
+              <a:buChar char="•"/>
+              <a:defRPr sz="2800" kern="1200">
+                <a:solidFill>
+                  <a:schemeClr val="tx1"/>
+                </a:solidFill>
+                <a:latin typeface="+mn-lt"/>
+                <a:ea typeface="+mn-ea"/>
+                <a:cs typeface="+mn-cs"/>
+              </a:defRPr>
+            </a:lvl1pPr>
+            <a:lvl2pPr marL="685800" indent="-228600" algn="l" defTabSz="914400" rtl="0" eaLnBrk="1" latinLnBrk="0" hangingPunct="1">
+              <a:lnSpc>
+                <a:spcPct val="90000"/>
+              </a:lnSpc>
+              <a:spcBef>
+                <a:spcPts val="500"/>
+              </a:spcBef>
+              <a:buFont typeface="Arial" panose="020B0604020202020204" pitchFamily="34" charset="0"/>
+              <a:buChar char="•"/>
+              <a:defRPr sz="2400" kern="1200">
+                <a:solidFill>
+                  <a:schemeClr val="tx1"/>
+                </a:solidFill>
+                <a:latin typeface="+mn-lt"/>
+                <a:ea typeface="+mn-ea"/>
+                <a:cs typeface="+mn-cs"/>
+              </a:defRPr>
+            </a:lvl2pPr>
+            <a:lvl3pPr marL="1143000" indent="-228600" algn="l" defTabSz="914400" rtl="0" eaLnBrk="1" latinLnBrk="0" hangingPunct="1">
+              <a:lnSpc>
+                <a:spcPct val="90000"/>
+              </a:lnSpc>
+              <a:spcBef>
+                <a:spcPts val="500"/>
+              </a:spcBef>
+              <a:buFont typeface="Arial" panose="020B0604020202020204" pitchFamily="34" charset="0"/>
+              <a:buChar char="•"/>
+              <a:defRPr sz="2000" kern="1200">
+                <a:solidFill>
+                  <a:schemeClr val="tx1"/>
+                </a:solidFill>
+                <a:latin typeface="+mn-lt"/>
+                <a:ea typeface="+mn-ea"/>
+                <a:cs typeface="+mn-cs"/>
+              </a:defRPr>
+            </a:lvl3pPr>
+            <a:lvl4pPr marL="1600200" indent="-228600" algn="l" defTabSz="914400" rtl="0" eaLnBrk="1" latinLnBrk="0" hangingPunct="1">
+              <a:lnSpc>
+                <a:spcPct val="90000"/>
+              </a:lnSpc>
+              <a:spcBef>
+                <a:spcPts val="500"/>
+              </a:spcBef>
+              <a:buFont typeface="Arial" panose="020B0604020202020204" pitchFamily="34" charset="0"/>
+              <a:buChar char="•"/>
+              <a:defRPr sz="1800" kern="1200">
+                <a:solidFill>
+                  <a:schemeClr val="tx1"/>
+                </a:solidFill>
+                <a:latin typeface="+mn-lt"/>
+                <a:ea typeface="+mn-ea"/>
+                <a:cs typeface="+mn-cs"/>
+              </a:defRPr>
+            </a:lvl4pPr>
+            <a:lvl5pPr marL="2057400" indent="-228600" algn="l" defTabSz="914400" rtl="0" eaLnBrk="1" latinLnBrk="0" hangingPunct="1">
+              <a:lnSpc>
+                <a:spcPct val="90000"/>
+              </a:lnSpc>
+              <a:spcBef>
+                <a:spcPts val="500"/>
+              </a:spcBef>
+              <a:buFont typeface="Arial" panose="020B0604020202020204" pitchFamily="34" charset="0"/>
+              <a:buChar char="•"/>
+              <a:defRPr sz="1800" kern="1200">
+                <a:solidFill>
+                  <a:schemeClr val="tx1"/>
+                </a:solidFill>
+                <a:latin typeface="+mn-lt"/>
+                <a:ea typeface="+mn-ea"/>
+                <a:cs typeface="+mn-cs"/>
+              </a:defRPr>
+            </a:lvl5pPr>
+            <a:lvl6pPr marL="2514600" indent="-228600" algn="l" defTabSz="914400" rtl="0" eaLnBrk="1" latinLnBrk="0" hangingPunct="1">
+              <a:lnSpc>
+                <a:spcPct val="90000"/>
+              </a:lnSpc>
+              <a:spcBef>
+                <a:spcPts val="500"/>
+              </a:spcBef>
+              <a:buFont typeface="Arial" panose="020B0604020202020204" pitchFamily="34" charset="0"/>
+              <a:buChar char="•"/>
+              <a:defRPr sz="1800" kern="1200">
+                <a:solidFill>
+                  <a:schemeClr val="tx1"/>
+                </a:solidFill>
+                <a:latin typeface="+mn-lt"/>
+                <a:ea typeface="+mn-ea"/>
+                <a:cs typeface="+mn-cs"/>
+              </a:defRPr>
+            </a:lvl6pPr>
+            <a:lvl7pPr marL="2971800" indent="-228600" algn="l" defTabSz="914400" rtl="0" eaLnBrk="1" latinLnBrk="0" hangingPunct="1">
+              <a:lnSpc>
+                <a:spcPct val="90000"/>
+              </a:lnSpc>
+              <a:spcBef>
+                <a:spcPts val="500"/>
+              </a:spcBef>
+              <a:buFont typeface="Arial" panose="020B0604020202020204" pitchFamily="34" charset="0"/>
+              <a:buChar char="•"/>
+              <a:defRPr sz="1800" kern="1200">
+                <a:solidFill>
+                  <a:schemeClr val="tx1"/>
+                </a:solidFill>
+                <a:latin typeface="+mn-lt"/>
+                <a:ea typeface="+mn-ea"/>
+                <a:cs typeface="+mn-cs"/>
+              </a:defRPr>
+            </a:lvl7pPr>
+            <a:lvl8pPr marL="3429000" indent="-228600" algn="l" defTabSz="914400" rtl="0" eaLnBrk="1" latinLnBrk="0" hangingPunct="1">
+              <a:lnSpc>
+                <a:spcPct val="90000"/>
+              </a:lnSpc>
+              <a:spcBef>
+                <a:spcPts val="500"/>
+              </a:spcBef>
+              <a:buFont typeface="Arial" panose="020B0604020202020204" pitchFamily="34" charset="0"/>
+              <a:buChar char="•"/>
+              <a:defRPr sz="1800" kern="1200">
+                <a:solidFill>
+                  <a:schemeClr val="tx1"/>
+                </a:solidFill>
+                <a:latin typeface="+mn-lt"/>
+                <a:ea typeface="+mn-ea"/>
+                <a:cs typeface="+mn-cs"/>
+              </a:defRPr>
+            </a:lvl8pPr>
+            <a:lvl9pPr marL="3886200" indent="-228600" algn="l" defTabSz="914400" rtl="0" eaLnBrk="1" latinLnBrk="0" hangingPunct="1">
+              <a:lnSpc>
+                <a:spcPct val="90000"/>
+              </a:lnSpc>
+              <a:spcBef>
+                <a:spcPts val="500"/>
+              </a:spcBef>
+              <a:buFont typeface="Arial" panose="020B0604020202020204" pitchFamily="34" charset="0"/>
+              <a:buChar char="•"/>
+              <a:defRPr sz="1800" kern="1200">
+                <a:solidFill>
+                  <a:schemeClr val="tx1"/>
+                </a:solidFill>
+                <a:latin typeface="+mn-lt"/>
+                <a:ea typeface="+mn-ea"/>
+                <a:cs typeface="+mn-cs"/>
+              </a:defRPr>
+            </a:lvl9pPr>
+          </a:lstStyle>
+          <a:p>
+            <a:pPr marL="0" indent="0">
+              <a:buNone/>
+            </a:pPr>
+            <a:r>
+              <a:rPr lang="it-IT" sz="2400" dirty="0"/>
+              <a:t>Creazione configurazione</a:t>
+            </a:r>
+          </a:p>
+          <a:p>
+            <a:r>
+              <a:rPr lang="it-IT" sz="2200" dirty="0"/>
+              <a:t>Si crea un prodotto con all’interno</a:t>
+            </a:r>
+            <a:br>
+              <a:rPr lang="it-IT" sz="2200" dirty="0"/>
+            </a:br>
+            <a:r>
+              <a:rPr lang="it-IT" sz="2200" dirty="0"/>
+              <a:t> tutti i possibili suoi componenti</a:t>
+            </a:r>
+          </a:p>
+          <a:p>
+            <a:r>
+              <a:rPr lang="it-IT" sz="2200" dirty="0"/>
+              <a:t>Per ognuno di essi si assegnano una o più regole</a:t>
+            </a:r>
+          </a:p>
+          <a:p>
+            <a:r>
+              <a:rPr lang="it-IT" sz="2200" dirty="0"/>
+              <a:t>Ad ogni regola si assegna una proprietà corrispondente ed un valore da soddisfare</a:t>
+            </a:r>
           </a:p>
         </p:txBody>
       </p:sp>
@@ -12181,6 +12634,72 @@
           </a:p>
         </p:txBody>
       </p:sp>
+      <p:pic>
+        <p:nvPicPr>
+          <p:cNvPr id="4" name="Immagine 3" descr="SSIS Extension Updates – Apr 2026 – AndyLeonard.blog()">
+            <a:extLst>
+              <a:ext uri="{FF2B5EF4-FFF2-40B4-BE49-F238E27FC236}">
+                <a16:creationId xmlns:a16="http://schemas.microsoft.com/office/drawing/2014/main" id="{03F09F59-7F92-2157-400A-F154201257D8}"/>
+              </a:ext>
+            </a:extLst>
+          </p:cNvPr>
+          <p:cNvPicPr>
+            <a:picLocks noChangeAspect="1"/>
+          </p:cNvPicPr>
+          <p:nvPr/>
+        </p:nvPicPr>
+        <p:blipFill>
+          <a:blip r:embed="rId2"/>
+          <a:stretch>
+            <a:fillRect/>
+          </a:stretch>
+        </p:blipFill>
+        <p:spPr>
+          <a:xfrm>
+            <a:off x="10133076" y="2095415"/>
+            <a:ext cx="1219200" cy="1219200"/>
+          </a:xfrm>
+          <a:prstGeom prst="rect">
+            <a:avLst/>
+          </a:prstGeom>
+        </p:spPr>
+      </p:pic>
+      <p:pic>
+        <p:nvPicPr>
+          <p:cNvPr id="6" name="Immagine 5">
+            <a:extLst>
+              <a:ext uri="{FF2B5EF4-FFF2-40B4-BE49-F238E27FC236}">
+                <a16:creationId xmlns:a16="http://schemas.microsoft.com/office/drawing/2014/main" id="{0C8363CD-8E3E-C564-3BC7-73F0001E218E}"/>
+              </a:ext>
+            </a:extLst>
+          </p:cNvPr>
+          <p:cNvPicPr>
+            <a:picLocks noChangeAspect="1"/>
+          </p:cNvPicPr>
+          <p:nvPr/>
+        </p:nvPicPr>
+        <p:blipFill>
+          <a:blip r:embed="rId3">
+            <a:extLst>
+              <a:ext uri="{28A0092B-C50C-407E-A947-70E740481C1C}">
+                <a14:useLocalDpi xmlns:a14="http://schemas.microsoft.com/office/drawing/2010/main" val="0"/>
+              </a:ext>
+            </a:extLst>
+          </a:blip>
+          <a:stretch>
+            <a:fillRect/>
+          </a:stretch>
+        </p:blipFill>
+        <p:spPr>
+          <a:xfrm>
+            <a:off x="6255934" y="3668856"/>
+            <a:ext cx="5668964" cy="2746211"/>
+          </a:xfrm>
+          <a:prstGeom prst="rect">
+            <a:avLst/>
+          </a:prstGeom>
+        </p:spPr>
+      </p:pic>
     </p:spTree>
     <p:extLst>
       <p:ext uri="{BB962C8B-B14F-4D97-AF65-F5344CB8AC3E}">
@@ -13144,42 +13663,157 @@
           </a:lstStyle>
           <a:p>
             <a:r>
-              <a:rPr lang="en-US" sz="2200"/>
-              <a:t>Utilizzato EF Core per mappare il database in entity</a:t>
-            </a:r>
-          </a:p>
-          <a:p>
-            <a:r>
-              <a:rPr lang="en-US" sz="2200"/>
-              <a:t>Mappate in classi neutre dette DTO, mediante NuGet Mapster</a:t>
-            </a:r>
-          </a:p>
-          <a:p>
-            <a:r>
-              <a:rPr lang="en-US" sz="2200"/>
-              <a:t>Creati Repository per gestire il database e relativi test di validazione</a:t>
-            </a:r>
-          </a:p>
-          <a:p>
-            <a:r>
-              <a:rPr lang="en-US" sz="2200"/>
-              <a:t>Esposto all’esterno solo l’interfaccia DbManager</a:t>
-            </a:r>
-          </a:p>
-          <a:p>
-            <a:r>
-              <a:rPr lang="en-US" sz="2200"/>
-              <a:t>Query scritte mediante LINQ.</a:t>
+              <a:rPr lang="en-US" sz="2200" dirty="0" err="1"/>
+              <a:t>Utilizzato</a:t>
+            </a:r>
+            <a:r>
+              <a:rPr lang="en-US" sz="2200" dirty="0"/>
+              <a:t> EF Core per </a:t>
+            </a:r>
+            <a:r>
+              <a:rPr lang="en-US" sz="2200" dirty="0" err="1"/>
+              <a:t>mappare</a:t>
+            </a:r>
+            <a:r>
+              <a:rPr lang="en-US" sz="2200" dirty="0"/>
+              <a:t> il database in entity</a:t>
+            </a:r>
+          </a:p>
+          <a:p>
+            <a:r>
+              <a:rPr lang="en-US" sz="2200" dirty="0" err="1"/>
+              <a:t>Mappate</a:t>
+            </a:r>
+            <a:r>
+              <a:rPr lang="en-US" sz="2200" dirty="0"/>
+              <a:t> in </a:t>
+            </a:r>
+            <a:r>
+              <a:rPr lang="en-US" sz="2200" dirty="0" err="1"/>
+              <a:t>classi</a:t>
+            </a:r>
+            <a:r>
+              <a:rPr lang="en-US" sz="2200" dirty="0"/>
+              <a:t> </a:t>
+            </a:r>
+            <a:r>
+              <a:rPr lang="en-US" sz="2200" dirty="0" err="1"/>
+              <a:t>neutre</a:t>
+            </a:r>
+            <a:r>
+              <a:rPr lang="en-US" sz="2200" dirty="0"/>
+              <a:t> </a:t>
+            </a:r>
+            <a:r>
+              <a:rPr lang="en-US" sz="2200" dirty="0" err="1"/>
+              <a:t>dette</a:t>
+            </a:r>
+            <a:r>
+              <a:rPr lang="en-US" sz="2200" dirty="0"/>
+              <a:t> DTO, </a:t>
+            </a:r>
+            <a:r>
+              <a:rPr lang="en-US" sz="2200" dirty="0" err="1"/>
+              <a:t>mediante</a:t>
+            </a:r>
+            <a:r>
+              <a:rPr lang="en-US" sz="2200" dirty="0"/>
+              <a:t> NuGet </a:t>
+            </a:r>
+            <a:r>
+              <a:rPr lang="en-US" sz="2200" dirty="0" err="1"/>
+              <a:t>Mapster</a:t>
+            </a:r>
+            <a:endParaRPr lang="en-US" sz="2200" dirty="0"/>
+          </a:p>
+          <a:p>
+            <a:r>
+              <a:rPr lang="en-US" sz="2200" dirty="0" err="1"/>
+              <a:t>Creati</a:t>
+            </a:r>
+            <a:r>
+              <a:rPr lang="en-US" sz="2200" dirty="0"/>
+              <a:t> Repository per </a:t>
+            </a:r>
+            <a:r>
+              <a:rPr lang="en-US" sz="2200" dirty="0" err="1"/>
+              <a:t>gestire</a:t>
+            </a:r>
+            <a:r>
+              <a:rPr lang="en-US" sz="2200" dirty="0"/>
+              <a:t> il database e </a:t>
+            </a:r>
+            <a:r>
+              <a:rPr lang="en-US" sz="2200" dirty="0" err="1"/>
+              <a:t>relativi</a:t>
+            </a:r>
+            <a:r>
+              <a:rPr lang="en-US" sz="2200" dirty="0"/>
+              <a:t> test di </a:t>
+            </a:r>
+            <a:r>
+              <a:rPr lang="en-US" sz="2200" dirty="0" err="1"/>
+              <a:t>validazione</a:t>
+            </a:r>
+            <a:endParaRPr lang="en-US" sz="2200" dirty="0"/>
+          </a:p>
+          <a:p>
+            <a:r>
+              <a:rPr lang="en-US" sz="2200" dirty="0"/>
+              <a:t>Esposto </a:t>
+            </a:r>
+            <a:r>
+              <a:rPr lang="en-US" sz="2200" dirty="0" err="1"/>
+              <a:t>all’esterno</a:t>
+            </a:r>
+            <a:r>
+              <a:rPr lang="en-US" sz="2200" dirty="0"/>
+              <a:t> solo </a:t>
+            </a:r>
+            <a:r>
+              <a:rPr lang="en-US" sz="2200" dirty="0" err="1"/>
+              <a:t>l’interfaccia</a:t>
+            </a:r>
+            <a:r>
+              <a:rPr lang="en-US" sz="2200" dirty="0"/>
+              <a:t> </a:t>
+            </a:r>
+            <a:r>
+              <a:rPr lang="en-US" sz="2200" dirty="0" err="1"/>
+              <a:t>DbManager</a:t>
+            </a:r>
+            <a:endParaRPr lang="en-US" sz="2200" dirty="0"/>
+          </a:p>
+          <a:p>
+            <a:r>
+              <a:rPr lang="en-US" sz="2200" dirty="0"/>
+              <a:t>Query </a:t>
+            </a:r>
+            <a:r>
+              <a:rPr lang="en-US" sz="2200" dirty="0" err="1"/>
+              <a:t>scritte</a:t>
+            </a:r>
+            <a:r>
+              <a:rPr lang="en-US" sz="2200" dirty="0"/>
+              <a:t> </a:t>
+            </a:r>
+            <a:r>
+              <a:rPr lang="en-US" sz="2200" dirty="0" err="1"/>
+              <a:t>mediante</a:t>
+            </a:r>
+            <a:r>
+              <a:rPr lang="en-US" sz="2200" dirty="0"/>
+              <a:t> LINQ.</a:t>
             </a:r>
           </a:p>
         </p:txBody>
       </p:sp>
       <p:pic>
         <p:nvPicPr>
-          <p:cNvPr id="11" name="Immagine 10" descr="oop - What should application layer return? entity or dto? - Stack Overflow">
+          <p:cNvPr id="4" name="Immagine 3">
             <a:extLst>
               <a:ext uri="{FF2B5EF4-FFF2-40B4-BE49-F238E27FC236}">
-                <a16:creationId xmlns:a16="http://schemas.microsoft.com/office/drawing/2014/main" id="{9ADC1BA7-1C4F-9BD7-5A05-3B984A880E3E}"/>
+                <a16:creationId xmlns:a16="http://schemas.microsoft.com/office/drawing/2014/main" id="{24D7344B-3360-18D7-C587-10EBCCAFC577}"/>
               </a:ext>
             </a:extLst>
           </p:cNvPr>
@@ -13196,8 +13830,8 @@
         </p:blipFill>
         <p:spPr>
           <a:xfrm>
-            <a:off x="458876" y="4699566"/>
-            <a:ext cx="7007049" cy="1820106"/>
+            <a:off x="593575" y="4582405"/>
+            <a:ext cx="6523285" cy="1196444"/>
           </a:xfrm>
           <a:prstGeom prst="rect">
             <a:avLst/>
